--- a/demo/SourcePilot-deck.pptx
+++ b/demo/SourcePilot-deck.pptx
@@ -2,17 +2,23 @@
 <file path=ppt/presentation.xml><?xml version="1.0" encoding="utf-8"?>
 <p:presentation xmlns:p="http://schemas.openxmlformats.org/presentationml/2006/main">
   <p:sldMasterIdLst>
-    <p:sldMasterId xmlns:r="http://schemas.openxmlformats.org/officeDocument/2006/relationships" id="2147483648" r:id="Rfaaac04ddd6043ba"/>
+    <p:sldMasterId xmlns:r="http://schemas.openxmlformats.org/officeDocument/2006/relationships" id="2147483648" r:id="R65fd60b8ae45496f"/>
   </p:sldMasterIdLst>
   <p:notesMasterIdLst>
-    <p:notesMasterId xmlns:r="http://schemas.openxmlformats.org/officeDocument/2006/relationships" r:id="R3fad5ee7ebe1417b"/>
+    <p:notesMasterId xmlns:r="http://schemas.openxmlformats.org/officeDocument/2006/relationships" r:id="R3525cc6d96084cb2"/>
   </p:notesMasterIdLst>
   <p:sldIdLst>
-    <p:sldId xmlns:r="http://schemas.openxmlformats.org/officeDocument/2006/relationships" id="256" r:id="R81ad6e3926fb4c08"/>
-    <p:sldId xmlns:r="http://schemas.openxmlformats.org/officeDocument/2006/relationships" id="257" r:id="R27010ebc64d04000"/>
-    <p:sldId xmlns:r="http://schemas.openxmlformats.org/officeDocument/2006/relationships" id="258" r:id="R300ddfca2a36421b"/>
-    <p:sldId xmlns:r="http://schemas.openxmlformats.org/officeDocument/2006/relationships" id="259" r:id="Rb3d92ee2bf6f47b4"/>
-    <p:sldId xmlns:r="http://schemas.openxmlformats.org/officeDocument/2006/relationships" id="260" r:id="Raae87d7955834979"/>
+    <p:sldId xmlns:r="http://schemas.openxmlformats.org/officeDocument/2006/relationships" id="256" r:id="R498d22edaed741c7"/>
+    <p:sldId xmlns:r="http://schemas.openxmlformats.org/officeDocument/2006/relationships" id="257" r:id="Red41bf6db73d4b38"/>
+    <p:sldId xmlns:r="http://schemas.openxmlformats.org/officeDocument/2006/relationships" id="258" r:id="Rf2d49fff5f044e14"/>
+    <p:sldId xmlns:r="http://schemas.openxmlformats.org/officeDocument/2006/relationships" id="259" r:id="R1df9adc2fc934254"/>
+    <p:sldId xmlns:r="http://schemas.openxmlformats.org/officeDocument/2006/relationships" id="260" r:id="Rae91a4df9f0d4505"/>
+    <p:sldId xmlns:r="http://schemas.openxmlformats.org/officeDocument/2006/relationships" id="261" r:id="R4d713423cd1f47b3"/>
+    <p:sldId xmlns:r="http://schemas.openxmlformats.org/officeDocument/2006/relationships" id="262" r:id="R632eac0bf80d49ae"/>
+    <p:sldId xmlns:r="http://schemas.openxmlformats.org/officeDocument/2006/relationships" id="263" r:id="R1986808a5238442d"/>
+    <p:sldId xmlns:r="http://schemas.openxmlformats.org/officeDocument/2006/relationships" id="264" r:id="R9366d5e99cf24f20"/>
+    <p:sldId xmlns:r="http://schemas.openxmlformats.org/officeDocument/2006/relationships" id="265" r:id="R99253bdddf6a45ec"/>
+    <p:sldId xmlns:r="http://schemas.openxmlformats.org/officeDocument/2006/relationships" id="266" r:id="R6dba780e1abf47fd"/>
   </p:sldIdLst>
   <p:sldSz cx="12191695" cy="6858000"/>
   <p:notesSz cx="6858000" cy="9144000"/>
@@ -499,6 +505,146 @@
 </p:notes>
 </file>
 
+<file path=ppt/notesSlides/notesSlide10.xml><?xml version="1.0" encoding="utf-8"?>
+<p:notes xmlns:p="http://schemas.openxmlformats.org/presentationml/2006/main">
+  <p:cSld>
+    <p:spTree>
+      <p:nvGrpSpPr>
+        <p:cNvPr id="1" name=""/>
+        <p:cNvGrpSpPr/>
+        <p:nvPr/>
+      </p:nvGrpSpPr>
+      <p:grpSpPr>
+        <a:xfrm xmlns:a="http://schemas.openxmlformats.org/drawingml/2006/main"/>
+      </p:grpSpPr>
+      <p:sp>
+        <p:nvSpPr>
+          <p:cNvPr id="2" name="Slide Image Placeholder 1"/>
+          <p:cNvSpPr>
+            <a:spLocks xmlns:a="http://schemas.openxmlformats.org/drawingml/2006/main" noGrp="1"/>
+          </p:cNvSpPr>
+          <p:nvPr>
+            <p:ph type="sldImg" idx="0"/>
+          </p:nvPr>
+        </p:nvSpPr>
+        <p:spPr/>
+      </p:sp>
+      <p:sp>
+        <p:nvSpPr>
+          <p:cNvPr id="3" name="Notes Placeholder 2"/>
+          <p:cNvSpPr>
+            <a:spLocks xmlns:a="http://schemas.openxmlformats.org/drawingml/2006/main" noGrp="1"/>
+          </p:cNvSpPr>
+          <p:nvPr>
+            <p:ph type="body" idx="1"/>
+          </p:nvPr>
+        </p:nvSpPr>
+        <p:spPr/>
+        <p:txBody>
+          <a:bodyPr xmlns:a="http://schemas.openxmlformats.org/drawingml/2006/main"/>
+          <a:lstStyle xmlns:a="http://schemas.openxmlformats.org/drawingml/2006/main"/>
+          <a:p xmlns:a="http://schemas.openxmlformats.org/drawingml/2006/main">
+            <a:r>
+              <a:t>Forty seconds. Open one of these in the explorer if the room is engaged. The remaining-166000 line is the ceiling actually decrementing — that is the claim.</a:t>
+            </a:r>
+          </a:p>
+        </p:txBody>
+      </p:sp>
+      <p:sp>
+        <p:nvSpPr>
+          <p:cNvPr id="4" name="Slide Number Placeholder 3"/>
+          <p:cNvSpPr>
+            <a:spLocks xmlns:a="http://schemas.openxmlformats.org/drawingml/2006/main" noGrp="1"/>
+          </p:cNvSpPr>
+          <p:nvPr>
+            <p:ph type="sldNum" idx="5"/>
+          </p:nvPr>
+        </p:nvSpPr>
+        <p:spPr/>
+        <p:txBody>
+          <a:bodyPr xmlns:a="http://schemas.openxmlformats.org/drawingml/2006/main"/>
+          <a:lstStyle xmlns:a="http://schemas.openxmlformats.org/drawingml/2006/main"/>
+          <a:p xmlns:a="http://schemas.openxmlformats.org/drawingml/2006/main"/>
+        </p:txBody>
+      </p:sp>
+    </p:spTree>
+  </p:cSld>
+  <p:clrMapOvr>
+    <a:masterClrMapping xmlns:a="http://schemas.openxmlformats.org/drawingml/2006/main"/>
+  </p:clrMapOvr>
+</p:notes>
+</file>
+
+<file path=ppt/notesSlides/notesSlide11.xml><?xml version="1.0" encoding="utf-8"?>
+<p:notes xmlns:p="http://schemas.openxmlformats.org/presentationml/2006/main">
+  <p:cSld>
+    <p:spTree>
+      <p:nvGrpSpPr>
+        <p:cNvPr id="1" name=""/>
+        <p:cNvGrpSpPr/>
+        <p:nvPr/>
+      </p:nvGrpSpPr>
+      <p:grpSpPr>
+        <a:xfrm xmlns:a="http://schemas.openxmlformats.org/drawingml/2006/main"/>
+      </p:grpSpPr>
+      <p:sp>
+        <p:nvSpPr>
+          <p:cNvPr id="2" name="Slide Image Placeholder 1"/>
+          <p:cNvSpPr>
+            <a:spLocks xmlns:a="http://schemas.openxmlformats.org/drawingml/2006/main" noGrp="1"/>
+          </p:cNvSpPr>
+          <p:nvPr>
+            <p:ph type="sldImg" idx="0"/>
+          </p:nvPr>
+        </p:nvSpPr>
+        <p:spPr/>
+      </p:sp>
+      <p:sp>
+        <p:nvSpPr>
+          <p:cNvPr id="3" name="Notes Placeholder 2"/>
+          <p:cNvSpPr>
+            <a:spLocks xmlns:a="http://schemas.openxmlformats.org/drawingml/2006/main" noGrp="1"/>
+          </p:cNvSpPr>
+          <p:nvPr>
+            <p:ph type="body" idx="1"/>
+          </p:nvPr>
+        </p:nvSpPr>
+        <p:spPr/>
+        <p:txBody>
+          <a:bodyPr xmlns:a="http://schemas.openxmlformats.org/drawingml/2006/main"/>
+          <a:lstStyle xmlns:a="http://schemas.openxmlformats.org/drawingml/2006/main"/>
+          <a:p xmlns:a="http://schemas.openxmlformats.org/drawingml/2006/main">
+            <a:r>
+              <a:t>Twenty-five seconds, and do not rush it. Naming the seam before judges find it is the strongest move in the deck. Four Rain employees are in the room; the simulated line must come from you first.</a:t>
+            </a:r>
+          </a:p>
+        </p:txBody>
+      </p:sp>
+      <p:sp>
+        <p:nvSpPr>
+          <p:cNvPr id="4" name="Slide Number Placeholder 3"/>
+          <p:cNvSpPr>
+            <a:spLocks xmlns:a="http://schemas.openxmlformats.org/drawingml/2006/main" noGrp="1"/>
+          </p:cNvSpPr>
+          <p:nvPr>
+            <p:ph type="sldNum" idx="5"/>
+          </p:nvPr>
+        </p:nvSpPr>
+        <p:spPr/>
+        <p:txBody>
+          <a:bodyPr xmlns:a="http://schemas.openxmlformats.org/drawingml/2006/main"/>
+          <a:lstStyle xmlns:a="http://schemas.openxmlformats.org/drawingml/2006/main"/>
+          <a:p xmlns:a="http://schemas.openxmlformats.org/drawingml/2006/main"/>
+        </p:txBody>
+      </p:sp>
+    </p:spTree>
+  </p:cSld>
+  <p:clrMapOvr>
+    <a:masterClrMapping xmlns:a="http://schemas.openxmlformats.org/drawingml/2006/main"/>
+  </p:clrMapOvr>
+</p:notes>
+</file>
+
 <file path=ppt/notesSlides/notesSlide2.xml><?xml version="1.0" encoding="utf-8"?>
 <p:notes xmlns:p="http://schemas.openxmlformats.org/presentationml/2006/main">
   <p:cSld>
@@ -679,7 +825,27 @@
           <a:lstStyle xmlns:a="http://schemas.openxmlformats.org/drawingml/2006/main"/>
           <a:p xmlns:a="http://schemas.openxmlformats.org/drawingml/2006/main">
             <a:r>
-              <a:t>Forty seconds. Open one of these in the explorer if the room is engaged. The remaining-166000 line is the ceiling actually decrementing — that is the claim.</a:t>
+              <a:t>Hanzhou is recommended because it clears the signed sourcing terms. The cheapest quote is rejected because shipping, delivery, specification, and deposit terms fail policy checks.</a:t>
+            </a:r>
+          </a:p>
+          <a:p xmlns:a="http://schemas.openxmlformats.org/drawingml/2006/main">
+            <a:r>
+              <a:t/>
+            </a:r>
+          </a:p>
+          <a:p xmlns:a="http://schemas.openxmlformats.org/drawingml/2006/main">
+            <a:r>
+              <a:t>[Sources]</a:t>
+            </a:r>
+          </a:p>
+          <a:p xmlns:a="http://schemas.openxmlformats.org/drawingml/2006/main">
+            <a:r>
+              <a:t>- /Users/yingzhou/Desktop/Screenshot 2026-08-09 at 12.43.49 AM.png (user-provided screenshot, captured 2026-08-09)</a:t>
+            </a:r>
+          </a:p>
+          <a:p xmlns:a="http://schemas.openxmlformats.org/drawingml/2006/main">
+            <a:r>
+              <a:t>[/Sources]</a:t>
             </a:r>
           </a:p>
         </p:txBody>
@@ -749,7 +915,387 @@
           <a:lstStyle xmlns:a="http://schemas.openxmlformats.org/drawingml/2006/main"/>
           <a:p xmlns:a="http://schemas.openxmlformats.org/drawingml/2006/main">
             <a:r>
-              <a:t>Twenty-five seconds, and do not rush it. Naming the seam before judges find it is the strongest move in the deck. Four Rain employees are in the room; the simulated line must come from you first.</a:t>
+              <a:t>Point to the $200 autonomous threshold and the pending founder approval. Do not submit the payment form during the recording.</a:t>
+            </a:r>
+          </a:p>
+          <a:p xmlns:a="http://schemas.openxmlformats.org/drawingml/2006/main">
+            <a:r>
+              <a:t/>
+            </a:r>
+          </a:p>
+          <a:p xmlns:a="http://schemas.openxmlformats.org/drawingml/2006/main">
+            <a:r>
+              <a:t>[Sources]</a:t>
+            </a:r>
+          </a:p>
+          <a:p xmlns:a="http://schemas.openxmlformats.org/drawingml/2006/main">
+            <a:r>
+              <a:t>- /Users/yingzhou/Desktop/Screenshot 2026-08-09 at 12.44.08 AM.png (user-provided screenshot, captured 2026-08-09)</a:t>
+            </a:r>
+          </a:p>
+          <a:p xmlns:a="http://schemas.openxmlformats.org/drawingml/2006/main">
+            <a:r>
+              <a:t>[/Sources]</a:t>
+            </a:r>
+          </a:p>
+        </p:txBody>
+      </p:sp>
+      <p:sp>
+        <p:nvSpPr>
+          <p:cNvPr id="4" name="Slide Number Placeholder 3"/>
+          <p:cNvSpPr>
+            <a:spLocks xmlns:a="http://schemas.openxmlformats.org/drawingml/2006/main" noGrp="1"/>
+          </p:cNvSpPr>
+          <p:nvPr>
+            <p:ph type="sldNum" idx="5"/>
+          </p:nvPr>
+        </p:nvSpPr>
+        <p:spPr/>
+        <p:txBody>
+          <a:bodyPr xmlns:a="http://schemas.openxmlformats.org/drawingml/2006/main"/>
+          <a:lstStyle xmlns:a="http://schemas.openxmlformats.org/drawingml/2006/main"/>
+          <a:p xmlns:a="http://schemas.openxmlformats.org/drawingml/2006/main"/>
+        </p:txBody>
+      </p:sp>
+    </p:spTree>
+  </p:cSld>
+  <p:clrMapOvr>
+    <a:masterClrMapping xmlns:a="http://schemas.openxmlformats.org/drawingml/2006/main"/>
+  </p:clrMapOvr>
+</p:notes>
+</file>
+
+<file path=ppt/notesSlides/notesSlide6.xml><?xml version="1.0" encoding="utf-8"?>
+<p:notes xmlns:p="http://schemas.openxmlformats.org/presentationml/2006/main">
+  <p:cSld>
+    <p:spTree>
+      <p:nvGrpSpPr>
+        <p:cNvPr id="1" name=""/>
+        <p:cNvGrpSpPr/>
+        <p:nvPr/>
+      </p:nvGrpSpPr>
+      <p:grpSpPr>
+        <a:xfrm xmlns:a="http://schemas.openxmlformats.org/drawingml/2006/main"/>
+      </p:grpSpPr>
+      <p:sp>
+        <p:nvSpPr>
+          <p:cNvPr id="2" name="Slide Image Placeholder 1"/>
+          <p:cNvSpPr>
+            <a:spLocks xmlns:a="http://schemas.openxmlformats.org/drawingml/2006/main" noGrp="1"/>
+          </p:cNvSpPr>
+          <p:nvPr>
+            <p:ph type="sldImg" idx="0"/>
+          </p:nvPr>
+        </p:nvSpPr>
+        <p:spPr/>
+      </p:sp>
+      <p:sp>
+        <p:nvSpPr>
+          <p:cNvPr id="3" name="Notes Placeholder 2"/>
+          <p:cNvSpPr>
+            <a:spLocks xmlns:a="http://schemas.openxmlformats.org/drawingml/2006/main" noGrp="1"/>
+          </p:cNvSpPr>
+          <p:nvPr>
+            <p:ph type="body" idx="1"/>
+          </p:nvPr>
+        </p:nvSpPr>
+        <p:spPr/>
+        <p:txBody>
+          <a:bodyPr xmlns:a="http://schemas.openxmlformats.org/drawingml/2006/main"/>
+          <a:lstStyle xmlns:a="http://schemas.openxmlformats.org/drawingml/2006/main"/>
+          <a:p xmlns:a="http://schemas.openxmlformats.org/drawingml/2006/main">
+            <a:r>
+              <a:t>This is the public Monad testnet registry. The three successful interactions are mandate creation, spend recording, and revocation.</a:t>
+            </a:r>
+          </a:p>
+          <a:p xmlns:a="http://schemas.openxmlformats.org/drawingml/2006/main">
+            <a:r>
+              <a:t/>
+            </a:r>
+          </a:p>
+          <a:p xmlns:a="http://schemas.openxmlformats.org/drawingml/2006/main">
+            <a:r>
+              <a:t>[Sources]</a:t>
+            </a:r>
+          </a:p>
+          <a:p xmlns:a="http://schemas.openxmlformats.org/drawingml/2006/main">
+            <a:r>
+              <a:t>- /Users/yingzhou/Desktop/Screenshot 2026-08-09 at 12.45.16 AM.png (user-provided screenshot, captured 2026-08-09)</a:t>
+            </a:r>
+          </a:p>
+          <a:p xmlns:a="http://schemas.openxmlformats.org/drawingml/2006/main">
+            <a:r>
+              <a:t>[/Sources]</a:t>
+            </a:r>
+          </a:p>
+        </p:txBody>
+      </p:sp>
+      <p:sp>
+        <p:nvSpPr>
+          <p:cNvPr id="4" name="Slide Number Placeholder 3"/>
+          <p:cNvSpPr>
+            <a:spLocks xmlns:a="http://schemas.openxmlformats.org/drawingml/2006/main" noGrp="1"/>
+          </p:cNvSpPr>
+          <p:nvPr>
+            <p:ph type="sldNum" idx="5"/>
+          </p:nvPr>
+        </p:nvSpPr>
+        <p:spPr/>
+        <p:txBody>
+          <a:bodyPr xmlns:a="http://schemas.openxmlformats.org/drawingml/2006/main"/>
+          <a:lstStyle xmlns:a="http://schemas.openxmlformats.org/drawingml/2006/main"/>
+          <a:p xmlns:a="http://schemas.openxmlformats.org/drawingml/2006/main"/>
+        </p:txBody>
+      </p:sp>
+    </p:spTree>
+  </p:cSld>
+  <p:clrMapOvr>
+    <a:masterClrMapping xmlns:a="http://schemas.openxmlformats.org/drawingml/2006/main"/>
+  </p:clrMapOvr>
+</p:notes>
+</file>
+
+<file path=ppt/notesSlides/notesSlide7.xml><?xml version="1.0" encoding="utf-8"?>
+<p:notes xmlns:p="http://schemas.openxmlformats.org/presentationml/2006/main">
+  <p:cSld>
+    <p:spTree>
+      <p:nvGrpSpPr>
+        <p:cNvPr id="1" name=""/>
+        <p:cNvGrpSpPr/>
+        <p:nvPr/>
+      </p:nvGrpSpPr>
+      <p:grpSpPr>
+        <a:xfrm xmlns:a="http://schemas.openxmlformats.org/drawingml/2006/main"/>
+      </p:grpSpPr>
+      <p:sp>
+        <p:nvSpPr>
+          <p:cNvPr id="2" name="Slide Image Placeholder 1"/>
+          <p:cNvSpPr>
+            <a:spLocks xmlns:a="http://schemas.openxmlformats.org/drawingml/2006/main" noGrp="1"/>
+          </p:cNvSpPr>
+          <p:nvPr>
+            <p:ph type="sldImg" idx="0"/>
+          </p:nvPr>
+        </p:nvSpPr>
+        <p:spPr/>
+      </p:sp>
+      <p:sp>
+        <p:nvSpPr>
+          <p:cNvPr id="3" name="Notes Placeholder 2"/>
+          <p:cNvSpPr>
+            <a:spLocks xmlns:a="http://schemas.openxmlformats.org/drawingml/2006/main" noGrp="1"/>
+          </p:cNvSpPr>
+          <p:nvPr>
+            <p:ph type="body" idx="1"/>
+          </p:nvPr>
+        </p:nvSpPr>
+        <p:spPr/>
+        <p:txBody>
+          <a:bodyPr xmlns:a="http://schemas.openxmlformats.org/drawingml/2006/main"/>
+          <a:lstStyle xmlns:a="http://schemas.openxmlformats.org/drawingml/2006/main"/>
+          <a:p xmlns:a="http://schemas.openxmlformats.org/drawingml/2006/main">
+            <a:r>
+              <a:t>Transaction 0xb690…f098 is the successful spend record. The contract interaction is public and independently inspectable.</a:t>
+            </a:r>
+          </a:p>
+          <a:p xmlns:a="http://schemas.openxmlformats.org/drawingml/2006/main">
+            <a:r>
+              <a:t/>
+            </a:r>
+          </a:p>
+          <a:p xmlns:a="http://schemas.openxmlformats.org/drawingml/2006/main">
+            <a:r>
+              <a:t>[Sources]</a:t>
+            </a:r>
+          </a:p>
+          <a:p xmlns:a="http://schemas.openxmlformats.org/drawingml/2006/main">
+            <a:r>
+              <a:t>- /Users/yingzhou/Desktop/Screenshot 2026-08-09 at 12.46.07 AM.png (user-provided screenshot, captured 2026-08-09)</a:t>
+            </a:r>
+          </a:p>
+          <a:p xmlns:a="http://schemas.openxmlformats.org/drawingml/2006/main">
+            <a:r>
+              <a:t>[/Sources]</a:t>
+            </a:r>
+          </a:p>
+        </p:txBody>
+      </p:sp>
+      <p:sp>
+        <p:nvSpPr>
+          <p:cNvPr id="4" name="Slide Number Placeholder 3"/>
+          <p:cNvSpPr>
+            <a:spLocks xmlns:a="http://schemas.openxmlformats.org/drawingml/2006/main" noGrp="1"/>
+          </p:cNvSpPr>
+          <p:nvPr>
+            <p:ph type="sldNum" idx="5"/>
+          </p:nvPr>
+        </p:nvSpPr>
+        <p:spPr/>
+        <p:txBody>
+          <a:bodyPr xmlns:a="http://schemas.openxmlformats.org/drawingml/2006/main"/>
+          <a:lstStyle xmlns:a="http://schemas.openxmlformats.org/drawingml/2006/main"/>
+          <a:p xmlns:a="http://schemas.openxmlformats.org/drawingml/2006/main"/>
+        </p:txBody>
+      </p:sp>
+    </p:spTree>
+  </p:cSld>
+  <p:clrMapOvr>
+    <a:masterClrMapping xmlns:a="http://schemas.openxmlformats.org/drawingml/2006/main"/>
+  </p:clrMapOvr>
+</p:notes>
+</file>
+
+<file path=ppt/notesSlides/notesSlide8.xml><?xml version="1.0" encoding="utf-8"?>
+<p:notes xmlns:p="http://schemas.openxmlformats.org/presentationml/2006/main">
+  <p:cSld>
+    <p:spTree>
+      <p:nvGrpSpPr>
+        <p:cNvPr id="1" name=""/>
+        <p:cNvGrpSpPr/>
+        <p:nvPr/>
+      </p:nvGrpSpPr>
+      <p:grpSpPr>
+        <a:xfrm xmlns:a="http://schemas.openxmlformats.org/drawingml/2006/main"/>
+      </p:grpSpPr>
+      <p:sp>
+        <p:nvSpPr>
+          <p:cNvPr id="2" name="Slide Image Placeholder 1"/>
+          <p:cNvSpPr>
+            <a:spLocks xmlns:a="http://schemas.openxmlformats.org/drawingml/2006/main" noGrp="1"/>
+          </p:cNvSpPr>
+          <p:nvPr>
+            <p:ph type="sldImg" idx="0"/>
+          </p:nvPr>
+        </p:nvSpPr>
+        <p:spPr/>
+      </p:sp>
+      <p:sp>
+        <p:nvSpPr>
+          <p:cNvPr id="3" name="Notes Placeholder 2"/>
+          <p:cNvSpPr>
+            <a:spLocks xmlns:a="http://schemas.openxmlformats.org/drawingml/2006/main" noGrp="1"/>
+          </p:cNvSpPr>
+          <p:nvPr>
+            <p:ph type="body" idx="1"/>
+          </p:nvPr>
+        </p:nvSpPr>
+        <p:spPr/>
+        <p:txBody>
+          <a:bodyPr xmlns:a="http://schemas.openxmlformats.org/drawingml/2006/main"/>
+          <a:lstStyle xmlns:a="http://schemas.openxmlformats.org/drawingml/2006/main"/>
+          <a:p xmlns:a="http://schemas.openxmlformats.org/drawingml/2006/main">
+            <a:r>
+              <a:t>Transaction 0x48b5…3ded revokes the mandate. After this state transition, later attempts cannot reuse the authority.</a:t>
+            </a:r>
+          </a:p>
+          <a:p xmlns:a="http://schemas.openxmlformats.org/drawingml/2006/main">
+            <a:r>
+              <a:t/>
+            </a:r>
+          </a:p>
+          <a:p xmlns:a="http://schemas.openxmlformats.org/drawingml/2006/main">
+            <a:r>
+              <a:t>[Sources]</a:t>
+            </a:r>
+          </a:p>
+          <a:p xmlns:a="http://schemas.openxmlformats.org/drawingml/2006/main">
+            <a:r>
+              <a:t>- /Users/yingzhou/Desktop/Screenshot 2026-08-09 at 12.46.19 AM.png (user-provided screenshot, captured 2026-08-09)</a:t>
+            </a:r>
+          </a:p>
+          <a:p xmlns:a="http://schemas.openxmlformats.org/drawingml/2006/main">
+            <a:r>
+              <a:t>[/Sources]</a:t>
+            </a:r>
+          </a:p>
+        </p:txBody>
+      </p:sp>
+      <p:sp>
+        <p:nvSpPr>
+          <p:cNvPr id="4" name="Slide Number Placeholder 3"/>
+          <p:cNvSpPr>
+            <a:spLocks xmlns:a="http://schemas.openxmlformats.org/drawingml/2006/main" noGrp="1"/>
+          </p:cNvSpPr>
+          <p:nvPr>
+            <p:ph type="sldNum" idx="5"/>
+          </p:nvPr>
+        </p:nvSpPr>
+        <p:spPr/>
+        <p:txBody>
+          <a:bodyPr xmlns:a="http://schemas.openxmlformats.org/drawingml/2006/main"/>
+          <a:lstStyle xmlns:a="http://schemas.openxmlformats.org/drawingml/2006/main"/>
+          <a:p xmlns:a="http://schemas.openxmlformats.org/drawingml/2006/main"/>
+        </p:txBody>
+      </p:sp>
+    </p:spTree>
+  </p:cSld>
+  <p:clrMapOvr>
+    <a:masterClrMapping xmlns:a="http://schemas.openxmlformats.org/drawingml/2006/main"/>
+  </p:clrMapOvr>
+</p:notes>
+</file>
+
+<file path=ppt/notesSlides/notesSlide9.xml><?xml version="1.0" encoding="utf-8"?>
+<p:notes xmlns:p="http://schemas.openxmlformats.org/presentationml/2006/main">
+  <p:cSld>
+    <p:spTree>
+      <p:nvGrpSpPr>
+        <p:cNvPr id="1" name=""/>
+        <p:cNvGrpSpPr/>
+        <p:nvPr/>
+      </p:nvGrpSpPr>
+      <p:grpSpPr>
+        <a:xfrm xmlns:a="http://schemas.openxmlformats.org/drawingml/2006/main"/>
+      </p:grpSpPr>
+      <p:sp>
+        <p:nvSpPr>
+          <p:cNvPr id="2" name="Slide Image Placeholder 1"/>
+          <p:cNvSpPr>
+            <a:spLocks xmlns:a="http://schemas.openxmlformats.org/drawingml/2006/main" noGrp="1"/>
+          </p:cNvSpPr>
+          <p:nvPr>
+            <p:ph type="sldImg" idx="0"/>
+          </p:nvPr>
+        </p:nvSpPr>
+        <p:spPr/>
+      </p:sp>
+      <p:sp>
+        <p:nvSpPr>
+          <p:cNvPr id="3" name="Notes Placeholder 2"/>
+          <p:cNvSpPr>
+            <a:spLocks xmlns:a="http://schemas.openxmlformats.org/drawingml/2006/main" noGrp="1"/>
+          </p:cNvSpPr>
+          <p:nvPr>
+            <p:ph type="body" idx="1"/>
+          </p:nvPr>
+        </p:nvSpPr>
+        <p:spPr/>
+        <p:txBody>
+          <a:bodyPr xmlns:a="http://schemas.openxmlformats.org/drawingml/2006/main"/>
+          <a:lstStyle xmlns:a="http://schemas.openxmlformats.org/drawingml/2006/main"/>
+          <a:p xmlns:a="http://schemas.openxmlformats.org/drawingml/2006/main">
+            <a:r>
+              <a:t>Show only the successful result: authenticated true, GET /issuing/transactions, HTTP 200, and transaction count zero. Never display the API key or authentication header.</a:t>
+            </a:r>
+          </a:p>
+          <a:p xmlns:a="http://schemas.openxmlformats.org/drawingml/2006/main">
+            <a:r>
+              <a:t/>
+            </a:r>
+          </a:p>
+          <a:p xmlns:a="http://schemas.openxmlformats.org/drawingml/2006/main">
+            <a:r>
+              <a:t>[Sources]</a:t>
+            </a:r>
+          </a:p>
+          <a:p xmlns:a="http://schemas.openxmlformats.org/drawingml/2006/main">
+            <a:r>
+              <a:t>- /Users/yingzhou/Desktop/Screenshot 2026-08-09 at 12.41.52 AM.png (user-provided screenshot, captured 2026-08-09)</a:t>
+            </a:r>
+          </a:p>
+          <a:p xmlns:a="http://schemas.openxmlformats.org/drawingml/2006/main">
+            <a:r>
+              <a:t>[/Sources]</a:t>
             </a:r>
           </a:p>
         </p:txBody>
@@ -3776,17 +4322,17 @@
   </p:cSld>
   <p:clrMap bg1="lt1" tx1="dk1" bg2="lt2" tx2="dk2" accent1="accent1" accent2="accent2" accent3="accent3" accent4="accent4" accent5="accent5" accent6="accent6" hlink="hlink" folHlink="folHlink"/>
   <p:sldLayoutIdLst>
-    <p:sldLayoutId xmlns:r="http://schemas.openxmlformats.org/officeDocument/2006/relationships" id="2147483649" r:id="R083d53a6a02c4b35"/>
-    <p:sldLayoutId xmlns:r="http://schemas.openxmlformats.org/officeDocument/2006/relationships" id="2147483650" r:id="R7413e7b8c1bb423a"/>
-    <p:sldLayoutId xmlns:r="http://schemas.openxmlformats.org/officeDocument/2006/relationships" id="2147483651" r:id="R7709bd6fb99647db"/>
-    <p:sldLayoutId xmlns:r="http://schemas.openxmlformats.org/officeDocument/2006/relationships" id="2147483652" r:id="R8b9754bbeb554382"/>
-    <p:sldLayoutId xmlns:r="http://schemas.openxmlformats.org/officeDocument/2006/relationships" id="2147483653" r:id="R89cd7a0b371a496c"/>
-    <p:sldLayoutId xmlns:r="http://schemas.openxmlformats.org/officeDocument/2006/relationships" id="2147483654" r:id="R3e747cd670954863"/>
-    <p:sldLayoutId xmlns:r="http://schemas.openxmlformats.org/officeDocument/2006/relationships" id="2147483655" r:id="R01f7f3d71bf44063"/>
-    <p:sldLayoutId xmlns:r="http://schemas.openxmlformats.org/officeDocument/2006/relationships" id="2147483656" r:id="R7f4407e4020843b1"/>
-    <p:sldLayoutId xmlns:r="http://schemas.openxmlformats.org/officeDocument/2006/relationships" id="2147483657" r:id="Rfeef5041b74a4cbf"/>
-    <p:sldLayoutId xmlns:r="http://schemas.openxmlformats.org/officeDocument/2006/relationships" id="2147483658" r:id="Rba5ea3f677e04710"/>
-    <p:sldLayoutId xmlns:r="http://schemas.openxmlformats.org/officeDocument/2006/relationships" id="2147483659" r:id="R892c740b6bfe4800"/>
+    <p:sldLayoutId xmlns:r="http://schemas.openxmlformats.org/officeDocument/2006/relationships" id="2147483649" r:id="R523c7ad39ca54bfc"/>
+    <p:sldLayoutId xmlns:r="http://schemas.openxmlformats.org/officeDocument/2006/relationships" id="2147483650" r:id="Rdd25e791339044e4"/>
+    <p:sldLayoutId xmlns:r="http://schemas.openxmlformats.org/officeDocument/2006/relationships" id="2147483651" r:id="Rcf7370e419734aa1"/>
+    <p:sldLayoutId xmlns:r="http://schemas.openxmlformats.org/officeDocument/2006/relationships" id="2147483652" r:id="Rfbab329f27164dc3"/>
+    <p:sldLayoutId xmlns:r="http://schemas.openxmlformats.org/officeDocument/2006/relationships" id="2147483653" r:id="Rca86dd79ba8f416b"/>
+    <p:sldLayoutId xmlns:r="http://schemas.openxmlformats.org/officeDocument/2006/relationships" id="2147483654" r:id="Re99299f549f64fec"/>
+    <p:sldLayoutId xmlns:r="http://schemas.openxmlformats.org/officeDocument/2006/relationships" id="2147483655" r:id="R72d3c892e1cc4a83"/>
+    <p:sldLayoutId xmlns:r="http://schemas.openxmlformats.org/officeDocument/2006/relationships" id="2147483656" r:id="R56089b75f359498a"/>
+    <p:sldLayoutId xmlns:r="http://schemas.openxmlformats.org/officeDocument/2006/relationships" id="2147483657" r:id="Re93b53d467f54f6b"/>
+    <p:sldLayoutId xmlns:r="http://schemas.openxmlformats.org/officeDocument/2006/relationships" id="2147483658" r:id="R2eb914bfb1004b07"/>
+    <p:sldLayoutId xmlns:r="http://schemas.openxmlformats.org/officeDocument/2006/relationships" id="2147483659" r:id="R812637bf1ab44a01"/>
   </p:sldLayoutIdLst>
   <p:txStyles>
     <p:titleStyle>
@@ -4946,6 +5492,3162 @@
 </p:sld>
 </file>
 
+<file path=ppt/slides/slide10.xml><?xml version="1.0" encoding="utf-8"?>
+<p:sld xmlns:p="http://schemas.openxmlformats.org/presentationml/2006/main">
+  <p:cSld>
+    <p:spTree>
+      <p:nvGrpSpPr>
+        <p:cNvPr id="1" name=""/>
+        <p:cNvGrpSpPr/>
+        <p:nvPr/>
+      </p:nvGrpSpPr>
+      <p:grpSpPr>
+        <a:xfrm xmlns:a="http://schemas.openxmlformats.org/drawingml/2006/main"/>
+      </p:grpSpPr>
+      <p:sp>
+        <p:nvSpPr>
+          <p:cNvPr id="2" name="Rectangle 1">
+            <a:extLst xmlns:a="http://schemas.openxmlformats.org/drawingml/2006/main">
+              <a:ext uri="{FF2B5EF4-FFF2-40B4-BE49-F238E27FC236}">
+                <a16:creationId xmlns:a16="http://schemas.microsoft.com/office/drawing/2014/main" id="{8778AC56-A020-4F4B-8EC9-E333EF639321}"/>
+              </a:ext>
+            </a:extLst>
+          </p:cNvPr>
+          <p:cNvSpPr>
+            <a:spLocks xmlns:a="http://schemas.openxmlformats.org/drawingml/2006/main" noGrp="1"/>
+          </p:cNvSpPr>
+          <p:nvPr/>
+        </p:nvSpPr>
+        <p:spPr>
+          <a:xfrm xmlns:a="http://schemas.openxmlformats.org/drawingml/2006/main">
+            <a:off x="0" y="0"/>
+            <a:ext cx="12191695" cy="6858000"/>
+          </a:xfrm>
+          <a:prstGeom xmlns:a="http://schemas.openxmlformats.org/drawingml/2006/main" prst="rect">
+            <a:avLst/>
+          </a:prstGeom>
+          <a:solidFill xmlns:a="http://schemas.openxmlformats.org/drawingml/2006/main">
+            <a:srgbClr val="0A0E14"/>
+          </a:solidFill>
+          <a:ln xmlns:a="http://schemas.openxmlformats.org/drawingml/2006/main">
+            <a:noFill/>
+          </a:ln>
+        </p:spPr>
+        <p:style>
+          <a:lnRef xmlns:a="http://schemas.openxmlformats.org/drawingml/2006/main" idx="1">
+            <a:schemeClr val="accent1"/>
+          </a:lnRef>
+          <a:fillRef xmlns:a="http://schemas.openxmlformats.org/drawingml/2006/main" idx="3">
+            <a:schemeClr val="accent1"/>
+          </a:fillRef>
+          <a:effectRef xmlns:a="http://schemas.openxmlformats.org/drawingml/2006/main" idx="2">
+            <a:schemeClr val="accent1"/>
+          </a:effectRef>
+          <a:fontRef xmlns:a="http://schemas.openxmlformats.org/drawingml/2006/main" idx="minor">
+            <a:schemeClr val="lt1"/>
+          </a:fontRef>
+        </p:style>
+        <p:txBody>
+          <a:bodyPr xmlns:a="http://schemas.openxmlformats.org/drawingml/2006/main" anchor="ctr"/>
+          <a:lstStyle xmlns:a="http://schemas.openxmlformats.org/drawingml/2006/main"/>
+          <a:p xmlns:a="http://schemas.openxmlformats.org/drawingml/2006/main">
+            <a:pPr algn="ctr">
+              <a:buNone/>
+            </a:pPr>
+          </a:p>
+        </p:txBody>
+      </p:sp>
+      <p:sp>
+        <p:nvSpPr>
+          <p:cNvPr id="3" name="TextBox 2">
+            <a:extLst xmlns:a="http://schemas.openxmlformats.org/drawingml/2006/main">
+              <a:ext uri="{FF2B5EF4-FFF2-40B4-BE49-F238E27FC236}">
+                <a16:creationId xmlns:a16="http://schemas.microsoft.com/office/drawing/2014/main" id="{DAEADF48-D880-4769-B8A2-13394F7AC580}"/>
+              </a:ext>
+            </a:extLst>
+          </p:cNvPr>
+          <p:cNvSpPr>
+            <a:spLocks xmlns:a="http://schemas.openxmlformats.org/drawingml/2006/main" noGrp="1"/>
+          </p:cNvSpPr>
+          <p:nvPr/>
+        </p:nvSpPr>
+        <p:spPr>
+          <a:xfrm xmlns:a="http://schemas.openxmlformats.org/drawingml/2006/main">
+            <a:off x="777240" y="658368"/>
+            <a:ext cx="5486400" cy="228600"/>
+          </a:xfrm>
+          <a:prstGeom xmlns:a="http://schemas.openxmlformats.org/drawingml/2006/main" prst="rect">
+            <a:avLst/>
+          </a:prstGeom>
+          <a:noFill xmlns:a="http://schemas.openxmlformats.org/drawingml/2006/main"/>
+        </p:spPr>
+        <p:txBody>
+          <a:bodyPr xmlns:a="http://schemas.openxmlformats.org/drawingml/2006/main" wrap="square" lIns="0" tIns="0" rIns="0" bIns="0" anchor="t">
+            <a:spAutoFit/>
+          </a:bodyPr>
+          <a:lstStyle xmlns:a="http://schemas.openxmlformats.org/drawingml/2006/main"/>
+          <a:p xmlns:a="http://schemas.openxmlformats.org/drawingml/2006/main">
+            <a:pPr algn="l">
+              <a:buNone/>
+            </a:pPr>
+            <a:r>
+              <a:rPr sz="1100" b="1" i="0">
+                <a:solidFill>
+                  <a:srgbClr val="D9FF55"/>
+                </a:solidFill>
+                <a:latin typeface="Arial"/>
+                <a:ea typeface="Arial"/>
+                <a:cs typeface="Arial"/>
+              </a:rPr>
+              <a:t>PROOF</a:t>
+            </a:r>
+          </a:p>
+        </p:txBody>
+      </p:sp>
+      <p:sp>
+        <p:nvSpPr>
+          <p:cNvPr id="4" name="TextBox 3">
+            <a:extLst xmlns:a="http://schemas.openxmlformats.org/drawingml/2006/main">
+              <a:ext uri="{FF2B5EF4-FFF2-40B4-BE49-F238E27FC236}">
+                <a16:creationId xmlns:a16="http://schemas.microsoft.com/office/drawing/2014/main" id="{8F34F624-32A1-4B9F-9E44-C24674A66551}"/>
+              </a:ext>
+            </a:extLst>
+          </p:cNvPr>
+          <p:cNvSpPr>
+            <a:spLocks xmlns:a="http://schemas.openxmlformats.org/drawingml/2006/main" noGrp="1"/>
+          </p:cNvSpPr>
+          <p:nvPr/>
+        </p:nvSpPr>
+        <p:spPr>
+          <a:xfrm xmlns:a="http://schemas.openxmlformats.org/drawingml/2006/main">
+            <a:off x="777240" y="960120"/>
+            <a:ext cx="10241280" cy="640080"/>
+          </a:xfrm>
+          <a:prstGeom xmlns:a="http://schemas.openxmlformats.org/drawingml/2006/main" prst="rect">
+            <a:avLst/>
+          </a:prstGeom>
+          <a:noFill xmlns:a="http://schemas.openxmlformats.org/drawingml/2006/main"/>
+        </p:spPr>
+        <p:txBody>
+          <a:bodyPr xmlns:a="http://schemas.openxmlformats.org/drawingml/2006/main" wrap="square" lIns="0" tIns="0" rIns="0" bIns="0" anchor="t">
+            <a:spAutoFit/>
+          </a:bodyPr>
+          <a:lstStyle xmlns:a="http://schemas.openxmlformats.org/drawingml/2006/main"/>
+          <a:p xmlns:a="http://schemas.openxmlformats.org/drawingml/2006/main">
+            <a:pPr algn="l">
+              <a:buNone/>
+            </a:pPr>
+            <a:r>
+              <a:rPr sz="3200" b="1" i="0">
+                <a:solidFill>
+                  <a:srgbClr val="E8EDF4"/>
+                </a:solidFill>
+                <a:latin typeface="Arial"/>
+                <a:ea typeface="Arial"/>
+                <a:cs typeface="Arial"/>
+              </a:rPr>
+              <a:t>Not a diagram. Four public transactions.</a:t>
+            </a:r>
+          </a:p>
+        </p:txBody>
+      </p:sp>
+      <p:sp>
+        <p:nvSpPr>
+          <p:cNvPr id="5" name="Rounded Rectangle 4">
+            <a:extLst xmlns:a="http://schemas.openxmlformats.org/drawingml/2006/main">
+              <a:ext uri="{FF2B5EF4-FFF2-40B4-BE49-F238E27FC236}">
+                <a16:creationId xmlns:a16="http://schemas.microsoft.com/office/drawing/2014/main" id="{ACF50DA2-73ED-48E6-9804-F805318EE2F0}"/>
+              </a:ext>
+            </a:extLst>
+          </p:cNvPr>
+          <p:cNvSpPr>
+            <a:spLocks xmlns:a="http://schemas.openxmlformats.org/drawingml/2006/main" noGrp="1"/>
+          </p:cNvSpPr>
+          <p:nvPr/>
+        </p:nvSpPr>
+        <p:spPr>
+          <a:xfrm xmlns:a="http://schemas.openxmlformats.org/drawingml/2006/main">
+            <a:off x="777240" y="1993392"/>
+            <a:ext cx="6949440" cy="731520"/>
+          </a:xfrm>
+          <a:prstGeom xmlns:a="http://schemas.openxmlformats.org/drawingml/2006/main" prst="roundRect">
+            <a:avLst>
+              <a:gd name="adj" fmla="val 6000"/>
+            </a:avLst>
+          </a:prstGeom>
+          <a:solidFill xmlns:a="http://schemas.openxmlformats.org/drawingml/2006/main">
+            <a:srgbClr val="161E2A"/>
+          </a:solidFill>
+          <a:ln xmlns:a="http://schemas.openxmlformats.org/drawingml/2006/main" w="12700">
+            <a:solidFill>
+              <a:srgbClr val="2A3647"/>
+            </a:solidFill>
+          </a:ln>
+        </p:spPr>
+        <p:style>
+          <a:lnRef xmlns:a="http://schemas.openxmlformats.org/drawingml/2006/main" idx="1">
+            <a:schemeClr val="accent1"/>
+          </a:lnRef>
+          <a:fillRef xmlns:a="http://schemas.openxmlformats.org/drawingml/2006/main" idx="3">
+            <a:schemeClr val="accent1"/>
+          </a:fillRef>
+          <a:effectRef xmlns:a="http://schemas.openxmlformats.org/drawingml/2006/main" idx="2">
+            <a:schemeClr val="accent1"/>
+          </a:effectRef>
+          <a:fontRef xmlns:a="http://schemas.openxmlformats.org/drawingml/2006/main" idx="minor">
+            <a:schemeClr val="lt1"/>
+          </a:fontRef>
+        </p:style>
+        <p:txBody>
+          <a:bodyPr xmlns:a="http://schemas.openxmlformats.org/drawingml/2006/main" anchor="ctr"/>
+          <a:lstStyle xmlns:a="http://schemas.openxmlformats.org/drawingml/2006/main"/>
+          <a:p xmlns:a="http://schemas.openxmlformats.org/drawingml/2006/main">
+            <a:pPr algn="ctr">
+              <a:buNone/>
+            </a:pPr>
+          </a:p>
+        </p:txBody>
+      </p:sp>
+      <p:sp>
+        <p:nvSpPr>
+          <p:cNvPr id="6" name="Oval 5">
+            <a:extLst xmlns:a="http://schemas.openxmlformats.org/drawingml/2006/main">
+              <a:ext uri="{FF2B5EF4-FFF2-40B4-BE49-F238E27FC236}">
+                <a16:creationId xmlns:a16="http://schemas.microsoft.com/office/drawing/2014/main" id="{A0A742D0-4639-4FE2-826B-CBA8F2B0ACDC}"/>
+              </a:ext>
+            </a:extLst>
+          </p:cNvPr>
+          <p:cNvSpPr>
+            <a:spLocks xmlns:a="http://schemas.openxmlformats.org/drawingml/2006/main" noGrp="1"/>
+          </p:cNvSpPr>
+          <p:nvPr/>
+        </p:nvSpPr>
+        <p:spPr>
+          <a:xfrm xmlns:a="http://schemas.openxmlformats.org/drawingml/2006/main">
+            <a:off x="1024128" y="2295144"/>
+            <a:ext cx="128016" cy="128016"/>
+          </a:xfrm>
+          <a:prstGeom xmlns:a="http://schemas.openxmlformats.org/drawingml/2006/main" prst="ellipse">
+            <a:avLst/>
+          </a:prstGeom>
+          <a:solidFill xmlns:a="http://schemas.openxmlformats.org/drawingml/2006/main">
+            <a:srgbClr val="9AA9BE"/>
+          </a:solidFill>
+          <a:ln xmlns:a="http://schemas.openxmlformats.org/drawingml/2006/main">
+            <a:noFill/>
+          </a:ln>
+        </p:spPr>
+        <p:style>
+          <a:lnRef xmlns:a="http://schemas.openxmlformats.org/drawingml/2006/main" idx="1">
+            <a:schemeClr val="accent1"/>
+          </a:lnRef>
+          <a:fillRef xmlns:a="http://schemas.openxmlformats.org/drawingml/2006/main" idx="3">
+            <a:schemeClr val="accent1"/>
+          </a:fillRef>
+          <a:effectRef xmlns:a="http://schemas.openxmlformats.org/drawingml/2006/main" idx="2">
+            <a:schemeClr val="accent1"/>
+          </a:effectRef>
+          <a:fontRef xmlns:a="http://schemas.openxmlformats.org/drawingml/2006/main" idx="minor">
+            <a:schemeClr val="lt1"/>
+          </a:fontRef>
+        </p:style>
+        <p:txBody>
+          <a:bodyPr xmlns:a="http://schemas.openxmlformats.org/drawingml/2006/main" anchor="ctr"/>
+          <a:lstStyle xmlns:a="http://schemas.openxmlformats.org/drawingml/2006/main"/>
+          <a:p xmlns:a="http://schemas.openxmlformats.org/drawingml/2006/main">
+            <a:pPr algn="ctr">
+              <a:buNone/>
+            </a:pPr>
+          </a:p>
+        </p:txBody>
+      </p:sp>
+      <p:sp>
+        <p:nvSpPr>
+          <p:cNvPr id="7" name="TextBox 6">
+            <a:extLst xmlns:a="http://schemas.openxmlformats.org/drawingml/2006/main">
+              <a:ext uri="{FF2B5EF4-FFF2-40B4-BE49-F238E27FC236}">
+                <a16:creationId xmlns:a16="http://schemas.microsoft.com/office/drawing/2014/main" id="{A2EB9DAC-D611-4785-8AF7-DD59E0D991E7}"/>
+              </a:ext>
+            </a:extLst>
+          </p:cNvPr>
+          <p:cNvSpPr>
+            <a:spLocks xmlns:a="http://schemas.openxmlformats.org/drawingml/2006/main" noGrp="1"/>
+          </p:cNvSpPr>
+          <p:nvPr/>
+        </p:nvSpPr>
+        <p:spPr>
+          <a:xfrm xmlns:a="http://schemas.openxmlformats.org/drawingml/2006/main">
+            <a:off x="1298448" y="2130552"/>
+            <a:ext cx="2926080" cy="274320"/>
+          </a:xfrm>
+          <a:prstGeom xmlns:a="http://schemas.openxmlformats.org/drawingml/2006/main" prst="rect">
+            <a:avLst/>
+          </a:prstGeom>
+          <a:noFill xmlns:a="http://schemas.openxmlformats.org/drawingml/2006/main"/>
+        </p:spPr>
+        <p:txBody>
+          <a:bodyPr xmlns:a="http://schemas.openxmlformats.org/drawingml/2006/main" wrap="square" lIns="0" tIns="0" rIns="0" bIns="0" anchor="t">
+            <a:spAutoFit/>
+          </a:bodyPr>
+          <a:lstStyle xmlns:a="http://schemas.openxmlformats.org/drawingml/2006/main"/>
+          <a:p xmlns:a="http://schemas.openxmlformats.org/drawingml/2006/main">
+            <a:pPr algn="l">
+              <a:buNone/>
+            </a:pPr>
+            <a:r>
+              <a:rPr sz="1300" b="1" i="0">
+                <a:solidFill>
+                  <a:srgbClr val="E8EDF4"/>
+                </a:solidFill>
+                <a:latin typeface="Arial"/>
+                <a:ea typeface="Arial"/>
+                <a:cs typeface="Arial"/>
+              </a:rPr>
+              <a:t>Registry deployed</a:t>
+            </a:r>
+          </a:p>
+        </p:txBody>
+      </p:sp>
+      <p:sp>
+        <p:nvSpPr>
+          <p:cNvPr id="8" name="TextBox 7">
+            <a:extLst xmlns:a="http://schemas.openxmlformats.org/drawingml/2006/main">
+              <a:ext uri="{FF2B5EF4-FFF2-40B4-BE49-F238E27FC236}">
+                <a16:creationId xmlns:a16="http://schemas.microsoft.com/office/drawing/2014/main" id="{4C62785E-2586-41B7-83F3-FFAE73FEF8FD}"/>
+              </a:ext>
+            </a:extLst>
+          </p:cNvPr>
+          <p:cNvSpPr>
+            <a:spLocks xmlns:a="http://schemas.openxmlformats.org/drawingml/2006/main" noGrp="1"/>
+          </p:cNvSpPr>
+          <p:nvPr/>
+        </p:nvSpPr>
+        <p:spPr>
+          <a:xfrm xmlns:a="http://schemas.openxmlformats.org/drawingml/2006/main">
+            <a:off x="1298448" y="2404872"/>
+            <a:ext cx="4572000" cy="237744"/>
+          </a:xfrm>
+          <a:prstGeom xmlns:a="http://schemas.openxmlformats.org/drawingml/2006/main" prst="rect">
+            <a:avLst/>
+          </a:prstGeom>
+          <a:noFill xmlns:a="http://schemas.openxmlformats.org/drawingml/2006/main"/>
+        </p:spPr>
+        <p:txBody>
+          <a:bodyPr xmlns:a="http://schemas.openxmlformats.org/drawingml/2006/main" wrap="square" lIns="0" tIns="0" rIns="0" bIns="0" anchor="t">
+            <a:spAutoFit/>
+          </a:bodyPr>
+          <a:lstStyle xmlns:a="http://schemas.openxmlformats.org/drawingml/2006/main"/>
+          <a:p xmlns:a="http://schemas.openxmlformats.org/drawingml/2006/main">
+            <a:pPr algn="l">
+              <a:buNone/>
+            </a:pPr>
+            <a:r>
+              <a:rPr sz="1050" b="0" i="0">
+                <a:solidFill>
+                  <a:srgbClr val="8A9CB5"/>
+                </a:solidFill>
+                <a:latin typeface="Arial"/>
+                <a:ea typeface="Arial"/>
+                <a:cs typeface="Arial"/>
+              </a:rPr>
+              <a:t>block 52019868</a:t>
+            </a:r>
+          </a:p>
+        </p:txBody>
+      </p:sp>
+      <p:sp>
+        <p:nvSpPr>
+          <p:cNvPr id="9" name="TextBox 8">
+            <a:extLst xmlns:a="http://schemas.openxmlformats.org/drawingml/2006/main">
+              <a:ext uri="{FF2B5EF4-FFF2-40B4-BE49-F238E27FC236}">
+                <a16:creationId xmlns:a16="http://schemas.microsoft.com/office/drawing/2014/main" id="{3C4E33EA-788E-46BC-9F3F-27FC6787DF64}"/>
+              </a:ext>
+            </a:extLst>
+          </p:cNvPr>
+          <p:cNvSpPr>
+            <a:spLocks xmlns:a="http://schemas.openxmlformats.org/drawingml/2006/main" noGrp="1"/>
+          </p:cNvSpPr>
+          <p:nvPr/>
+        </p:nvSpPr>
+        <p:spPr>
+          <a:xfrm xmlns:a="http://schemas.openxmlformats.org/drawingml/2006/main">
+            <a:off x="5989320" y="2249424"/>
+            <a:ext cx="1600200" cy="274320"/>
+          </a:xfrm>
+          <a:prstGeom xmlns:a="http://schemas.openxmlformats.org/drawingml/2006/main" prst="rect">
+            <a:avLst/>
+          </a:prstGeom>
+          <a:noFill xmlns:a="http://schemas.openxmlformats.org/drawingml/2006/main"/>
+        </p:spPr>
+        <p:txBody>
+          <a:bodyPr xmlns:a="http://schemas.openxmlformats.org/drawingml/2006/main" wrap="square" lIns="0" tIns="0" rIns="0" bIns="0" anchor="t">
+            <a:spAutoFit/>
+          </a:bodyPr>
+          <a:lstStyle xmlns:a="http://schemas.openxmlformats.org/drawingml/2006/main"/>
+          <a:p xmlns:a="http://schemas.openxmlformats.org/drawingml/2006/main">
+            <a:pPr algn="r">
+              <a:buNone/>
+            </a:pPr>
+            <a:r>
+              <a:rPr sz="1150" b="1" i="0">
+                <a:solidFill>
+                  <a:srgbClr val="9AA9BE"/>
+                </a:solidFill>
+                <a:latin typeface="Courier New"/>
+                <a:ea typeface="Courier New"/>
+                <a:cs typeface="Courier New"/>
+              </a:rPr>
+              <a:t>0x4fba…4a41</a:t>
+            </a:r>
+          </a:p>
+        </p:txBody>
+      </p:sp>
+      <p:sp>
+        <p:nvSpPr>
+          <p:cNvPr id="10" name="Rounded Rectangle 9">
+            <a:extLst xmlns:a="http://schemas.openxmlformats.org/drawingml/2006/main">
+              <a:ext uri="{FF2B5EF4-FFF2-40B4-BE49-F238E27FC236}">
+                <a16:creationId xmlns:a16="http://schemas.microsoft.com/office/drawing/2014/main" id="{6DB54F6D-7332-4900-80AF-F713403834C1}"/>
+              </a:ext>
+            </a:extLst>
+          </p:cNvPr>
+          <p:cNvSpPr>
+            <a:spLocks xmlns:a="http://schemas.openxmlformats.org/drawingml/2006/main" noGrp="1"/>
+          </p:cNvSpPr>
+          <p:nvPr/>
+        </p:nvSpPr>
+        <p:spPr>
+          <a:xfrm xmlns:a="http://schemas.openxmlformats.org/drawingml/2006/main">
+            <a:off x="777240" y="2816352"/>
+            <a:ext cx="6949440" cy="731520"/>
+          </a:xfrm>
+          <a:prstGeom xmlns:a="http://schemas.openxmlformats.org/drawingml/2006/main" prst="roundRect">
+            <a:avLst>
+              <a:gd name="adj" fmla="val 6000"/>
+            </a:avLst>
+          </a:prstGeom>
+          <a:solidFill xmlns:a="http://schemas.openxmlformats.org/drawingml/2006/main">
+            <a:srgbClr val="161E2A"/>
+          </a:solidFill>
+          <a:ln xmlns:a="http://schemas.openxmlformats.org/drawingml/2006/main" w="12700">
+            <a:solidFill>
+              <a:srgbClr val="2A3647"/>
+            </a:solidFill>
+          </a:ln>
+        </p:spPr>
+        <p:style>
+          <a:lnRef xmlns:a="http://schemas.openxmlformats.org/drawingml/2006/main" idx="1">
+            <a:schemeClr val="accent1"/>
+          </a:lnRef>
+          <a:fillRef xmlns:a="http://schemas.openxmlformats.org/drawingml/2006/main" idx="3">
+            <a:schemeClr val="accent1"/>
+          </a:fillRef>
+          <a:effectRef xmlns:a="http://schemas.openxmlformats.org/drawingml/2006/main" idx="2">
+            <a:schemeClr val="accent1"/>
+          </a:effectRef>
+          <a:fontRef xmlns:a="http://schemas.openxmlformats.org/drawingml/2006/main" idx="minor">
+            <a:schemeClr val="lt1"/>
+          </a:fontRef>
+        </p:style>
+        <p:txBody>
+          <a:bodyPr xmlns:a="http://schemas.openxmlformats.org/drawingml/2006/main" anchor="ctr"/>
+          <a:lstStyle xmlns:a="http://schemas.openxmlformats.org/drawingml/2006/main"/>
+          <a:p xmlns:a="http://schemas.openxmlformats.org/drawingml/2006/main">
+            <a:pPr algn="ctr">
+              <a:buNone/>
+            </a:pPr>
+          </a:p>
+        </p:txBody>
+      </p:sp>
+      <p:sp>
+        <p:nvSpPr>
+          <p:cNvPr id="11" name="Oval 10">
+            <a:extLst xmlns:a="http://schemas.openxmlformats.org/drawingml/2006/main">
+              <a:ext uri="{FF2B5EF4-FFF2-40B4-BE49-F238E27FC236}">
+                <a16:creationId xmlns:a16="http://schemas.microsoft.com/office/drawing/2014/main" id="{0D89008D-BD9F-4D92-87A3-14B386E5BF3C}"/>
+              </a:ext>
+            </a:extLst>
+          </p:cNvPr>
+          <p:cNvSpPr>
+            <a:spLocks xmlns:a="http://schemas.openxmlformats.org/drawingml/2006/main" noGrp="1"/>
+          </p:cNvSpPr>
+          <p:nvPr/>
+        </p:nvSpPr>
+        <p:spPr>
+          <a:xfrm xmlns:a="http://schemas.openxmlformats.org/drawingml/2006/main">
+            <a:off x="1024128" y="3118104"/>
+            <a:ext cx="128016" cy="128016"/>
+          </a:xfrm>
+          <a:prstGeom xmlns:a="http://schemas.openxmlformats.org/drawingml/2006/main" prst="ellipse">
+            <a:avLst/>
+          </a:prstGeom>
+          <a:solidFill xmlns:a="http://schemas.openxmlformats.org/drawingml/2006/main">
+            <a:srgbClr val="9AA9BE"/>
+          </a:solidFill>
+          <a:ln xmlns:a="http://schemas.openxmlformats.org/drawingml/2006/main">
+            <a:noFill/>
+          </a:ln>
+        </p:spPr>
+        <p:style>
+          <a:lnRef xmlns:a="http://schemas.openxmlformats.org/drawingml/2006/main" idx="1">
+            <a:schemeClr val="accent1"/>
+          </a:lnRef>
+          <a:fillRef xmlns:a="http://schemas.openxmlformats.org/drawingml/2006/main" idx="3">
+            <a:schemeClr val="accent1"/>
+          </a:fillRef>
+          <a:effectRef xmlns:a="http://schemas.openxmlformats.org/drawingml/2006/main" idx="2">
+            <a:schemeClr val="accent1"/>
+          </a:effectRef>
+          <a:fontRef xmlns:a="http://schemas.openxmlformats.org/drawingml/2006/main" idx="minor">
+            <a:schemeClr val="lt1"/>
+          </a:fontRef>
+        </p:style>
+        <p:txBody>
+          <a:bodyPr xmlns:a="http://schemas.openxmlformats.org/drawingml/2006/main" anchor="ctr"/>
+          <a:lstStyle xmlns:a="http://schemas.openxmlformats.org/drawingml/2006/main"/>
+          <a:p xmlns:a="http://schemas.openxmlformats.org/drawingml/2006/main">
+            <a:pPr algn="ctr">
+              <a:buNone/>
+            </a:pPr>
+          </a:p>
+        </p:txBody>
+      </p:sp>
+      <p:sp>
+        <p:nvSpPr>
+          <p:cNvPr id="12" name="TextBox 11">
+            <a:extLst xmlns:a="http://schemas.openxmlformats.org/drawingml/2006/main">
+              <a:ext uri="{FF2B5EF4-FFF2-40B4-BE49-F238E27FC236}">
+                <a16:creationId xmlns:a16="http://schemas.microsoft.com/office/drawing/2014/main" id="{F3523B2A-9DBA-402C-A8A3-038E8BD8F628}"/>
+              </a:ext>
+            </a:extLst>
+          </p:cNvPr>
+          <p:cNvSpPr>
+            <a:spLocks xmlns:a="http://schemas.openxmlformats.org/drawingml/2006/main" noGrp="1"/>
+          </p:cNvSpPr>
+          <p:nvPr/>
+        </p:nvSpPr>
+        <p:spPr>
+          <a:xfrm xmlns:a="http://schemas.openxmlformats.org/drawingml/2006/main">
+            <a:off x="1298448" y="2953512"/>
+            <a:ext cx="2926080" cy="274320"/>
+          </a:xfrm>
+          <a:prstGeom xmlns:a="http://schemas.openxmlformats.org/drawingml/2006/main" prst="rect">
+            <a:avLst/>
+          </a:prstGeom>
+          <a:noFill xmlns:a="http://schemas.openxmlformats.org/drawingml/2006/main"/>
+        </p:spPr>
+        <p:txBody>
+          <a:bodyPr xmlns:a="http://schemas.openxmlformats.org/drawingml/2006/main" wrap="square" lIns="0" tIns="0" rIns="0" bIns="0" anchor="t">
+            <a:spAutoFit/>
+          </a:bodyPr>
+          <a:lstStyle xmlns:a="http://schemas.openxmlformats.org/drawingml/2006/main"/>
+          <a:p xmlns:a="http://schemas.openxmlformats.org/drawingml/2006/main">
+            <a:pPr algn="l">
+              <a:buNone/>
+            </a:pPr>
+            <a:r>
+              <a:rPr sz="1300" b="1" i="0">
+                <a:solidFill>
+                  <a:srgbClr val="E8EDF4"/>
+                </a:solidFill>
+                <a:latin typeface="Arial"/>
+                <a:ea typeface="Arial"/>
+                <a:cs typeface="Arial"/>
+              </a:rPr>
+              <a:t>Mandate created</a:t>
+            </a:r>
+          </a:p>
+        </p:txBody>
+      </p:sp>
+      <p:sp>
+        <p:nvSpPr>
+          <p:cNvPr id="13" name="TextBox 12">
+            <a:extLst xmlns:a="http://schemas.openxmlformats.org/drawingml/2006/main">
+              <a:ext uri="{FF2B5EF4-FFF2-40B4-BE49-F238E27FC236}">
+                <a16:creationId xmlns:a16="http://schemas.microsoft.com/office/drawing/2014/main" id="{A8FD5A59-7222-4868-A48F-83D9D4B0A7EC}"/>
+              </a:ext>
+            </a:extLst>
+          </p:cNvPr>
+          <p:cNvSpPr>
+            <a:spLocks xmlns:a="http://schemas.openxmlformats.org/drawingml/2006/main" noGrp="1"/>
+          </p:cNvSpPr>
+          <p:nvPr/>
+        </p:nvSpPr>
+        <p:spPr>
+          <a:xfrm xmlns:a="http://schemas.openxmlformats.org/drawingml/2006/main">
+            <a:off x="1298448" y="3227832"/>
+            <a:ext cx="4572000" cy="237744"/>
+          </a:xfrm>
+          <a:prstGeom xmlns:a="http://schemas.openxmlformats.org/drawingml/2006/main" prst="rect">
+            <a:avLst/>
+          </a:prstGeom>
+          <a:noFill xmlns:a="http://schemas.openxmlformats.org/drawingml/2006/main"/>
+        </p:spPr>
+        <p:txBody>
+          <a:bodyPr xmlns:a="http://schemas.openxmlformats.org/drawingml/2006/main" wrap="square" lIns="0" tIns="0" rIns="0" bIns="0" anchor="t">
+            <a:spAutoFit/>
+          </a:bodyPr>
+          <a:lstStyle xmlns:a="http://schemas.openxmlformats.org/drawingml/2006/main"/>
+          <a:p xmlns:a="http://schemas.openxmlformats.org/drawingml/2006/main">
+            <a:pPr algn="l">
+              <a:buNone/>
+            </a:pPr>
+            <a:r>
+              <a:rPr sz="1050" b="0" i="0">
+                <a:solidFill>
+                  <a:srgbClr val="8A9CB5"/>
+                </a:solidFill>
+                <a:latin typeface="Arial"/>
+                <a:ea typeface="Arial"/>
+                <a:cs typeface="Arial"/>
+              </a:rPr>
+              <a:t>digest recomputed on-chain from 12 signed fields</a:t>
+            </a:r>
+          </a:p>
+        </p:txBody>
+      </p:sp>
+      <p:sp>
+        <p:nvSpPr>
+          <p:cNvPr id="14" name="TextBox 13">
+            <a:extLst xmlns:a="http://schemas.openxmlformats.org/drawingml/2006/main">
+              <a:ext uri="{FF2B5EF4-FFF2-40B4-BE49-F238E27FC236}">
+                <a16:creationId xmlns:a16="http://schemas.microsoft.com/office/drawing/2014/main" id="{5F026A78-ED67-46DE-87DB-2ED2FFEBF425}"/>
+              </a:ext>
+            </a:extLst>
+          </p:cNvPr>
+          <p:cNvSpPr>
+            <a:spLocks xmlns:a="http://schemas.openxmlformats.org/drawingml/2006/main" noGrp="1"/>
+          </p:cNvSpPr>
+          <p:nvPr/>
+        </p:nvSpPr>
+        <p:spPr>
+          <a:xfrm xmlns:a="http://schemas.openxmlformats.org/drawingml/2006/main">
+            <a:off x="5989320" y="3072384"/>
+            <a:ext cx="1600200" cy="274320"/>
+          </a:xfrm>
+          <a:prstGeom xmlns:a="http://schemas.openxmlformats.org/drawingml/2006/main" prst="rect">
+            <a:avLst/>
+          </a:prstGeom>
+          <a:noFill xmlns:a="http://schemas.openxmlformats.org/drawingml/2006/main"/>
+        </p:spPr>
+        <p:txBody>
+          <a:bodyPr xmlns:a="http://schemas.openxmlformats.org/drawingml/2006/main" wrap="square" lIns="0" tIns="0" rIns="0" bIns="0" anchor="t">
+            <a:spAutoFit/>
+          </a:bodyPr>
+          <a:lstStyle xmlns:a="http://schemas.openxmlformats.org/drawingml/2006/main"/>
+          <a:p xmlns:a="http://schemas.openxmlformats.org/drawingml/2006/main">
+            <a:pPr algn="r">
+              <a:buNone/>
+            </a:pPr>
+            <a:r>
+              <a:rPr sz="1150" b="1" i="0">
+                <a:solidFill>
+                  <a:srgbClr val="9AA9BE"/>
+                </a:solidFill>
+                <a:latin typeface="Courier New"/>
+                <a:ea typeface="Courier New"/>
+                <a:cs typeface="Courier New"/>
+              </a:rPr>
+              <a:t>0x6883…1688</a:t>
+            </a:r>
+          </a:p>
+        </p:txBody>
+      </p:sp>
+      <p:sp>
+        <p:nvSpPr>
+          <p:cNvPr id="15" name="Rounded Rectangle 14">
+            <a:extLst xmlns:a="http://schemas.openxmlformats.org/drawingml/2006/main">
+              <a:ext uri="{FF2B5EF4-FFF2-40B4-BE49-F238E27FC236}">
+                <a16:creationId xmlns:a16="http://schemas.microsoft.com/office/drawing/2014/main" id="{C2DAAC75-B15B-4977-9AFC-EDC007A92682}"/>
+              </a:ext>
+            </a:extLst>
+          </p:cNvPr>
+          <p:cNvSpPr>
+            <a:spLocks xmlns:a="http://schemas.openxmlformats.org/drawingml/2006/main" noGrp="1"/>
+          </p:cNvSpPr>
+          <p:nvPr/>
+        </p:nvSpPr>
+        <p:spPr>
+          <a:xfrm xmlns:a="http://schemas.openxmlformats.org/drawingml/2006/main">
+            <a:off x="777240" y="3639312"/>
+            <a:ext cx="6949440" cy="731520"/>
+          </a:xfrm>
+          <a:prstGeom xmlns:a="http://schemas.openxmlformats.org/drawingml/2006/main" prst="roundRect">
+            <a:avLst>
+              <a:gd name="adj" fmla="val 6000"/>
+            </a:avLst>
+          </a:prstGeom>
+          <a:solidFill xmlns:a="http://schemas.openxmlformats.org/drawingml/2006/main">
+            <a:srgbClr val="161E2A"/>
+          </a:solidFill>
+          <a:ln xmlns:a="http://schemas.openxmlformats.org/drawingml/2006/main" w="12700">
+            <a:solidFill>
+              <a:srgbClr val="2A3647"/>
+            </a:solidFill>
+          </a:ln>
+        </p:spPr>
+        <p:style>
+          <a:lnRef xmlns:a="http://schemas.openxmlformats.org/drawingml/2006/main" idx="1">
+            <a:schemeClr val="accent1"/>
+          </a:lnRef>
+          <a:fillRef xmlns:a="http://schemas.openxmlformats.org/drawingml/2006/main" idx="3">
+            <a:schemeClr val="accent1"/>
+          </a:fillRef>
+          <a:effectRef xmlns:a="http://schemas.openxmlformats.org/drawingml/2006/main" idx="2">
+            <a:schemeClr val="accent1"/>
+          </a:effectRef>
+          <a:fontRef xmlns:a="http://schemas.openxmlformats.org/drawingml/2006/main" idx="minor">
+            <a:schemeClr val="lt1"/>
+          </a:fontRef>
+        </p:style>
+        <p:txBody>
+          <a:bodyPr xmlns:a="http://schemas.openxmlformats.org/drawingml/2006/main" anchor="ctr"/>
+          <a:lstStyle xmlns:a="http://schemas.openxmlformats.org/drawingml/2006/main"/>
+          <a:p xmlns:a="http://schemas.openxmlformats.org/drawingml/2006/main">
+            <a:pPr algn="ctr">
+              <a:buNone/>
+            </a:pPr>
+          </a:p>
+        </p:txBody>
+      </p:sp>
+      <p:sp>
+        <p:nvSpPr>
+          <p:cNvPr id="16" name="Oval 15">
+            <a:extLst xmlns:a="http://schemas.openxmlformats.org/drawingml/2006/main">
+              <a:ext uri="{FF2B5EF4-FFF2-40B4-BE49-F238E27FC236}">
+                <a16:creationId xmlns:a16="http://schemas.microsoft.com/office/drawing/2014/main" id="{3949C50F-CA26-4367-8B2D-EA689305339E}"/>
+              </a:ext>
+            </a:extLst>
+          </p:cNvPr>
+          <p:cNvSpPr>
+            <a:spLocks xmlns:a="http://schemas.openxmlformats.org/drawingml/2006/main" noGrp="1"/>
+          </p:cNvSpPr>
+          <p:nvPr/>
+        </p:nvSpPr>
+        <p:spPr>
+          <a:xfrm xmlns:a="http://schemas.openxmlformats.org/drawingml/2006/main">
+            <a:off x="1024128" y="3941063"/>
+            <a:ext cx="128016" cy="128016"/>
+          </a:xfrm>
+          <a:prstGeom xmlns:a="http://schemas.openxmlformats.org/drawingml/2006/main" prst="ellipse">
+            <a:avLst/>
+          </a:prstGeom>
+          <a:solidFill xmlns:a="http://schemas.openxmlformats.org/drawingml/2006/main">
+            <a:srgbClr val="D9FF55"/>
+          </a:solidFill>
+          <a:ln xmlns:a="http://schemas.openxmlformats.org/drawingml/2006/main">
+            <a:noFill/>
+          </a:ln>
+        </p:spPr>
+        <p:style>
+          <a:lnRef xmlns:a="http://schemas.openxmlformats.org/drawingml/2006/main" idx="1">
+            <a:schemeClr val="accent1"/>
+          </a:lnRef>
+          <a:fillRef xmlns:a="http://schemas.openxmlformats.org/drawingml/2006/main" idx="3">
+            <a:schemeClr val="accent1"/>
+          </a:fillRef>
+          <a:effectRef xmlns:a="http://schemas.openxmlformats.org/drawingml/2006/main" idx="2">
+            <a:schemeClr val="accent1"/>
+          </a:effectRef>
+          <a:fontRef xmlns:a="http://schemas.openxmlformats.org/drawingml/2006/main" idx="minor">
+            <a:schemeClr val="lt1"/>
+          </a:fontRef>
+        </p:style>
+        <p:txBody>
+          <a:bodyPr xmlns:a="http://schemas.openxmlformats.org/drawingml/2006/main" anchor="ctr"/>
+          <a:lstStyle xmlns:a="http://schemas.openxmlformats.org/drawingml/2006/main"/>
+          <a:p xmlns:a="http://schemas.openxmlformats.org/drawingml/2006/main">
+            <a:pPr algn="ctr">
+              <a:buNone/>
+            </a:pPr>
+          </a:p>
+        </p:txBody>
+      </p:sp>
+      <p:sp>
+        <p:nvSpPr>
+          <p:cNvPr id="17" name="TextBox 16">
+            <a:extLst xmlns:a="http://schemas.openxmlformats.org/drawingml/2006/main">
+              <a:ext uri="{FF2B5EF4-FFF2-40B4-BE49-F238E27FC236}">
+                <a16:creationId xmlns:a16="http://schemas.microsoft.com/office/drawing/2014/main" id="{0DD12585-CD2E-44D8-850C-2B5166C3A95B}"/>
+              </a:ext>
+            </a:extLst>
+          </p:cNvPr>
+          <p:cNvSpPr>
+            <a:spLocks xmlns:a="http://schemas.openxmlformats.org/drawingml/2006/main" noGrp="1"/>
+          </p:cNvSpPr>
+          <p:nvPr/>
+        </p:nvSpPr>
+        <p:spPr>
+          <a:xfrm xmlns:a="http://schemas.openxmlformats.org/drawingml/2006/main">
+            <a:off x="1298448" y="3776472"/>
+            <a:ext cx="2926080" cy="274320"/>
+          </a:xfrm>
+          <a:prstGeom xmlns:a="http://schemas.openxmlformats.org/drawingml/2006/main" prst="rect">
+            <a:avLst/>
+          </a:prstGeom>
+          <a:noFill xmlns:a="http://schemas.openxmlformats.org/drawingml/2006/main"/>
+        </p:spPr>
+        <p:txBody>
+          <a:bodyPr xmlns:a="http://schemas.openxmlformats.org/drawingml/2006/main" wrap="square" lIns="0" tIns="0" rIns="0" bIns="0" anchor="t">
+            <a:spAutoFit/>
+          </a:bodyPr>
+          <a:lstStyle xmlns:a="http://schemas.openxmlformats.org/drawingml/2006/main"/>
+          <a:p xmlns:a="http://schemas.openxmlformats.org/drawingml/2006/main">
+            <a:pPr algn="l">
+              <a:buNone/>
+            </a:pPr>
+            <a:r>
+              <a:rPr sz="1300" b="1" i="0">
+                <a:solidFill>
+                  <a:srgbClr val="E8EDF4"/>
+                </a:solidFill>
+                <a:latin typeface="Arial"/>
+                <a:ea typeface="Arial"/>
+                <a:cs typeface="Arial"/>
+              </a:rPr>
+              <a:t>$180 sample recorded</a:t>
+            </a:r>
+          </a:p>
+        </p:txBody>
+      </p:sp>
+      <p:sp>
+        <p:nvSpPr>
+          <p:cNvPr id="18" name="TextBox 17">
+            <a:extLst xmlns:a="http://schemas.openxmlformats.org/drawingml/2006/main">
+              <a:ext uri="{FF2B5EF4-FFF2-40B4-BE49-F238E27FC236}">
+                <a16:creationId xmlns:a16="http://schemas.microsoft.com/office/drawing/2014/main" id="{937A5583-A8B9-4DF3-A8CE-099E89AE44E3}"/>
+              </a:ext>
+            </a:extLst>
+          </p:cNvPr>
+          <p:cNvSpPr>
+            <a:spLocks xmlns:a="http://schemas.openxmlformats.org/drawingml/2006/main" noGrp="1"/>
+          </p:cNvSpPr>
+          <p:nvPr/>
+        </p:nvSpPr>
+        <p:spPr>
+          <a:xfrm xmlns:a="http://schemas.openxmlformats.org/drawingml/2006/main">
+            <a:off x="1298448" y="4050791"/>
+            <a:ext cx="4572000" cy="237744"/>
+          </a:xfrm>
+          <a:prstGeom xmlns:a="http://schemas.openxmlformats.org/drawingml/2006/main" prst="rect">
+            <a:avLst/>
+          </a:prstGeom>
+          <a:noFill xmlns:a="http://schemas.openxmlformats.org/drawingml/2006/main"/>
+        </p:spPr>
+        <p:txBody>
+          <a:bodyPr xmlns:a="http://schemas.openxmlformats.org/drawingml/2006/main" wrap="square" lIns="0" tIns="0" rIns="0" bIns="0" anchor="t">
+            <a:spAutoFit/>
+          </a:bodyPr>
+          <a:lstStyle xmlns:a="http://schemas.openxmlformats.org/drawingml/2006/main"/>
+          <a:p xmlns:a="http://schemas.openxmlformats.org/drawingml/2006/main">
+            <a:pPr algn="l">
+              <a:buNone/>
+            </a:pPr>
+            <a:r>
+              <a:rPr sz="1050" b="0" i="0">
+                <a:solidFill>
+                  <a:srgbClr val="8A9CB5"/>
+                </a:solidFill>
+                <a:latin typeface="Arial"/>
+                <a:ea typeface="Arial"/>
+                <a:cs typeface="Arial"/>
+              </a:rPr>
+              <a:t>spent 18000 → remaining 166000</a:t>
+            </a:r>
+          </a:p>
+        </p:txBody>
+      </p:sp>
+      <p:sp>
+        <p:nvSpPr>
+          <p:cNvPr id="19" name="TextBox 18">
+            <a:extLst xmlns:a="http://schemas.openxmlformats.org/drawingml/2006/main">
+              <a:ext uri="{FF2B5EF4-FFF2-40B4-BE49-F238E27FC236}">
+                <a16:creationId xmlns:a16="http://schemas.microsoft.com/office/drawing/2014/main" id="{4D6AA740-33F4-4157-9E44-9F09AAB04CF2}"/>
+              </a:ext>
+            </a:extLst>
+          </p:cNvPr>
+          <p:cNvSpPr>
+            <a:spLocks xmlns:a="http://schemas.openxmlformats.org/drawingml/2006/main" noGrp="1"/>
+          </p:cNvSpPr>
+          <p:nvPr/>
+        </p:nvSpPr>
+        <p:spPr>
+          <a:xfrm xmlns:a="http://schemas.openxmlformats.org/drawingml/2006/main">
+            <a:off x="5989320" y="3895344"/>
+            <a:ext cx="1600200" cy="274320"/>
+          </a:xfrm>
+          <a:prstGeom xmlns:a="http://schemas.openxmlformats.org/drawingml/2006/main" prst="rect">
+            <a:avLst/>
+          </a:prstGeom>
+          <a:noFill xmlns:a="http://schemas.openxmlformats.org/drawingml/2006/main"/>
+        </p:spPr>
+        <p:txBody>
+          <a:bodyPr xmlns:a="http://schemas.openxmlformats.org/drawingml/2006/main" wrap="square" lIns="0" tIns="0" rIns="0" bIns="0" anchor="t">
+            <a:spAutoFit/>
+          </a:bodyPr>
+          <a:lstStyle xmlns:a="http://schemas.openxmlformats.org/drawingml/2006/main"/>
+          <a:p xmlns:a="http://schemas.openxmlformats.org/drawingml/2006/main">
+            <a:pPr algn="r">
+              <a:buNone/>
+            </a:pPr>
+            <a:r>
+              <a:rPr sz="1150" b="1" i="0">
+                <a:solidFill>
+                  <a:srgbClr val="D9FF55"/>
+                </a:solidFill>
+                <a:latin typeface="Courier New"/>
+                <a:ea typeface="Courier New"/>
+                <a:cs typeface="Courier New"/>
+              </a:rPr>
+              <a:t>0xb690…f098</a:t>
+            </a:r>
+          </a:p>
+        </p:txBody>
+      </p:sp>
+      <p:sp>
+        <p:nvSpPr>
+          <p:cNvPr id="20" name="Rounded Rectangle 19">
+            <a:extLst xmlns:a="http://schemas.openxmlformats.org/drawingml/2006/main">
+              <a:ext uri="{FF2B5EF4-FFF2-40B4-BE49-F238E27FC236}">
+                <a16:creationId xmlns:a16="http://schemas.microsoft.com/office/drawing/2014/main" id="{60A4A759-4513-45ED-98A6-9B8B061C44D1}"/>
+              </a:ext>
+            </a:extLst>
+          </p:cNvPr>
+          <p:cNvSpPr>
+            <a:spLocks xmlns:a="http://schemas.openxmlformats.org/drawingml/2006/main" noGrp="1"/>
+          </p:cNvSpPr>
+          <p:nvPr/>
+        </p:nvSpPr>
+        <p:spPr>
+          <a:xfrm xmlns:a="http://schemas.openxmlformats.org/drawingml/2006/main">
+            <a:off x="777240" y="4462272"/>
+            <a:ext cx="6949440" cy="731520"/>
+          </a:xfrm>
+          <a:prstGeom xmlns:a="http://schemas.openxmlformats.org/drawingml/2006/main" prst="roundRect">
+            <a:avLst>
+              <a:gd name="adj" fmla="val 6000"/>
+            </a:avLst>
+          </a:prstGeom>
+          <a:solidFill xmlns:a="http://schemas.openxmlformats.org/drawingml/2006/main">
+            <a:srgbClr val="161E2A"/>
+          </a:solidFill>
+          <a:ln xmlns:a="http://schemas.openxmlformats.org/drawingml/2006/main" w="12700">
+            <a:solidFill>
+              <a:srgbClr val="2A3647"/>
+            </a:solidFill>
+          </a:ln>
+        </p:spPr>
+        <p:style>
+          <a:lnRef xmlns:a="http://schemas.openxmlformats.org/drawingml/2006/main" idx="1">
+            <a:schemeClr val="accent1"/>
+          </a:lnRef>
+          <a:fillRef xmlns:a="http://schemas.openxmlformats.org/drawingml/2006/main" idx="3">
+            <a:schemeClr val="accent1"/>
+          </a:fillRef>
+          <a:effectRef xmlns:a="http://schemas.openxmlformats.org/drawingml/2006/main" idx="2">
+            <a:schemeClr val="accent1"/>
+          </a:effectRef>
+          <a:fontRef xmlns:a="http://schemas.openxmlformats.org/drawingml/2006/main" idx="minor">
+            <a:schemeClr val="lt1"/>
+          </a:fontRef>
+        </p:style>
+        <p:txBody>
+          <a:bodyPr xmlns:a="http://schemas.openxmlformats.org/drawingml/2006/main" anchor="ctr"/>
+          <a:lstStyle xmlns:a="http://schemas.openxmlformats.org/drawingml/2006/main"/>
+          <a:p xmlns:a="http://schemas.openxmlformats.org/drawingml/2006/main">
+            <a:pPr algn="ctr">
+              <a:buNone/>
+            </a:pPr>
+          </a:p>
+        </p:txBody>
+      </p:sp>
+      <p:sp>
+        <p:nvSpPr>
+          <p:cNvPr id="21" name="Oval 20">
+            <a:extLst xmlns:a="http://schemas.openxmlformats.org/drawingml/2006/main">
+              <a:ext uri="{FF2B5EF4-FFF2-40B4-BE49-F238E27FC236}">
+                <a16:creationId xmlns:a16="http://schemas.microsoft.com/office/drawing/2014/main" id="{F9C28C3A-ECD8-4915-BA71-6A998455E017}"/>
+              </a:ext>
+            </a:extLst>
+          </p:cNvPr>
+          <p:cNvSpPr>
+            <a:spLocks xmlns:a="http://schemas.openxmlformats.org/drawingml/2006/main" noGrp="1"/>
+          </p:cNvSpPr>
+          <p:nvPr/>
+        </p:nvSpPr>
+        <p:spPr>
+          <a:xfrm xmlns:a="http://schemas.openxmlformats.org/drawingml/2006/main">
+            <a:off x="1024128" y="4764024"/>
+            <a:ext cx="128016" cy="128016"/>
+          </a:xfrm>
+          <a:prstGeom xmlns:a="http://schemas.openxmlformats.org/drawingml/2006/main" prst="ellipse">
+            <a:avLst/>
+          </a:prstGeom>
+          <a:solidFill xmlns:a="http://schemas.openxmlformats.org/drawingml/2006/main">
+            <a:srgbClr val="FB7185"/>
+          </a:solidFill>
+          <a:ln xmlns:a="http://schemas.openxmlformats.org/drawingml/2006/main">
+            <a:noFill/>
+          </a:ln>
+        </p:spPr>
+        <p:style>
+          <a:lnRef xmlns:a="http://schemas.openxmlformats.org/drawingml/2006/main" idx="1">
+            <a:schemeClr val="accent1"/>
+          </a:lnRef>
+          <a:fillRef xmlns:a="http://schemas.openxmlformats.org/drawingml/2006/main" idx="3">
+            <a:schemeClr val="accent1"/>
+          </a:fillRef>
+          <a:effectRef xmlns:a="http://schemas.openxmlformats.org/drawingml/2006/main" idx="2">
+            <a:schemeClr val="accent1"/>
+          </a:effectRef>
+          <a:fontRef xmlns:a="http://schemas.openxmlformats.org/drawingml/2006/main" idx="minor">
+            <a:schemeClr val="lt1"/>
+          </a:fontRef>
+        </p:style>
+        <p:txBody>
+          <a:bodyPr xmlns:a="http://schemas.openxmlformats.org/drawingml/2006/main" anchor="ctr"/>
+          <a:lstStyle xmlns:a="http://schemas.openxmlformats.org/drawingml/2006/main"/>
+          <a:p xmlns:a="http://schemas.openxmlformats.org/drawingml/2006/main">
+            <a:pPr algn="ctr">
+              <a:buNone/>
+            </a:pPr>
+          </a:p>
+        </p:txBody>
+      </p:sp>
+      <p:sp>
+        <p:nvSpPr>
+          <p:cNvPr id="22" name="TextBox 21">
+            <a:extLst xmlns:a="http://schemas.openxmlformats.org/drawingml/2006/main">
+              <a:ext uri="{FF2B5EF4-FFF2-40B4-BE49-F238E27FC236}">
+                <a16:creationId xmlns:a16="http://schemas.microsoft.com/office/drawing/2014/main" id="{693AC740-305E-4847-8B06-5D4C4A84E6D1}"/>
+              </a:ext>
+            </a:extLst>
+          </p:cNvPr>
+          <p:cNvSpPr>
+            <a:spLocks xmlns:a="http://schemas.openxmlformats.org/drawingml/2006/main" noGrp="1"/>
+          </p:cNvSpPr>
+          <p:nvPr/>
+        </p:nvSpPr>
+        <p:spPr>
+          <a:xfrm xmlns:a="http://schemas.openxmlformats.org/drawingml/2006/main">
+            <a:off x="1298448" y="4599432"/>
+            <a:ext cx="2926080" cy="274320"/>
+          </a:xfrm>
+          <a:prstGeom xmlns:a="http://schemas.openxmlformats.org/drawingml/2006/main" prst="rect">
+            <a:avLst/>
+          </a:prstGeom>
+          <a:noFill xmlns:a="http://schemas.openxmlformats.org/drawingml/2006/main"/>
+        </p:spPr>
+        <p:txBody>
+          <a:bodyPr xmlns:a="http://schemas.openxmlformats.org/drawingml/2006/main" wrap="square" lIns="0" tIns="0" rIns="0" bIns="0" anchor="t">
+            <a:spAutoFit/>
+          </a:bodyPr>
+          <a:lstStyle xmlns:a="http://schemas.openxmlformats.org/drawingml/2006/main"/>
+          <a:p xmlns:a="http://schemas.openxmlformats.org/drawingml/2006/main">
+            <a:pPr algn="l">
+              <a:buNone/>
+            </a:pPr>
+            <a:r>
+              <a:rPr sz="1300" b="1" i="0">
+                <a:solidFill>
+                  <a:srgbClr val="E8EDF4"/>
+                </a:solidFill>
+                <a:latin typeface="Arial"/>
+                <a:ea typeface="Arial"/>
+                <a:cs typeface="Arial"/>
+              </a:rPr>
+              <a:t>Mandate revoked</a:t>
+            </a:r>
+          </a:p>
+        </p:txBody>
+      </p:sp>
+      <p:sp>
+        <p:nvSpPr>
+          <p:cNvPr id="23" name="TextBox 22">
+            <a:extLst xmlns:a="http://schemas.openxmlformats.org/drawingml/2006/main">
+              <a:ext uri="{FF2B5EF4-FFF2-40B4-BE49-F238E27FC236}">
+                <a16:creationId xmlns:a16="http://schemas.microsoft.com/office/drawing/2014/main" id="{CF9F3407-851F-4AA3-8596-F1CA8EE99D11}"/>
+              </a:ext>
+            </a:extLst>
+          </p:cNvPr>
+          <p:cNvSpPr>
+            <a:spLocks xmlns:a="http://schemas.openxmlformats.org/drawingml/2006/main" noGrp="1"/>
+          </p:cNvSpPr>
+          <p:nvPr/>
+        </p:nvSpPr>
+        <p:spPr>
+          <a:xfrm xmlns:a="http://schemas.openxmlformats.org/drawingml/2006/main">
+            <a:off x="1298448" y="4873752"/>
+            <a:ext cx="4572000" cy="237744"/>
+          </a:xfrm>
+          <a:prstGeom xmlns:a="http://schemas.openxmlformats.org/drawingml/2006/main" prst="rect">
+            <a:avLst/>
+          </a:prstGeom>
+          <a:noFill xmlns:a="http://schemas.openxmlformats.org/drawingml/2006/main"/>
+        </p:spPr>
+        <p:txBody>
+          <a:bodyPr xmlns:a="http://schemas.openxmlformats.org/drawingml/2006/main" wrap="square" lIns="0" tIns="0" rIns="0" bIns="0" anchor="t">
+            <a:spAutoFit/>
+          </a:bodyPr>
+          <a:lstStyle xmlns:a="http://schemas.openxmlformats.org/drawingml/2006/main"/>
+          <a:p xmlns:a="http://schemas.openxmlformats.org/drawingml/2006/main">
+            <a:pPr algn="l">
+              <a:buNone/>
+            </a:pPr>
+            <a:r>
+              <a:rPr sz="1050" b="0" i="0">
+                <a:solidFill>
+                  <a:srgbClr val="8A9CB5"/>
+                </a:solidFill>
+                <a:latin typeface="Arial"/>
+                <a:ea typeface="Arial"/>
+                <a:cs typeface="Arial"/>
+              </a:rPr>
+              <a:t>every later payment reverts Revoked</a:t>
+            </a:r>
+          </a:p>
+        </p:txBody>
+      </p:sp>
+      <p:sp>
+        <p:nvSpPr>
+          <p:cNvPr id="24" name="TextBox 23">
+            <a:extLst xmlns:a="http://schemas.openxmlformats.org/drawingml/2006/main">
+              <a:ext uri="{FF2B5EF4-FFF2-40B4-BE49-F238E27FC236}">
+                <a16:creationId xmlns:a16="http://schemas.microsoft.com/office/drawing/2014/main" id="{318816DE-0628-4A30-BA85-C0B5E11E2A03}"/>
+              </a:ext>
+            </a:extLst>
+          </p:cNvPr>
+          <p:cNvSpPr>
+            <a:spLocks xmlns:a="http://schemas.openxmlformats.org/drawingml/2006/main" noGrp="1"/>
+          </p:cNvSpPr>
+          <p:nvPr/>
+        </p:nvSpPr>
+        <p:spPr>
+          <a:xfrm xmlns:a="http://schemas.openxmlformats.org/drawingml/2006/main">
+            <a:off x="5989320" y="4718304"/>
+            <a:ext cx="1600200" cy="274320"/>
+          </a:xfrm>
+          <a:prstGeom xmlns:a="http://schemas.openxmlformats.org/drawingml/2006/main" prst="rect">
+            <a:avLst/>
+          </a:prstGeom>
+          <a:noFill xmlns:a="http://schemas.openxmlformats.org/drawingml/2006/main"/>
+        </p:spPr>
+        <p:txBody>
+          <a:bodyPr xmlns:a="http://schemas.openxmlformats.org/drawingml/2006/main" wrap="square" lIns="0" tIns="0" rIns="0" bIns="0" anchor="t">
+            <a:spAutoFit/>
+          </a:bodyPr>
+          <a:lstStyle xmlns:a="http://schemas.openxmlformats.org/drawingml/2006/main"/>
+          <a:p xmlns:a="http://schemas.openxmlformats.org/drawingml/2006/main">
+            <a:pPr algn="r">
+              <a:buNone/>
+            </a:pPr>
+            <a:r>
+              <a:rPr sz="1150" b="1" i="0">
+                <a:solidFill>
+                  <a:srgbClr val="FB7185"/>
+                </a:solidFill>
+                <a:latin typeface="Courier New"/>
+                <a:ea typeface="Courier New"/>
+                <a:cs typeface="Courier New"/>
+              </a:rPr>
+              <a:t>0x48b5…3ded</a:t>
+            </a:r>
+          </a:p>
+        </p:txBody>
+      </p:sp>
+      <p:sp>
+        <p:nvSpPr>
+          <p:cNvPr id="25" name="Rounded Rectangle 24">
+            <a:extLst xmlns:a="http://schemas.openxmlformats.org/drawingml/2006/main">
+              <a:ext uri="{FF2B5EF4-FFF2-40B4-BE49-F238E27FC236}">
+                <a16:creationId xmlns:a16="http://schemas.microsoft.com/office/drawing/2014/main" id="{A1E58990-A693-4F9F-89E8-57235622129D}"/>
+              </a:ext>
+            </a:extLst>
+          </p:cNvPr>
+          <p:cNvSpPr>
+            <a:spLocks xmlns:a="http://schemas.openxmlformats.org/drawingml/2006/main" noGrp="1"/>
+          </p:cNvSpPr>
+          <p:nvPr/>
+        </p:nvSpPr>
+        <p:spPr>
+          <a:xfrm xmlns:a="http://schemas.openxmlformats.org/drawingml/2006/main">
+            <a:off x="8001000" y="1993392"/>
+            <a:ext cx="2880360" cy="841248"/>
+          </a:xfrm>
+          <a:prstGeom xmlns:a="http://schemas.openxmlformats.org/drawingml/2006/main" prst="roundRect">
+            <a:avLst>
+              <a:gd name="adj" fmla="val 6000"/>
+            </a:avLst>
+          </a:prstGeom>
+          <a:solidFill xmlns:a="http://schemas.openxmlformats.org/drawingml/2006/main">
+            <a:srgbClr val="161E2A"/>
+          </a:solidFill>
+          <a:ln xmlns:a="http://schemas.openxmlformats.org/drawingml/2006/main" w="12700">
+            <a:solidFill>
+              <a:srgbClr val="2A3647"/>
+            </a:solidFill>
+          </a:ln>
+        </p:spPr>
+        <p:style>
+          <a:lnRef xmlns:a="http://schemas.openxmlformats.org/drawingml/2006/main" idx="1">
+            <a:schemeClr val="accent1"/>
+          </a:lnRef>
+          <a:fillRef xmlns:a="http://schemas.openxmlformats.org/drawingml/2006/main" idx="3">
+            <a:schemeClr val="accent1"/>
+          </a:fillRef>
+          <a:effectRef xmlns:a="http://schemas.openxmlformats.org/drawingml/2006/main" idx="2">
+            <a:schemeClr val="accent1"/>
+          </a:effectRef>
+          <a:fontRef xmlns:a="http://schemas.openxmlformats.org/drawingml/2006/main" idx="minor">
+            <a:schemeClr val="lt1"/>
+          </a:fontRef>
+        </p:style>
+        <p:txBody>
+          <a:bodyPr xmlns:a="http://schemas.openxmlformats.org/drawingml/2006/main" anchor="ctr"/>
+          <a:lstStyle xmlns:a="http://schemas.openxmlformats.org/drawingml/2006/main"/>
+          <a:p xmlns:a="http://schemas.openxmlformats.org/drawingml/2006/main">
+            <a:pPr algn="ctr">
+              <a:buNone/>
+            </a:pPr>
+          </a:p>
+        </p:txBody>
+      </p:sp>
+      <p:sp>
+        <p:nvSpPr>
+          <p:cNvPr id="26" name="TextBox 25">
+            <a:extLst xmlns:a="http://schemas.openxmlformats.org/drawingml/2006/main">
+              <a:ext uri="{FF2B5EF4-FFF2-40B4-BE49-F238E27FC236}">
+                <a16:creationId xmlns:a16="http://schemas.microsoft.com/office/drawing/2014/main" id="{D7BACB15-440B-4160-8C9F-58A32941C2D2}"/>
+              </a:ext>
+            </a:extLst>
+          </p:cNvPr>
+          <p:cNvSpPr>
+            <a:spLocks xmlns:a="http://schemas.openxmlformats.org/drawingml/2006/main" noGrp="1"/>
+          </p:cNvSpPr>
+          <p:nvPr/>
+        </p:nvSpPr>
+        <p:spPr>
+          <a:xfrm xmlns:a="http://schemas.openxmlformats.org/drawingml/2006/main">
+            <a:off x="8275320" y="2093976"/>
+            <a:ext cx="1005840" cy="457200"/>
+          </a:xfrm>
+          <a:prstGeom xmlns:a="http://schemas.openxmlformats.org/drawingml/2006/main" prst="rect">
+            <a:avLst/>
+          </a:prstGeom>
+          <a:noFill xmlns:a="http://schemas.openxmlformats.org/drawingml/2006/main"/>
+        </p:spPr>
+        <p:txBody>
+          <a:bodyPr xmlns:a="http://schemas.openxmlformats.org/drawingml/2006/main" wrap="square" lIns="0" tIns="0" rIns="0" bIns="0" anchor="t">
+            <a:spAutoFit/>
+          </a:bodyPr>
+          <a:lstStyle xmlns:a="http://schemas.openxmlformats.org/drawingml/2006/main"/>
+          <a:p xmlns:a="http://schemas.openxmlformats.org/drawingml/2006/main">
+            <a:pPr algn="l">
+              <a:buNone/>
+            </a:pPr>
+            <a:r>
+              <a:rPr sz="3000" b="1" i="0">
+                <a:solidFill>
+                  <a:srgbClr val="D9FF55"/>
+                </a:solidFill>
+                <a:latin typeface="Arial"/>
+                <a:ea typeface="Arial"/>
+                <a:cs typeface="Arial"/>
+              </a:rPr>
+              <a:t>208</a:t>
+            </a:r>
+          </a:p>
+        </p:txBody>
+      </p:sp>
+      <p:sp>
+        <p:nvSpPr>
+          <p:cNvPr id="27" name="TextBox 26">
+            <a:extLst xmlns:a="http://schemas.openxmlformats.org/drawingml/2006/main">
+              <a:ext uri="{FF2B5EF4-FFF2-40B4-BE49-F238E27FC236}">
+                <a16:creationId xmlns:a16="http://schemas.microsoft.com/office/drawing/2014/main" id="{34706040-0176-492D-996C-9908C39CDFD8}"/>
+              </a:ext>
+            </a:extLst>
+          </p:cNvPr>
+          <p:cNvSpPr>
+            <a:spLocks xmlns:a="http://schemas.openxmlformats.org/drawingml/2006/main" noGrp="1"/>
+          </p:cNvSpPr>
+          <p:nvPr/>
+        </p:nvSpPr>
+        <p:spPr>
+          <a:xfrm xmlns:a="http://schemas.openxmlformats.org/drawingml/2006/main">
+            <a:off x="9235440" y="2267712"/>
+            <a:ext cx="1554480" cy="411480"/>
+          </a:xfrm>
+          <a:prstGeom xmlns:a="http://schemas.openxmlformats.org/drawingml/2006/main" prst="rect">
+            <a:avLst/>
+          </a:prstGeom>
+          <a:noFill xmlns:a="http://schemas.openxmlformats.org/drawingml/2006/main"/>
+        </p:spPr>
+        <p:txBody>
+          <a:bodyPr xmlns:a="http://schemas.openxmlformats.org/drawingml/2006/main" wrap="square" lIns="0" tIns="0" rIns="0" bIns="0" anchor="t">
+            <a:spAutoFit/>
+          </a:bodyPr>
+          <a:lstStyle xmlns:a="http://schemas.openxmlformats.org/drawingml/2006/main"/>
+          <a:p xmlns:a="http://schemas.openxmlformats.org/drawingml/2006/main">
+            <a:pPr algn="l">
+              <a:buNone/>
+            </a:pPr>
+            <a:r>
+              <a:rPr sz="1100" b="0" i="0">
+                <a:solidFill>
+                  <a:srgbClr val="9AA9BE"/>
+                </a:solidFill>
+                <a:latin typeface="Arial"/>
+                <a:ea typeface="Arial"/>
+                <a:cs typeface="Arial"/>
+              </a:rPr>
+              <a:t>tests passing</a:t>
+            </a:r>
+          </a:p>
+        </p:txBody>
+      </p:sp>
+      <p:sp>
+        <p:nvSpPr>
+          <p:cNvPr id="28" name="Rounded Rectangle 27">
+            <a:extLst xmlns:a="http://schemas.openxmlformats.org/drawingml/2006/main">
+              <a:ext uri="{FF2B5EF4-FFF2-40B4-BE49-F238E27FC236}">
+                <a16:creationId xmlns:a16="http://schemas.microsoft.com/office/drawing/2014/main" id="{30B9E128-521C-4034-8342-2D8563F6B7C5}"/>
+              </a:ext>
+            </a:extLst>
+          </p:cNvPr>
+          <p:cNvSpPr>
+            <a:spLocks xmlns:a="http://schemas.openxmlformats.org/drawingml/2006/main" noGrp="1"/>
+          </p:cNvSpPr>
+          <p:nvPr/>
+        </p:nvSpPr>
+        <p:spPr>
+          <a:xfrm xmlns:a="http://schemas.openxmlformats.org/drawingml/2006/main">
+            <a:off x="8001000" y="3017520"/>
+            <a:ext cx="2880360" cy="841248"/>
+          </a:xfrm>
+          <a:prstGeom xmlns:a="http://schemas.openxmlformats.org/drawingml/2006/main" prst="roundRect">
+            <a:avLst>
+              <a:gd name="adj" fmla="val 6000"/>
+            </a:avLst>
+          </a:prstGeom>
+          <a:solidFill xmlns:a="http://schemas.openxmlformats.org/drawingml/2006/main">
+            <a:srgbClr val="161E2A"/>
+          </a:solidFill>
+          <a:ln xmlns:a="http://schemas.openxmlformats.org/drawingml/2006/main" w="12700">
+            <a:solidFill>
+              <a:srgbClr val="2A3647"/>
+            </a:solidFill>
+          </a:ln>
+        </p:spPr>
+        <p:style>
+          <a:lnRef xmlns:a="http://schemas.openxmlformats.org/drawingml/2006/main" idx="1">
+            <a:schemeClr val="accent1"/>
+          </a:lnRef>
+          <a:fillRef xmlns:a="http://schemas.openxmlformats.org/drawingml/2006/main" idx="3">
+            <a:schemeClr val="accent1"/>
+          </a:fillRef>
+          <a:effectRef xmlns:a="http://schemas.openxmlformats.org/drawingml/2006/main" idx="2">
+            <a:schemeClr val="accent1"/>
+          </a:effectRef>
+          <a:fontRef xmlns:a="http://schemas.openxmlformats.org/drawingml/2006/main" idx="minor">
+            <a:schemeClr val="lt1"/>
+          </a:fontRef>
+        </p:style>
+        <p:txBody>
+          <a:bodyPr xmlns:a="http://schemas.openxmlformats.org/drawingml/2006/main" anchor="ctr"/>
+          <a:lstStyle xmlns:a="http://schemas.openxmlformats.org/drawingml/2006/main"/>
+          <a:p xmlns:a="http://schemas.openxmlformats.org/drawingml/2006/main">
+            <a:pPr algn="ctr">
+              <a:buNone/>
+            </a:pPr>
+          </a:p>
+        </p:txBody>
+      </p:sp>
+      <p:sp>
+        <p:nvSpPr>
+          <p:cNvPr id="29" name="TextBox 28">
+            <a:extLst xmlns:a="http://schemas.openxmlformats.org/drawingml/2006/main">
+              <a:ext uri="{FF2B5EF4-FFF2-40B4-BE49-F238E27FC236}">
+                <a16:creationId xmlns:a16="http://schemas.microsoft.com/office/drawing/2014/main" id="{BCC16B7D-6CB7-42A0-93F4-8427E43BCE20}"/>
+              </a:ext>
+            </a:extLst>
+          </p:cNvPr>
+          <p:cNvSpPr>
+            <a:spLocks xmlns:a="http://schemas.openxmlformats.org/drawingml/2006/main" noGrp="1"/>
+          </p:cNvSpPr>
+          <p:nvPr/>
+        </p:nvSpPr>
+        <p:spPr>
+          <a:xfrm xmlns:a="http://schemas.openxmlformats.org/drawingml/2006/main">
+            <a:off x="8275320" y="3118104"/>
+            <a:ext cx="1005840" cy="457200"/>
+          </a:xfrm>
+          <a:prstGeom xmlns:a="http://schemas.openxmlformats.org/drawingml/2006/main" prst="rect">
+            <a:avLst/>
+          </a:prstGeom>
+          <a:noFill xmlns:a="http://schemas.openxmlformats.org/drawingml/2006/main"/>
+        </p:spPr>
+        <p:txBody>
+          <a:bodyPr xmlns:a="http://schemas.openxmlformats.org/drawingml/2006/main" wrap="square" lIns="0" tIns="0" rIns="0" bIns="0" anchor="t">
+            <a:spAutoFit/>
+          </a:bodyPr>
+          <a:lstStyle xmlns:a="http://schemas.openxmlformats.org/drawingml/2006/main"/>
+          <a:p xmlns:a="http://schemas.openxmlformats.org/drawingml/2006/main">
+            <a:pPr algn="l">
+              <a:buNone/>
+            </a:pPr>
+            <a:r>
+              <a:rPr sz="3000" b="1" i="0">
+                <a:solidFill>
+                  <a:srgbClr val="E8EDF4"/>
+                </a:solidFill>
+                <a:latin typeface="Arial"/>
+                <a:ea typeface="Arial"/>
+                <a:cs typeface="Arial"/>
+              </a:rPr>
+              <a:t>24</a:t>
+            </a:r>
+          </a:p>
+        </p:txBody>
+      </p:sp>
+      <p:sp>
+        <p:nvSpPr>
+          <p:cNvPr id="30" name="TextBox 29">
+            <a:extLst xmlns:a="http://schemas.openxmlformats.org/drawingml/2006/main">
+              <a:ext uri="{FF2B5EF4-FFF2-40B4-BE49-F238E27FC236}">
+                <a16:creationId xmlns:a16="http://schemas.microsoft.com/office/drawing/2014/main" id="{C7B61565-B945-456F-B046-9A5DF91D65AA}"/>
+              </a:ext>
+            </a:extLst>
+          </p:cNvPr>
+          <p:cNvSpPr>
+            <a:spLocks xmlns:a="http://schemas.openxmlformats.org/drawingml/2006/main" noGrp="1"/>
+          </p:cNvSpPr>
+          <p:nvPr/>
+        </p:nvSpPr>
+        <p:spPr>
+          <a:xfrm xmlns:a="http://schemas.openxmlformats.org/drawingml/2006/main">
+            <a:off x="9235440" y="3291840"/>
+            <a:ext cx="1554480" cy="411480"/>
+          </a:xfrm>
+          <a:prstGeom xmlns:a="http://schemas.openxmlformats.org/drawingml/2006/main" prst="rect">
+            <a:avLst/>
+          </a:prstGeom>
+          <a:noFill xmlns:a="http://schemas.openxmlformats.org/drawingml/2006/main"/>
+        </p:spPr>
+        <p:txBody>
+          <a:bodyPr xmlns:a="http://schemas.openxmlformats.org/drawingml/2006/main" wrap="square" lIns="0" tIns="0" rIns="0" bIns="0" anchor="t">
+            <a:spAutoFit/>
+          </a:bodyPr>
+          <a:lstStyle xmlns:a="http://schemas.openxmlformats.org/drawingml/2006/main"/>
+          <a:p xmlns:a="http://schemas.openxmlformats.org/drawingml/2006/main">
+            <a:pPr algn="l">
+              <a:buNone/>
+            </a:pPr>
+            <a:r>
+              <a:rPr sz="1100" b="0" i="0">
+                <a:solidFill>
+                  <a:srgbClr val="9AA9BE"/>
+                </a:solidFill>
+                <a:latin typeface="Arial"/>
+                <a:ea typeface="Arial"/>
+                <a:cs typeface="Arial"/>
+              </a:rPr>
+              <a:t>Foundry contract tests</a:t>
+            </a:r>
+          </a:p>
+        </p:txBody>
+      </p:sp>
+      <p:sp>
+        <p:nvSpPr>
+          <p:cNvPr id="31" name="Rounded Rectangle 30">
+            <a:extLst xmlns:a="http://schemas.openxmlformats.org/drawingml/2006/main">
+              <a:ext uri="{FF2B5EF4-FFF2-40B4-BE49-F238E27FC236}">
+                <a16:creationId xmlns:a16="http://schemas.microsoft.com/office/drawing/2014/main" id="{9E739526-14DC-43FA-AAA1-F62DF31796B8}"/>
+              </a:ext>
+            </a:extLst>
+          </p:cNvPr>
+          <p:cNvSpPr>
+            <a:spLocks xmlns:a="http://schemas.openxmlformats.org/drawingml/2006/main" noGrp="1"/>
+          </p:cNvSpPr>
+          <p:nvPr/>
+        </p:nvSpPr>
+        <p:spPr>
+          <a:xfrm xmlns:a="http://schemas.openxmlformats.org/drawingml/2006/main">
+            <a:off x="8001000" y="4041648"/>
+            <a:ext cx="2880360" cy="841248"/>
+          </a:xfrm>
+          <a:prstGeom xmlns:a="http://schemas.openxmlformats.org/drawingml/2006/main" prst="roundRect">
+            <a:avLst>
+              <a:gd name="adj" fmla="val 6000"/>
+            </a:avLst>
+          </a:prstGeom>
+          <a:solidFill xmlns:a="http://schemas.openxmlformats.org/drawingml/2006/main">
+            <a:srgbClr val="161E2A"/>
+          </a:solidFill>
+          <a:ln xmlns:a="http://schemas.openxmlformats.org/drawingml/2006/main" w="12700">
+            <a:solidFill>
+              <a:srgbClr val="2A3647"/>
+            </a:solidFill>
+          </a:ln>
+        </p:spPr>
+        <p:style>
+          <a:lnRef xmlns:a="http://schemas.openxmlformats.org/drawingml/2006/main" idx="1">
+            <a:schemeClr val="accent1"/>
+          </a:lnRef>
+          <a:fillRef xmlns:a="http://schemas.openxmlformats.org/drawingml/2006/main" idx="3">
+            <a:schemeClr val="accent1"/>
+          </a:fillRef>
+          <a:effectRef xmlns:a="http://schemas.openxmlformats.org/drawingml/2006/main" idx="2">
+            <a:schemeClr val="accent1"/>
+          </a:effectRef>
+          <a:fontRef xmlns:a="http://schemas.openxmlformats.org/drawingml/2006/main" idx="minor">
+            <a:schemeClr val="lt1"/>
+          </a:fontRef>
+        </p:style>
+        <p:txBody>
+          <a:bodyPr xmlns:a="http://schemas.openxmlformats.org/drawingml/2006/main" anchor="ctr"/>
+          <a:lstStyle xmlns:a="http://schemas.openxmlformats.org/drawingml/2006/main"/>
+          <a:p xmlns:a="http://schemas.openxmlformats.org/drawingml/2006/main">
+            <a:pPr algn="ctr">
+              <a:buNone/>
+            </a:pPr>
+          </a:p>
+        </p:txBody>
+      </p:sp>
+      <p:sp>
+        <p:nvSpPr>
+          <p:cNvPr id="32" name="TextBox 31">
+            <a:extLst xmlns:a="http://schemas.openxmlformats.org/drawingml/2006/main">
+              <a:ext uri="{FF2B5EF4-FFF2-40B4-BE49-F238E27FC236}">
+                <a16:creationId xmlns:a16="http://schemas.microsoft.com/office/drawing/2014/main" id="{E739D60B-DF7B-4996-9D10-8CD8F8B2359C}"/>
+              </a:ext>
+            </a:extLst>
+          </p:cNvPr>
+          <p:cNvSpPr>
+            <a:spLocks xmlns:a="http://schemas.openxmlformats.org/drawingml/2006/main" noGrp="1"/>
+          </p:cNvSpPr>
+          <p:nvPr/>
+        </p:nvSpPr>
+        <p:spPr>
+          <a:xfrm xmlns:a="http://schemas.openxmlformats.org/drawingml/2006/main">
+            <a:off x="8275320" y="4142232"/>
+            <a:ext cx="1005840" cy="457200"/>
+          </a:xfrm>
+          <a:prstGeom xmlns:a="http://schemas.openxmlformats.org/drawingml/2006/main" prst="rect">
+            <a:avLst/>
+          </a:prstGeom>
+          <a:noFill xmlns:a="http://schemas.openxmlformats.org/drawingml/2006/main"/>
+        </p:spPr>
+        <p:txBody>
+          <a:bodyPr xmlns:a="http://schemas.openxmlformats.org/drawingml/2006/main" wrap="square" lIns="0" tIns="0" rIns="0" bIns="0" anchor="t">
+            <a:spAutoFit/>
+          </a:bodyPr>
+          <a:lstStyle xmlns:a="http://schemas.openxmlformats.org/drawingml/2006/main"/>
+          <a:p xmlns:a="http://schemas.openxmlformats.org/drawingml/2006/main">
+            <a:pPr algn="l">
+              <a:buNone/>
+            </a:pPr>
+            <a:r>
+              <a:rPr sz="3000" b="1" i="0">
+                <a:solidFill>
+                  <a:srgbClr val="4ADE80"/>
+                </a:solidFill>
+                <a:latin typeface="Arial"/>
+                <a:ea typeface="Arial"/>
+                <a:cs typeface="Arial"/>
+              </a:rPr>
+              <a:t>0</a:t>
+            </a:r>
+          </a:p>
+        </p:txBody>
+      </p:sp>
+      <p:sp>
+        <p:nvSpPr>
+          <p:cNvPr id="33" name="TextBox 32">
+            <a:extLst xmlns:a="http://schemas.openxmlformats.org/drawingml/2006/main">
+              <a:ext uri="{FF2B5EF4-FFF2-40B4-BE49-F238E27FC236}">
+                <a16:creationId xmlns:a16="http://schemas.microsoft.com/office/drawing/2014/main" id="{0FF99210-A1C0-4B35-9E58-D83DDAF86A6D}"/>
+              </a:ext>
+            </a:extLst>
+          </p:cNvPr>
+          <p:cNvSpPr>
+            <a:spLocks xmlns:a="http://schemas.openxmlformats.org/drawingml/2006/main" noGrp="1"/>
+          </p:cNvSpPr>
+          <p:nvPr/>
+        </p:nvSpPr>
+        <p:spPr>
+          <a:xfrm xmlns:a="http://schemas.openxmlformats.org/drawingml/2006/main">
+            <a:off x="9235440" y="4315968"/>
+            <a:ext cx="1554480" cy="411480"/>
+          </a:xfrm>
+          <a:prstGeom xmlns:a="http://schemas.openxmlformats.org/drawingml/2006/main" prst="rect">
+            <a:avLst/>
+          </a:prstGeom>
+          <a:noFill xmlns:a="http://schemas.openxmlformats.org/drawingml/2006/main"/>
+        </p:spPr>
+        <p:txBody>
+          <a:bodyPr xmlns:a="http://schemas.openxmlformats.org/drawingml/2006/main" wrap="square" lIns="0" tIns="0" rIns="0" bIns="0" anchor="t">
+            <a:spAutoFit/>
+          </a:bodyPr>
+          <a:lstStyle xmlns:a="http://schemas.openxmlformats.org/drawingml/2006/main"/>
+          <a:p xmlns:a="http://schemas.openxmlformats.org/drawingml/2006/main">
+            <a:pPr algn="l">
+              <a:buNone/>
+            </a:pPr>
+            <a:r>
+              <a:rPr sz="1100" b="0" i="0">
+                <a:solidFill>
+                  <a:srgbClr val="9AA9BE"/>
+                </a:solidFill>
+                <a:latin typeface="Arial"/>
+                <a:ea typeface="Arial"/>
+                <a:cs typeface="Arial"/>
+              </a:rPr>
+              <a:t>processor calls when blocked</a:t>
+            </a:r>
+          </a:p>
+        </p:txBody>
+      </p:sp>
+      <p:sp>
+        <p:nvSpPr>
+          <p:cNvPr id="34" name="Rounded Rectangle 33">
+            <a:extLst xmlns:a="http://schemas.openxmlformats.org/drawingml/2006/main">
+              <a:ext uri="{FF2B5EF4-FFF2-40B4-BE49-F238E27FC236}">
+                <a16:creationId xmlns:a16="http://schemas.microsoft.com/office/drawing/2014/main" id="{AC97D035-9579-416E-A5C0-DC60C0C9E172}"/>
+              </a:ext>
+            </a:extLst>
+          </p:cNvPr>
+          <p:cNvSpPr>
+            <a:spLocks xmlns:a="http://schemas.openxmlformats.org/drawingml/2006/main" noGrp="1"/>
+          </p:cNvSpPr>
+          <p:nvPr/>
+        </p:nvSpPr>
+        <p:spPr>
+          <a:xfrm xmlns:a="http://schemas.openxmlformats.org/drawingml/2006/main">
+            <a:off x="8001000" y="5065776"/>
+            <a:ext cx="2880360" cy="658368"/>
+          </a:xfrm>
+          <a:prstGeom xmlns:a="http://schemas.openxmlformats.org/drawingml/2006/main" prst="roundRect">
+            <a:avLst>
+              <a:gd name="adj" fmla="val 6000"/>
+            </a:avLst>
+          </a:prstGeom>
+          <a:solidFill xmlns:a="http://schemas.openxmlformats.org/drawingml/2006/main">
+            <a:srgbClr val="1E2836"/>
+          </a:solidFill>
+          <a:ln xmlns:a="http://schemas.openxmlformats.org/drawingml/2006/main" w="12700">
+            <a:solidFill>
+              <a:srgbClr val="2A3647"/>
+            </a:solidFill>
+          </a:ln>
+        </p:spPr>
+        <p:style>
+          <a:lnRef xmlns:a="http://schemas.openxmlformats.org/drawingml/2006/main" idx="1">
+            <a:schemeClr val="accent1"/>
+          </a:lnRef>
+          <a:fillRef xmlns:a="http://schemas.openxmlformats.org/drawingml/2006/main" idx="3">
+            <a:schemeClr val="accent1"/>
+          </a:fillRef>
+          <a:effectRef xmlns:a="http://schemas.openxmlformats.org/drawingml/2006/main" idx="2">
+            <a:schemeClr val="accent1"/>
+          </a:effectRef>
+          <a:fontRef xmlns:a="http://schemas.openxmlformats.org/drawingml/2006/main" idx="minor">
+            <a:schemeClr val="lt1"/>
+          </a:fontRef>
+        </p:style>
+        <p:txBody>
+          <a:bodyPr xmlns:a="http://schemas.openxmlformats.org/drawingml/2006/main" anchor="ctr"/>
+          <a:lstStyle xmlns:a="http://schemas.openxmlformats.org/drawingml/2006/main"/>
+          <a:p xmlns:a="http://schemas.openxmlformats.org/drawingml/2006/main">
+            <a:pPr algn="ctr">
+              <a:buNone/>
+            </a:pPr>
+          </a:p>
+        </p:txBody>
+      </p:sp>
+      <p:sp>
+        <p:nvSpPr>
+          <p:cNvPr id="35" name="TextBox 34">
+            <a:extLst xmlns:a="http://schemas.openxmlformats.org/drawingml/2006/main">
+              <a:ext uri="{FF2B5EF4-FFF2-40B4-BE49-F238E27FC236}">
+                <a16:creationId xmlns:a16="http://schemas.microsoft.com/office/drawing/2014/main" id="{BA4130E9-D87E-4B7A-AB17-32E2DFC3DA8F}"/>
+              </a:ext>
+            </a:extLst>
+          </p:cNvPr>
+          <p:cNvSpPr>
+            <a:spLocks xmlns:a="http://schemas.openxmlformats.org/drawingml/2006/main" noGrp="1"/>
+          </p:cNvSpPr>
+          <p:nvPr/>
+        </p:nvSpPr>
+        <p:spPr>
+          <a:xfrm xmlns:a="http://schemas.openxmlformats.org/drawingml/2006/main">
+            <a:off x="8275320" y="5184648"/>
+            <a:ext cx="2377440" cy="228600"/>
+          </a:xfrm>
+          <a:prstGeom xmlns:a="http://schemas.openxmlformats.org/drawingml/2006/main" prst="rect">
+            <a:avLst/>
+          </a:prstGeom>
+          <a:noFill xmlns:a="http://schemas.openxmlformats.org/drawingml/2006/main"/>
+        </p:spPr>
+        <p:txBody>
+          <a:bodyPr xmlns:a="http://schemas.openxmlformats.org/drawingml/2006/main" wrap="square" lIns="0" tIns="0" rIns="0" bIns="0" anchor="t">
+            <a:spAutoFit/>
+          </a:bodyPr>
+          <a:lstStyle xmlns:a="http://schemas.openxmlformats.org/drawingml/2006/main"/>
+          <a:p xmlns:a="http://schemas.openxmlformats.org/drawingml/2006/main">
+            <a:pPr algn="l">
+              <a:buNone/>
+            </a:pPr>
+            <a:r>
+              <a:rPr sz="950" b="1" i="0">
+                <a:solidFill>
+                  <a:srgbClr val="8A9CB5"/>
+                </a:solidFill>
+                <a:latin typeface="Arial"/>
+                <a:ea typeface="Arial"/>
+                <a:cs typeface="Arial"/>
+              </a:rPr>
+              <a:t>REGISTRY</a:t>
+            </a:r>
+          </a:p>
+        </p:txBody>
+      </p:sp>
+      <p:sp>
+        <p:nvSpPr>
+          <p:cNvPr id="36" name="TextBox 35">
+            <a:extLst xmlns:a="http://schemas.openxmlformats.org/drawingml/2006/main">
+              <a:ext uri="{FF2B5EF4-FFF2-40B4-BE49-F238E27FC236}">
+                <a16:creationId xmlns:a16="http://schemas.microsoft.com/office/drawing/2014/main" id="{EBED7863-7E41-4170-8F2C-2BDA414CCB83}"/>
+              </a:ext>
+            </a:extLst>
+          </p:cNvPr>
+          <p:cNvSpPr>
+            <a:spLocks xmlns:a="http://schemas.openxmlformats.org/drawingml/2006/main" noGrp="1"/>
+          </p:cNvSpPr>
+          <p:nvPr/>
+        </p:nvSpPr>
+        <p:spPr>
+          <a:xfrm xmlns:a="http://schemas.openxmlformats.org/drawingml/2006/main">
+            <a:off x="8275320" y="5404104"/>
+            <a:ext cx="2377440" cy="228600"/>
+          </a:xfrm>
+          <a:prstGeom xmlns:a="http://schemas.openxmlformats.org/drawingml/2006/main" prst="rect">
+            <a:avLst/>
+          </a:prstGeom>
+          <a:noFill xmlns:a="http://schemas.openxmlformats.org/drawingml/2006/main"/>
+        </p:spPr>
+        <p:txBody>
+          <a:bodyPr xmlns:a="http://schemas.openxmlformats.org/drawingml/2006/main" wrap="square" lIns="0" tIns="0" rIns="0" bIns="0" anchor="t">
+            <a:spAutoFit/>
+          </a:bodyPr>
+          <a:lstStyle xmlns:a="http://schemas.openxmlformats.org/drawingml/2006/main"/>
+          <a:p xmlns:a="http://schemas.openxmlformats.org/drawingml/2006/main">
+            <a:pPr algn="l">
+              <a:buNone/>
+            </a:pPr>
+            <a:r>
+              <a:rPr sz="1100" b="1" i="0">
+                <a:solidFill>
+                  <a:srgbClr val="D9FF55"/>
+                </a:solidFill>
+                <a:latin typeface="Courier New"/>
+                <a:ea typeface="Courier New"/>
+                <a:cs typeface="Courier New"/>
+              </a:rPr>
+              <a:t>0x9553c5…dbf1</a:t>
+            </a:r>
+          </a:p>
+        </p:txBody>
+      </p:sp>
+      <p:sp>
+        <p:nvSpPr>
+          <p:cNvPr id="37" name="TextBox 36">
+            <a:extLst xmlns:a="http://schemas.openxmlformats.org/drawingml/2006/main">
+              <a:ext uri="{FF2B5EF4-FFF2-40B4-BE49-F238E27FC236}">
+                <a16:creationId xmlns:a16="http://schemas.microsoft.com/office/drawing/2014/main" id="{23CC8BD3-DC57-4871-B24C-87579EB85917}"/>
+              </a:ext>
+            </a:extLst>
+          </p:cNvPr>
+          <p:cNvSpPr>
+            <a:spLocks xmlns:a="http://schemas.openxmlformats.org/drawingml/2006/main" noGrp="1"/>
+          </p:cNvSpPr>
+          <p:nvPr/>
+        </p:nvSpPr>
+        <p:spPr>
+          <a:xfrm xmlns:a="http://schemas.openxmlformats.org/drawingml/2006/main">
+            <a:off x="777240" y="5440680"/>
+            <a:ext cx="6949440" cy="274320"/>
+          </a:xfrm>
+          <a:prstGeom xmlns:a="http://schemas.openxmlformats.org/drawingml/2006/main" prst="rect">
+            <a:avLst/>
+          </a:prstGeom>
+          <a:noFill xmlns:a="http://schemas.openxmlformats.org/drawingml/2006/main"/>
+        </p:spPr>
+        <p:txBody>
+          <a:bodyPr xmlns:a="http://schemas.openxmlformats.org/drawingml/2006/main" wrap="square" lIns="0" tIns="0" rIns="0" bIns="0" anchor="t">
+            <a:spAutoFit/>
+          </a:bodyPr>
+          <a:lstStyle xmlns:a="http://schemas.openxmlformats.org/drawingml/2006/main"/>
+          <a:p xmlns:a="http://schemas.openxmlformats.org/drawingml/2006/main">
+            <a:pPr algn="l">
+              <a:buNone/>
+            </a:pPr>
+            <a:r>
+              <a:rPr sz="1150" b="0" i="0">
+                <a:solidFill>
+                  <a:srgbClr val="8A9CB5"/>
+                </a:solidFill>
+                <a:latin typeface="Arial"/>
+                <a:ea typeface="Arial"/>
+                <a:cs typeface="Arial"/>
+              </a:rPr>
+              <a:t>Every figure re-checkable: </a:t>
+            </a:r>
+            <a:r>
+              <a:rPr sz="1150" b="1" i="0">
+                <a:solidFill>
+                  <a:srgbClr val="D9FF55"/>
+                </a:solidFill>
+                <a:latin typeface="Arial"/>
+                <a:ea typeface="Arial"/>
+                <a:cs typeface="Arial"/>
+              </a:rPr>
+              <a:t>pnpm verify:claims</a:t>
+            </a:r>
+            <a:r>
+              <a:rPr sz="1150" b="0" i="0">
+                <a:solidFill>
+                  <a:srgbClr val="8A9CB5"/>
+                </a:solidFill>
+                <a:latin typeface="Arial"/>
+                <a:ea typeface="Arial"/>
+                <a:cs typeface="Arial"/>
+              </a:rPr>
+              <a:t>  ·  output/monad/deployment.json</a:t>
+            </a:r>
+          </a:p>
+        </p:txBody>
+      </p:sp>
+    </p:spTree>
+    <p:extLst>
+      <p:ext uri="{BB962C8B-B14F-4D97-AF65-F5344CB8AC3E}">
+        <p14:creationId xmlns:p14="http://schemas.microsoft.com/office/powerpoint/2010/main" val="1761612312"/>
+      </p:ext>
+    </p:extLst>
+  </p:cSld>
+</p:sld>
+</file>
+
+<file path=ppt/slides/slide11.xml><?xml version="1.0" encoding="utf-8"?>
+<p:sld xmlns:p="http://schemas.openxmlformats.org/presentationml/2006/main">
+  <p:cSld>
+    <p:spTree>
+      <p:nvGrpSpPr>
+        <p:cNvPr id="1" name=""/>
+        <p:cNvGrpSpPr/>
+        <p:nvPr/>
+      </p:nvGrpSpPr>
+      <p:grpSpPr>
+        <a:xfrm xmlns:a="http://schemas.openxmlformats.org/drawingml/2006/main"/>
+      </p:grpSpPr>
+      <p:sp>
+        <p:nvSpPr>
+          <p:cNvPr id="2" name="Rectangle 1">
+            <a:extLst xmlns:a="http://schemas.openxmlformats.org/drawingml/2006/main">
+              <a:ext uri="{FF2B5EF4-FFF2-40B4-BE49-F238E27FC236}">
+                <a16:creationId xmlns:a16="http://schemas.microsoft.com/office/drawing/2014/main" id="{E9C7D062-8740-41D3-82BD-72679040C103}"/>
+              </a:ext>
+            </a:extLst>
+          </p:cNvPr>
+          <p:cNvSpPr>
+            <a:spLocks xmlns:a="http://schemas.openxmlformats.org/drawingml/2006/main" noGrp="1"/>
+          </p:cNvSpPr>
+          <p:nvPr/>
+        </p:nvSpPr>
+        <p:spPr>
+          <a:xfrm xmlns:a="http://schemas.openxmlformats.org/drawingml/2006/main">
+            <a:off x="0" y="0"/>
+            <a:ext cx="12191695" cy="6858000"/>
+          </a:xfrm>
+          <a:prstGeom xmlns:a="http://schemas.openxmlformats.org/drawingml/2006/main" prst="rect">
+            <a:avLst/>
+          </a:prstGeom>
+          <a:solidFill xmlns:a="http://schemas.openxmlformats.org/drawingml/2006/main">
+            <a:srgbClr val="0A0E14"/>
+          </a:solidFill>
+          <a:ln xmlns:a="http://schemas.openxmlformats.org/drawingml/2006/main">
+            <a:noFill/>
+          </a:ln>
+        </p:spPr>
+        <p:style>
+          <a:lnRef xmlns:a="http://schemas.openxmlformats.org/drawingml/2006/main" idx="1">
+            <a:schemeClr val="accent1"/>
+          </a:lnRef>
+          <a:fillRef xmlns:a="http://schemas.openxmlformats.org/drawingml/2006/main" idx="3">
+            <a:schemeClr val="accent1"/>
+          </a:fillRef>
+          <a:effectRef xmlns:a="http://schemas.openxmlformats.org/drawingml/2006/main" idx="2">
+            <a:schemeClr val="accent1"/>
+          </a:effectRef>
+          <a:fontRef xmlns:a="http://schemas.openxmlformats.org/drawingml/2006/main" idx="minor">
+            <a:schemeClr val="lt1"/>
+          </a:fontRef>
+        </p:style>
+        <p:txBody>
+          <a:bodyPr xmlns:a="http://schemas.openxmlformats.org/drawingml/2006/main" anchor="ctr"/>
+          <a:lstStyle xmlns:a="http://schemas.openxmlformats.org/drawingml/2006/main"/>
+          <a:p xmlns:a="http://schemas.openxmlformats.org/drawingml/2006/main">
+            <a:pPr algn="ctr">
+              <a:buNone/>
+            </a:pPr>
+          </a:p>
+        </p:txBody>
+      </p:sp>
+      <p:sp>
+        <p:nvSpPr>
+          <p:cNvPr id="3" name="TextBox 2">
+            <a:extLst xmlns:a="http://schemas.openxmlformats.org/drawingml/2006/main">
+              <a:ext uri="{FF2B5EF4-FFF2-40B4-BE49-F238E27FC236}">
+                <a16:creationId xmlns:a16="http://schemas.microsoft.com/office/drawing/2014/main" id="{6B6E5BEC-2B43-4636-AC5E-1E8D82EE54F2}"/>
+              </a:ext>
+            </a:extLst>
+          </p:cNvPr>
+          <p:cNvSpPr>
+            <a:spLocks xmlns:a="http://schemas.openxmlformats.org/drawingml/2006/main" noGrp="1"/>
+          </p:cNvSpPr>
+          <p:nvPr/>
+        </p:nvSpPr>
+        <p:spPr>
+          <a:xfrm xmlns:a="http://schemas.openxmlformats.org/drawingml/2006/main">
+            <a:off x="777240" y="658368"/>
+            <a:ext cx="5486400" cy="228600"/>
+          </a:xfrm>
+          <a:prstGeom xmlns:a="http://schemas.openxmlformats.org/drawingml/2006/main" prst="rect">
+            <a:avLst/>
+          </a:prstGeom>
+          <a:noFill xmlns:a="http://schemas.openxmlformats.org/drawingml/2006/main"/>
+        </p:spPr>
+        <p:txBody>
+          <a:bodyPr xmlns:a="http://schemas.openxmlformats.org/drawingml/2006/main" wrap="square" lIns="0" tIns="0" rIns="0" bIns="0" anchor="t">
+            <a:spAutoFit/>
+          </a:bodyPr>
+          <a:lstStyle xmlns:a="http://schemas.openxmlformats.org/drawingml/2006/main"/>
+          <a:p xmlns:a="http://schemas.openxmlformats.org/drawingml/2006/main">
+            <a:pPr algn="l">
+              <a:buNone/>
+            </a:pPr>
+            <a:r>
+              <a:rPr sz="1100" b="1" i="0">
+                <a:solidFill>
+                  <a:srgbClr val="D9FF55"/>
+                </a:solidFill>
+                <a:latin typeface="Arial"/>
+                <a:ea typeface="Arial"/>
+                <a:cs typeface="Arial"/>
+              </a:rPr>
+              <a:t>THE BOUNDARY</a:t>
+            </a:r>
+          </a:p>
+        </p:txBody>
+      </p:sp>
+      <p:sp>
+        <p:nvSpPr>
+          <p:cNvPr id="4" name="TextBox 3">
+            <a:extLst xmlns:a="http://schemas.openxmlformats.org/drawingml/2006/main">
+              <a:ext uri="{FF2B5EF4-FFF2-40B4-BE49-F238E27FC236}">
+                <a16:creationId xmlns:a16="http://schemas.microsoft.com/office/drawing/2014/main" id="{1CEB04B5-14C4-4C5D-85CB-4DFBBBD539B0}"/>
+              </a:ext>
+            </a:extLst>
+          </p:cNvPr>
+          <p:cNvSpPr>
+            <a:spLocks xmlns:a="http://schemas.openxmlformats.org/drawingml/2006/main" noGrp="1"/>
+          </p:cNvSpPr>
+          <p:nvPr/>
+        </p:nvSpPr>
+        <p:spPr>
+          <a:xfrm xmlns:a="http://schemas.openxmlformats.org/drawingml/2006/main">
+            <a:off x="777240" y="960120"/>
+            <a:ext cx="10241280" cy="640080"/>
+          </a:xfrm>
+          <a:prstGeom xmlns:a="http://schemas.openxmlformats.org/drawingml/2006/main" prst="rect">
+            <a:avLst/>
+          </a:prstGeom>
+          <a:noFill xmlns:a="http://schemas.openxmlformats.org/drawingml/2006/main"/>
+        </p:spPr>
+        <p:txBody>
+          <a:bodyPr xmlns:a="http://schemas.openxmlformats.org/drawingml/2006/main" wrap="square" lIns="0" tIns="0" rIns="0" bIns="0" anchor="t">
+            <a:spAutoFit/>
+          </a:bodyPr>
+          <a:lstStyle xmlns:a="http://schemas.openxmlformats.org/drawingml/2006/main"/>
+          <a:p xmlns:a="http://schemas.openxmlformats.org/drawingml/2006/main">
+            <a:pPr algn="l">
+              <a:buNone/>
+            </a:pPr>
+            <a:r>
+              <a:rPr sz="3200" b="1" i="0">
+                <a:solidFill>
+                  <a:srgbClr val="E8EDF4"/>
+                </a:solidFill>
+                <a:latin typeface="Arial"/>
+                <a:ea typeface="Arial"/>
+                <a:cs typeface="Arial"/>
+              </a:rPr>
+              <a:t>What we enforce — and what we don’t</a:t>
+            </a:r>
+          </a:p>
+        </p:txBody>
+      </p:sp>
+      <p:sp>
+        <p:nvSpPr>
+          <p:cNvPr id="5" name="Rounded Rectangle 4">
+            <a:extLst xmlns:a="http://schemas.openxmlformats.org/drawingml/2006/main">
+              <a:ext uri="{FF2B5EF4-FFF2-40B4-BE49-F238E27FC236}">
+                <a16:creationId xmlns:a16="http://schemas.microsoft.com/office/drawing/2014/main" id="{1EF81E7D-1C7D-40C4-A05B-12BDB8F4E6D0}"/>
+              </a:ext>
+            </a:extLst>
+          </p:cNvPr>
+          <p:cNvSpPr>
+            <a:spLocks xmlns:a="http://schemas.openxmlformats.org/drawingml/2006/main" noGrp="1"/>
+          </p:cNvSpPr>
+          <p:nvPr/>
+        </p:nvSpPr>
+        <p:spPr>
+          <a:xfrm xmlns:a="http://schemas.openxmlformats.org/drawingml/2006/main">
+            <a:off x="777240" y="1965960"/>
+            <a:ext cx="4892040" cy="2743200"/>
+          </a:xfrm>
+          <a:prstGeom xmlns:a="http://schemas.openxmlformats.org/drawingml/2006/main" prst="roundRect">
+            <a:avLst>
+              <a:gd name="adj" fmla="val 6000"/>
+            </a:avLst>
+          </a:prstGeom>
+          <a:solidFill xmlns:a="http://schemas.openxmlformats.org/drawingml/2006/main">
+            <a:srgbClr val="161E2A"/>
+          </a:solidFill>
+          <a:ln xmlns:a="http://schemas.openxmlformats.org/drawingml/2006/main" w="12700">
+            <a:solidFill>
+              <a:srgbClr val="2A3647"/>
+            </a:solidFill>
+          </a:ln>
+        </p:spPr>
+        <p:style>
+          <a:lnRef xmlns:a="http://schemas.openxmlformats.org/drawingml/2006/main" idx="1">
+            <a:schemeClr val="accent1"/>
+          </a:lnRef>
+          <a:fillRef xmlns:a="http://schemas.openxmlformats.org/drawingml/2006/main" idx="3">
+            <a:schemeClr val="accent1"/>
+          </a:fillRef>
+          <a:effectRef xmlns:a="http://schemas.openxmlformats.org/drawingml/2006/main" idx="2">
+            <a:schemeClr val="accent1"/>
+          </a:effectRef>
+          <a:fontRef xmlns:a="http://schemas.openxmlformats.org/drawingml/2006/main" idx="minor">
+            <a:schemeClr val="lt1"/>
+          </a:fontRef>
+        </p:style>
+        <p:txBody>
+          <a:bodyPr xmlns:a="http://schemas.openxmlformats.org/drawingml/2006/main" anchor="ctr"/>
+          <a:lstStyle xmlns:a="http://schemas.openxmlformats.org/drawingml/2006/main"/>
+          <a:p xmlns:a="http://schemas.openxmlformats.org/drawingml/2006/main">
+            <a:pPr algn="ctr">
+              <a:buNone/>
+            </a:pPr>
+          </a:p>
+        </p:txBody>
+      </p:sp>
+      <p:sp>
+        <p:nvSpPr>
+          <p:cNvPr id="6" name="TextBox 5">
+            <a:extLst xmlns:a="http://schemas.openxmlformats.org/drawingml/2006/main">
+              <a:ext uri="{FF2B5EF4-FFF2-40B4-BE49-F238E27FC236}">
+                <a16:creationId xmlns:a16="http://schemas.microsoft.com/office/drawing/2014/main" id="{950A366B-6390-425C-946A-61C2E50A7C81}"/>
+              </a:ext>
+            </a:extLst>
+          </p:cNvPr>
+          <p:cNvSpPr>
+            <a:spLocks xmlns:a="http://schemas.openxmlformats.org/drawingml/2006/main" noGrp="1"/>
+          </p:cNvSpPr>
+          <p:nvPr/>
+        </p:nvSpPr>
+        <p:spPr>
+          <a:xfrm xmlns:a="http://schemas.openxmlformats.org/drawingml/2006/main">
+            <a:off x="1097280" y="2212848"/>
+            <a:ext cx="4114800" cy="274320"/>
+          </a:xfrm>
+          <a:prstGeom xmlns:a="http://schemas.openxmlformats.org/drawingml/2006/main" prst="rect">
+            <a:avLst/>
+          </a:prstGeom>
+          <a:noFill xmlns:a="http://schemas.openxmlformats.org/drawingml/2006/main"/>
+        </p:spPr>
+        <p:txBody>
+          <a:bodyPr xmlns:a="http://schemas.openxmlformats.org/drawingml/2006/main" wrap="square" lIns="0" tIns="0" rIns="0" bIns="0" anchor="t">
+            <a:spAutoFit/>
+          </a:bodyPr>
+          <a:lstStyle xmlns:a="http://schemas.openxmlformats.org/drawingml/2006/main"/>
+          <a:p xmlns:a="http://schemas.openxmlformats.org/drawingml/2006/main">
+            <a:pPr algn="l">
+              <a:buNone/>
+            </a:pPr>
+            <a:r>
+              <a:rPr sz="1100" b="1" i="0">
+                <a:solidFill>
+                  <a:srgbClr val="4ADE80"/>
+                </a:solidFill>
+                <a:latin typeface="Arial"/>
+                <a:ea typeface="Arial"/>
+                <a:cs typeface="Arial"/>
+              </a:rPr>
+              <a:t>ENFORCED BY THE CONTRACT</a:t>
+            </a:r>
+          </a:p>
+        </p:txBody>
+      </p:sp>
+      <p:sp>
+        <p:nvSpPr>
+          <p:cNvPr id="7" name="Oval 6">
+            <a:extLst xmlns:a="http://schemas.openxmlformats.org/drawingml/2006/main">
+              <a:ext uri="{FF2B5EF4-FFF2-40B4-BE49-F238E27FC236}">
+                <a16:creationId xmlns:a16="http://schemas.microsoft.com/office/drawing/2014/main" id="{58D13E85-B666-4E5B-BB0F-ACEA248513A4}"/>
+              </a:ext>
+            </a:extLst>
+          </p:cNvPr>
+          <p:cNvSpPr>
+            <a:spLocks xmlns:a="http://schemas.openxmlformats.org/drawingml/2006/main" noGrp="1"/>
+          </p:cNvSpPr>
+          <p:nvPr/>
+        </p:nvSpPr>
+        <p:spPr>
+          <a:xfrm xmlns:a="http://schemas.openxmlformats.org/drawingml/2006/main">
+            <a:off x="1097280" y="2660904"/>
+            <a:ext cx="100584" cy="100584"/>
+          </a:xfrm>
+          <a:prstGeom xmlns:a="http://schemas.openxmlformats.org/drawingml/2006/main" prst="ellipse">
+            <a:avLst/>
+          </a:prstGeom>
+          <a:solidFill xmlns:a="http://schemas.openxmlformats.org/drawingml/2006/main">
+            <a:srgbClr val="4ADE80"/>
+          </a:solidFill>
+          <a:ln xmlns:a="http://schemas.openxmlformats.org/drawingml/2006/main">
+            <a:noFill/>
+          </a:ln>
+        </p:spPr>
+        <p:style>
+          <a:lnRef xmlns:a="http://schemas.openxmlformats.org/drawingml/2006/main" idx="1">
+            <a:schemeClr val="accent1"/>
+          </a:lnRef>
+          <a:fillRef xmlns:a="http://schemas.openxmlformats.org/drawingml/2006/main" idx="3">
+            <a:schemeClr val="accent1"/>
+          </a:fillRef>
+          <a:effectRef xmlns:a="http://schemas.openxmlformats.org/drawingml/2006/main" idx="2">
+            <a:schemeClr val="accent1"/>
+          </a:effectRef>
+          <a:fontRef xmlns:a="http://schemas.openxmlformats.org/drawingml/2006/main" idx="minor">
+            <a:schemeClr val="lt1"/>
+          </a:fontRef>
+        </p:style>
+        <p:txBody>
+          <a:bodyPr xmlns:a="http://schemas.openxmlformats.org/drawingml/2006/main" anchor="ctr"/>
+          <a:lstStyle xmlns:a="http://schemas.openxmlformats.org/drawingml/2006/main"/>
+          <a:p xmlns:a="http://schemas.openxmlformats.org/drawingml/2006/main">
+            <a:pPr algn="ctr">
+              <a:buNone/>
+            </a:pPr>
+          </a:p>
+        </p:txBody>
+      </p:sp>
+      <p:sp>
+        <p:nvSpPr>
+          <p:cNvPr id="8" name="TextBox 7">
+            <a:extLst xmlns:a="http://schemas.openxmlformats.org/drawingml/2006/main">
+              <a:ext uri="{FF2B5EF4-FFF2-40B4-BE49-F238E27FC236}">
+                <a16:creationId xmlns:a16="http://schemas.microsoft.com/office/drawing/2014/main" id="{285616A3-0EFC-43B1-809F-0A95642BD09A}"/>
+              </a:ext>
+            </a:extLst>
+          </p:cNvPr>
+          <p:cNvSpPr>
+            <a:spLocks xmlns:a="http://schemas.openxmlformats.org/drawingml/2006/main" noGrp="1"/>
+          </p:cNvSpPr>
+          <p:nvPr/>
+        </p:nvSpPr>
+        <p:spPr>
+          <a:xfrm xmlns:a="http://schemas.openxmlformats.org/drawingml/2006/main">
+            <a:off x="1353312" y="2587752"/>
+            <a:ext cx="4023360" cy="457200"/>
+          </a:xfrm>
+          <a:prstGeom xmlns:a="http://schemas.openxmlformats.org/drawingml/2006/main" prst="rect">
+            <a:avLst/>
+          </a:prstGeom>
+          <a:noFill xmlns:a="http://schemas.openxmlformats.org/drawingml/2006/main"/>
+        </p:spPr>
+        <p:txBody>
+          <a:bodyPr xmlns:a="http://schemas.openxmlformats.org/drawingml/2006/main" wrap="square" lIns="0" tIns="0" rIns="0" bIns="0" anchor="t">
+            <a:spAutoFit/>
+          </a:bodyPr>
+          <a:lstStyle xmlns:a="http://schemas.openxmlformats.org/drawingml/2006/main"/>
+          <a:p xmlns:a="http://schemas.openxmlformats.org/drawingml/2006/main">
+            <a:pPr algn="l">
+              <a:buNone/>
+            </a:pPr>
+            <a:r>
+              <a:rPr sz="1250" b="0" i="0">
+                <a:solidFill>
+                  <a:srgbClr val="E8EDF4"/>
+                </a:solidFill>
+                <a:latin typeface="Arial"/>
+                <a:ea typeface="Arial"/>
+                <a:cs typeface="Arial"/>
+              </a:rPr>
+              <a:t>Cumulative spending ceiling</a:t>
+            </a:r>
+          </a:p>
+        </p:txBody>
+      </p:sp>
+      <p:sp>
+        <p:nvSpPr>
+          <p:cNvPr id="9" name="Oval 8">
+            <a:extLst xmlns:a="http://schemas.openxmlformats.org/drawingml/2006/main">
+              <a:ext uri="{FF2B5EF4-FFF2-40B4-BE49-F238E27FC236}">
+                <a16:creationId xmlns:a16="http://schemas.microsoft.com/office/drawing/2014/main" id="{07E1319D-6ACF-4167-9E94-EC9BDE735535}"/>
+              </a:ext>
+            </a:extLst>
+          </p:cNvPr>
+          <p:cNvSpPr>
+            <a:spLocks xmlns:a="http://schemas.openxmlformats.org/drawingml/2006/main" noGrp="1"/>
+          </p:cNvSpPr>
+          <p:nvPr/>
+        </p:nvSpPr>
+        <p:spPr>
+          <a:xfrm xmlns:a="http://schemas.openxmlformats.org/drawingml/2006/main">
+            <a:off x="1097280" y="3063240"/>
+            <a:ext cx="100584" cy="100584"/>
+          </a:xfrm>
+          <a:prstGeom xmlns:a="http://schemas.openxmlformats.org/drawingml/2006/main" prst="ellipse">
+            <a:avLst/>
+          </a:prstGeom>
+          <a:solidFill xmlns:a="http://schemas.openxmlformats.org/drawingml/2006/main">
+            <a:srgbClr val="4ADE80"/>
+          </a:solidFill>
+          <a:ln xmlns:a="http://schemas.openxmlformats.org/drawingml/2006/main">
+            <a:noFill/>
+          </a:ln>
+        </p:spPr>
+        <p:style>
+          <a:lnRef xmlns:a="http://schemas.openxmlformats.org/drawingml/2006/main" idx="1">
+            <a:schemeClr val="accent1"/>
+          </a:lnRef>
+          <a:fillRef xmlns:a="http://schemas.openxmlformats.org/drawingml/2006/main" idx="3">
+            <a:schemeClr val="accent1"/>
+          </a:fillRef>
+          <a:effectRef xmlns:a="http://schemas.openxmlformats.org/drawingml/2006/main" idx="2">
+            <a:schemeClr val="accent1"/>
+          </a:effectRef>
+          <a:fontRef xmlns:a="http://schemas.openxmlformats.org/drawingml/2006/main" idx="minor">
+            <a:schemeClr val="lt1"/>
+          </a:fontRef>
+        </p:style>
+        <p:txBody>
+          <a:bodyPr xmlns:a="http://schemas.openxmlformats.org/drawingml/2006/main" anchor="ctr"/>
+          <a:lstStyle xmlns:a="http://schemas.openxmlformats.org/drawingml/2006/main"/>
+          <a:p xmlns:a="http://schemas.openxmlformats.org/drawingml/2006/main">
+            <a:pPr algn="ctr">
+              <a:buNone/>
+            </a:pPr>
+          </a:p>
+        </p:txBody>
+      </p:sp>
+      <p:sp>
+        <p:nvSpPr>
+          <p:cNvPr id="10" name="TextBox 9">
+            <a:extLst xmlns:a="http://schemas.openxmlformats.org/drawingml/2006/main">
+              <a:ext uri="{FF2B5EF4-FFF2-40B4-BE49-F238E27FC236}">
+                <a16:creationId xmlns:a16="http://schemas.microsoft.com/office/drawing/2014/main" id="{7310C5B9-CD56-4A9D-8AEF-04DBC14DFB10}"/>
+              </a:ext>
+            </a:extLst>
+          </p:cNvPr>
+          <p:cNvSpPr>
+            <a:spLocks xmlns:a="http://schemas.openxmlformats.org/drawingml/2006/main" noGrp="1"/>
+          </p:cNvSpPr>
+          <p:nvPr/>
+        </p:nvSpPr>
+        <p:spPr>
+          <a:xfrm xmlns:a="http://schemas.openxmlformats.org/drawingml/2006/main">
+            <a:off x="1353312" y="2990088"/>
+            <a:ext cx="4023360" cy="457200"/>
+          </a:xfrm>
+          <a:prstGeom xmlns:a="http://schemas.openxmlformats.org/drawingml/2006/main" prst="rect">
+            <a:avLst/>
+          </a:prstGeom>
+          <a:noFill xmlns:a="http://schemas.openxmlformats.org/drawingml/2006/main"/>
+        </p:spPr>
+        <p:txBody>
+          <a:bodyPr xmlns:a="http://schemas.openxmlformats.org/drawingml/2006/main" wrap="square" lIns="0" tIns="0" rIns="0" bIns="0" anchor="t">
+            <a:spAutoFit/>
+          </a:bodyPr>
+          <a:lstStyle xmlns:a="http://schemas.openxmlformats.org/drawingml/2006/main"/>
+          <a:p xmlns:a="http://schemas.openxmlformats.org/drawingml/2006/main">
+            <a:pPr algn="l">
+              <a:buNone/>
+            </a:pPr>
+            <a:r>
+              <a:rPr sz="1250" b="0" i="0">
+                <a:solidFill>
+                  <a:srgbClr val="E8EDF4"/>
+                </a:solidFill>
+                <a:latin typeface="Arial"/>
+                <a:ea typeface="Arial"/>
+                <a:cs typeface="Arial"/>
+              </a:rPr>
+              <a:t>Approved-payee scope</a:t>
+            </a:r>
+          </a:p>
+        </p:txBody>
+      </p:sp>
+      <p:sp>
+        <p:nvSpPr>
+          <p:cNvPr id="11" name="Oval 10">
+            <a:extLst xmlns:a="http://schemas.openxmlformats.org/drawingml/2006/main">
+              <a:ext uri="{FF2B5EF4-FFF2-40B4-BE49-F238E27FC236}">
+                <a16:creationId xmlns:a16="http://schemas.microsoft.com/office/drawing/2014/main" id="{A4EC2AA3-DDE0-4F2B-A5DE-44FF6F219C6A}"/>
+              </a:ext>
+            </a:extLst>
+          </p:cNvPr>
+          <p:cNvSpPr>
+            <a:spLocks xmlns:a="http://schemas.openxmlformats.org/drawingml/2006/main" noGrp="1"/>
+          </p:cNvSpPr>
+          <p:nvPr/>
+        </p:nvSpPr>
+        <p:spPr>
+          <a:xfrm xmlns:a="http://schemas.openxmlformats.org/drawingml/2006/main">
+            <a:off x="1097280" y="3465576"/>
+            <a:ext cx="100584" cy="100584"/>
+          </a:xfrm>
+          <a:prstGeom xmlns:a="http://schemas.openxmlformats.org/drawingml/2006/main" prst="ellipse">
+            <a:avLst/>
+          </a:prstGeom>
+          <a:solidFill xmlns:a="http://schemas.openxmlformats.org/drawingml/2006/main">
+            <a:srgbClr val="4ADE80"/>
+          </a:solidFill>
+          <a:ln xmlns:a="http://schemas.openxmlformats.org/drawingml/2006/main">
+            <a:noFill/>
+          </a:ln>
+        </p:spPr>
+        <p:style>
+          <a:lnRef xmlns:a="http://schemas.openxmlformats.org/drawingml/2006/main" idx="1">
+            <a:schemeClr val="accent1"/>
+          </a:lnRef>
+          <a:fillRef xmlns:a="http://schemas.openxmlformats.org/drawingml/2006/main" idx="3">
+            <a:schemeClr val="accent1"/>
+          </a:fillRef>
+          <a:effectRef xmlns:a="http://schemas.openxmlformats.org/drawingml/2006/main" idx="2">
+            <a:schemeClr val="accent1"/>
+          </a:effectRef>
+          <a:fontRef xmlns:a="http://schemas.openxmlformats.org/drawingml/2006/main" idx="minor">
+            <a:schemeClr val="lt1"/>
+          </a:fontRef>
+        </p:style>
+        <p:txBody>
+          <a:bodyPr xmlns:a="http://schemas.openxmlformats.org/drawingml/2006/main" anchor="ctr"/>
+          <a:lstStyle xmlns:a="http://schemas.openxmlformats.org/drawingml/2006/main"/>
+          <a:p xmlns:a="http://schemas.openxmlformats.org/drawingml/2006/main">
+            <a:pPr algn="ctr">
+              <a:buNone/>
+            </a:pPr>
+          </a:p>
+        </p:txBody>
+      </p:sp>
+      <p:sp>
+        <p:nvSpPr>
+          <p:cNvPr id="12" name="TextBox 11">
+            <a:extLst xmlns:a="http://schemas.openxmlformats.org/drawingml/2006/main">
+              <a:ext uri="{FF2B5EF4-FFF2-40B4-BE49-F238E27FC236}">
+                <a16:creationId xmlns:a16="http://schemas.microsoft.com/office/drawing/2014/main" id="{A335B7DD-D329-4B7F-B52E-65DCFD4F852A}"/>
+              </a:ext>
+            </a:extLst>
+          </p:cNvPr>
+          <p:cNvSpPr>
+            <a:spLocks xmlns:a="http://schemas.openxmlformats.org/drawingml/2006/main" noGrp="1"/>
+          </p:cNvSpPr>
+          <p:nvPr/>
+        </p:nvSpPr>
+        <p:spPr>
+          <a:xfrm xmlns:a="http://schemas.openxmlformats.org/drawingml/2006/main">
+            <a:off x="1353312" y="3392424"/>
+            <a:ext cx="4023360" cy="457200"/>
+          </a:xfrm>
+          <a:prstGeom xmlns:a="http://schemas.openxmlformats.org/drawingml/2006/main" prst="rect">
+            <a:avLst/>
+          </a:prstGeom>
+          <a:noFill xmlns:a="http://schemas.openxmlformats.org/drawingml/2006/main"/>
+        </p:spPr>
+        <p:txBody>
+          <a:bodyPr xmlns:a="http://schemas.openxmlformats.org/drawingml/2006/main" wrap="square" lIns="0" tIns="0" rIns="0" bIns="0" anchor="t">
+            <a:spAutoFit/>
+          </a:bodyPr>
+          <a:lstStyle xmlns:a="http://schemas.openxmlformats.org/drawingml/2006/main"/>
+          <a:p xmlns:a="http://schemas.openxmlformats.org/drawingml/2006/main">
+            <a:pPr algn="l">
+              <a:buNone/>
+            </a:pPr>
+            <a:r>
+              <a:rPr sz="1250" b="0" i="0">
+                <a:solidFill>
+                  <a:srgbClr val="E8EDF4"/>
+                </a:solidFill>
+                <a:latin typeface="Arial"/>
+                <a:ea typeface="Arial"/>
+                <a:cs typeface="Arial"/>
+              </a:rPr>
+              <a:t>Validity window</a:t>
+            </a:r>
+          </a:p>
+        </p:txBody>
+      </p:sp>
+      <p:sp>
+        <p:nvSpPr>
+          <p:cNvPr id="13" name="Oval 12">
+            <a:extLst xmlns:a="http://schemas.openxmlformats.org/drawingml/2006/main">
+              <a:ext uri="{FF2B5EF4-FFF2-40B4-BE49-F238E27FC236}">
+                <a16:creationId xmlns:a16="http://schemas.microsoft.com/office/drawing/2014/main" id="{2E8E337C-04E1-4792-8A2B-2B1D6BC82370}"/>
+              </a:ext>
+            </a:extLst>
+          </p:cNvPr>
+          <p:cNvSpPr>
+            <a:spLocks xmlns:a="http://schemas.openxmlformats.org/drawingml/2006/main" noGrp="1"/>
+          </p:cNvSpPr>
+          <p:nvPr/>
+        </p:nvSpPr>
+        <p:spPr>
+          <a:xfrm xmlns:a="http://schemas.openxmlformats.org/drawingml/2006/main">
+            <a:off x="1097280" y="3867911"/>
+            <a:ext cx="100584" cy="100584"/>
+          </a:xfrm>
+          <a:prstGeom xmlns:a="http://schemas.openxmlformats.org/drawingml/2006/main" prst="ellipse">
+            <a:avLst/>
+          </a:prstGeom>
+          <a:solidFill xmlns:a="http://schemas.openxmlformats.org/drawingml/2006/main">
+            <a:srgbClr val="4ADE80"/>
+          </a:solidFill>
+          <a:ln xmlns:a="http://schemas.openxmlformats.org/drawingml/2006/main">
+            <a:noFill/>
+          </a:ln>
+        </p:spPr>
+        <p:style>
+          <a:lnRef xmlns:a="http://schemas.openxmlformats.org/drawingml/2006/main" idx="1">
+            <a:schemeClr val="accent1"/>
+          </a:lnRef>
+          <a:fillRef xmlns:a="http://schemas.openxmlformats.org/drawingml/2006/main" idx="3">
+            <a:schemeClr val="accent1"/>
+          </a:fillRef>
+          <a:effectRef xmlns:a="http://schemas.openxmlformats.org/drawingml/2006/main" idx="2">
+            <a:schemeClr val="accent1"/>
+          </a:effectRef>
+          <a:fontRef xmlns:a="http://schemas.openxmlformats.org/drawingml/2006/main" idx="minor">
+            <a:schemeClr val="lt1"/>
+          </a:fontRef>
+        </p:style>
+        <p:txBody>
+          <a:bodyPr xmlns:a="http://schemas.openxmlformats.org/drawingml/2006/main" anchor="ctr"/>
+          <a:lstStyle xmlns:a="http://schemas.openxmlformats.org/drawingml/2006/main"/>
+          <a:p xmlns:a="http://schemas.openxmlformats.org/drawingml/2006/main">
+            <a:pPr algn="ctr">
+              <a:buNone/>
+            </a:pPr>
+          </a:p>
+        </p:txBody>
+      </p:sp>
+      <p:sp>
+        <p:nvSpPr>
+          <p:cNvPr id="14" name="TextBox 13">
+            <a:extLst xmlns:a="http://schemas.openxmlformats.org/drawingml/2006/main">
+              <a:ext uri="{FF2B5EF4-FFF2-40B4-BE49-F238E27FC236}">
+                <a16:creationId xmlns:a16="http://schemas.microsoft.com/office/drawing/2014/main" id="{B63E03B6-A86B-4144-B33E-C143B4BEAA2D}"/>
+              </a:ext>
+            </a:extLst>
+          </p:cNvPr>
+          <p:cNvSpPr>
+            <a:spLocks xmlns:a="http://schemas.openxmlformats.org/drawingml/2006/main" noGrp="1"/>
+          </p:cNvSpPr>
+          <p:nvPr/>
+        </p:nvSpPr>
+        <p:spPr>
+          <a:xfrm xmlns:a="http://schemas.openxmlformats.org/drawingml/2006/main">
+            <a:off x="1353312" y="3794760"/>
+            <a:ext cx="4023360" cy="457200"/>
+          </a:xfrm>
+          <a:prstGeom xmlns:a="http://schemas.openxmlformats.org/drawingml/2006/main" prst="rect">
+            <a:avLst/>
+          </a:prstGeom>
+          <a:noFill xmlns:a="http://schemas.openxmlformats.org/drawingml/2006/main"/>
+        </p:spPr>
+        <p:txBody>
+          <a:bodyPr xmlns:a="http://schemas.openxmlformats.org/drawingml/2006/main" wrap="square" lIns="0" tIns="0" rIns="0" bIns="0" anchor="t">
+            <a:spAutoFit/>
+          </a:bodyPr>
+          <a:lstStyle xmlns:a="http://schemas.openxmlformats.org/drawingml/2006/main"/>
+          <a:p xmlns:a="http://schemas.openxmlformats.org/drawingml/2006/main">
+            <a:pPr algn="l">
+              <a:buNone/>
+            </a:pPr>
+            <a:r>
+              <a:rPr sz="1250" b="0" i="0">
+                <a:solidFill>
+                  <a:srgbClr val="E8EDF4"/>
+                </a:solidFill>
+                <a:latin typeface="Arial"/>
+                <a:ea typeface="Arial"/>
+                <a:cs typeface="Arial"/>
+              </a:rPr>
+              <a:t>Revocation</a:t>
+            </a:r>
+          </a:p>
+        </p:txBody>
+      </p:sp>
+      <p:sp>
+        <p:nvSpPr>
+          <p:cNvPr id="15" name="Oval 14">
+            <a:extLst xmlns:a="http://schemas.openxmlformats.org/drawingml/2006/main">
+              <a:ext uri="{FF2B5EF4-FFF2-40B4-BE49-F238E27FC236}">
+                <a16:creationId xmlns:a16="http://schemas.microsoft.com/office/drawing/2014/main" id="{41DEC92B-1FB5-48D8-889B-035979728F12}"/>
+              </a:ext>
+            </a:extLst>
+          </p:cNvPr>
+          <p:cNvSpPr>
+            <a:spLocks xmlns:a="http://schemas.openxmlformats.org/drawingml/2006/main" noGrp="1"/>
+          </p:cNvSpPr>
+          <p:nvPr/>
+        </p:nvSpPr>
+        <p:spPr>
+          <a:xfrm xmlns:a="http://schemas.openxmlformats.org/drawingml/2006/main">
+            <a:off x="1097280" y="4270248"/>
+            <a:ext cx="100584" cy="100584"/>
+          </a:xfrm>
+          <a:prstGeom xmlns:a="http://schemas.openxmlformats.org/drawingml/2006/main" prst="ellipse">
+            <a:avLst/>
+          </a:prstGeom>
+          <a:solidFill xmlns:a="http://schemas.openxmlformats.org/drawingml/2006/main">
+            <a:srgbClr val="4ADE80"/>
+          </a:solidFill>
+          <a:ln xmlns:a="http://schemas.openxmlformats.org/drawingml/2006/main">
+            <a:noFill/>
+          </a:ln>
+        </p:spPr>
+        <p:style>
+          <a:lnRef xmlns:a="http://schemas.openxmlformats.org/drawingml/2006/main" idx="1">
+            <a:schemeClr val="accent1"/>
+          </a:lnRef>
+          <a:fillRef xmlns:a="http://schemas.openxmlformats.org/drawingml/2006/main" idx="3">
+            <a:schemeClr val="accent1"/>
+          </a:fillRef>
+          <a:effectRef xmlns:a="http://schemas.openxmlformats.org/drawingml/2006/main" idx="2">
+            <a:schemeClr val="accent1"/>
+          </a:effectRef>
+          <a:fontRef xmlns:a="http://schemas.openxmlformats.org/drawingml/2006/main" idx="minor">
+            <a:schemeClr val="lt1"/>
+          </a:fontRef>
+        </p:style>
+        <p:txBody>
+          <a:bodyPr xmlns:a="http://schemas.openxmlformats.org/drawingml/2006/main" anchor="ctr"/>
+          <a:lstStyle xmlns:a="http://schemas.openxmlformats.org/drawingml/2006/main"/>
+          <a:p xmlns:a="http://schemas.openxmlformats.org/drawingml/2006/main">
+            <a:pPr algn="ctr">
+              <a:buNone/>
+            </a:pPr>
+          </a:p>
+        </p:txBody>
+      </p:sp>
+      <p:sp>
+        <p:nvSpPr>
+          <p:cNvPr id="16" name="TextBox 15">
+            <a:extLst xmlns:a="http://schemas.openxmlformats.org/drawingml/2006/main">
+              <a:ext uri="{FF2B5EF4-FFF2-40B4-BE49-F238E27FC236}">
+                <a16:creationId xmlns:a16="http://schemas.microsoft.com/office/drawing/2014/main" id="{6A43DA89-A7D3-4F37-8B02-805F5AF07C5F}"/>
+              </a:ext>
+            </a:extLst>
+          </p:cNvPr>
+          <p:cNvSpPr>
+            <a:spLocks xmlns:a="http://schemas.openxmlformats.org/drawingml/2006/main" noGrp="1"/>
+          </p:cNvSpPr>
+          <p:nvPr/>
+        </p:nvSpPr>
+        <p:spPr>
+          <a:xfrm xmlns:a="http://schemas.openxmlformats.org/drawingml/2006/main">
+            <a:off x="1353312" y="4197096"/>
+            <a:ext cx="4023360" cy="457200"/>
+          </a:xfrm>
+          <a:prstGeom xmlns:a="http://schemas.openxmlformats.org/drawingml/2006/main" prst="rect">
+            <a:avLst/>
+          </a:prstGeom>
+          <a:noFill xmlns:a="http://schemas.openxmlformats.org/drawingml/2006/main"/>
+        </p:spPr>
+        <p:txBody>
+          <a:bodyPr xmlns:a="http://schemas.openxmlformats.org/drawingml/2006/main" wrap="square" lIns="0" tIns="0" rIns="0" bIns="0" anchor="t">
+            <a:spAutoFit/>
+          </a:bodyPr>
+          <a:lstStyle xmlns:a="http://schemas.openxmlformats.org/drawingml/2006/main"/>
+          <a:p xmlns:a="http://schemas.openxmlformats.org/drawingml/2006/main">
+            <a:pPr algn="l">
+              <a:buNone/>
+            </a:pPr>
+            <a:r>
+              <a:rPr sz="1250" b="0" i="0">
+                <a:solidFill>
+                  <a:srgbClr val="E8EDF4"/>
+                </a:solidFill>
+                <a:latin typeface="Arial"/>
+                <a:ea typeface="Arial"/>
+                <a:cs typeface="Arial"/>
+              </a:rPr>
+              <a:t>Deposit cap, via an approval
+signature verified on-chain</a:t>
+            </a:r>
+          </a:p>
+        </p:txBody>
+      </p:sp>
+      <p:sp>
+        <p:nvSpPr>
+          <p:cNvPr id="17" name="Rounded Rectangle 16">
+            <a:extLst xmlns:a="http://schemas.openxmlformats.org/drawingml/2006/main">
+              <a:ext uri="{FF2B5EF4-FFF2-40B4-BE49-F238E27FC236}">
+                <a16:creationId xmlns:a16="http://schemas.microsoft.com/office/drawing/2014/main" id="{F7C9F38F-C8F6-4C58-9769-C3CEC588E2C0}"/>
+              </a:ext>
+            </a:extLst>
+          </p:cNvPr>
+          <p:cNvSpPr>
+            <a:spLocks xmlns:a="http://schemas.openxmlformats.org/drawingml/2006/main" noGrp="1"/>
+          </p:cNvSpPr>
+          <p:nvPr/>
+        </p:nvSpPr>
+        <p:spPr>
+          <a:xfrm xmlns:a="http://schemas.openxmlformats.org/drawingml/2006/main">
+            <a:off x="5989320" y="1965960"/>
+            <a:ext cx="4892040" cy="2743200"/>
+          </a:xfrm>
+          <a:prstGeom xmlns:a="http://schemas.openxmlformats.org/drawingml/2006/main" prst="roundRect">
+            <a:avLst>
+              <a:gd name="adj" fmla="val 6000"/>
+            </a:avLst>
+          </a:prstGeom>
+          <a:solidFill xmlns:a="http://schemas.openxmlformats.org/drawingml/2006/main">
+            <a:srgbClr val="161E2A"/>
+          </a:solidFill>
+          <a:ln xmlns:a="http://schemas.openxmlformats.org/drawingml/2006/main" w="12700">
+            <a:solidFill>
+              <a:srgbClr val="2A3647"/>
+            </a:solidFill>
+          </a:ln>
+        </p:spPr>
+        <p:style>
+          <a:lnRef xmlns:a="http://schemas.openxmlformats.org/drawingml/2006/main" idx="1">
+            <a:schemeClr val="accent1"/>
+          </a:lnRef>
+          <a:fillRef xmlns:a="http://schemas.openxmlformats.org/drawingml/2006/main" idx="3">
+            <a:schemeClr val="accent1"/>
+          </a:fillRef>
+          <a:effectRef xmlns:a="http://schemas.openxmlformats.org/drawingml/2006/main" idx="2">
+            <a:schemeClr val="accent1"/>
+          </a:effectRef>
+          <a:fontRef xmlns:a="http://schemas.openxmlformats.org/drawingml/2006/main" idx="minor">
+            <a:schemeClr val="lt1"/>
+          </a:fontRef>
+        </p:style>
+        <p:txBody>
+          <a:bodyPr xmlns:a="http://schemas.openxmlformats.org/drawingml/2006/main" anchor="ctr"/>
+          <a:lstStyle xmlns:a="http://schemas.openxmlformats.org/drawingml/2006/main"/>
+          <a:p xmlns:a="http://schemas.openxmlformats.org/drawingml/2006/main">
+            <a:pPr algn="ctr">
+              <a:buNone/>
+            </a:pPr>
+          </a:p>
+        </p:txBody>
+      </p:sp>
+      <p:sp>
+        <p:nvSpPr>
+          <p:cNvPr id="18" name="TextBox 17">
+            <a:extLst xmlns:a="http://schemas.openxmlformats.org/drawingml/2006/main">
+              <a:ext uri="{FF2B5EF4-FFF2-40B4-BE49-F238E27FC236}">
+                <a16:creationId xmlns:a16="http://schemas.microsoft.com/office/drawing/2014/main" id="{F5F1A653-6EF5-4D25-AB6F-2B2CF22A6A5A}"/>
+              </a:ext>
+            </a:extLst>
+          </p:cNvPr>
+          <p:cNvSpPr>
+            <a:spLocks xmlns:a="http://schemas.openxmlformats.org/drawingml/2006/main" noGrp="1"/>
+          </p:cNvSpPr>
+          <p:nvPr/>
+        </p:nvSpPr>
+        <p:spPr>
+          <a:xfrm xmlns:a="http://schemas.openxmlformats.org/drawingml/2006/main">
+            <a:off x="6309360" y="2212848"/>
+            <a:ext cx="4114800" cy="274320"/>
+          </a:xfrm>
+          <a:prstGeom xmlns:a="http://schemas.openxmlformats.org/drawingml/2006/main" prst="rect">
+            <a:avLst/>
+          </a:prstGeom>
+          <a:noFill xmlns:a="http://schemas.openxmlformats.org/drawingml/2006/main"/>
+        </p:spPr>
+        <p:txBody>
+          <a:bodyPr xmlns:a="http://schemas.openxmlformats.org/drawingml/2006/main" wrap="square" lIns="0" tIns="0" rIns="0" bIns="0" anchor="t">
+            <a:spAutoFit/>
+          </a:bodyPr>
+          <a:lstStyle xmlns:a="http://schemas.openxmlformats.org/drawingml/2006/main"/>
+          <a:p xmlns:a="http://schemas.openxmlformats.org/drawingml/2006/main">
+            <a:pPr algn="l">
+              <a:buNone/>
+            </a:pPr>
+            <a:r>
+              <a:rPr sz="1100" b="1" i="0">
+                <a:solidFill>
+                  <a:srgbClr val="FB7185"/>
+                </a:solidFill>
+                <a:latin typeface="Arial"/>
+                <a:ea typeface="Arial"/>
+                <a:cs typeface="Arial"/>
+              </a:rPr>
+              <a:t>NOT ENFORCED — AND WE SAY SO</a:t>
+            </a:r>
+          </a:p>
+        </p:txBody>
+      </p:sp>
+      <p:sp>
+        <p:nvSpPr>
+          <p:cNvPr id="19" name="Oval 18">
+            <a:extLst xmlns:a="http://schemas.openxmlformats.org/drawingml/2006/main">
+              <a:ext uri="{FF2B5EF4-FFF2-40B4-BE49-F238E27FC236}">
+                <a16:creationId xmlns:a16="http://schemas.microsoft.com/office/drawing/2014/main" id="{A41917CB-7E72-475E-84DB-16AA03FF8232}"/>
+              </a:ext>
+            </a:extLst>
+          </p:cNvPr>
+          <p:cNvSpPr>
+            <a:spLocks xmlns:a="http://schemas.openxmlformats.org/drawingml/2006/main" noGrp="1"/>
+          </p:cNvSpPr>
+          <p:nvPr/>
+        </p:nvSpPr>
+        <p:spPr>
+          <a:xfrm xmlns:a="http://schemas.openxmlformats.org/drawingml/2006/main">
+            <a:off x="6309360" y="2660904"/>
+            <a:ext cx="100584" cy="100584"/>
+          </a:xfrm>
+          <a:prstGeom xmlns:a="http://schemas.openxmlformats.org/drawingml/2006/main" prst="ellipse">
+            <a:avLst/>
+          </a:prstGeom>
+          <a:solidFill xmlns:a="http://schemas.openxmlformats.org/drawingml/2006/main">
+            <a:srgbClr val="FB7185"/>
+          </a:solidFill>
+          <a:ln xmlns:a="http://schemas.openxmlformats.org/drawingml/2006/main">
+            <a:noFill/>
+          </a:ln>
+        </p:spPr>
+        <p:style>
+          <a:lnRef xmlns:a="http://schemas.openxmlformats.org/drawingml/2006/main" idx="1">
+            <a:schemeClr val="accent1"/>
+          </a:lnRef>
+          <a:fillRef xmlns:a="http://schemas.openxmlformats.org/drawingml/2006/main" idx="3">
+            <a:schemeClr val="accent1"/>
+          </a:fillRef>
+          <a:effectRef xmlns:a="http://schemas.openxmlformats.org/drawingml/2006/main" idx="2">
+            <a:schemeClr val="accent1"/>
+          </a:effectRef>
+          <a:fontRef xmlns:a="http://schemas.openxmlformats.org/drawingml/2006/main" idx="minor">
+            <a:schemeClr val="lt1"/>
+          </a:fontRef>
+        </p:style>
+        <p:txBody>
+          <a:bodyPr xmlns:a="http://schemas.openxmlformats.org/drawingml/2006/main" anchor="ctr"/>
+          <a:lstStyle xmlns:a="http://schemas.openxmlformats.org/drawingml/2006/main"/>
+          <a:p xmlns:a="http://schemas.openxmlformats.org/drawingml/2006/main">
+            <a:pPr algn="ctr">
+              <a:buNone/>
+            </a:pPr>
+          </a:p>
+        </p:txBody>
+      </p:sp>
+      <p:sp>
+        <p:nvSpPr>
+          <p:cNvPr id="20" name="TextBox 19">
+            <a:extLst xmlns:a="http://schemas.openxmlformats.org/drawingml/2006/main">
+              <a:ext uri="{FF2B5EF4-FFF2-40B4-BE49-F238E27FC236}">
+                <a16:creationId xmlns:a16="http://schemas.microsoft.com/office/drawing/2014/main" id="{5224E462-2B2D-425F-BD2F-3116564C4BD7}"/>
+              </a:ext>
+            </a:extLst>
+          </p:cNvPr>
+          <p:cNvSpPr>
+            <a:spLocks xmlns:a="http://schemas.openxmlformats.org/drawingml/2006/main" noGrp="1"/>
+          </p:cNvSpPr>
+          <p:nvPr/>
+        </p:nvSpPr>
+        <p:spPr>
+          <a:xfrm xmlns:a="http://schemas.openxmlformats.org/drawingml/2006/main">
+            <a:off x="6565392" y="2587752"/>
+            <a:ext cx="4114800" cy="548640"/>
+          </a:xfrm>
+          <a:prstGeom xmlns:a="http://schemas.openxmlformats.org/drawingml/2006/main" prst="rect">
+            <a:avLst/>
+          </a:prstGeom>
+          <a:noFill xmlns:a="http://schemas.openxmlformats.org/drawingml/2006/main"/>
+        </p:spPr>
+        <p:txBody>
+          <a:bodyPr xmlns:a="http://schemas.openxmlformats.org/drawingml/2006/main" wrap="square" lIns="0" tIns="0" rIns="0" bIns="0" anchor="t">
+            <a:spAutoFit/>
+          </a:bodyPr>
+          <a:lstStyle xmlns:a="http://schemas.openxmlformats.org/drawingml/2006/main"/>
+          <a:p xmlns:a="http://schemas.openxmlformats.org/drawingml/2006/main">
+            <a:pPr algn="l">
+              <a:buNone/>
+            </a:pPr>
+            <a:r>
+              <a:rPr sz="1250" b="0" i="0">
+                <a:solidFill>
+                  <a:srgbClr val="E8EDF4"/>
+                </a:solidFill>
+                <a:latin typeface="Arial"/>
+                <a:ea typeface="Arial"/>
+                <a:cs typeface="Arial"/>
+              </a:rPr>
+              <a:t>Whether the signed PO value matches
+the real invoice. No contract can.</a:t>
+            </a:r>
+          </a:p>
+        </p:txBody>
+      </p:sp>
+      <p:sp>
+        <p:nvSpPr>
+          <p:cNvPr id="21" name="Oval 20">
+            <a:extLst xmlns:a="http://schemas.openxmlformats.org/drawingml/2006/main">
+              <a:ext uri="{FF2B5EF4-FFF2-40B4-BE49-F238E27FC236}">
+                <a16:creationId xmlns:a16="http://schemas.microsoft.com/office/drawing/2014/main" id="{5891B326-7F0C-4D0B-A6CC-EECDCF683E79}"/>
+              </a:ext>
+            </a:extLst>
+          </p:cNvPr>
+          <p:cNvSpPr>
+            <a:spLocks xmlns:a="http://schemas.openxmlformats.org/drawingml/2006/main" noGrp="1"/>
+          </p:cNvSpPr>
+          <p:nvPr/>
+        </p:nvSpPr>
+        <p:spPr>
+          <a:xfrm xmlns:a="http://schemas.openxmlformats.org/drawingml/2006/main">
+            <a:off x="6309360" y="3227832"/>
+            <a:ext cx="100584" cy="100584"/>
+          </a:xfrm>
+          <a:prstGeom xmlns:a="http://schemas.openxmlformats.org/drawingml/2006/main" prst="ellipse">
+            <a:avLst/>
+          </a:prstGeom>
+          <a:solidFill xmlns:a="http://schemas.openxmlformats.org/drawingml/2006/main">
+            <a:srgbClr val="FB7185"/>
+          </a:solidFill>
+          <a:ln xmlns:a="http://schemas.openxmlformats.org/drawingml/2006/main">
+            <a:noFill/>
+          </a:ln>
+        </p:spPr>
+        <p:style>
+          <a:lnRef xmlns:a="http://schemas.openxmlformats.org/drawingml/2006/main" idx="1">
+            <a:schemeClr val="accent1"/>
+          </a:lnRef>
+          <a:fillRef xmlns:a="http://schemas.openxmlformats.org/drawingml/2006/main" idx="3">
+            <a:schemeClr val="accent1"/>
+          </a:fillRef>
+          <a:effectRef xmlns:a="http://schemas.openxmlformats.org/drawingml/2006/main" idx="2">
+            <a:schemeClr val="accent1"/>
+          </a:effectRef>
+          <a:fontRef xmlns:a="http://schemas.openxmlformats.org/drawingml/2006/main" idx="minor">
+            <a:schemeClr val="lt1"/>
+          </a:fontRef>
+        </p:style>
+        <p:txBody>
+          <a:bodyPr xmlns:a="http://schemas.openxmlformats.org/drawingml/2006/main" anchor="ctr"/>
+          <a:lstStyle xmlns:a="http://schemas.openxmlformats.org/drawingml/2006/main"/>
+          <a:p xmlns:a="http://schemas.openxmlformats.org/drawingml/2006/main">
+            <a:pPr algn="ctr">
+              <a:buNone/>
+            </a:pPr>
+          </a:p>
+        </p:txBody>
+      </p:sp>
+      <p:sp>
+        <p:nvSpPr>
+          <p:cNvPr id="22" name="TextBox 21">
+            <a:extLst xmlns:a="http://schemas.openxmlformats.org/drawingml/2006/main">
+              <a:ext uri="{FF2B5EF4-FFF2-40B4-BE49-F238E27FC236}">
+                <a16:creationId xmlns:a16="http://schemas.microsoft.com/office/drawing/2014/main" id="{6CB85F0C-E4FD-4471-8333-E39FAD9BBC00}"/>
+              </a:ext>
+            </a:extLst>
+          </p:cNvPr>
+          <p:cNvSpPr>
+            <a:spLocks xmlns:a="http://schemas.openxmlformats.org/drawingml/2006/main" noGrp="1"/>
+          </p:cNvSpPr>
+          <p:nvPr/>
+        </p:nvSpPr>
+        <p:spPr>
+          <a:xfrm xmlns:a="http://schemas.openxmlformats.org/drawingml/2006/main">
+            <a:off x="6565392" y="3154680"/>
+            <a:ext cx="4114800" cy="548640"/>
+          </a:xfrm>
+          <a:prstGeom xmlns:a="http://schemas.openxmlformats.org/drawingml/2006/main" prst="rect">
+            <a:avLst/>
+          </a:prstGeom>
+          <a:noFill xmlns:a="http://schemas.openxmlformats.org/drawingml/2006/main"/>
+        </p:spPr>
+        <p:txBody>
+          <a:bodyPr xmlns:a="http://schemas.openxmlformats.org/drawingml/2006/main" wrap="square" lIns="0" tIns="0" rIns="0" bIns="0" anchor="t">
+            <a:spAutoFit/>
+          </a:bodyPr>
+          <a:lstStyle xmlns:a="http://schemas.openxmlformats.org/drawingml/2006/main"/>
+          <a:p xmlns:a="http://schemas.openxmlformats.org/drawingml/2006/main">
+            <a:pPr algn="l">
+              <a:buNone/>
+            </a:pPr>
+            <a:r>
+              <a:rPr sz="1250" b="0" i="0">
+                <a:solidFill>
+                  <a:srgbClr val="E8EDF4"/>
+                </a:solidFill>
+                <a:latin typeface="Arial"/>
+                <a:ea typeface="Arial"/>
+                <a:cs typeface="Arial"/>
+              </a:rPr>
+              <a:t>Supplier verification. Out of scope,
+and we don’t claim it.</a:t>
+            </a:r>
+          </a:p>
+        </p:txBody>
+      </p:sp>
+      <p:sp>
+        <p:nvSpPr>
+          <p:cNvPr id="23" name="Oval 22">
+            <a:extLst xmlns:a="http://schemas.openxmlformats.org/drawingml/2006/main">
+              <a:ext uri="{FF2B5EF4-FFF2-40B4-BE49-F238E27FC236}">
+                <a16:creationId xmlns:a16="http://schemas.microsoft.com/office/drawing/2014/main" id="{49D58B91-9ACF-4F41-A2BC-12F4F9361CA1}"/>
+              </a:ext>
+            </a:extLst>
+          </p:cNvPr>
+          <p:cNvSpPr>
+            <a:spLocks xmlns:a="http://schemas.openxmlformats.org/drawingml/2006/main" noGrp="1"/>
+          </p:cNvSpPr>
+          <p:nvPr/>
+        </p:nvSpPr>
+        <p:spPr>
+          <a:xfrm xmlns:a="http://schemas.openxmlformats.org/drawingml/2006/main">
+            <a:off x="6309360" y="3794759"/>
+            <a:ext cx="100584" cy="100584"/>
+          </a:xfrm>
+          <a:prstGeom xmlns:a="http://schemas.openxmlformats.org/drawingml/2006/main" prst="ellipse">
+            <a:avLst/>
+          </a:prstGeom>
+          <a:solidFill xmlns:a="http://schemas.openxmlformats.org/drawingml/2006/main">
+            <a:srgbClr val="FB7185"/>
+          </a:solidFill>
+          <a:ln xmlns:a="http://schemas.openxmlformats.org/drawingml/2006/main">
+            <a:noFill/>
+          </a:ln>
+        </p:spPr>
+        <p:style>
+          <a:lnRef xmlns:a="http://schemas.openxmlformats.org/drawingml/2006/main" idx="1">
+            <a:schemeClr val="accent1"/>
+          </a:lnRef>
+          <a:fillRef xmlns:a="http://schemas.openxmlformats.org/drawingml/2006/main" idx="3">
+            <a:schemeClr val="accent1"/>
+          </a:fillRef>
+          <a:effectRef xmlns:a="http://schemas.openxmlformats.org/drawingml/2006/main" idx="2">
+            <a:schemeClr val="accent1"/>
+          </a:effectRef>
+          <a:fontRef xmlns:a="http://schemas.openxmlformats.org/drawingml/2006/main" idx="minor">
+            <a:schemeClr val="lt1"/>
+          </a:fontRef>
+        </p:style>
+        <p:txBody>
+          <a:bodyPr xmlns:a="http://schemas.openxmlformats.org/drawingml/2006/main" anchor="ctr"/>
+          <a:lstStyle xmlns:a="http://schemas.openxmlformats.org/drawingml/2006/main"/>
+          <a:p xmlns:a="http://schemas.openxmlformats.org/drawingml/2006/main">
+            <a:pPr algn="ctr">
+              <a:buNone/>
+            </a:pPr>
+          </a:p>
+        </p:txBody>
+      </p:sp>
+      <p:sp>
+        <p:nvSpPr>
+          <p:cNvPr id="24" name="TextBox 23">
+            <a:extLst xmlns:a="http://schemas.openxmlformats.org/drawingml/2006/main">
+              <a:ext uri="{FF2B5EF4-FFF2-40B4-BE49-F238E27FC236}">
+                <a16:creationId xmlns:a16="http://schemas.microsoft.com/office/drawing/2014/main" id="{F77D094F-94AA-4E44-A1E1-3292D5047144}"/>
+              </a:ext>
+            </a:extLst>
+          </p:cNvPr>
+          <p:cNvSpPr>
+            <a:spLocks xmlns:a="http://schemas.openxmlformats.org/drawingml/2006/main" noGrp="1"/>
+          </p:cNvSpPr>
+          <p:nvPr/>
+        </p:nvSpPr>
+        <p:spPr>
+          <a:xfrm xmlns:a="http://schemas.openxmlformats.org/drawingml/2006/main">
+            <a:off x="6565392" y="3721608"/>
+            <a:ext cx="4114800" cy="548640"/>
+          </a:xfrm>
+          <a:prstGeom xmlns:a="http://schemas.openxmlformats.org/drawingml/2006/main" prst="rect">
+            <a:avLst/>
+          </a:prstGeom>
+          <a:noFill xmlns:a="http://schemas.openxmlformats.org/drawingml/2006/main"/>
+        </p:spPr>
+        <p:txBody>
+          <a:bodyPr xmlns:a="http://schemas.openxmlformats.org/drawingml/2006/main" wrap="square" lIns="0" tIns="0" rIns="0" bIns="0" anchor="t">
+            <a:spAutoFit/>
+          </a:bodyPr>
+          <a:lstStyle xmlns:a="http://schemas.openxmlformats.org/drawingml/2006/main"/>
+          <a:p xmlns:a="http://schemas.openxmlformats.org/drawingml/2006/main">
+            <a:pPr algn="l">
+              <a:buNone/>
+            </a:pPr>
+            <a:r>
+              <a:rPr sz="1250" b="0" i="0">
+                <a:solidFill>
+                  <a:srgbClr val="E8EDF4"/>
+                </a:solidFill>
+                <a:latin typeface="Arial"/>
+                <a:ea typeface="Arial"/>
+                <a:cs typeface="Arial"/>
+              </a:rPr>
+              <a:t>Rain sandbox authentication is live.
+No live issuance or settlement.</a:t>
+            </a:r>
+          </a:p>
+        </p:txBody>
+      </p:sp>
+      <p:sp>
+        <p:nvSpPr>
+          <p:cNvPr id="25" name="Rounded Rectangle 24">
+            <a:extLst xmlns:a="http://schemas.openxmlformats.org/drawingml/2006/main">
+              <a:ext uri="{FF2B5EF4-FFF2-40B4-BE49-F238E27FC236}">
+                <a16:creationId xmlns:a16="http://schemas.microsoft.com/office/drawing/2014/main" id="{6A300827-5EDE-4115-9A58-0EE17627F972}"/>
+              </a:ext>
+            </a:extLst>
+          </p:cNvPr>
+          <p:cNvSpPr>
+            <a:spLocks xmlns:a="http://schemas.openxmlformats.org/drawingml/2006/main" noGrp="1"/>
+          </p:cNvSpPr>
+          <p:nvPr/>
+        </p:nvSpPr>
+        <p:spPr>
+          <a:xfrm xmlns:a="http://schemas.openxmlformats.org/drawingml/2006/main">
+            <a:off x="777240" y="5029200"/>
+            <a:ext cx="10104120" cy="1051560"/>
+          </a:xfrm>
+          <a:prstGeom xmlns:a="http://schemas.openxmlformats.org/drawingml/2006/main" prst="roundRect">
+            <a:avLst>
+              <a:gd name="adj" fmla="val 6000"/>
+            </a:avLst>
+          </a:prstGeom>
+          <a:solidFill xmlns:a="http://schemas.openxmlformats.org/drawingml/2006/main">
+            <a:srgbClr val="182011"/>
+          </a:solidFill>
+          <a:ln xmlns:a="http://schemas.openxmlformats.org/drawingml/2006/main" w="12700">
+            <a:solidFill>
+              <a:srgbClr val="3D4A1E"/>
+            </a:solidFill>
+          </a:ln>
+        </p:spPr>
+        <p:style>
+          <a:lnRef xmlns:a="http://schemas.openxmlformats.org/drawingml/2006/main" idx="1">
+            <a:schemeClr val="accent1"/>
+          </a:lnRef>
+          <a:fillRef xmlns:a="http://schemas.openxmlformats.org/drawingml/2006/main" idx="3">
+            <a:schemeClr val="accent1"/>
+          </a:fillRef>
+          <a:effectRef xmlns:a="http://schemas.openxmlformats.org/drawingml/2006/main" idx="2">
+            <a:schemeClr val="accent1"/>
+          </a:effectRef>
+          <a:fontRef xmlns:a="http://schemas.openxmlformats.org/drawingml/2006/main" idx="minor">
+            <a:schemeClr val="lt1"/>
+          </a:fontRef>
+        </p:style>
+        <p:txBody>
+          <a:bodyPr xmlns:a="http://schemas.openxmlformats.org/drawingml/2006/main" anchor="ctr"/>
+          <a:lstStyle xmlns:a="http://schemas.openxmlformats.org/drawingml/2006/main"/>
+          <a:p xmlns:a="http://schemas.openxmlformats.org/drawingml/2006/main">
+            <a:pPr algn="ctr">
+              <a:buNone/>
+            </a:pPr>
+          </a:p>
+        </p:txBody>
+      </p:sp>
+      <p:sp>
+        <p:nvSpPr>
+          <p:cNvPr id="26" name="TextBox 25">
+            <a:extLst xmlns:a="http://schemas.openxmlformats.org/drawingml/2006/main">
+              <a:ext uri="{FF2B5EF4-FFF2-40B4-BE49-F238E27FC236}">
+                <a16:creationId xmlns:a16="http://schemas.microsoft.com/office/drawing/2014/main" id="{75ECB08C-3861-4A67-A674-B0A15ED7722D}"/>
+              </a:ext>
+            </a:extLst>
+          </p:cNvPr>
+          <p:cNvSpPr>
+            <a:spLocks xmlns:a="http://schemas.openxmlformats.org/drawingml/2006/main" noGrp="1"/>
+          </p:cNvSpPr>
+          <p:nvPr/>
+        </p:nvSpPr>
+        <p:spPr>
+          <a:xfrm xmlns:a="http://schemas.openxmlformats.org/drawingml/2006/main">
+            <a:off x="1097280" y="5257800"/>
+            <a:ext cx="9509760" cy="685800"/>
+          </a:xfrm>
+          <a:prstGeom xmlns:a="http://schemas.openxmlformats.org/drawingml/2006/main" prst="rect">
+            <a:avLst/>
+          </a:prstGeom>
+          <a:noFill xmlns:a="http://schemas.openxmlformats.org/drawingml/2006/main"/>
+        </p:spPr>
+        <p:txBody>
+          <a:bodyPr xmlns:a="http://schemas.openxmlformats.org/drawingml/2006/main" wrap="square" lIns="0" tIns="0" rIns="0" bIns="0">
+            <a:spAutoFit/>
+          </a:bodyPr>
+          <a:lstStyle xmlns:a="http://schemas.openxmlformats.org/drawingml/2006/main"/>
+          <a:p xmlns:a="http://schemas.openxmlformats.org/drawingml/2006/main">
+            <a:pPr algn="l">
+              <a:spcAft>
+                <a:spcPts val="0"/>
+              </a:spcAft>
+              <a:buNone/>
+            </a:pPr>
+            <a:r>
+              <a:rPr sz="1350" b="0">
+                <a:solidFill>
+                  <a:srgbClr val="9AA9BE"/>
+                </a:solidFill>
+                <a:latin typeface="Arial"/>
+                <a:ea typeface="Arial"/>
+                <a:cs typeface="Arial"/>
+              </a:rPr>
+              <a:t>Live Rain GET: HTTP 200. For blocked payments, </a:t>
+            </a:r>
+            <a:r>
+              <a:rPr sz="1350" b="1">
+                <a:solidFill>
+                  <a:srgbClr val="D9FF55"/>
+                </a:solidFill>
+                <a:latin typeface="Arial"/>
+                <a:ea typeface="Arial"/>
+                <a:cs typeface="Arial"/>
+              </a:rPr>
+              <a:t>MockRainAdapter.calls = 0</a:t>
+            </a:r>
+            <a:r>
+              <a:rPr sz="1350" b="0">
+                <a:solidFill>
+                  <a:srgbClr val="9AA9BE"/>
+                </a:solidFill>
+                <a:latin typeface="Arial"/>
+                <a:ea typeface="Arial"/>
+                <a:cs typeface="Arial"/>
+              </a:rPr>
+              <a:t> — Monad remains the gate before mock execution.</a:t>
+            </a:r>
+          </a:p>
+        </p:txBody>
+      </p:sp>
+    </p:spTree>
+    <p:extLst>
+      <p:ext uri="{BB962C8B-B14F-4D97-AF65-F5344CB8AC3E}">
+        <p14:creationId xmlns:p14="http://schemas.microsoft.com/office/powerpoint/2010/main" val="541367755"/>
+      </p:ext>
+    </p:extLst>
+  </p:cSld>
+</p:sld>
+</file>
+
 <file path=ppt/slides/slide2.xml><?xml version="1.0" encoding="utf-8"?>
 <p:sld xmlns:p="http://schemas.openxmlformats.org/presentationml/2006/main">
   <p:cSld>
@@ -7202,10 +10904,10 @@
       </p:grpSpPr>
       <p:sp>
         <p:nvSpPr>
-          <p:cNvPr id="2" name="Rectangle 1">
-            <a:extLst xmlns:a="http://schemas.openxmlformats.org/drawingml/2006/main">
-              <a:ext uri="{FF2B5EF4-FFF2-40B4-BE49-F238E27FC236}">
-                <a16:creationId xmlns:a16="http://schemas.microsoft.com/office/drawing/2014/main" id="{8778AC56-A020-4F4B-8EC9-E333EF639321}"/>
+          <p:cNvPr id="7" name="evidence-background-1">
+            <a:extLst xmlns:a="http://schemas.openxmlformats.org/drawingml/2006/main">
+              <a:ext uri="{FF2B5EF4-FFF2-40B4-BE49-F238E27FC236}">
+                <a16:creationId xmlns:a16="http://schemas.microsoft.com/office/drawing/2014/main" id="{7898AD71-29C6-4540-91F2-7C0BF42D2495}"/>
               </a:ext>
             </a:extLst>
           </p:cNvPr>
@@ -7217,7 +10919,7 @@
         <p:spPr>
           <a:xfrm xmlns:a="http://schemas.openxmlformats.org/drawingml/2006/main">
             <a:off x="0" y="0"/>
-            <a:ext cx="12191695" cy="6858000"/>
+            <a:ext cx="12192000" cy="6858000"/>
           </a:xfrm>
           <a:prstGeom xmlns:a="http://schemas.openxmlformats.org/drawingml/2006/main" prst="rect">
             <a:avLst/>
@@ -7225,1809 +10927,262 @@
           <a:solidFill xmlns:a="http://schemas.openxmlformats.org/drawingml/2006/main">
             <a:srgbClr val="0A0E14"/>
           </a:solidFill>
-          <a:ln xmlns:a="http://schemas.openxmlformats.org/drawingml/2006/main">
-            <a:noFill/>
+          <a:ln xmlns:a="http://schemas.openxmlformats.org/drawingml/2006/main" w="0">
+            <a:solidFill>
+              <a:srgbClr val="0A0E14"/>
+            </a:solidFill>
+            <a:prstDash val="solid"/>
           </a:ln>
         </p:spPr>
-        <p:style>
-          <a:lnRef xmlns:a="http://schemas.openxmlformats.org/drawingml/2006/main" idx="1">
-            <a:schemeClr val="accent1"/>
-          </a:lnRef>
-          <a:fillRef xmlns:a="http://schemas.openxmlformats.org/drawingml/2006/main" idx="3">
-            <a:schemeClr val="accent1"/>
-          </a:fillRef>
-          <a:effectRef xmlns:a="http://schemas.openxmlformats.org/drawingml/2006/main" idx="2">
-            <a:schemeClr val="accent1"/>
-          </a:effectRef>
-          <a:fontRef xmlns:a="http://schemas.openxmlformats.org/drawingml/2006/main" idx="minor">
-            <a:schemeClr val="lt1"/>
-          </a:fontRef>
-        </p:style>
+      </p:sp>
+      <p:sp>
+        <p:nvSpPr>
+          <p:cNvPr id="2" name="evidence-accent-1">
+            <a:extLst xmlns:a="http://schemas.openxmlformats.org/drawingml/2006/main">
+              <a:ext uri="{FF2B5EF4-FFF2-40B4-BE49-F238E27FC236}">
+                <a16:creationId xmlns:a16="http://schemas.microsoft.com/office/drawing/2014/main" id="{B1ECD424-A406-4FA3-9791-65A2A002C727}"/>
+              </a:ext>
+            </a:extLst>
+          </p:cNvPr>
+          <p:cNvSpPr>
+            <a:spLocks xmlns:a="http://schemas.openxmlformats.org/drawingml/2006/main" noGrp="1"/>
+          </p:cNvSpPr>
+          <p:nvPr/>
+        </p:nvSpPr>
+        <p:spPr>
+          <a:xfrm xmlns:a="http://schemas.openxmlformats.org/drawingml/2006/main">
+            <a:off x="685800" y="361950"/>
+            <a:ext cx="1181100" cy="257175"/>
+          </a:xfrm>
+          <a:prstGeom xmlns:a="http://schemas.openxmlformats.org/drawingml/2006/main" prst="roundRect">
+            <a:avLst>
+              <a:gd name="adj" fmla="val 29630"/>
+            </a:avLst>
+          </a:prstGeom>
+          <a:solidFill xmlns:a="http://schemas.openxmlformats.org/drawingml/2006/main">
+            <a:srgbClr val="D7FF43"/>
+          </a:solidFill>
+          <a:ln xmlns:a="http://schemas.openxmlformats.org/drawingml/2006/main" w="0">
+            <a:solidFill>
+              <a:srgbClr val="D7FF43"/>
+            </a:solidFill>
+            <a:prstDash val="solid"/>
+          </a:ln>
+        </p:spPr>
         <p:txBody>
           <a:bodyPr xmlns:a="http://schemas.openxmlformats.org/drawingml/2006/main" anchor="ctr"/>
           <a:lstStyle xmlns:a="http://schemas.openxmlformats.org/drawingml/2006/main"/>
           <a:p xmlns:a="http://schemas.openxmlformats.org/drawingml/2006/main">
             <a:pPr algn="ctr">
-              <a:buNone/>
-            </a:pPr>
-          </a:p>
-        </p:txBody>
-      </p:sp>
-      <p:sp>
-        <p:nvSpPr>
-          <p:cNvPr id="3" name="TextBox 2">
-            <a:extLst xmlns:a="http://schemas.openxmlformats.org/drawingml/2006/main">
-              <a:ext uri="{FF2B5EF4-FFF2-40B4-BE49-F238E27FC236}">
-                <a16:creationId xmlns:a16="http://schemas.microsoft.com/office/drawing/2014/main" id="{DAEADF48-D880-4769-B8A2-13394F7AC580}"/>
-              </a:ext>
-            </a:extLst>
-          </p:cNvPr>
-          <p:cNvSpPr>
-            <a:spLocks xmlns:a="http://schemas.openxmlformats.org/drawingml/2006/main" noGrp="1"/>
-          </p:cNvSpPr>
-          <p:nvPr/>
-        </p:nvSpPr>
-        <p:spPr>
-          <a:xfrm xmlns:a="http://schemas.openxmlformats.org/drawingml/2006/main">
-            <a:off x="777240" y="658368"/>
-            <a:ext cx="5486400" cy="228600"/>
-          </a:xfrm>
-          <a:prstGeom xmlns:a="http://schemas.openxmlformats.org/drawingml/2006/main" prst="rect">
-            <a:avLst/>
-          </a:prstGeom>
-          <a:noFill xmlns:a="http://schemas.openxmlformats.org/drawingml/2006/main"/>
-        </p:spPr>
-        <p:txBody>
-          <a:bodyPr xmlns:a="http://schemas.openxmlformats.org/drawingml/2006/main" wrap="square" lIns="0" tIns="0" rIns="0" bIns="0" anchor="t">
-            <a:spAutoFit/>
-          </a:bodyPr>
-          <a:lstStyle xmlns:a="http://schemas.openxmlformats.org/drawingml/2006/main"/>
-          <a:p xmlns:a="http://schemas.openxmlformats.org/drawingml/2006/main">
-            <a:pPr algn="l">
-              <a:buNone/>
-            </a:pPr>
-            <a:r>
-              <a:rPr sz="1100" b="1" i="0">
-                <a:solidFill>
-                  <a:srgbClr val="D9FF55"/>
+              <a:defRPr sz="900" b="1">
+                <a:solidFill>
+                  <a:srgbClr val="10150E"/>
+                </a:solidFill>
+                <a:latin typeface="Arial"/>
+                <a:ea typeface="Arial"/>
+                <a:cs typeface="Arial"/>
+              </a:defRPr>
+            </a:pPr>
+            <a:r>
+              <a:rPr sz="900" b="1">
+                <a:solidFill>
+                  <a:srgbClr val="10150E"/>
                 </a:solidFill>
                 <a:latin typeface="Arial"/>
                 <a:ea typeface="Arial"/>
                 <a:cs typeface="Arial"/>
               </a:rPr>
-              <a:t>PROOF</a:t>
-            </a:r>
-          </a:p>
-        </p:txBody>
-      </p:sp>
-      <p:sp>
-        <p:nvSpPr>
-          <p:cNvPr id="4" name="TextBox 3">
-            <a:extLst xmlns:a="http://schemas.openxmlformats.org/drawingml/2006/main">
-              <a:ext uri="{FF2B5EF4-FFF2-40B4-BE49-F238E27FC236}">
-                <a16:creationId xmlns:a16="http://schemas.microsoft.com/office/drawing/2014/main" id="{8F34F624-32A1-4B9F-9E44-C24674A66551}"/>
-              </a:ext>
-            </a:extLst>
-          </p:cNvPr>
-          <p:cNvSpPr>
-            <a:spLocks xmlns:a="http://schemas.openxmlformats.org/drawingml/2006/main" noGrp="1"/>
-          </p:cNvSpPr>
-          <p:nvPr/>
-        </p:nvSpPr>
-        <p:spPr>
-          <a:xfrm xmlns:a="http://schemas.openxmlformats.org/drawingml/2006/main">
-            <a:off x="777240" y="960120"/>
-            <a:ext cx="10241280" cy="640080"/>
+              <a:t>DEMO · 01</a:t>
+            </a:r>
+          </a:p>
+        </p:txBody>
+      </p:sp>
+      <p:sp>
+        <p:nvSpPr>
+          <p:cNvPr id="3" name="evidence-title-1">
+            <a:extLst xmlns:a="http://schemas.openxmlformats.org/drawingml/2006/main">
+              <a:ext uri="{FF2B5EF4-FFF2-40B4-BE49-F238E27FC236}">
+                <a16:creationId xmlns:a16="http://schemas.microsoft.com/office/drawing/2014/main" id="{B490851F-AAD5-4CCE-871F-B41D8613652A}"/>
+              </a:ext>
+            </a:extLst>
+          </p:cNvPr>
+          <p:cNvSpPr>
+            <a:spLocks xmlns:a="http://schemas.openxmlformats.org/drawingml/2006/main" noGrp="1"/>
+          </p:cNvSpPr>
+          <p:nvPr/>
+        </p:nvSpPr>
+        <p:spPr>
+          <a:xfrm xmlns:a="http://schemas.openxmlformats.org/drawingml/2006/main">
+            <a:off x="685800" y="714375"/>
+            <a:ext cx="10820400" cy="485775"/>
           </a:xfrm>
           <a:prstGeom xmlns:a="http://schemas.openxmlformats.org/drawingml/2006/main" prst="rect">
             <a:avLst/>
           </a:prstGeom>
-          <a:noFill xmlns:a="http://schemas.openxmlformats.org/drawingml/2006/main"/>
-        </p:spPr>
-        <p:txBody>
-          <a:bodyPr xmlns:a="http://schemas.openxmlformats.org/drawingml/2006/main" wrap="square" lIns="0" tIns="0" rIns="0" bIns="0" anchor="t">
-            <a:spAutoFit/>
-          </a:bodyPr>
-          <a:lstStyle xmlns:a="http://schemas.openxmlformats.org/drawingml/2006/main"/>
-          <a:p xmlns:a="http://schemas.openxmlformats.org/drawingml/2006/main">
-            <a:pPr algn="l">
-              <a:buNone/>
-            </a:pPr>
-            <a:r>
-              <a:rPr sz="3200" b="1" i="0">
-                <a:solidFill>
-                  <a:srgbClr val="E8EDF4"/>
+          <a:solidFill xmlns:a="http://schemas.openxmlformats.org/drawingml/2006/main">
+            <a:srgbClr val="0A0E14"/>
+          </a:solidFill>
+          <a:ln xmlns:a="http://schemas.openxmlformats.org/drawingml/2006/main" w="0">
+            <a:solidFill>
+              <a:srgbClr val="0A0E14"/>
+            </a:solidFill>
+            <a:prstDash val="solid"/>
+          </a:ln>
+        </p:spPr>
+        <p:txBody>
+          <a:bodyPr xmlns:a="http://schemas.openxmlformats.org/drawingml/2006/main"/>
+          <a:lstStyle xmlns:a="http://schemas.openxmlformats.org/drawingml/2006/main"/>
+          <a:p xmlns:a="http://schemas.openxmlformats.org/drawingml/2006/main">
+            <a:pPr>
+              <a:defRPr sz="2850" b="1">
+                <a:solidFill>
+                  <a:srgbClr val="F2F5F8"/>
+                </a:solidFill>
+                <a:latin typeface="Arial"/>
+                <a:ea typeface="Arial"/>
+                <a:cs typeface="Arial"/>
+              </a:defRPr>
+            </a:pPr>
+            <a:r>
+              <a:rPr sz="2850" b="1">
+                <a:solidFill>
+                  <a:srgbClr val="F2F5F8"/>
                 </a:solidFill>
                 <a:latin typeface="Arial"/>
                 <a:ea typeface="Arial"/>
                 <a:cs typeface="Arial"/>
               </a:rPr>
-              <a:t>Not a diagram. Four public transactions.</a:t>
-            </a:r>
-          </a:p>
-        </p:txBody>
-      </p:sp>
-      <p:sp>
-        <p:nvSpPr>
-          <p:cNvPr id="5" name="Rounded Rectangle 4">
-            <a:extLst xmlns:a="http://schemas.openxmlformats.org/drawingml/2006/main">
-              <a:ext uri="{FF2B5EF4-FFF2-40B4-BE49-F238E27FC236}">
-                <a16:creationId xmlns:a16="http://schemas.microsoft.com/office/drawing/2014/main" id="{ACF50DA2-73ED-48E6-9804-F805318EE2F0}"/>
-              </a:ext>
-            </a:extLst>
-          </p:cNvPr>
-          <p:cNvSpPr>
-            <a:spLocks xmlns:a="http://schemas.openxmlformats.org/drawingml/2006/main" noGrp="1"/>
-          </p:cNvSpPr>
-          <p:nvPr/>
-        </p:nvSpPr>
-        <p:spPr>
-          <a:xfrm xmlns:a="http://schemas.openxmlformats.org/drawingml/2006/main">
-            <a:off x="777240" y="1993392"/>
-            <a:ext cx="6949440" cy="731520"/>
-          </a:xfrm>
-          <a:prstGeom xmlns:a="http://schemas.openxmlformats.org/drawingml/2006/main" prst="roundRect">
-            <a:avLst>
-              <a:gd name="adj" fmla="val 6000"/>
-            </a:avLst>
-          </a:prstGeom>
-          <a:solidFill xmlns:a="http://schemas.openxmlformats.org/drawingml/2006/main">
-            <a:srgbClr val="161E2A"/>
-          </a:solidFill>
-          <a:ln xmlns:a="http://schemas.openxmlformats.org/drawingml/2006/main" w="12700">
-            <a:solidFill>
-              <a:srgbClr val="2A3647"/>
-            </a:solidFill>
-          </a:ln>
-        </p:spPr>
-        <p:style>
-          <a:lnRef xmlns:a="http://schemas.openxmlformats.org/drawingml/2006/main" idx="1">
-            <a:schemeClr val="accent1"/>
-          </a:lnRef>
-          <a:fillRef xmlns:a="http://schemas.openxmlformats.org/drawingml/2006/main" idx="3">
-            <a:schemeClr val="accent1"/>
-          </a:fillRef>
-          <a:effectRef xmlns:a="http://schemas.openxmlformats.org/drawingml/2006/main" idx="2">
-            <a:schemeClr val="accent1"/>
-          </a:effectRef>
-          <a:fontRef xmlns:a="http://schemas.openxmlformats.org/drawingml/2006/main" idx="minor">
-            <a:schemeClr val="lt1"/>
-          </a:fontRef>
-        </p:style>
-        <p:txBody>
-          <a:bodyPr xmlns:a="http://schemas.openxmlformats.org/drawingml/2006/main" anchor="ctr"/>
-          <a:lstStyle xmlns:a="http://schemas.openxmlformats.org/drawingml/2006/main"/>
-          <a:p xmlns:a="http://schemas.openxmlformats.org/drawingml/2006/main">
-            <a:pPr algn="ctr">
-              <a:buNone/>
-            </a:pPr>
-          </a:p>
-        </p:txBody>
-      </p:sp>
-      <p:sp>
-        <p:nvSpPr>
-          <p:cNvPr id="6" name="Oval 5">
-            <a:extLst xmlns:a="http://schemas.openxmlformats.org/drawingml/2006/main">
-              <a:ext uri="{FF2B5EF4-FFF2-40B4-BE49-F238E27FC236}">
-                <a16:creationId xmlns:a16="http://schemas.microsoft.com/office/drawing/2014/main" id="{A0A742D0-4639-4FE2-826B-CBA8F2B0ACDC}"/>
-              </a:ext>
-            </a:extLst>
-          </p:cNvPr>
-          <p:cNvSpPr>
-            <a:spLocks xmlns:a="http://schemas.openxmlformats.org/drawingml/2006/main" noGrp="1"/>
-          </p:cNvSpPr>
-          <p:nvPr/>
-        </p:nvSpPr>
-        <p:spPr>
-          <a:xfrm xmlns:a="http://schemas.openxmlformats.org/drawingml/2006/main">
-            <a:off x="1024128" y="2295144"/>
-            <a:ext cx="128016" cy="128016"/>
-          </a:xfrm>
-          <a:prstGeom xmlns:a="http://schemas.openxmlformats.org/drawingml/2006/main" prst="ellipse">
-            <a:avLst/>
-          </a:prstGeom>
-          <a:solidFill xmlns:a="http://schemas.openxmlformats.org/drawingml/2006/main">
-            <a:srgbClr val="9AA9BE"/>
-          </a:solidFill>
-          <a:ln xmlns:a="http://schemas.openxmlformats.org/drawingml/2006/main">
-            <a:noFill/>
-          </a:ln>
-        </p:spPr>
-        <p:style>
-          <a:lnRef xmlns:a="http://schemas.openxmlformats.org/drawingml/2006/main" idx="1">
-            <a:schemeClr val="accent1"/>
-          </a:lnRef>
-          <a:fillRef xmlns:a="http://schemas.openxmlformats.org/drawingml/2006/main" idx="3">
-            <a:schemeClr val="accent1"/>
-          </a:fillRef>
-          <a:effectRef xmlns:a="http://schemas.openxmlformats.org/drawingml/2006/main" idx="2">
-            <a:schemeClr val="accent1"/>
-          </a:effectRef>
-          <a:fontRef xmlns:a="http://schemas.openxmlformats.org/drawingml/2006/main" idx="minor">
-            <a:schemeClr val="lt1"/>
-          </a:fontRef>
-        </p:style>
-        <p:txBody>
-          <a:bodyPr xmlns:a="http://schemas.openxmlformats.org/drawingml/2006/main" anchor="ctr"/>
-          <a:lstStyle xmlns:a="http://schemas.openxmlformats.org/drawingml/2006/main"/>
-          <a:p xmlns:a="http://schemas.openxmlformats.org/drawingml/2006/main">
-            <a:pPr algn="ctr">
-              <a:buNone/>
-            </a:pPr>
-          </a:p>
-        </p:txBody>
-      </p:sp>
-      <p:sp>
-        <p:nvSpPr>
-          <p:cNvPr id="7" name="TextBox 6">
-            <a:extLst xmlns:a="http://schemas.openxmlformats.org/drawingml/2006/main">
-              <a:ext uri="{FF2B5EF4-FFF2-40B4-BE49-F238E27FC236}">
-                <a16:creationId xmlns:a16="http://schemas.microsoft.com/office/drawing/2014/main" id="{A2EB9DAC-D611-4785-8AF7-DD59E0D991E7}"/>
-              </a:ext>
-            </a:extLst>
-          </p:cNvPr>
-          <p:cNvSpPr>
-            <a:spLocks xmlns:a="http://schemas.openxmlformats.org/drawingml/2006/main" noGrp="1"/>
-          </p:cNvSpPr>
-          <p:nvPr/>
-        </p:nvSpPr>
-        <p:spPr>
-          <a:xfrm xmlns:a="http://schemas.openxmlformats.org/drawingml/2006/main">
-            <a:off x="1298448" y="2130552"/>
-            <a:ext cx="2926080" cy="274320"/>
+              <a:t>Compare suppliers</a:t>
+            </a:r>
+          </a:p>
+        </p:txBody>
+      </p:sp>
+      <p:sp>
+        <p:nvSpPr>
+          <p:cNvPr id="4" name="evidence-subtitle-1">
+            <a:extLst xmlns:a="http://schemas.openxmlformats.org/drawingml/2006/main">
+              <a:ext uri="{FF2B5EF4-FFF2-40B4-BE49-F238E27FC236}">
+                <a16:creationId xmlns:a16="http://schemas.microsoft.com/office/drawing/2014/main" id="{9F5B7CF6-F56C-46D6-9F2A-A8737B1ED8D7}"/>
+              </a:ext>
+            </a:extLst>
+          </p:cNvPr>
+          <p:cNvSpPr>
+            <a:spLocks xmlns:a="http://schemas.openxmlformats.org/drawingml/2006/main" noGrp="1"/>
+          </p:cNvSpPr>
+          <p:nvPr/>
+        </p:nvSpPr>
+        <p:spPr>
+          <a:xfrm xmlns:a="http://schemas.openxmlformats.org/drawingml/2006/main">
+            <a:off x="685800" y="1209675"/>
+            <a:ext cx="10820400" cy="295275"/>
           </a:xfrm>
           <a:prstGeom xmlns:a="http://schemas.openxmlformats.org/drawingml/2006/main" prst="rect">
             <a:avLst/>
           </a:prstGeom>
-          <a:noFill xmlns:a="http://schemas.openxmlformats.org/drawingml/2006/main"/>
-        </p:spPr>
-        <p:txBody>
-          <a:bodyPr xmlns:a="http://schemas.openxmlformats.org/drawingml/2006/main" wrap="square" lIns="0" tIns="0" rIns="0" bIns="0" anchor="t">
-            <a:spAutoFit/>
-          </a:bodyPr>
-          <a:lstStyle xmlns:a="http://schemas.openxmlformats.org/drawingml/2006/main"/>
-          <a:p xmlns:a="http://schemas.openxmlformats.org/drawingml/2006/main">
-            <a:pPr algn="l">
-              <a:buNone/>
-            </a:pPr>
-            <a:r>
-              <a:rPr sz="1300" b="1" i="0">
-                <a:solidFill>
-                  <a:srgbClr val="E8EDF4"/>
+          <a:solidFill xmlns:a="http://schemas.openxmlformats.org/drawingml/2006/main">
+            <a:srgbClr val="0A0E14"/>
+          </a:solidFill>
+          <a:ln xmlns:a="http://schemas.openxmlformats.org/drawingml/2006/main" w="0">
+            <a:solidFill>
+              <a:srgbClr val="0A0E14"/>
+            </a:solidFill>
+            <a:prstDash val="solid"/>
+          </a:ln>
+        </p:spPr>
+        <p:txBody>
+          <a:bodyPr xmlns:a="http://schemas.openxmlformats.org/drawingml/2006/main"/>
+          <a:lstStyle xmlns:a="http://schemas.openxmlformats.org/drawingml/2006/main"/>
+          <a:p xmlns:a="http://schemas.openxmlformats.org/drawingml/2006/main">
+            <a:pPr>
+              <a:defRPr sz="1275">
+                <a:solidFill>
+                  <a:srgbClr val="9BACBE"/>
+                </a:solidFill>
+                <a:latin typeface="Arial"/>
+                <a:ea typeface="Arial"/>
+                <a:cs typeface="Arial"/>
+              </a:defRPr>
+            </a:pPr>
+            <a:r>
+              <a:rPr sz="1275">
+                <a:solidFill>
+                  <a:srgbClr val="9BACBE"/>
                 </a:solidFill>
                 <a:latin typeface="Arial"/>
                 <a:ea typeface="Arial"/>
                 <a:cs typeface="Arial"/>
               </a:rPr>
-              <a:t>Registry deployed</a:t>
-            </a:r>
-          </a:p>
-        </p:txBody>
-      </p:sp>
-      <p:sp>
-        <p:nvSpPr>
-          <p:cNvPr id="8" name="TextBox 7">
-            <a:extLst xmlns:a="http://schemas.openxmlformats.org/drawingml/2006/main">
-              <a:ext uri="{FF2B5EF4-FFF2-40B4-BE49-F238E27FC236}">
-                <a16:creationId xmlns:a16="http://schemas.microsoft.com/office/drawing/2014/main" id="{4C62785E-2586-41B7-83F3-FFAE73FEF8FD}"/>
-              </a:ext>
-            </a:extLst>
-          </p:cNvPr>
-          <p:cNvSpPr>
-            <a:spLocks xmlns:a="http://schemas.openxmlformats.org/drawingml/2006/main" noGrp="1"/>
-          </p:cNvSpPr>
-          <p:nvPr/>
-        </p:nvSpPr>
-        <p:spPr>
-          <a:xfrm xmlns:a="http://schemas.openxmlformats.org/drawingml/2006/main">
-            <a:off x="1298448" y="2404872"/>
-            <a:ext cx="4572000" cy="237744"/>
-          </a:xfrm>
-          <a:prstGeom xmlns:a="http://schemas.openxmlformats.org/drawingml/2006/main" prst="rect">
-            <a:avLst/>
-          </a:prstGeom>
-          <a:noFill xmlns:a="http://schemas.openxmlformats.org/drawingml/2006/main"/>
-        </p:spPr>
-        <p:txBody>
-          <a:bodyPr xmlns:a="http://schemas.openxmlformats.org/drawingml/2006/main" wrap="square" lIns="0" tIns="0" rIns="0" bIns="0" anchor="t">
-            <a:spAutoFit/>
-          </a:bodyPr>
-          <a:lstStyle xmlns:a="http://schemas.openxmlformats.org/drawingml/2006/main"/>
-          <a:p xmlns:a="http://schemas.openxmlformats.org/drawingml/2006/main">
-            <a:pPr algn="l">
-              <a:buNone/>
-            </a:pPr>
-            <a:r>
-              <a:rPr sz="1050" b="0" i="0">
-                <a:solidFill>
-                  <a:srgbClr val="8A9CB5"/>
-                </a:solidFill>
-                <a:latin typeface="Arial"/>
-                <a:ea typeface="Arial"/>
-                <a:cs typeface="Arial"/>
-              </a:rPr>
-              <a:t>block 52019868</a:t>
-            </a:r>
-          </a:p>
-        </p:txBody>
-      </p:sp>
-      <p:sp>
-        <p:nvSpPr>
-          <p:cNvPr id="9" name="TextBox 8">
-            <a:extLst xmlns:a="http://schemas.openxmlformats.org/drawingml/2006/main">
-              <a:ext uri="{FF2B5EF4-FFF2-40B4-BE49-F238E27FC236}">
-                <a16:creationId xmlns:a16="http://schemas.microsoft.com/office/drawing/2014/main" id="{3C4E33EA-788E-46BC-9F3F-27FC6787DF64}"/>
-              </a:ext>
-            </a:extLst>
-          </p:cNvPr>
-          <p:cNvSpPr>
-            <a:spLocks xmlns:a="http://schemas.openxmlformats.org/drawingml/2006/main" noGrp="1"/>
-          </p:cNvSpPr>
-          <p:nvPr/>
-        </p:nvSpPr>
-        <p:spPr>
-          <a:xfrm xmlns:a="http://schemas.openxmlformats.org/drawingml/2006/main">
-            <a:off x="5989320" y="2249424"/>
-            <a:ext cx="1600200" cy="274320"/>
-          </a:xfrm>
-          <a:prstGeom xmlns:a="http://schemas.openxmlformats.org/drawingml/2006/main" prst="rect">
-            <a:avLst/>
-          </a:prstGeom>
-          <a:noFill xmlns:a="http://schemas.openxmlformats.org/drawingml/2006/main"/>
-        </p:spPr>
-        <p:txBody>
-          <a:bodyPr xmlns:a="http://schemas.openxmlformats.org/drawingml/2006/main" wrap="square" lIns="0" tIns="0" rIns="0" bIns="0" anchor="t">
-            <a:spAutoFit/>
-          </a:bodyPr>
-          <a:lstStyle xmlns:a="http://schemas.openxmlformats.org/drawingml/2006/main"/>
-          <a:p xmlns:a="http://schemas.openxmlformats.org/drawingml/2006/main">
-            <a:pPr algn="r">
-              <a:buNone/>
-            </a:pPr>
-            <a:r>
-              <a:rPr sz="1150" b="1" i="0">
-                <a:solidFill>
-                  <a:srgbClr val="9AA9BE"/>
-                </a:solidFill>
-                <a:latin typeface="Courier New"/>
-                <a:ea typeface="Courier New"/>
-                <a:cs typeface="Courier New"/>
-              </a:rPr>
-              <a:t>0x4fba…4a41</a:t>
-            </a:r>
-          </a:p>
-        </p:txBody>
-      </p:sp>
-      <p:sp>
-        <p:nvSpPr>
-          <p:cNvPr id="10" name="Rounded Rectangle 9">
-            <a:extLst xmlns:a="http://schemas.openxmlformats.org/drawingml/2006/main">
-              <a:ext uri="{FF2B5EF4-FFF2-40B4-BE49-F238E27FC236}">
-                <a16:creationId xmlns:a16="http://schemas.microsoft.com/office/drawing/2014/main" id="{6DB54F6D-7332-4900-80AF-F713403834C1}"/>
-              </a:ext>
-            </a:extLst>
-          </p:cNvPr>
-          <p:cNvSpPr>
-            <a:spLocks xmlns:a="http://schemas.openxmlformats.org/drawingml/2006/main" noGrp="1"/>
-          </p:cNvSpPr>
-          <p:nvPr/>
-        </p:nvSpPr>
-        <p:spPr>
-          <a:xfrm xmlns:a="http://schemas.openxmlformats.org/drawingml/2006/main">
-            <a:off x="777240" y="2816352"/>
-            <a:ext cx="6949440" cy="731520"/>
+              <a:t>The agent ranks the complete terms — not just the lowest unit price.</a:t>
+            </a:r>
+          </a:p>
+        </p:txBody>
+      </p:sp>
+      <p:sp>
+        <p:nvSpPr>
+          <p:cNvPr id="5" name="evidence-frame-1">
+            <a:extLst xmlns:a="http://schemas.openxmlformats.org/drawingml/2006/main">
+              <a:ext uri="{FF2B5EF4-FFF2-40B4-BE49-F238E27FC236}">
+                <a16:creationId xmlns:a16="http://schemas.microsoft.com/office/drawing/2014/main" id="{5E64EF67-DDF5-479C-99EE-96F08464E70B}"/>
+              </a:ext>
+            </a:extLst>
+          </p:cNvPr>
+          <p:cNvSpPr>
+            <a:spLocks xmlns:a="http://schemas.openxmlformats.org/drawingml/2006/main" noGrp="1"/>
+          </p:cNvSpPr>
+          <p:nvPr/>
+        </p:nvSpPr>
+        <p:spPr>
+          <a:xfrm xmlns:a="http://schemas.openxmlformats.org/drawingml/2006/main">
+            <a:off x="685800" y="1638300"/>
+            <a:ext cx="10820400" cy="4610100"/>
           </a:xfrm>
           <a:prstGeom xmlns:a="http://schemas.openxmlformats.org/drawingml/2006/main" prst="roundRect">
             <a:avLst>
-              <a:gd name="adj" fmla="val 6000"/>
+              <a:gd name="adj" fmla="val 1653"/>
             </a:avLst>
           </a:prstGeom>
           <a:solidFill xmlns:a="http://schemas.openxmlformats.org/drawingml/2006/main">
-            <a:srgbClr val="161E2A"/>
+            <a:srgbClr val="111820"/>
           </a:solidFill>
-          <a:ln xmlns:a="http://schemas.openxmlformats.org/drawingml/2006/main" w="12700">
+          <a:ln xmlns:a="http://schemas.openxmlformats.org/drawingml/2006/main" w="14288">
             <a:solidFill>
-              <a:srgbClr val="2A3647"/>
+              <a:srgbClr val="2B3746"/>
             </a:solidFill>
+            <a:prstDash val="solid"/>
           </a:ln>
         </p:spPr>
-        <p:style>
-          <a:lnRef xmlns:a="http://schemas.openxmlformats.org/drawingml/2006/main" idx="1">
-            <a:schemeClr val="accent1"/>
-          </a:lnRef>
-          <a:fillRef xmlns:a="http://schemas.openxmlformats.org/drawingml/2006/main" idx="3">
-            <a:schemeClr val="accent1"/>
-          </a:fillRef>
-          <a:effectRef xmlns:a="http://schemas.openxmlformats.org/drawingml/2006/main" idx="2">
-            <a:schemeClr val="accent1"/>
-          </a:effectRef>
-          <a:fontRef xmlns:a="http://schemas.openxmlformats.org/drawingml/2006/main" idx="minor">
-            <a:schemeClr val="lt1"/>
-          </a:fontRef>
-        </p:style>
-        <p:txBody>
-          <a:bodyPr xmlns:a="http://schemas.openxmlformats.org/drawingml/2006/main" anchor="ctr"/>
-          <a:lstStyle xmlns:a="http://schemas.openxmlformats.org/drawingml/2006/main"/>
-          <a:p xmlns:a="http://schemas.openxmlformats.org/drawingml/2006/main">
-            <a:pPr algn="ctr">
-              <a:buNone/>
-            </a:pPr>
-          </a:p>
-        </p:txBody>
-      </p:sp>
-      <p:sp>
-        <p:nvSpPr>
-          <p:cNvPr id="11" name="Oval 10">
-            <a:extLst xmlns:a="http://schemas.openxmlformats.org/drawingml/2006/main">
-              <a:ext uri="{FF2B5EF4-FFF2-40B4-BE49-F238E27FC236}">
-                <a16:creationId xmlns:a16="http://schemas.microsoft.com/office/drawing/2014/main" id="{0D89008D-BD9F-4D92-87A3-14B386E5BF3C}"/>
-              </a:ext>
-            </a:extLst>
-          </p:cNvPr>
-          <p:cNvSpPr>
-            <a:spLocks xmlns:a="http://schemas.openxmlformats.org/drawingml/2006/main" noGrp="1"/>
-          </p:cNvSpPr>
-          <p:nvPr/>
-        </p:nvSpPr>
-        <p:spPr>
-          <a:xfrm xmlns:a="http://schemas.openxmlformats.org/drawingml/2006/main">
-            <a:off x="1024128" y="3118104"/>
-            <a:ext cx="128016" cy="128016"/>
-          </a:xfrm>
-          <a:prstGeom xmlns:a="http://schemas.openxmlformats.org/drawingml/2006/main" prst="ellipse">
-            <a:avLst/>
-          </a:prstGeom>
-          <a:solidFill xmlns:a="http://schemas.openxmlformats.org/drawingml/2006/main">
-            <a:srgbClr val="9AA9BE"/>
-          </a:solidFill>
-          <a:ln xmlns:a="http://schemas.openxmlformats.org/drawingml/2006/main">
-            <a:noFill/>
-          </a:ln>
-        </p:spPr>
-        <p:style>
-          <a:lnRef xmlns:a="http://schemas.openxmlformats.org/drawingml/2006/main" idx="1">
-            <a:schemeClr val="accent1"/>
-          </a:lnRef>
-          <a:fillRef xmlns:a="http://schemas.openxmlformats.org/drawingml/2006/main" idx="3">
-            <a:schemeClr val="accent1"/>
-          </a:fillRef>
-          <a:effectRef xmlns:a="http://schemas.openxmlformats.org/drawingml/2006/main" idx="2">
-            <a:schemeClr val="accent1"/>
-          </a:effectRef>
-          <a:fontRef xmlns:a="http://schemas.openxmlformats.org/drawingml/2006/main" idx="minor">
-            <a:schemeClr val="lt1"/>
-          </a:fontRef>
-        </p:style>
-        <p:txBody>
-          <a:bodyPr xmlns:a="http://schemas.openxmlformats.org/drawingml/2006/main" anchor="ctr"/>
-          <a:lstStyle xmlns:a="http://schemas.openxmlformats.org/drawingml/2006/main"/>
-          <a:p xmlns:a="http://schemas.openxmlformats.org/drawingml/2006/main">
-            <a:pPr algn="ctr">
-              <a:buNone/>
-            </a:pPr>
-          </a:p>
-        </p:txBody>
-      </p:sp>
-      <p:sp>
-        <p:nvSpPr>
-          <p:cNvPr id="12" name="TextBox 11">
-            <a:extLst xmlns:a="http://schemas.openxmlformats.org/drawingml/2006/main">
-              <a:ext uri="{FF2B5EF4-FFF2-40B4-BE49-F238E27FC236}">
-                <a16:creationId xmlns:a16="http://schemas.microsoft.com/office/drawing/2014/main" id="{F3523B2A-9DBA-402C-A8A3-038E8BD8F628}"/>
-              </a:ext>
-            </a:extLst>
-          </p:cNvPr>
-          <p:cNvSpPr>
-            <a:spLocks xmlns:a="http://schemas.openxmlformats.org/drawingml/2006/main" noGrp="1"/>
-          </p:cNvSpPr>
-          <p:nvPr/>
-        </p:nvSpPr>
-        <p:spPr>
-          <a:xfrm xmlns:a="http://schemas.openxmlformats.org/drawingml/2006/main">
-            <a:off x="1298448" y="2953512"/>
-            <a:ext cx="2926080" cy="274320"/>
-          </a:xfrm>
-          <a:prstGeom xmlns:a="http://schemas.openxmlformats.org/drawingml/2006/main" prst="rect">
-            <a:avLst/>
-          </a:prstGeom>
-          <a:noFill xmlns:a="http://schemas.openxmlformats.org/drawingml/2006/main"/>
-        </p:spPr>
-        <p:txBody>
-          <a:bodyPr xmlns:a="http://schemas.openxmlformats.org/drawingml/2006/main" wrap="square" lIns="0" tIns="0" rIns="0" bIns="0" anchor="t">
-            <a:spAutoFit/>
-          </a:bodyPr>
-          <a:lstStyle xmlns:a="http://schemas.openxmlformats.org/drawingml/2006/main"/>
-          <a:p xmlns:a="http://schemas.openxmlformats.org/drawingml/2006/main">
-            <a:pPr algn="l">
-              <a:buNone/>
-            </a:pPr>
-            <a:r>
-              <a:rPr sz="1300" b="1" i="0">
-                <a:solidFill>
-                  <a:srgbClr val="E8EDF4"/>
-                </a:solidFill>
-                <a:latin typeface="Arial"/>
-                <a:ea typeface="Arial"/>
-                <a:cs typeface="Arial"/>
-              </a:rPr>
-              <a:t>Mandate created</a:t>
-            </a:r>
-          </a:p>
-        </p:txBody>
-      </p:sp>
-      <p:sp>
-        <p:nvSpPr>
-          <p:cNvPr id="13" name="TextBox 12">
-            <a:extLst xmlns:a="http://schemas.openxmlformats.org/drawingml/2006/main">
-              <a:ext uri="{FF2B5EF4-FFF2-40B4-BE49-F238E27FC236}">
-                <a16:creationId xmlns:a16="http://schemas.microsoft.com/office/drawing/2014/main" id="{A8FD5A59-7222-4868-A48F-83D9D4B0A7EC}"/>
-              </a:ext>
-            </a:extLst>
-          </p:cNvPr>
-          <p:cNvSpPr>
-            <a:spLocks xmlns:a="http://schemas.openxmlformats.org/drawingml/2006/main" noGrp="1"/>
-          </p:cNvSpPr>
-          <p:nvPr/>
-        </p:nvSpPr>
-        <p:spPr>
-          <a:xfrm xmlns:a="http://schemas.openxmlformats.org/drawingml/2006/main">
-            <a:off x="1298448" y="3227832"/>
-            <a:ext cx="4572000" cy="237744"/>
-          </a:xfrm>
-          <a:prstGeom xmlns:a="http://schemas.openxmlformats.org/drawingml/2006/main" prst="rect">
-            <a:avLst/>
-          </a:prstGeom>
-          <a:noFill xmlns:a="http://schemas.openxmlformats.org/drawingml/2006/main"/>
-        </p:spPr>
-        <p:txBody>
-          <a:bodyPr xmlns:a="http://schemas.openxmlformats.org/drawingml/2006/main" wrap="square" lIns="0" tIns="0" rIns="0" bIns="0" anchor="t">
-            <a:spAutoFit/>
-          </a:bodyPr>
-          <a:lstStyle xmlns:a="http://schemas.openxmlformats.org/drawingml/2006/main"/>
-          <a:p xmlns:a="http://schemas.openxmlformats.org/drawingml/2006/main">
-            <a:pPr algn="l">
-              <a:buNone/>
-            </a:pPr>
-            <a:r>
-              <a:rPr sz="1050" b="0" i="0">
-                <a:solidFill>
-                  <a:srgbClr val="8A9CB5"/>
-                </a:solidFill>
-                <a:latin typeface="Arial"/>
-                <a:ea typeface="Arial"/>
-                <a:cs typeface="Arial"/>
-              </a:rPr>
-              <a:t>digest recomputed on-chain from 12 signed fields</a:t>
-            </a:r>
-          </a:p>
-        </p:txBody>
-      </p:sp>
-      <p:sp>
-        <p:nvSpPr>
-          <p:cNvPr id="14" name="TextBox 13">
-            <a:extLst xmlns:a="http://schemas.openxmlformats.org/drawingml/2006/main">
-              <a:ext uri="{FF2B5EF4-FFF2-40B4-BE49-F238E27FC236}">
-                <a16:creationId xmlns:a16="http://schemas.microsoft.com/office/drawing/2014/main" id="{5F026A78-ED67-46DE-87DB-2ED2FFEBF425}"/>
-              </a:ext>
-            </a:extLst>
-          </p:cNvPr>
-          <p:cNvSpPr>
-            <a:spLocks xmlns:a="http://schemas.openxmlformats.org/drawingml/2006/main" noGrp="1"/>
-          </p:cNvSpPr>
-          <p:nvPr/>
-        </p:nvSpPr>
-        <p:spPr>
-          <a:xfrm xmlns:a="http://schemas.openxmlformats.org/drawingml/2006/main">
-            <a:off x="5989320" y="3072384"/>
-            <a:ext cx="1600200" cy="274320"/>
-          </a:xfrm>
-          <a:prstGeom xmlns:a="http://schemas.openxmlformats.org/drawingml/2006/main" prst="rect">
-            <a:avLst/>
-          </a:prstGeom>
-          <a:noFill xmlns:a="http://schemas.openxmlformats.org/drawingml/2006/main"/>
-        </p:spPr>
-        <p:txBody>
-          <a:bodyPr xmlns:a="http://schemas.openxmlformats.org/drawingml/2006/main" wrap="square" lIns="0" tIns="0" rIns="0" bIns="0" anchor="t">
-            <a:spAutoFit/>
-          </a:bodyPr>
-          <a:lstStyle xmlns:a="http://schemas.openxmlformats.org/drawingml/2006/main"/>
-          <a:p xmlns:a="http://schemas.openxmlformats.org/drawingml/2006/main">
-            <a:pPr algn="r">
-              <a:buNone/>
-            </a:pPr>
-            <a:r>
-              <a:rPr sz="1150" b="1" i="0">
-                <a:solidFill>
-                  <a:srgbClr val="9AA9BE"/>
-                </a:solidFill>
-                <a:latin typeface="Courier New"/>
-                <a:ea typeface="Courier New"/>
-                <a:cs typeface="Courier New"/>
-              </a:rPr>
-              <a:t>0x6883…1688</a:t>
-            </a:r>
-          </a:p>
-        </p:txBody>
-      </p:sp>
-      <p:sp>
-        <p:nvSpPr>
-          <p:cNvPr id="15" name="Rounded Rectangle 14">
-            <a:extLst xmlns:a="http://schemas.openxmlformats.org/drawingml/2006/main">
-              <a:ext uri="{FF2B5EF4-FFF2-40B4-BE49-F238E27FC236}">
-                <a16:creationId xmlns:a16="http://schemas.microsoft.com/office/drawing/2014/main" id="{C2DAAC75-B15B-4977-9AFC-EDC007A92682}"/>
-              </a:ext>
-            </a:extLst>
-          </p:cNvPr>
-          <p:cNvSpPr>
-            <a:spLocks xmlns:a="http://schemas.openxmlformats.org/drawingml/2006/main" noGrp="1"/>
-          </p:cNvSpPr>
-          <p:nvPr/>
-        </p:nvSpPr>
-        <p:spPr>
-          <a:xfrm xmlns:a="http://schemas.openxmlformats.org/drawingml/2006/main">
-            <a:off x="777240" y="3639312"/>
-            <a:ext cx="6949440" cy="731520"/>
+      </p:sp>
+      <p:pic>
+        <p:nvPicPr>
+          <p:cNvPr id="12" name="evidence-image-1"/>
+          <p:cNvPicPr>
+            <a:picLocks xmlns:a="http://schemas.openxmlformats.org/drawingml/2006/main" noChangeAspect="1"/>
+          </p:cNvPicPr>
+          <p:nvPr/>
+        </p:nvPicPr>
+        <p:blipFill>
+          <a:blip xmlns:r="http://schemas.openxmlformats.org/officeDocument/2006/relationships" xmlns:a="http://schemas.openxmlformats.org/drawingml/2006/main" r:embed="Rcb62da2299cb4402"/>
+          <a:srcRect xmlns:a="http://schemas.openxmlformats.org/drawingml/2006/main" l="0" t="26919" r="0" b="26919"/>
+          <a:stretch xmlns:a="http://schemas.openxmlformats.org/drawingml/2006/main">
+            <a:fillRect l="0" t="0" r="0" b="0"/>
+          </a:stretch>
+        </p:blipFill>
+        <p:spPr>
+          <a:xfrm xmlns:a="http://schemas.openxmlformats.org/drawingml/2006/main">
+            <a:off x="781050" y="1733550"/>
+            <a:ext cx="10629900" cy="4419600"/>
           </a:xfrm>
           <a:prstGeom xmlns:a="http://schemas.openxmlformats.org/drawingml/2006/main" prst="roundRect">
             <a:avLst>
-              <a:gd name="adj" fmla="val 6000"/>
+              <a:gd name="adj" fmla="val 2155"/>
             </a:avLst>
           </a:prstGeom>
-          <a:solidFill xmlns:a="http://schemas.openxmlformats.org/drawingml/2006/main">
-            <a:srgbClr val="161E2A"/>
-          </a:solidFill>
-          <a:ln xmlns:a="http://schemas.openxmlformats.org/drawingml/2006/main" w="12700">
-            <a:solidFill>
-              <a:srgbClr val="2A3647"/>
-            </a:solidFill>
-          </a:ln>
-        </p:spPr>
-        <p:style>
-          <a:lnRef xmlns:a="http://schemas.openxmlformats.org/drawingml/2006/main" idx="1">
-            <a:schemeClr val="accent1"/>
-          </a:lnRef>
-          <a:fillRef xmlns:a="http://schemas.openxmlformats.org/drawingml/2006/main" idx="3">
-            <a:schemeClr val="accent1"/>
-          </a:fillRef>
-          <a:effectRef xmlns:a="http://schemas.openxmlformats.org/drawingml/2006/main" idx="2">
-            <a:schemeClr val="accent1"/>
-          </a:effectRef>
-          <a:fontRef xmlns:a="http://schemas.openxmlformats.org/drawingml/2006/main" idx="minor">
-            <a:schemeClr val="lt1"/>
-          </a:fontRef>
-        </p:style>
-        <p:txBody>
-          <a:bodyPr xmlns:a="http://schemas.openxmlformats.org/drawingml/2006/main" anchor="ctr"/>
-          <a:lstStyle xmlns:a="http://schemas.openxmlformats.org/drawingml/2006/main"/>
-          <a:p xmlns:a="http://schemas.openxmlformats.org/drawingml/2006/main">
-            <a:pPr algn="ctr">
-              <a:buNone/>
-            </a:pPr>
-          </a:p>
-        </p:txBody>
-      </p:sp>
-      <p:sp>
-        <p:nvSpPr>
-          <p:cNvPr id="16" name="Oval 15">
-            <a:extLst xmlns:a="http://schemas.openxmlformats.org/drawingml/2006/main">
-              <a:ext uri="{FF2B5EF4-FFF2-40B4-BE49-F238E27FC236}">
-                <a16:creationId xmlns:a16="http://schemas.microsoft.com/office/drawing/2014/main" id="{3949C50F-CA26-4367-8B2D-EA689305339E}"/>
-              </a:ext>
-            </a:extLst>
-          </p:cNvPr>
-          <p:cNvSpPr>
-            <a:spLocks xmlns:a="http://schemas.openxmlformats.org/drawingml/2006/main" noGrp="1"/>
-          </p:cNvSpPr>
-          <p:nvPr/>
-        </p:nvSpPr>
-        <p:spPr>
-          <a:xfrm xmlns:a="http://schemas.openxmlformats.org/drawingml/2006/main">
-            <a:off x="1024128" y="3941063"/>
-            <a:ext cx="128016" cy="128016"/>
-          </a:xfrm>
-          <a:prstGeom xmlns:a="http://schemas.openxmlformats.org/drawingml/2006/main" prst="ellipse">
-            <a:avLst/>
-          </a:prstGeom>
-          <a:solidFill xmlns:a="http://schemas.openxmlformats.org/drawingml/2006/main">
-            <a:srgbClr val="D9FF55"/>
-          </a:solidFill>
-          <a:ln xmlns:a="http://schemas.openxmlformats.org/drawingml/2006/main">
-            <a:noFill/>
-          </a:ln>
-        </p:spPr>
-        <p:style>
-          <a:lnRef xmlns:a="http://schemas.openxmlformats.org/drawingml/2006/main" idx="1">
-            <a:schemeClr val="accent1"/>
-          </a:lnRef>
-          <a:fillRef xmlns:a="http://schemas.openxmlformats.org/drawingml/2006/main" idx="3">
-            <a:schemeClr val="accent1"/>
-          </a:fillRef>
-          <a:effectRef xmlns:a="http://schemas.openxmlformats.org/drawingml/2006/main" idx="2">
-            <a:schemeClr val="accent1"/>
-          </a:effectRef>
-          <a:fontRef xmlns:a="http://schemas.openxmlformats.org/drawingml/2006/main" idx="minor">
-            <a:schemeClr val="lt1"/>
-          </a:fontRef>
-        </p:style>
-        <p:txBody>
-          <a:bodyPr xmlns:a="http://schemas.openxmlformats.org/drawingml/2006/main" anchor="ctr"/>
-          <a:lstStyle xmlns:a="http://schemas.openxmlformats.org/drawingml/2006/main"/>
-          <a:p xmlns:a="http://schemas.openxmlformats.org/drawingml/2006/main">
-            <a:pPr algn="ctr">
-              <a:buNone/>
-            </a:pPr>
-          </a:p>
-        </p:txBody>
-      </p:sp>
-      <p:sp>
-        <p:nvSpPr>
-          <p:cNvPr id="17" name="TextBox 16">
-            <a:extLst xmlns:a="http://schemas.openxmlformats.org/drawingml/2006/main">
-              <a:ext uri="{FF2B5EF4-FFF2-40B4-BE49-F238E27FC236}">
-                <a16:creationId xmlns:a16="http://schemas.microsoft.com/office/drawing/2014/main" id="{0DD12585-CD2E-44D8-850C-2B5166C3A95B}"/>
-              </a:ext>
-            </a:extLst>
-          </p:cNvPr>
-          <p:cNvSpPr>
-            <a:spLocks xmlns:a="http://schemas.openxmlformats.org/drawingml/2006/main" noGrp="1"/>
-          </p:cNvSpPr>
-          <p:nvPr/>
-        </p:nvSpPr>
-        <p:spPr>
-          <a:xfrm xmlns:a="http://schemas.openxmlformats.org/drawingml/2006/main">
-            <a:off x="1298448" y="3776472"/>
-            <a:ext cx="2926080" cy="274320"/>
-          </a:xfrm>
-          <a:prstGeom xmlns:a="http://schemas.openxmlformats.org/drawingml/2006/main" prst="rect">
-            <a:avLst/>
-          </a:prstGeom>
-          <a:noFill xmlns:a="http://schemas.openxmlformats.org/drawingml/2006/main"/>
-        </p:spPr>
-        <p:txBody>
-          <a:bodyPr xmlns:a="http://schemas.openxmlformats.org/drawingml/2006/main" wrap="square" lIns="0" tIns="0" rIns="0" bIns="0" anchor="t">
-            <a:spAutoFit/>
-          </a:bodyPr>
-          <a:lstStyle xmlns:a="http://schemas.openxmlformats.org/drawingml/2006/main"/>
-          <a:p xmlns:a="http://schemas.openxmlformats.org/drawingml/2006/main">
-            <a:pPr algn="l">
-              <a:buNone/>
-            </a:pPr>
-            <a:r>
-              <a:rPr sz="1300" b="1" i="0">
-                <a:solidFill>
-                  <a:srgbClr val="E8EDF4"/>
-                </a:solidFill>
-                <a:latin typeface="Arial"/>
-                <a:ea typeface="Arial"/>
-                <a:cs typeface="Arial"/>
-              </a:rPr>
-              <a:t>$180 sample recorded</a:t>
-            </a:r>
-          </a:p>
-        </p:txBody>
-      </p:sp>
-      <p:sp>
-        <p:nvSpPr>
-          <p:cNvPr id="18" name="TextBox 17">
-            <a:extLst xmlns:a="http://schemas.openxmlformats.org/drawingml/2006/main">
-              <a:ext uri="{FF2B5EF4-FFF2-40B4-BE49-F238E27FC236}">
-                <a16:creationId xmlns:a16="http://schemas.microsoft.com/office/drawing/2014/main" id="{937A5583-A8B9-4DF3-A8CE-099E89AE44E3}"/>
-              </a:ext>
-            </a:extLst>
-          </p:cNvPr>
-          <p:cNvSpPr>
-            <a:spLocks xmlns:a="http://schemas.openxmlformats.org/drawingml/2006/main" noGrp="1"/>
-          </p:cNvSpPr>
-          <p:nvPr/>
-        </p:nvSpPr>
-        <p:spPr>
-          <a:xfrm xmlns:a="http://schemas.openxmlformats.org/drawingml/2006/main">
-            <a:off x="1298448" y="4050791"/>
-            <a:ext cx="4572000" cy="237744"/>
-          </a:xfrm>
-          <a:prstGeom xmlns:a="http://schemas.openxmlformats.org/drawingml/2006/main" prst="rect">
-            <a:avLst/>
-          </a:prstGeom>
-          <a:noFill xmlns:a="http://schemas.openxmlformats.org/drawingml/2006/main"/>
-        </p:spPr>
-        <p:txBody>
-          <a:bodyPr xmlns:a="http://schemas.openxmlformats.org/drawingml/2006/main" wrap="square" lIns="0" tIns="0" rIns="0" bIns="0" anchor="t">
-            <a:spAutoFit/>
-          </a:bodyPr>
-          <a:lstStyle xmlns:a="http://schemas.openxmlformats.org/drawingml/2006/main"/>
-          <a:p xmlns:a="http://schemas.openxmlformats.org/drawingml/2006/main">
-            <a:pPr algn="l">
-              <a:buNone/>
-            </a:pPr>
-            <a:r>
-              <a:rPr sz="1050" b="0" i="0">
-                <a:solidFill>
-                  <a:srgbClr val="8A9CB5"/>
-                </a:solidFill>
-                <a:latin typeface="Arial"/>
-                <a:ea typeface="Arial"/>
-                <a:cs typeface="Arial"/>
-              </a:rPr>
-              <a:t>spent 18000 → remaining 166000</a:t>
-            </a:r>
-          </a:p>
-        </p:txBody>
-      </p:sp>
-      <p:sp>
-        <p:nvSpPr>
-          <p:cNvPr id="19" name="TextBox 18">
-            <a:extLst xmlns:a="http://schemas.openxmlformats.org/drawingml/2006/main">
-              <a:ext uri="{FF2B5EF4-FFF2-40B4-BE49-F238E27FC236}">
-                <a16:creationId xmlns:a16="http://schemas.microsoft.com/office/drawing/2014/main" id="{4D6AA740-33F4-4157-9E44-9F09AAB04CF2}"/>
-              </a:ext>
-            </a:extLst>
-          </p:cNvPr>
-          <p:cNvSpPr>
-            <a:spLocks xmlns:a="http://schemas.openxmlformats.org/drawingml/2006/main" noGrp="1"/>
-          </p:cNvSpPr>
-          <p:nvPr/>
-        </p:nvSpPr>
-        <p:spPr>
-          <a:xfrm xmlns:a="http://schemas.openxmlformats.org/drawingml/2006/main">
-            <a:off x="5989320" y="3895344"/>
-            <a:ext cx="1600200" cy="274320"/>
-          </a:xfrm>
-          <a:prstGeom xmlns:a="http://schemas.openxmlformats.org/drawingml/2006/main" prst="rect">
-            <a:avLst/>
-          </a:prstGeom>
-          <a:noFill xmlns:a="http://schemas.openxmlformats.org/drawingml/2006/main"/>
-        </p:spPr>
-        <p:txBody>
-          <a:bodyPr xmlns:a="http://schemas.openxmlformats.org/drawingml/2006/main" wrap="square" lIns="0" tIns="0" rIns="0" bIns="0" anchor="t">
-            <a:spAutoFit/>
-          </a:bodyPr>
-          <a:lstStyle xmlns:a="http://schemas.openxmlformats.org/drawingml/2006/main"/>
-          <a:p xmlns:a="http://schemas.openxmlformats.org/drawingml/2006/main">
-            <a:pPr algn="r">
-              <a:buNone/>
-            </a:pPr>
-            <a:r>
-              <a:rPr sz="1150" b="1" i="0">
-                <a:solidFill>
-                  <a:srgbClr val="D9FF55"/>
-                </a:solidFill>
-                <a:latin typeface="Courier New"/>
-                <a:ea typeface="Courier New"/>
-                <a:cs typeface="Courier New"/>
-              </a:rPr>
-              <a:t>0xb690…f098</a:t>
-            </a:r>
-          </a:p>
-        </p:txBody>
-      </p:sp>
-      <p:sp>
-        <p:nvSpPr>
-          <p:cNvPr id="20" name="Rounded Rectangle 19">
-            <a:extLst xmlns:a="http://schemas.openxmlformats.org/drawingml/2006/main">
-              <a:ext uri="{FF2B5EF4-FFF2-40B4-BE49-F238E27FC236}">
-                <a16:creationId xmlns:a16="http://schemas.microsoft.com/office/drawing/2014/main" id="{60A4A759-4513-45ED-98A6-9B8B061C44D1}"/>
-              </a:ext>
-            </a:extLst>
-          </p:cNvPr>
-          <p:cNvSpPr>
-            <a:spLocks xmlns:a="http://schemas.openxmlformats.org/drawingml/2006/main" noGrp="1"/>
-          </p:cNvSpPr>
-          <p:nvPr/>
-        </p:nvSpPr>
-        <p:spPr>
-          <a:xfrm xmlns:a="http://schemas.openxmlformats.org/drawingml/2006/main">
-            <a:off x="777240" y="4462272"/>
-            <a:ext cx="6949440" cy="731520"/>
-          </a:xfrm>
-          <a:prstGeom xmlns:a="http://schemas.openxmlformats.org/drawingml/2006/main" prst="roundRect">
-            <a:avLst>
-              <a:gd name="adj" fmla="val 6000"/>
-            </a:avLst>
-          </a:prstGeom>
-          <a:solidFill xmlns:a="http://schemas.openxmlformats.org/drawingml/2006/main">
-            <a:srgbClr val="161E2A"/>
-          </a:solidFill>
-          <a:ln xmlns:a="http://schemas.openxmlformats.org/drawingml/2006/main" w="12700">
-            <a:solidFill>
-              <a:srgbClr val="2A3647"/>
-            </a:solidFill>
-          </a:ln>
-        </p:spPr>
-        <p:style>
-          <a:lnRef xmlns:a="http://schemas.openxmlformats.org/drawingml/2006/main" idx="1">
-            <a:schemeClr val="accent1"/>
-          </a:lnRef>
-          <a:fillRef xmlns:a="http://schemas.openxmlformats.org/drawingml/2006/main" idx="3">
-            <a:schemeClr val="accent1"/>
-          </a:fillRef>
-          <a:effectRef xmlns:a="http://schemas.openxmlformats.org/drawingml/2006/main" idx="2">
-            <a:schemeClr val="accent1"/>
-          </a:effectRef>
-          <a:fontRef xmlns:a="http://schemas.openxmlformats.org/drawingml/2006/main" idx="minor">
-            <a:schemeClr val="lt1"/>
-          </a:fontRef>
-        </p:style>
-        <p:txBody>
-          <a:bodyPr xmlns:a="http://schemas.openxmlformats.org/drawingml/2006/main" anchor="ctr"/>
-          <a:lstStyle xmlns:a="http://schemas.openxmlformats.org/drawingml/2006/main"/>
-          <a:p xmlns:a="http://schemas.openxmlformats.org/drawingml/2006/main">
-            <a:pPr algn="ctr">
-              <a:buNone/>
-            </a:pPr>
-          </a:p>
-        </p:txBody>
-      </p:sp>
-      <p:sp>
-        <p:nvSpPr>
-          <p:cNvPr id="21" name="Oval 20">
-            <a:extLst xmlns:a="http://schemas.openxmlformats.org/drawingml/2006/main">
-              <a:ext uri="{FF2B5EF4-FFF2-40B4-BE49-F238E27FC236}">
-                <a16:creationId xmlns:a16="http://schemas.microsoft.com/office/drawing/2014/main" id="{F9C28C3A-ECD8-4915-BA71-6A998455E017}"/>
-              </a:ext>
-            </a:extLst>
-          </p:cNvPr>
-          <p:cNvSpPr>
-            <a:spLocks xmlns:a="http://schemas.openxmlformats.org/drawingml/2006/main" noGrp="1"/>
-          </p:cNvSpPr>
-          <p:nvPr/>
-        </p:nvSpPr>
-        <p:spPr>
-          <a:xfrm xmlns:a="http://schemas.openxmlformats.org/drawingml/2006/main">
-            <a:off x="1024128" y="4764024"/>
-            <a:ext cx="128016" cy="128016"/>
-          </a:xfrm>
-          <a:prstGeom xmlns:a="http://schemas.openxmlformats.org/drawingml/2006/main" prst="ellipse">
-            <a:avLst/>
-          </a:prstGeom>
-          <a:solidFill xmlns:a="http://schemas.openxmlformats.org/drawingml/2006/main">
-            <a:srgbClr val="FB7185"/>
-          </a:solidFill>
-          <a:ln xmlns:a="http://schemas.openxmlformats.org/drawingml/2006/main">
-            <a:noFill/>
-          </a:ln>
-        </p:spPr>
-        <p:style>
-          <a:lnRef xmlns:a="http://schemas.openxmlformats.org/drawingml/2006/main" idx="1">
-            <a:schemeClr val="accent1"/>
-          </a:lnRef>
-          <a:fillRef xmlns:a="http://schemas.openxmlformats.org/drawingml/2006/main" idx="3">
-            <a:schemeClr val="accent1"/>
-          </a:fillRef>
-          <a:effectRef xmlns:a="http://schemas.openxmlformats.org/drawingml/2006/main" idx="2">
-            <a:schemeClr val="accent1"/>
-          </a:effectRef>
-          <a:fontRef xmlns:a="http://schemas.openxmlformats.org/drawingml/2006/main" idx="minor">
-            <a:schemeClr val="lt1"/>
-          </a:fontRef>
-        </p:style>
-        <p:txBody>
-          <a:bodyPr xmlns:a="http://schemas.openxmlformats.org/drawingml/2006/main" anchor="ctr"/>
-          <a:lstStyle xmlns:a="http://schemas.openxmlformats.org/drawingml/2006/main"/>
-          <a:p xmlns:a="http://schemas.openxmlformats.org/drawingml/2006/main">
-            <a:pPr algn="ctr">
-              <a:buNone/>
-            </a:pPr>
-          </a:p>
-        </p:txBody>
-      </p:sp>
-      <p:sp>
-        <p:nvSpPr>
-          <p:cNvPr id="22" name="TextBox 21">
-            <a:extLst xmlns:a="http://schemas.openxmlformats.org/drawingml/2006/main">
-              <a:ext uri="{FF2B5EF4-FFF2-40B4-BE49-F238E27FC236}">
-                <a16:creationId xmlns:a16="http://schemas.microsoft.com/office/drawing/2014/main" id="{693AC740-305E-4847-8B06-5D4C4A84E6D1}"/>
-              </a:ext>
-            </a:extLst>
-          </p:cNvPr>
-          <p:cNvSpPr>
-            <a:spLocks xmlns:a="http://schemas.openxmlformats.org/drawingml/2006/main" noGrp="1"/>
-          </p:cNvSpPr>
-          <p:nvPr/>
-        </p:nvSpPr>
-        <p:spPr>
-          <a:xfrm xmlns:a="http://schemas.openxmlformats.org/drawingml/2006/main">
-            <a:off x="1298448" y="4599432"/>
-            <a:ext cx="2926080" cy="274320"/>
-          </a:xfrm>
-          <a:prstGeom xmlns:a="http://schemas.openxmlformats.org/drawingml/2006/main" prst="rect">
-            <a:avLst/>
-          </a:prstGeom>
-          <a:noFill xmlns:a="http://schemas.openxmlformats.org/drawingml/2006/main"/>
-        </p:spPr>
-        <p:txBody>
-          <a:bodyPr xmlns:a="http://schemas.openxmlformats.org/drawingml/2006/main" wrap="square" lIns="0" tIns="0" rIns="0" bIns="0" anchor="t">
-            <a:spAutoFit/>
-          </a:bodyPr>
-          <a:lstStyle xmlns:a="http://schemas.openxmlformats.org/drawingml/2006/main"/>
-          <a:p xmlns:a="http://schemas.openxmlformats.org/drawingml/2006/main">
-            <a:pPr algn="l">
-              <a:buNone/>
-            </a:pPr>
-            <a:r>
-              <a:rPr sz="1300" b="1" i="0">
-                <a:solidFill>
-                  <a:srgbClr val="E8EDF4"/>
-                </a:solidFill>
-                <a:latin typeface="Arial"/>
-                <a:ea typeface="Arial"/>
-                <a:cs typeface="Arial"/>
-              </a:rPr>
-              <a:t>Mandate revoked</a:t>
-            </a:r>
-          </a:p>
-        </p:txBody>
-      </p:sp>
-      <p:sp>
-        <p:nvSpPr>
-          <p:cNvPr id="23" name="TextBox 22">
-            <a:extLst xmlns:a="http://schemas.openxmlformats.org/drawingml/2006/main">
-              <a:ext uri="{FF2B5EF4-FFF2-40B4-BE49-F238E27FC236}">
-                <a16:creationId xmlns:a16="http://schemas.microsoft.com/office/drawing/2014/main" id="{CF9F3407-851F-4AA3-8596-F1CA8EE99D11}"/>
-              </a:ext>
-            </a:extLst>
-          </p:cNvPr>
-          <p:cNvSpPr>
-            <a:spLocks xmlns:a="http://schemas.openxmlformats.org/drawingml/2006/main" noGrp="1"/>
-          </p:cNvSpPr>
-          <p:nvPr/>
-        </p:nvSpPr>
-        <p:spPr>
-          <a:xfrm xmlns:a="http://schemas.openxmlformats.org/drawingml/2006/main">
-            <a:off x="1298448" y="4873752"/>
-            <a:ext cx="4572000" cy="237744"/>
-          </a:xfrm>
-          <a:prstGeom xmlns:a="http://schemas.openxmlformats.org/drawingml/2006/main" prst="rect">
-            <a:avLst/>
-          </a:prstGeom>
-          <a:noFill xmlns:a="http://schemas.openxmlformats.org/drawingml/2006/main"/>
-        </p:spPr>
-        <p:txBody>
-          <a:bodyPr xmlns:a="http://schemas.openxmlformats.org/drawingml/2006/main" wrap="square" lIns="0" tIns="0" rIns="0" bIns="0" anchor="t">
-            <a:spAutoFit/>
-          </a:bodyPr>
-          <a:lstStyle xmlns:a="http://schemas.openxmlformats.org/drawingml/2006/main"/>
-          <a:p xmlns:a="http://schemas.openxmlformats.org/drawingml/2006/main">
-            <a:pPr algn="l">
-              <a:buNone/>
-            </a:pPr>
-            <a:r>
-              <a:rPr sz="1050" b="0" i="0">
-                <a:solidFill>
-                  <a:srgbClr val="8A9CB5"/>
-                </a:solidFill>
-                <a:latin typeface="Arial"/>
-                <a:ea typeface="Arial"/>
-                <a:cs typeface="Arial"/>
-              </a:rPr>
-              <a:t>every later payment reverts Revoked</a:t>
-            </a:r>
-          </a:p>
-        </p:txBody>
-      </p:sp>
-      <p:sp>
-        <p:nvSpPr>
-          <p:cNvPr id="24" name="TextBox 23">
-            <a:extLst xmlns:a="http://schemas.openxmlformats.org/drawingml/2006/main">
-              <a:ext uri="{FF2B5EF4-FFF2-40B4-BE49-F238E27FC236}">
-                <a16:creationId xmlns:a16="http://schemas.microsoft.com/office/drawing/2014/main" id="{318816DE-0628-4A30-BA85-C0B5E11E2A03}"/>
-              </a:ext>
-            </a:extLst>
-          </p:cNvPr>
-          <p:cNvSpPr>
-            <a:spLocks xmlns:a="http://schemas.openxmlformats.org/drawingml/2006/main" noGrp="1"/>
-          </p:cNvSpPr>
-          <p:nvPr/>
-        </p:nvSpPr>
-        <p:spPr>
-          <a:xfrm xmlns:a="http://schemas.openxmlformats.org/drawingml/2006/main">
-            <a:off x="5989320" y="4718304"/>
-            <a:ext cx="1600200" cy="274320"/>
-          </a:xfrm>
-          <a:prstGeom xmlns:a="http://schemas.openxmlformats.org/drawingml/2006/main" prst="rect">
-            <a:avLst/>
-          </a:prstGeom>
-          <a:noFill xmlns:a="http://schemas.openxmlformats.org/drawingml/2006/main"/>
-        </p:spPr>
-        <p:txBody>
-          <a:bodyPr xmlns:a="http://schemas.openxmlformats.org/drawingml/2006/main" wrap="square" lIns="0" tIns="0" rIns="0" bIns="0" anchor="t">
-            <a:spAutoFit/>
-          </a:bodyPr>
-          <a:lstStyle xmlns:a="http://schemas.openxmlformats.org/drawingml/2006/main"/>
-          <a:p xmlns:a="http://schemas.openxmlformats.org/drawingml/2006/main">
-            <a:pPr algn="r">
-              <a:buNone/>
-            </a:pPr>
-            <a:r>
-              <a:rPr sz="1150" b="1" i="0">
-                <a:solidFill>
-                  <a:srgbClr val="FB7185"/>
-                </a:solidFill>
-                <a:latin typeface="Courier New"/>
-                <a:ea typeface="Courier New"/>
-                <a:cs typeface="Courier New"/>
-              </a:rPr>
-              <a:t>0x48b5…3ded</a:t>
-            </a:r>
-          </a:p>
-        </p:txBody>
-      </p:sp>
-      <p:sp>
-        <p:nvSpPr>
-          <p:cNvPr id="25" name="Rounded Rectangle 24">
-            <a:extLst xmlns:a="http://schemas.openxmlformats.org/drawingml/2006/main">
-              <a:ext uri="{FF2B5EF4-FFF2-40B4-BE49-F238E27FC236}">
-                <a16:creationId xmlns:a16="http://schemas.microsoft.com/office/drawing/2014/main" id="{A1E58990-A693-4F9F-89E8-57235622129D}"/>
-              </a:ext>
-            </a:extLst>
-          </p:cNvPr>
-          <p:cNvSpPr>
-            <a:spLocks xmlns:a="http://schemas.openxmlformats.org/drawingml/2006/main" noGrp="1"/>
-          </p:cNvSpPr>
-          <p:nvPr/>
-        </p:nvSpPr>
-        <p:spPr>
-          <a:xfrm xmlns:a="http://schemas.openxmlformats.org/drawingml/2006/main">
-            <a:off x="8001000" y="1993392"/>
-            <a:ext cx="2880360" cy="841248"/>
-          </a:xfrm>
-          <a:prstGeom xmlns:a="http://schemas.openxmlformats.org/drawingml/2006/main" prst="roundRect">
-            <a:avLst>
-              <a:gd name="adj" fmla="val 6000"/>
-            </a:avLst>
-          </a:prstGeom>
-          <a:solidFill xmlns:a="http://schemas.openxmlformats.org/drawingml/2006/main">
-            <a:srgbClr val="161E2A"/>
-          </a:solidFill>
-          <a:ln xmlns:a="http://schemas.openxmlformats.org/drawingml/2006/main" w="12700">
-            <a:solidFill>
-              <a:srgbClr val="2A3647"/>
-            </a:solidFill>
-          </a:ln>
-        </p:spPr>
-        <p:style>
-          <a:lnRef xmlns:a="http://schemas.openxmlformats.org/drawingml/2006/main" idx="1">
-            <a:schemeClr val="accent1"/>
-          </a:lnRef>
-          <a:fillRef xmlns:a="http://schemas.openxmlformats.org/drawingml/2006/main" idx="3">
-            <a:schemeClr val="accent1"/>
-          </a:fillRef>
-          <a:effectRef xmlns:a="http://schemas.openxmlformats.org/drawingml/2006/main" idx="2">
-            <a:schemeClr val="accent1"/>
-          </a:effectRef>
-          <a:fontRef xmlns:a="http://schemas.openxmlformats.org/drawingml/2006/main" idx="minor">
-            <a:schemeClr val="lt1"/>
-          </a:fontRef>
-        </p:style>
-        <p:txBody>
-          <a:bodyPr xmlns:a="http://schemas.openxmlformats.org/drawingml/2006/main" anchor="ctr"/>
-          <a:lstStyle xmlns:a="http://schemas.openxmlformats.org/drawingml/2006/main"/>
-          <a:p xmlns:a="http://schemas.openxmlformats.org/drawingml/2006/main">
-            <a:pPr algn="ctr">
-              <a:buNone/>
-            </a:pPr>
-          </a:p>
-        </p:txBody>
-      </p:sp>
-      <p:sp>
-        <p:nvSpPr>
-          <p:cNvPr id="26" name="TextBox 25">
-            <a:extLst xmlns:a="http://schemas.openxmlformats.org/drawingml/2006/main">
-              <a:ext uri="{FF2B5EF4-FFF2-40B4-BE49-F238E27FC236}">
-                <a16:creationId xmlns:a16="http://schemas.microsoft.com/office/drawing/2014/main" id="{D7BACB15-440B-4160-8C9F-58A32941C2D2}"/>
-              </a:ext>
-            </a:extLst>
-          </p:cNvPr>
-          <p:cNvSpPr>
-            <a:spLocks xmlns:a="http://schemas.openxmlformats.org/drawingml/2006/main" noGrp="1"/>
-          </p:cNvSpPr>
-          <p:nvPr/>
-        </p:nvSpPr>
-        <p:spPr>
-          <a:xfrm xmlns:a="http://schemas.openxmlformats.org/drawingml/2006/main">
-            <a:off x="8275320" y="2093976"/>
-            <a:ext cx="1005840" cy="457200"/>
-          </a:xfrm>
-          <a:prstGeom xmlns:a="http://schemas.openxmlformats.org/drawingml/2006/main" prst="rect">
-            <a:avLst/>
-          </a:prstGeom>
-          <a:noFill xmlns:a="http://schemas.openxmlformats.org/drawingml/2006/main"/>
-        </p:spPr>
-        <p:txBody>
-          <a:bodyPr xmlns:a="http://schemas.openxmlformats.org/drawingml/2006/main" wrap="square" lIns="0" tIns="0" rIns="0" bIns="0" anchor="t">
-            <a:spAutoFit/>
-          </a:bodyPr>
-          <a:lstStyle xmlns:a="http://schemas.openxmlformats.org/drawingml/2006/main"/>
-          <a:p xmlns:a="http://schemas.openxmlformats.org/drawingml/2006/main">
-            <a:pPr algn="l">
-              <a:buNone/>
-            </a:pPr>
-            <a:r>
-              <a:rPr sz="3000" b="1" i="0">
-                <a:solidFill>
-                  <a:srgbClr val="D9FF55"/>
-                </a:solidFill>
-                <a:latin typeface="Arial"/>
-                <a:ea typeface="Arial"/>
-                <a:cs typeface="Arial"/>
-              </a:rPr>
-              <a:t>207</a:t>
-            </a:r>
-          </a:p>
-        </p:txBody>
-      </p:sp>
-      <p:sp>
-        <p:nvSpPr>
-          <p:cNvPr id="27" name="TextBox 26">
-            <a:extLst xmlns:a="http://schemas.openxmlformats.org/drawingml/2006/main">
-              <a:ext uri="{FF2B5EF4-FFF2-40B4-BE49-F238E27FC236}">
-                <a16:creationId xmlns:a16="http://schemas.microsoft.com/office/drawing/2014/main" id="{34706040-0176-492D-996C-9908C39CDFD8}"/>
-              </a:ext>
-            </a:extLst>
-          </p:cNvPr>
-          <p:cNvSpPr>
-            <a:spLocks xmlns:a="http://schemas.openxmlformats.org/drawingml/2006/main" noGrp="1"/>
-          </p:cNvSpPr>
-          <p:nvPr/>
-        </p:nvSpPr>
-        <p:spPr>
-          <a:xfrm xmlns:a="http://schemas.openxmlformats.org/drawingml/2006/main">
-            <a:off x="9235440" y="2267712"/>
-            <a:ext cx="1554480" cy="411480"/>
-          </a:xfrm>
-          <a:prstGeom xmlns:a="http://schemas.openxmlformats.org/drawingml/2006/main" prst="rect">
-            <a:avLst/>
-          </a:prstGeom>
-          <a:noFill xmlns:a="http://schemas.openxmlformats.org/drawingml/2006/main"/>
-        </p:spPr>
-        <p:txBody>
-          <a:bodyPr xmlns:a="http://schemas.openxmlformats.org/drawingml/2006/main" wrap="square" lIns="0" tIns="0" rIns="0" bIns="0" anchor="t">
-            <a:spAutoFit/>
-          </a:bodyPr>
-          <a:lstStyle xmlns:a="http://schemas.openxmlformats.org/drawingml/2006/main"/>
-          <a:p xmlns:a="http://schemas.openxmlformats.org/drawingml/2006/main">
-            <a:pPr algn="l">
-              <a:buNone/>
-            </a:pPr>
-            <a:r>
-              <a:rPr sz="1100" b="0" i="0">
-                <a:solidFill>
-                  <a:srgbClr val="9AA9BE"/>
-                </a:solidFill>
-                <a:latin typeface="Arial"/>
-                <a:ea typeface="Arial"/>
-                <a:cs typeface="Arial"/>
-              </a:rPr>
-              <a:t>tests passing</a:t>
-            </a:r>
-          </a:p>
-        </p:txBody>
-      </p:sp>
-      <p:sp>
-        <p:nvSpPr>
-          <p:cNvPr id="28" name="Rounded Rectangle 27">
-            <a:extLst xmlns:a="http://schemas.openxmlformats.org/drawingml/2006/main">
-              <a:ext uri="{FF2B5EF4-FFF2-40B4-BE49-F238E27FC236}">
-                <a16:creationId xmlns:a16="http://schemas.microsoft.com/office/drawing/2014/main" id="{30B9E128-521C-4034-8342-2D8563F6B7C5}"/>
-              </a:ext>
-            </a:extLst>
-          </p:cNvPr>
-          <p:cNvSpPr>
-            <a:spLocks xmlns:a="http://schemas.openxmlformats.org/drawingml/2006/main" noGrp="1"/>
-          </p:cNvSpPr>
-          <p:nvPr/>
-        </p:nvSpPr>
-        <p:spPr>
-          <a:xfrm xmlns:a="http://schemas.openxmlformats.org/drawingml/2006/main">
-            <a:off x="8001000" y="3017520"/>
-            <a:ext cx="2880360" cy="841248"/>
-          </a:xfrm>
-          <a:prstGeom xmlns:a="http://schemas.openxmlformats.org/drawingml/2006/main" prst="roundRect">
-            <a:avLst>
-              <a:gd name="adj" fmla="val 6000"/>
-            </a:avLst>
-          </a:prstGeom>
-          <a:solidFill xmlns:a="http://schemas.openxmlformats.org/drawingml/2006/main">
-            <a:srgbClr val="161E2A"/>
-          </a:solidFill>
-          <a:ln xmlns:a="http://schemas.openxmlformats.org/drawingml/2006/main" w="12700">
-            <a:solidFill>
-              <a:srgbClr val="2A3647"/>
-            </a:solidFill>
-          </a:ln>
-        </p:spPr>
-        <p:style>
-          <a:lnRef xmlns:a="http://schemas.openxmlformats.org/drawingml/2006/main" idx="1">
-            <a:schemeClr val="accent1"/>
-          </a:lnRef>
-          <a:fillRef xmlns:a="http://schemas.openxmlformats.org/drawingml/2006/main" idx="3">
-            <a:schemeClr val="accent1"/>
-          </a:fillRef>
-          <a:effectRef xmlns:a="http://schemas.openxmlformats.org/drawingml/2006/main" idx="2">
-            <a:schemeClr val="accent1"/>
-          </a:effectRef>
-          <a:fontRef xmlns:a="http://schemas.openxmlformats.org/drawingml/2006/main" idx="minor">
-            <a:schemeClr val="lt1"/>
-          </a:fontRef>
-        </p:style>
-        <p:txBody>
-          <a:bodyPr xmlns:a="http://schemas.openxmlformats.org/drawingml/2006/main" anchor="ctr"/>
-          <a:lstStyle xmlns:a="http://schemas.openxmlformats.org/drawingml/2006/main"/>
-          <a:p xmlns:a="http://schemas.openxmlformats.org/drawingml/2006/main">
-            <a:pPr algn="ctr">
-              <a:buNone/>
-            </a:pPr>
-          </a:p>
-        </p:txBody>
-      </p:sp>
-      <p:sp>
-        <p:nvSpPr>
-          <p:cNvPr id="29" name="TextBox 28">
-            <a:extLst xmlns:a="http://schemas.openxmlformats.org/drawingml/2006/main">
-              <a:ext uri="{FF2B5EF4-FFF2-40B4-BE49-F238E27FC236}">
-                <a16:creationId xmlns:a16="http://schemas.microsoft.com/office/drawing/2014/main" id="{BCC16B7D-6CB7-42A0-93F4-8427E43BCE20}"/>
-              </a:ext>
-            </a:extLst>
-          </p:cNvPr>
-          <p:cNvSpPr>
-            <a:spLocks xmlns:a="http://schemas.openxmlformats.org/drawingml/2006/main" noGrp="1"/>
-          </p:cNvSpPr>
-          <p:nvPr/>
-        </p:nvSpPr>
-        <p:spPr>
-          <a:xfrm xmlns:a="http://schemas.openxmlformats.org/drawingml/2006/main">
-            <a:off x="8275320" y="3118104"/>
-            <a:ext cx="1005840" cy="457200"/>
-          </a:xfrm>
-          <a:prstGeom xmlns:a="http://schemas.openxmlformats.org/drawingml/2006/main" prst="rect">
-            <a:avLst/>
-          </a:prstGeom>
-          <a:noFill xmlns:a="http://schemas.openxmlformats.org/drawingml/2006/main"/>
-        </p:spPr>
-        <p:txBody>
-          <a:bodyPr xmlns:a="http://schemas.openxmlformats.org/drawingml/2006/main" wrap="square" lIns="0" tIns="0" rIns="0" bIns="0" anchor="t">
-            <a:spAutoFit/>
-          </a:bodyPr>
-          <a:lstStyle xmlns:a="http://schemas.openxmlformats.org/drawingml/2006/main"/>
-          <a:p xmlns:a="http://schemas.openxmlformats.org/drawingml/2006/main">
-            <a:pPr algn="l">
-              <a:buNone/>
-            </a:pPr>
-            <a:r>
-              <a:rPr sz="3000" b="1" i="0">
-                <a:solidFill>
-                  <a:srgbClr val="E8EDF4"/>
-                </a:solidFill>
-                <a:latin typeface="Arial"/>
-                <a:ea typeface="Arial"/>
-                <a:cs typeface="Arial"/>
-              </a:rPr>
-              <a:t>24</a:t>
-            </a:r>
-          </a:p>
-        </p:txBody>
-      </p:sp>
-      <p:sp>
-        <p:nvSpPr>
-          <p:cNvPr id="30" name="TextBox 29">
-            <a:extLst xmlns:a="http://schemas.openxmlformats.org/drawingml/2006/main">
-              <a:ext uri="{FF2B5EF4-FFF2-40B4-BE49-F238E27FC236}">
-                <a16:creationId xmlns:a16="http://schemas.microsoft.com/office/drawing/2014/main" id="{C7B61565-B945-456F-B046-9A5DF91D65AA}"/>
-              </a:ext>
-            </a:extLst>
-          </p:cNvPr>
-          <p:cNvSpPr>
-            <a:spLocks xmlns:a="http://schemas.openxmlformats.org/drawingml/2006/main" noGrp="1"/>
-          </p:cNvSpPr>
-          <p:nvPr/>
-        </p:nvSpPr>
-        <p:spPr>
-          <a:xfrm xmlns:a="http://schemas.openxmlformats.org/drawingml/2006/main">
-            <a:off x="9235440" y="3291840"/>
-            <a:ext cx="1554480" cy="411480"/>
-          </a:xfrm>
-          <a:prstGeom xmlns:a="http://schemas.openxmlformats.org/drawingml/2006/main" prst="rect">
-            <a:avLst/>
-          </a:prstGeom>
-          <a:noFill xmlns:a="http://schemas.openxmlformats.org/drawingml/2006/main"/>
-        </p:spPr>
-        <p:txBody>
-          <a:bodyPr xmlns:a="http://schemas.openxmlformats.org/drawingml/2006/main" wrap="square" lIns="0" tIns="0" rIns="0" bIns="0" anchor="t">
-            <a:spAutoFit/>
-          </a:bodyPr>
-          <a:lstStyle xmlns:a="http://schemas.openxmlformats.org/drawingml/2006/main"/>
-          <a:p xmlns:a="http://schemas.openxmlformats.org/drawingml/2006/main">
-            <a:pPr algn="l">
-              <a:buNone/>
-            </a:pPr>
-            <a:r>
-              <a:rPr sz="1100" b="0" i="0">
-                <a:solidFill>
-                  <a:srgbClr val="9AA9BE"/>
-                </a:solidFill>
-                <a:latin typeface="Arial"/>
-                <a:ea typeface="Arial"/>
-                <a:cs typeface="Arial"/>
-              </a:rPr>
-              <a:t>Foundry contract tests</a:t>
-            </a:r>
-          </a:p>
-        </p:txBody>
-      </p:sp>
-      <p:sp>
-        <p:nvSpPr>
-          <p:cNvPr id="31" name="Rounded Rectangle 30">
-            <a:extLst xmlns:a="http://schemas.openxmlformats.org/drawingml/2006/main">
-              <a:ext uri="{FF2B5EF4-FFF2-40B4-BE49-F238E27FC236}">
-                <a16:creationId xmlns:a16="http://schemas.microsoft.com/office/drawing/2014/main" id="{9E739526-14DC-43FA-AAA1-F62DF31796B8}"/>
-              </a:ext>
-            </a:extLst>
-          </p:cNvPr>
-          <p:cNvSpPr>
-            <a:spLocks xmlns:a="http://schemas.openxmlformats.org/drawingml/2006/main" noGrp="1"/>
-          </p:cNvSpPr>
-          <p:nvPr/>
-        </p:nvSpPr>
-        <p:spPr>
-          <a:xfrm xmlns:a="http://schemas.openxmlformats.org/drawingml/2006/main">
-            <a:off x="8001000" y="4041648"/>
-            <a:ext cx="2880360" cy="841248"/>
-          </a:xfrm>
-          <a:prstGeom xmlns:a="http://schemas.openxmlformats.org/drawingml/2006/main" prst="roundRect">
-            <a:avLst>
-              <a:gd name="adj" fmla="val 6000"/>
-            </a:avLst>
-          </a:prstGeom>
-          <a:solidFill xmlns:a="http://schemas.openxmlformats.org/drawingml/2006/main">
-            <a:srgbClr val="161E2A"/>
-          </a:solidFill>
-          <a:ln xmlns:a="http://schemas.openxmlformats.org/drawingml/2006/main" w="12700">
-            <a:solidFill>
-              <a:srgbClr val="2A3647"/>
-            </a:solidFill>
-          </a:ln>
-        </p:spPr>
-        <p:style>
-          <a:lnRef xmlns:a="http://schemas.openxmlformats.org/drawingml/2006/main" idx="1">
-            <a:schemeClr val="accent1"/>
-          </a:lnRef>
-          <a:fillRef xmlns:a="http://schemas.openxmlformats.org/drawingml/2006/main" idx="3">
-            <a:schemeClr val="accent1"/>
-          </a:fillRef>
-          <a:effectRef xmlns:a="http://schemas.openxmlformats.org/drawingml/2006/main" idx="2">
-            <a:schemeClr val="accent1"/>
-          </a:effectRef>
-          <a:fontRef xmlns:a="http://schemas.openxmlformats.org/drawingml/2006/main" idx="minor">
-            <a:schemeClr val="lt1"/>
-          </a:fontRef>
-        </p:style>
-        <p:txBody>
-          <a:bodyPr xmlns:a="http://schemas.openxmlformats.org/drawingml/2006/main" anchor="ctr"/>
-          <a:lstStyle xmlns:a="http://schemas.openxmlformats.org/drawingml/2006/main"/>
-          <a:p xmlns:a="http://schemas.openxmlformats.org/drawingml/2006/main">
-            <a:pPr algn="ctr">
-              <a:buNone/>
-            </a:pPr>
-          </a:p>
-        </p:txBody>
-      </p:sp>
-      <p:sp>
-        <p:nvSpPr>
-          <p:cNvPr id="32" name="TextBox 31">
-            <a:extLst xmlns:a="http://schemas.openxmlformats.org/drawingml/2006/main">
-              <a:ext uri="{FF2B5EF4-FFF2-40B4-BE49-F238E27FC236}">
-                <a16:creationId xmlns:a16="http://schemas.microsoft.com/office/drawing/2014/main" id="{E739D60B-DF7B-4996-9D10-8CD8F8B2359C}"/>
-              </a:ext>
-            </a:extLst>
-          </p:cNvPr>
-          <p:cNvSpPr>
-            <a:spLocks xmlns:a="http://schemas.openxmlformats.org/drawingml/2006/main" noGrp="1"/>
-          </p:cNvSpPr>
-          <p:nvPr/>
-        </p:nvSpPr>
-        <p:spPr>
-          <a:xfrm xmlns:a="http://schemas.openxmlformats.org/drawingml/2006/main">
-            <a:off x="8275320" y="4142232"/>
-            <a:ext cx="1005840" cy="457200"/>
-          </a:xfrm>
-          <a:prstGeom xmlns:a="http://schemas.openxmlformats.org/drawingml/2006/main" prst="rect">
-            <a:avLst/>
-          </a:prstGeom>
-          <a:noFill xmlns:a="http://schemas.openxmlformats.org/drawingml/2006/main"/>
-        </p:spPr>
-        <p:txBody>
-          <a:bodyPr xmlns:a="http://schemas.openxmlformats.org/drawingml/2006/main" wrap="square" lIns="0" tIns="0" rIns="0" bIns="0" anchor="t">
-            <a:spAutoFit/>
-          </a:bodyPr>
-          <a:lstStyle xmlns:a="http://schemas.openxmlformats.org/drawingml/2006/main"/>
-          <a:p xmlns:a="http://schemas.openxmlformats.org/drawingml/2006/main">
-            <a:pPr algn="l">
-              <a:buNone/>
-            </a:pPr>
-            <a:r>
-              <a:rPr sz="3000" b="1" i="0">
-                <a:solidFill>
-                  <a:srgbClr val="4ADE80"/>
-                </a:solidFill>
-                <a:latin typeface="Arial"/>
-                <a:ea typeface="Arial"/>
-                <a:cs typeface="Arial"/>
-              </a:rPr>
-              <a:t>0</a:t>
-            </a:r>
-          </a:p>
-        </p:txBody>
-      </p:sp>
-      <p:sp>
-        <p:nvSpPr>
-          <p:cNvPr id="33" name="TextBox 32">
-            <a:extLst xmlns:a="http://schemas.openxmlformats.org/drawingml/2006/main">
-              <a:ext uri="{FF2B5EF4-FFF2-40B4-BE49-F238E27FC236}">
-                <a16:creationId xmlns:a16="http://schemas.microsoft.com/office/drawing/2014/main" id="{0FF99210-A1C0-4B35-9E58-D83DDAF86A6D}"/>
-              </a:ext>
-            </a:extLst>
-          </p:cNvPr>
-          <p:cNvSpPr>
-            <a:spLocks xmlns:a="http://schemas.openxmlformats.org/drawingml/2006/main" noGrp="1"/>
-          </p:cNvSpPr>
-          <p:nvPr/>
-        </p:nvSpPr>
-        <p:spPr>
-          <a:xfrm xmlns:a="http://schemas.openxmlformats.org/drawingml/2006/main">
-            <a:off x="9235440" y="4315968"/>
-            <a:ext cx="1554480" cy="411480"/>
-          </a:xfrm>
-          <a:prstGeom xmlns:a="http://schemas.openxmlformats.org/drawingml/2006/main" prst="rect">
-            <a:avLst/>
-          </a:prstGeom>
-          <a:noFill xmlns:a="http://schemas.openxmlformats.org/drawingml/2006/main"/>
-        </p:spPr>
-        <p:txBody>
-          <a:bodyPr xmlns:a="http://schemas.openxmlformats.org/drawingml/2006/main" wrap="square" lIns="0" tIns="0" rIns="0" bIns="0" anchor="t">
-            <a:spAutoFit/>
-          </a:bodyPr>
-          <a:lstStyle xmlns:a="http://schemas.openxmlformats.org/drawingml/2006/main"/>
-          <a:p xmlns:a="http://schemas.openxmlformats.org/drawingml/2006/main">
-            <a:pPr algn="l">
-              <a:buNone/>
-            </a:pPr>
-            <a:r>
-              <a:rPr sz="1100" b="0" i="0">
-                <a:solidFill>
-                  <a:srgbClr val="9AA9BE"/>
-                </a:solidFill>
-                <a:latin typeface="Arial"/>
-                <a:ea typeface="Arial"/>
-                <a:cs typeface="Arial"/>
-              </a:rPr>
-              <a:t>processor calls when blocked</a:t>
-            </a:r>
-          </a:p>
-        </p:txBody>
-      </p:sp>
-      <p:sp>
-        <p:nvSpPr>
-          <p:cNvPr id="34" name="Rounded Rectangle 33">
-            <a:extLst xmlns:a="http://schemas.openxmlformats.org/drawingml/2006/main">
-              <a:ext uri="{FF2B5EF4-FFF2-40B4-BE49-F238E27FC236}">
-                <a16:creationId xmlns:a16="http://schemas.microsoft.com/office/drawing/2014/main" id="{AC97D035-9579-416E-A5C0-DC60C0C9E172}"/>
-              </a:ext>
-            </a:extLst>
-          </p:cNvPr>
-          <p:cNvSpPr>
-            <a:spLocks xmlns:a="http://schemas.openxmlformats.org/drawingml/2006/main" noGrp="1"/>
-          </p:cNvSpPr>
-          <p:nvPr/>
-        </p:nvSpPr>
-        <p:spPr>
-          <a:xfrm xmlns:a="http://schemas.openxmlformats.org/drawingml/2006/main">
-            <a:off x="8001000" y="5065776"/>
-            <a:ext cx="2880360" cy="658368"/>
-          </a:xfrm>
-          <a:prstGeom xmlns:a="http://schemas.openxmlformats.org/drawingml/2006/main" prst="roundRect">
-            <a:avLst>
-              <a:gd name="adj" fmla="val 6000"/>
-            </a:avLst>
-          </a:prstGeom>
-          <a:solidFill xmlns:a="http://schemas.openxmlformats.org/drawingml/2006/main">
-            <a:srgbClr val="1E2836"/>
-          </a:solidFill>
-          <a:ln xmlns:a="http://schemas.openxmlformats.org/drawingml/2006/main" w="12700">
-            <a:solidFill>
-              <a:srgbClr val="2A3647"/>
-            </a:solidFill>
-          </a:ln>
-        </p:spPr>
-        <p:style>
-          <a:lnRef xmlns:a="http://schemas.openxmlformats.org/drawingml/2006/main" idx="1">
-            <a:schemeClr val="accent1"/>
-          </a:lnRef>
-          <a:fillRef xmlns:a="http://schemas.openxmlformats.org/drawingml/2006/main" idx="3">
-            <a:schemeClr val="accent1"/>
-          </a:fillRef>
-          <a:effectRef xmlns:a="http://schemas.openxmlformats.org/drawingml/2006/main" idx="2">
-            <a:schemeClr val="accent1"/>
-          </a:effectRef>
-          <a:fontRef xmlns:a="http://schemas.openxmlformats.org/drawingml/2006/main" idx="minor">
-            <a:schemeClr val="lt1"/>
-          </a:fontRef>
-        </p:style>
-        <p:txBody>
-          <a:bodyPr xmlns:a="http://schemas.openxmlformats.org/drawingml/2006/main" anchor="ctr"/>
-          <a:lstStyle xmlns:a="http://schemas.openxmlformats.org/drawingml/2006/main"/>
-          <a:p xmlns:a="http://schemas.openxmlformats.org/drawingml/2006/main">
-            <a:pPr algn="ctr">
-              <a:buNone/>
-            </a:pPr>
-          </a:p>
-        </p:txBody>
-      </p:sp>
-      <p:sp>
-        <p:nvSpPr>
-          <p:cNvPr id="35" name="TextBox 34">
-            <a:extLst xmlns:a="http://schemas.openxmlformats.org/drawingml/2006/main">
-              <a:ext uri="{FF2B5EF4-FFF2-40B4-BE49-F238E27FC236}">
-                <a16:creationId xmlns:a16="http://schemas.microsoft.com/office/drawing/2014/main" id="{BA4130E9-D87E-4B7A-AB17-32E2DFC3DA8F}"/>
-              </a:ext>
-            </a:extLst>
-          </p:cNvPr>
-          <p:cNvSpPr>
-            <a:spLocks xmlns:a="http://schemas.openxmlformats.org/drawingml/2006/main" noGrp="1"/>
-          </p:cNvSpPr>
-          <p:nvPr/>
-        </p:nvSpPr>
-        <p:spPr>
-          <a:xfrm xmlns:a="http://schemas.openxmlformats.org/drawingml/2006/main">
-            <a:off x="8275320" y="5184648"/>
-            <a:ext cx="2377440" cy="228600"/>
-          </a:xfrm>
-          <a:prstGeom xmlns:a="http://schemas.openxmlformats.org/drawingml/2006/main" prst="rect">
-            <a:avLst/>
-          </a:prstGeom>
-          <a:noFill xmlns:a="http://schemas.openxmlformats.org/drawingml/2006/main"/>
-        </p:spPr>
-        <p:txBody>
-          <a:bodyPr xmlns:a="http://schemas.openxmlformats.org/drawingml/2006/main" wrap="square" lIns="0" tIns="0" rIns="0" bIns="0" anchor="t">
-            <a:spAutoFit/>
-          </a:bodyPr>
-          <a:lstStyle xmlns:a="http://schemas.openxmlformats.org/drawingml/2006/main"/>
-          <a:p xmlns:a="http://schemas.openxmlformats.org/drawingml/2006/main">
-            <a:pPr algn="l">
-              <a:buNone/>
-            </a:pPr>
-            <a:r>
-              <a:rPr sz="950" b="1" i="0">
-                <a:solidFill>
-                  <a:srgbClr val="8A9CB5"/>
-                </a:solidFill>
-                <a:latin typeface="Arial"/>
-                <a:ea typeface="Arial"/>
-                <a:cs typeface="Arial"/>
-              </a:rPr>
-              <a:t>REGISTRY</a:t>
-            </a:r>
-          </a:p>
-        </p:txBody>
-      </p:sp>
-      <p:sp>
-        <p:nvSpPr>
-          <p:cNvPr id="36" name="TextBox 35">
-            <a:extLst xmlns:a="http://schemas.openxmlformats.org/drawingml/2006/main">
-              <a:ext uri="{FF2B5EF4-FFF2-40B4-BE49-F238E27FC236}">
-                <a16:creationId xmlns:a16="http://schemas.microsoft.com/office/drawing/2014/main" id="{EBED7863-7E41-4170-8F2C-2BDA414CCB83}"/>
-              </a:ext>
-            </a:extLst>
-          </p:cNvPr>
-          <p:cNvSpPr>
-            <a:spLocks xmlns:a="http://schemas.openxmlformats.org/drawingml/2006/main" noGrp="1"/>
-          </p:cNvSpPr>
-          <p:nvPr/>
-        </p:nvSpPr>
-        <p:spPr>
-          <a:xfrm xmlns:a="http://schemas.openxmlformats.org/drawingml/2006/main">
-            <a:off x="8275320" y="5404104"/>
-            <a:ext cx="2377440" cy="228600"/>
-          </a:xfrm>
-          <a:prstGeom xmlns:a="http://schemas.openxmlformats.org/drawingml/2006/main" prst="rect">
-            <a:avLst/>
-          </a:prstGeom>
-          <a:noFill xmlns:a="http://schemas.openxmlformats.org/drawingml/2006/main"/>
-        </p:spPr>
-        <p:txBody>
-          <a:bodyPr xmlns:a="http://schemas.openxmlformats.org/drawingml/2006/main" wrap="square" lIns="0" tIns="0" rIns="0" bIns="0" anchor="t">
-            <a:spAutoFit/>
-          </a:bodyPr>
-          <a:lstStyle xmlns:a="http://schemas.openxmlformats.org/drawingml/2006/main"/>
-          <a:p xmlns:a="http://schemas.openxmlformats.org/drawingml/2006/main">
-            <a:pPr algn="l">
-              <a:buNone/>
-            </a:pPr>
-            <a:r>
-              <a:rPr sz="1100" b="1" i="0">
-                <a:solidFill>
-                  <a:srgbClr val="D9FF55"/>
-                </a:solidFill>
-                <a:latin typeface="Courier New"/>
-                <a:ea typeface="Courier New"/>
-                <a:cs typeface="Courier New"/>
-              </a:rPr>
-              <a:t>0x9553c5…dbf1</a:t>
-            </a:r>
-          </a:p>
-        </p:txBody>
-      </p:sp>
-      <p:sp>
-        <p:nvSpPr>
-          <p:cNvPr id="37" name="TextBox 36">
-            <a:extLst xmlns:a="http://schemas.openxmlformats.org/drawingml/2006/main">
-              <a:ext uri="{FF2B5EF4-FFF2-40B4-BE49-F238E27FC236}">
-                <a16:creationId xmlns:a16="http://schemas.microsoft.com/office/drawing/2014/main" id="{23CC8BD3-DC57-4871-B24C-87579EB85917}"/>
-              </a:ext>
-            </a:extLst>
-          </p:cNvPr>
-          <p:cNvSpPr>
-            <a:spLocks xmlns:a="http://schemas.openxmlformats.org/drawingml/2006/main" noGrp="1"/>
-          </p:cNvSpPr>
-          <p:nvPr/>
-        </p:nvSpPr>
-        <p:spPr>
-          <a:xfrm xmlns:a="http://schemas.openxmlformats.org/drawingml/2006/main">
-            <a:off x="777240" y="5440680"/>
-            <a:ext cx="6949440" cy="274320"/>
-          </a:xfrm>
-          <a:prstGeom xmlns:a="http://schemas.openxmlformats.org/drawingml/2006/main" prst="rect">
-            <a:avLst/>
-          </a:prstGeom>
-          <a:noFill xmlns:a="http://schemas.openxmlformats.org/drawingml/2006/main"/>
-        </p:spPr>
-        <p:txBody>
-          <a:bodyPr xmlns:a="http://schemas.openxmlformats.org/drawingml/2006/main" wrap="square" lIns="0" tIns="0" rIns="0" bIns="0" anchor="t">
-            <a:spAutoFit/>
-          </a:bodyPr>
-          <a:lstStyle xmlns:a="http://schemas.openxmlformats.org/drawingml/2006/main"/>
-          <a:p xmlns:a="http://schemas.openxmlformats.org/drawingml/2006/main">
-            <a:pPr algn="l">
-              <a:buNone/>
-            </a:pPr>
-            <a:r>
-              <a:rPr sz="1150" b="0" i="0">
-                <a:solidFill>
-                  <a:srgbClr val="8A9CB5"/>
-                </a:solidFill>
-                <a:latin typeface="Arial"/>
-                <a:ea typeface="Arial"/>
-                <a:cs typeface="Arial"/>
-              </a:rPr>
-              <a:t>Every figure re-checkable: </a:t>
-            </a:r>
-            <a:r>
-              <a:rPr sz="1150" b="1" i="0">
-                <a:solidFill>
-                  <a:srgbClr val="D9FF55"/>
-                </a:solidFill>
-                <a:latin typeface="Arial"/>
-                <a:ea typeface="Arial"/>
-                <a:cs typeface="Arial"/>
-              </a:rPr>
-              <a:t>pnpm verify:claims</a:t>
-            </a:r>
-            <a:r>
-              <a:rPr sz="1150" b="0" i="0">
-                <a:solidFill>
-                  <a:srgbClr val="8A9CB5"/>
-                </a:solidFill>
-                <a:latin typeface="Arial"/>
-                <a:ea typeface="Arial"/>
-                <a:cs typeface="Arial"/>
-              </a:rPr>
-              <a:t>  ·  output/monad/deployment.json</a:t>
-            </a:r>
-          </a:p>
-        </p:txBody>
-      </p:sp>
+        </p:spPr>
+      </p:pic>
     </p:spTree>
     <p:extLst>
       <p:ext uri="{BB962C8B-B14F-4D97-AF65-F5344CB8AC3E}">
-        <p14:creationId xmlns:p14="http://schemas.microsoft.com/office/powerpoint/2010/main" val="1761612312"/>
+        <p14:creationId xmlns:p14="http://schemas.microsoft.com/office/powerpoint/2010/main" val="1476615000"/>
       </p:ext>
     </p:extLst>
   </p:cSld>
@@ -9048,10 +11203,10 @@
       </p:grpSpPr>
       <p:sp>
         <p:nvSpPr>
-          <p:cNvPr id="2" name="Rectangle 1">
-            <a:extLst xmlns:a="http://schemas.openxmlformats.org/drawingml/2006/main">
-              <a:ext uri="{FF2B5EF4-FFF2-40B4-BE49-F238E27FC236}">
-                <a16:creationId xmlns:a16="http://schemas.microsoft.com/office/drawing/2014/main" id="{E9C7D062-8740-41D3-82BD-72679040C103}"/>
+          <p:cNvPr id="7" name="evidence-background-2">
+            <a:extLst xmlns:a="http://schemas.openxmlformats.org/drawingml/2006/main">
+              <a:ext uri="{FF2B5EF4-FFF2-40B4-BE49-F238E27FC236}">
+                <a16:creationId xmlns:a16="http://schemas.microsoft.com/office/drawing/2014/main" id="{03997737-7A0E-4394-B179-29A26CA27650}"/>
               </a:ext>
             </a:extLst>
           </p:cNvPr>
@@ -9063,7 +11218,7 @@
         <p:spPr>
           <a:xfrm xmlns:a="http://schemas.openxmlformats.org/drawingml/2006/main">
             <a:off x="0" y="0"/>
-            <a:ext cx="12191695" cy="6858000"/>
+            <a:ext cx="12192000" cy="6858000"/>
           </a:xfrm>
           <a:prstGeom xmlns:a="http://schemas.openxmlformats.org/drawingml/2006/main" prst="rect">
             <a:avLst/>
@@ -9071,1273 +11226,1452 @@
           <a:solidFill xmlns:a="http://schemas.openxmlformats.org/drawingml/2006/main">
             <a:srgbClr val="0A0E14"/>
           </a:solidFill>
-          <a:ln xmlns:a="http://schemas.openxmlformats.org/drawingml/2006/main">
-            <a:noFill/>
+          <a:ln xmlns:a="http://schemas.openxmlformats.org/drawingml/2006/main" w="0">
+            <a:solidFill>
+              <a:srgbClr val="0A0E14"/>
+            </a:solidFill>
+            <a:prstDash val="solid"/>
           </a:ln>
         </p:spPr>
-        <p:style>
-          <a:lnRef xmlns:a="http://schemas.openxmlformats.org/drawingml/2006/main" idx="1">
-            <a:schemeClr val="accent1"/>
-          </a:lnRef>
-          <a:fillRef xmlns:a="http://schemas.openxmlformats.org/drawingml/2006/main" idx="3">
-            <a:schemeClr val="accent1"/>
-          </a:fillRef>
-          <a:effectRef xmlns:a="http://schemas.openxmlformats.org/drawingml/2006/main" idx="2">
-            <a:schemeClr val="accent1"/>
-          </a:effectRef>
-          <a:fontRef xmlns:a="http://schemas.openxmlformats.org/drawingml/2006/main" idx="minor">
-            <a:schemeClr val="lt1"/>
-          </a:fontRef>
-        </p:style>
+      </p:sp>
+      <p:sp>
+        <p:nvSpPr>
+          <p:cNvPr id="2" name="evidence-accent-2">
+            <a:extLst xmlns:a="http://schemas.openxmlformats.org/drawingml/2006/main">
+              <a:ext uri="{FF2B5EF4-FFF2-40B4-BE49-F238E27FC236}">
+                <a16:creationId xmlns:a16="http://schemas.microsoft.com/office/drawing/2014/main" id="{B4ED7EFE-3D3F-437B-94AE-CD22FB17F478}"/>
+              </a:ext>
+            </a:extLst>
+          </p:cNvPr>
+          <p:cNvSpPr>
+            <a:spLocks xmlns:a="http://schemas.openxmlformats.org/drawingml/2006/main" noGrp="1"/>
+          </p:cNvSpPr>
+          <p:nvPr/>
+        </p:nvSpPr>
+        <p:spPr>
+          <a:xfrm xmlns:a="http://schemas.openxmlformats.org/drawingml/2006/main">
+            <a:off x="685800" y="361950"/>
+            <a:ext cx="1181100" cy="257175"/>
+          </a:xfrm>
+          <a:prstGeom xmlns:a="http://schemas.openxmlformats.org/drawingml/2006/main" prst="roundRect">
+            <a:avLst>
+              <a:gd name="adj" fmla="val 29630"/>
+            </a:avLst>
+          </a:prstGeom>
+          <a:solidFill xmlns:a="http://schemas.openxmlformats.org/drawingml/2006/main">
+            <a:srgbClr val="D7FF43"/>
+          </a:solidFill>
+          <a:ln xmlns:a="http://schemas.openxmlformats.org/drawingml/2006/main" w="0">
+            <a:solidFill>
+              <a:srgbClr val="D7FF43"/>
+            </a:solidFill>
+            <a:prstDash val="solid"/>
+          </a:ln>
+        </p:spPr>
         <p:txBody>
           <a:bodyPr xmlns:a="http://schemas.openxmlformats.org/drawingml/2006/main" anchor="ctr"/>
           <a:lstStyle xmlns:a="http://schemas.openxmlformats.org/drawingml/2006/main"/>
           <a:p xmlns:a="http://schemas.openxmlformats.org/drawingml/2006/main">
             <a:pPr algn="ctr">
-              <a:buNone/>
-            </a:pPr>
-          </a:p>
-        </p:txBody>
-      </p:sp>
-      <p:sp>
-        <p:nvSpPr>
-          <p:cNvPr id="3" name="TextBox 2">
-            <a:extLst xmlns:a="http://schemas.openxmlformats.org/drawingml/2006/main">
-              <a:ext uri="{FF2B5EF4-FFF2-40B4-BE49-F238E27FC236}">
-                <a16:creationId xmlns:a16="http://schemas.microsoft.com/office/drawing/2014/main" id="{6B6E5BEC-2B43-4636-AC5E-1E8D82EE54F2}"/>
-              </a:ext>
-            </a:extLst>
-          </p:cNvPr>
-          <p:cNvSpPr>
-            <a:spLocks xmlns:a="http://schemas.openxmlformats.org/drawingml/2006/main" noGrp="1"/>
-          </p:cNvSpPr>
-          <p:nvPr/>
-        </p:nvSpPr>
-        <p:spPr>
-          <a:xfrm xmlns:a="http://schemas.openxmlformats.org/drawingml/2006/main">
-            <a:off x="777240" y="658368"/>
-            <a:ext cx="5486400" cy="228600"/>
-          </a:xfrm>
-          <a:prstGeom xmlns:a="http://schemas.openxmlformats.org/drawingml/2006/main" prst="rect">
-            <a:avLst/>
-          </a:prstGeom>
-          <a:noFill xmlns:a="http://schemas.openxmlformats.org/drawingml/2006/main"/>
-        </p:spPr>
-        <p:txBody>
-          <a:bodyPr xmlns:a="http://schemas.openxmlformats.org/drawingml/2006/main" wrap="square" lIns="0" tIns="0" rIns="0" bIns="0" anchor="t">
-            <a:spAutoFit/>
-          </a:bodyPr>
-          <a:lstStyle xmlns:a="http://schemas.openxmlformats.org/drawingml/2006/main"/>
-          <a:p xmlns:a="http://schemas.openxmlformats.org/drawingml/2006/main">
-            <a:pPr algn="l">
-              <a:buNone/>
-            </a:pPr>
-            <a:r>
-              <a:rPr sz="1100" b="1" i="0">
-                <a:solidFill>
-                  <a:srgbClr val="D9FF55"/>
+              <a:defRPr sz="900" b="1">
+                <a:solidFill>
+                  <a:srgbClr val="10150E"/>
+                </a:solidFill>
+                <a:latin typeface="Arial"/>
+                <a:ea typeface="Arial"/>
+                <a:cs typeface="Arial"/>
+              </a:defRPr>
+            </a:pPr>
+            <a:r>
+              <a:rPr sz="900" b="1">
+                <a:solidFill>
+                  <a:srgbClr val="10150E"/>
                 </a:solidFill>
                 <a:latin typeface="Arial"/>
                 <a:ea typeface="Arial"/>
                 <a:cs typeface="Arial"/>
               </a:rPr>
-              <a:t>THE BOUNDARY</a:t>
-            </a:r>
-          </a:p>
-        </p:txBody>
-      </p:sp>
-      <p:sp>
-        <p:nvSpPr>
-          <p:cNvPr id="4" name="TextBox 3">
-            <a:extLst xmlns:a="http://schemas.openxmlformats.org/drawingml/2006/main">
-              <a:ext uri="{FF2B5EF4-FFF2-40B4-BE49-F238E27FC236}">
-                <a16:creationId xmlns:a16="http://schemas.microsoft.com/office/drawing/2014/main" id="{1CEB04B5-14C4-4C5D-85CB-4DFBBBD539B0}"/>
-              </a:ext>
-            </a:extLst>
-          </p:cNvPr>
-          <p:cNvSpPr>
-            <a:spLocks xmlns:a="http://schemas.openxmlformats.org/drawingml/2006/main" noGrp="1"/>
-          </p:cNvSpPr>
-          <p:nvPr/>
-        </p:nvSpPr>
-        <p:spPr>
-          <a:xfrm xmlns:a="http://schemas.openxmlformats.org/drawingml/2006/main">
-            <a:off x="777240" y="960120"/>
-            <a:ext cx="10241280" cy="640080"/>
+              <a:t>DEMO · 02</a:t>
+            </a:r>
+          </a:p>
+        </p:txBody>
+      </p:sp>
+      <p:sp>
+        <p:nvSpPr>
+          <p:cNvPr id="3" name="evidence-title-2">
+            <a:extLst xmlns:a="http://schemas.openxmlformats.org/drawingml/2006/main">
+              <a:ext uri="{FF2B5EF4-FFF2-40B4-BE49-F238E27FC236}">
+                <a16:creationId xmlns:a16="http://schemas.microsoft.com/office/drawing/2014/main" id="{2F3EDBA3-E69C-49DB-95D5-03581782C4B5}"/>
+              </a:ext>
+            </a:extLst>
+          </p:cNvPr>
+          <p:cNvSpPr>
+            <a:spLocks xmlns:a="http://schemas.openxmlformats.org/drawingml/2006/main" noGrp="1"/>
+          </p:cNvSpPr>
+          <p:nvPr/>
+        </p:nvSpPr>
+        <p:spPr>
+          <a:xfrm xmlns:a="http://schemas.openxmlformats.org/drawingml/2006/main">
+            <a:off x="685800" y="714375"/>
+            <a:ext cx="10820400" cy="485775"/>
           </a:xfrm>
           <a:prstGeom xmlns:a="http://schemas.openxmlformats.org/drawingml/2006/main" prst="rect">
             <a:avLst/>
           </a:prstGeom>
-          <a:noFill xmlns:a="http://schemas.openxmlformats.org/drawingml/2006/main"/>
-        </p:spPr>
-        <p:txBody>
-          <a:bodyPr xmlns:a="http://schemas.openxmlformats.org/drawingml/2006/main" wrap="square" lIns="0" tIns="0" rIns="0" bIns="0" anchor="t">
-            <a:spAutoFit/>
-          </a:bodyPr>
-          <a:lstStyle xmlns:a="http://schemas.openxmlformats.org/drawingml/2006/main"/>
-          <a:p xmlns:a="http://schemas.openxmlformats.org/drawingml/2006/main">
-            <a:pPr algn="l">
-              <a:buNone/>
-            </a:pPr>
-            <a:r>
-              <a:rPr sz="3200" b="1" i="0">
-                <a:solidFill>
-                  <a:srgbClr val="E8EDF4"/>
+          <a:solidFill xmlns:a="http://schemas.openxmlformats.org/drawingml/2006/main">
+            <a:srgbClr val="0A0E14"/>
+          </a:solidFill>
+          <a:ln xmlns:a="http://schemas.openxmlformats.org/drawingml/2006/main" w="0">
+            <a:solidFill>
+              <a:srgbClr val="0A0E14"/>
+            </a:solidFill>
+            <a:prstDash val="solid"/>
+          </a:ln>
+        </p:spPr>
+        <p:txBody>
+          <a:bodyPr xmlns:a="http://schemas.openxmlformats.org/drawingml/2006/main"/>
+          <a:lstStyle xmlns:a="http://schemas.openxmlformats.org/drawingml/2006/main"/>
+          <a:p xmlns:a="http://schemas.openxmlformats.org/drawingml/2006/main">
+            <a:pPr>
+              <a:defRPr sz="2850" b="1">
+                <a:solidFill>
+                  <a:srgbClr val="F2F5F8"/>
+                </a:solidFill>
+                <a:latin typeface="Arial"/>
+                <a:ea typeface="Arial"/>
+                <a:cs typeface="Arial"/>
+              </a:defRPr>
+            </a:pPr>
+            <a:r>
+              <a:rPr sz="2850" b="1">
+                <a:solidFill>
+                  <a:srgbClr val="F2F5F8"/>
                 </a:solidFill>
                 <a:latin typeface="Arial"/>
                 <a:ea typeface="Arial"/>
                 <a:cs typeface="Arial"/>
               </a:rPr>
-              <a:t>What we enforce — and what we don’t</a:t>
-            </a:r>
-          </a:p>
-        </p:txBody>
-      </p:sp>
-      <p:sp>
-        <p:nvSpPr>
-          <p:cNvPr id="5" name="Rounded Rectangle 4">
-            <a:extLst xmlns:a="http://schemas.openxmlformats.org/drawingml/2006/main">
-              <a:ext uri="{FF2B5EF4-FFF2-40B4-BE49-F238E27FC236}">
-                <a16:creationId xmlns:a16="http://schemas.microsoft.com/office/drawing/2014/main" id="{1EF81E7D-1C7D-40C4-A05B-12BDB8F4E6D0}"/>
-              </a:ext>
-            </a:extLst>
-          </p:cNvPr>
-          <p:cNvSpPr>
-            <a:spLocks xmlns:a="http://schemas.openxmlformats.org/drawingml/2006/main" noGrp="1"/>
-          </p:cNvSpPr>
-          <p:nvPr/>
-        </p:nvSpPr>
-        <p:spPr>
-          <a:xfrm xmlns:a="http://schemas.openxmlformats.org/drawingml/2006/main">
-            <a:off x="777240" y="1965960"/>
-            <a:ext cx="4892040" cy="2743200"/>
-          </a:xfrm>
-          <a:prstGeom xmlns:a="http://schemas.openxmlformats.org/drawingml/2006/main" prst="roundRect">
-            <a:avLst>
-              <a:gd name="adj" fmla="val 6000"/>
-            </a:avLst>
-          </a:prstGeom>
-          <a:solidFill xmlns:a="http://schemas.openxmlformats.org/drawingml/2006/main">
-            <a:srgbClr val="161E2A"/>
-          </a:solidFill>
-          <a:ln xmlns:a="http://schemas.openxmlformats.org/drawingml/2006/main" w="12700">
-            <a:solidFill>
-              <a:srgbClr val="2A3647"/>
-            </a:solidFill>
-          </a:ln>
-        </p:spPr>
-        <p:style>
-          <a:lnRef xmlns:a="http://schemas.openxmlformats.org/drawingml/2006/main" idx="1">
-            <a:schemeClr val="accent1"/>
-          </a:lnRef>
-          <a:fillRef xmlns:a="http://schemas.openxmlformats.org/drawingml/2006/main" idx="3">
-            <a:schemeClr val="accent1"/>
-          </a:fillRef>
-          <a:effectRef xmlns:a="http://schemas.openxmlformats.org/drawingml/2006/main" idx="2">
-            <a:schemeClr val="accent1"/>
-          </a:effectRef>
-          <a:fontRef xmlns:a="http://schemas.openxmlformats.org/drawingml/2006/main" idx="minor">
-            <a:schemeClr val="lt1"/>
-          </a:fontRef>
-        </p:style>
-        <p:txBody>
-          <a:bodyPr xmlns:a="http://schemas.openxmlformats.org/drawingml/2006/main" anchor="ctr"/>
-          <a:lstStyle xmlns:a="http://schemas.openxmlformats.org/drawingml/2006/main"/>
-          <a:p xmlns:a="http://schemas.openxmlformats.org/drawingml/2006/main">
-            <a:pPr algn="ctr">
-              <a:buNone/>
-            </a:pPr>
-          </a:p>
-        </p:txBody>
-      </p:sp>
-      <p:sp>
-        <p:nvSpPr>
-          <p:cNvPr id="6" name="TextBox 5">
-            <a:extLst xmlns:a="http://schemas.openxmlformats.org/drawingml/2006/main">
-              <a:ext uri="{FF2B5EF4-FFF2-40B4-BE49-F238E27FC236}">
-                <a16:creationId xmlns:a16="http://schemas.microsoft.com/office/drawing/2014/main" id="{950A366B-6390-425C-946A-61C2E50A7C81}"/>
-              </a:ext>
-            </a:extLst>
-          </p:cNvPr>
-          <p:cNvSpPr>
-            <a:spLocks xmlns:a="http://schemas.openxmlformats.org/drawingml/2006/main" noGrp="1"/>
-          </p:cNvSpPr>
-          <p:nvPr/>
-        </p:nvSpPr>
-        <p:spPr>
-          <a:xfrm xmlns:a="http://schemas.openxmlformats.org/drawingml/2006/main">
-            <a:off x="1097280" y="2212848"/>
-            <a:ext cx="4114800" cy="274320"/>
+              <a:t>Stop at the approval boundary</a:t>
+            </a:r>
+          </a:p>
+        </p:txBody>
+      </p:sp>
+      <p:sp>
+        <p:nvSpPr>
+          <p:cNvPr id="4" name="evidence-subtitle-2">
+            <a:extLst xmlns:a="http://schemas.openxmlformats.org/drawingml/2006/main">
+              <a:ext uri="{FF2B5EF4-FFF2-40B4-BE49-F238E27FC236}">
+                <a16:creationId xmlns:a16="http://schemas.microsoft.com/office/drawing/2014/main" id="{75FA4746-89DA-4D01-8994-D325ECD62821}"/>
+              </a:ext>
+            </a:extLst>
+          </p:cNvPr>
+          <p:cNvSpPr>
+            <a:spLocks xmlns:a="http://schemas.openxmlformats.org/drawingml/2006/main" noGrp="1"/>
+          </p:cNvSpPr>
+          <p:nvPr/>
+        </p:nvSpPr>
+        <p:spPr>
+          <a:xfrm xmlns:a="http://schemas.openxmlformats.org/drawingml/2006/main">
+            <a:off x="685800" y="1209675"/>
+            <a:ext cx="10820400" cy="295275"/>
           </a:xfrm>
           <a:prstGeom xmlns:a="http://schemas.openxmlformats.org/drawingml/2006/main" prst="rect">
             <a:avLst/>
           </a:prstGeom>
-          <a:noFill xmlns:a="http://schemas.openxmlformats.org/drawingml/2006/main"/>
-        </p:spPr>
-        <p:txBody>
-          <a:bodyPr xmlns:a="http://schemas.openxmlformats.org/drawingml/2006/main" wrap="square" lIns="0" tIns="0" rIns="0" bIns="0" anchor="t">
-            <a:spAutoFit/>
-          </a:bodyPr>
-          <a:lstStyle xmlns:a="http://schemas.openxmlformats.org/drawingml/2006/main"/>
-          <a:p xmlns:a="http://schemas.openxmlformats.org/drawingml/2006/main">
-            <a:pPr algn="l">
-              <a:buNone/>
-            </a:pPr>
-            <a:r>
-              <a:rPr sz="1100" b="1" i="0">
-                <a:solidFill>
-                  <a:srgbClr val="4ADE80"/>
+          <a:solidFill xmlns:a="http://schemas.openxmlformats.org/drawingml/2006/main">
+            <a:srgbClr val="0A0E14"/>
+          </a:solidFill>
+          <a:ln xmlns:a="http://schemas.openxmlformats.org/drawingml/2006/main" w="0">
+            <a:solidFill>
+              <a:srgbClr val="0A0E14"/>
+            </a:solidFill>
+            <a:prstDash val="solid"/>
+          </a:ln>
+        </p:spPr>
+        <p:txBody>
+          <a:bodyPr xmlns:a="http://schemas.openxmlformats.org/drawingml/2006/main"/>
+          <a:lstStyle xmlns:a="http://schemas.openxmlformats.org/drawingml/2006/main"/>
+          <a:p xmlns:a="http://schemas.openxmlformats.org/drawingml/2006/main">
+            <a:pPr>
+              <a:defRPr sz="1275">
+                <a:solidFill>
+                  <a:srgbClr val="9BACBE"/>
+                </a:solidFill>
+                <a:latin typeface="Arial"/>
+                <a:ea typeface="Arial"/>
+                <a:cs typeface="Arial"/>
+              </a:defRPr>
+            </a:pPr>
+            <a:r>
+              <a:rPr sz="1275">
+                <a:solidFill>
+                  <a:srgbClr val="9BACBE"/>
                 </a:solidFill>
                 <a:latin typeface="Arial"/>
                 <a:ea typeface="Arial"/>
                 <a:cs typeface="Arial"/>
               </a:rPr>
-              <a:t>ENFORCED BY THE CONTRACT</a:t>
-            </a:r>
-          </a:p>
-        </p:txBody>
-      </p:sp>
-      <p:sp>
-        <p:nvSpPr>
-          <p:cNvPr id="7" name="Oval 6">
-            <a:extLst xmlns:a="http://schemas.openxmlformats.org/drawingml/2006/main">
-              <a:ext uri="{FF2B5EF4-FFF2-40B4-BE49-F238E27FC236}">
-                <a16:creationId xmlns:a16="http://schemas.microsoft.com/office/drawing/2014/main" id="{58D13E85-B666-4E5B-BB0F-ACEA248513A4}"/>
-              </a:ext>
-            </a:extLst>
-          </p:cNvPr>
-          <p:cNvSpPr>
-            <a:spLocks xmlns:a="http://schemas.openxmlformats.org/drawingml/2006/main" noGrp="1"/>
-          </p:cNvSpPr>
-          <p:nvPr/>
-        </p:nvSpPr>
-        <p:spPr>
-          <a:xfrm xmlns:a="http://schemas.openxmlformats.org/drawingml/2006/main">
-            <a:off x="1097280" y="2660904"/>
-            <a:ext cx="100584" cy="100584"/>
-          </a:xfrm>
-          <a:prstGeom xmlns:a="http://schemas.openxmlformats.org/drawingml/2006/main" prst="ellipse">
-            <a:avLst/>
+              <a:t>The signed mandate makes the agent's authority explicit before any payment side effect.</a:t>
+            </a:r>
+          </a:p>
+        </p:txBody>
+      </p:sp>
+      <p:sp>
+        <p:nvSpPr>
+          <p:cNvPr id="5" name="evidence-frame-2">
+            <a:extLst xmlns:a="http://schemas.openxmlformats.org/drawingml/2006/main">
+              <a:ext uri="{FF2B5EF4-FFF2-40B4-BE49-F238E27FC236}">
+                <a16:creationId xmlns:a16="http://schemas.microsoft.com/office/drawing/2014/main" id="{AC79C44C-F32C-47BA-A4AA-268F97E908DE}"/>
+              </a:ext>
+            </a:extLst>
+          </p:cNvPr>
+          <p:cNvSpPr>
+            <a:spLocks xmlns:a="http://schemas.openxmlformats.org/drawingml/2006/main" noGrp="1"/>
+          </p:cNvSpPr>
+          <p:nvPr/>
+        </p:nvSpPr>
+        <p:spPr>
+          <a:xfrm xmlns:a="http://schemas.openxmlformats.org/drawingml/2006/main">
+            <a:off x="685800" y="1638300"/>
+            <a:ext cx="10820400" cy="4610100"/>
+          </a:xfrm>
+          <a:prstGeom xmlns:a="http://schemas.openxmlformats.org/drawingml/2006/main" prst="roundRect">
+            <a:avLst>
+              <a:gd name="adj" fmla="val 1653"/>
+            </a:avLst>
           </a:prstGeom>
           <a:solidFill xmlns:a="http://schemas.openxmlformats.org/drawingml/2006/main">
-            <a:srgbClr val="4ADE80"/>
+            <a:srgbClr val="111820"/>
           </a:solidFill>
-          <a:ln xmlns:a="http://schemas.openxmlformats.org/drawingml/2006/main">
-            <a:noFill/>
+          <a:ln xmlns:a="http://schemas.openxmlformats.org/drawingml/2006/main" w="14288">
+            <a:solidFill>
+              <a:srgbClr val="2B3746"/>
+            </a:solidFill>
+            <a:prstDash val="solid"/>
           </a:ln>
         </p:spPr>
-        <p:style>
-          <a:lnRef xmlns:a="http://schemas.openxmlformats.org/drawingml/2006/main" idx="1">
-            <a:schemeClr val="accent1"/>
-          </a:lnRef>
-          <a:fillRef xmlns:a="http://schemas.openxmlformats.org/drawingml/2006/main" idx="3">
-            <a:schemeClr val="accent1"/>
-          </a:fillRef>
-          <a:effectRef xmlns:a="http://schemas.openxmlformats.org/drawingml/2006/main" idx="2">
-            <a:schemeClr val="accent1"/>
-          </a:effectRef>
-          <a:fontRef xmlns:a="http://schemas.openxmlformats.org/drawingml/2006/main" idx="minor">
-            <a:schemeClr val="lt1"/>
-          </a:fontRef>
-        </p:style>
-        <p:txBody>
-          <a:bodyPr xmlns:a="http://schemas.openxmlformats.org/drawingml/2006/main" anchor="ctr"/>
-          <a:lstStyle xmlns:a="http://schemas.openxmlformats.org/drawingml/2006/main"/>
-          <a:p xmlns:a="http://schemas.openxmlformats.org/drawingml/2006/main">
-            <a:pPr algn="ctr">
-              <a:buNone/>
-            </a:pPr>
-          </a:p>
-        </p:txBody>
-      </p:sp>
-      <p:sp>
-        <p:nvSpPr>
-          <p:cNvPr id="8" name="TextBox 7">
-            <a:extLst xmlns:a="http://schemas.openxmlformats.org/drawingml/2006/main">
-              <a:ext uri="{FF2B5EF4-FFF2-40B4-BE49-F238E27FC236}">
-                <a16:creationId xmlns:a16="http://schemas.microsoft.com/office/drawing/2014/main" id="{285616A3-0EFC-43B1-809F-0A95642BD09A}"/>
-              </a:ext>
-            </a:extLst>
-          </p:cNvPr>
-          <p:cNvSpPr>
-            <a:spLocks xmlns:a="http://schemas.openxmlformats.org/drawingml/2006/main" noGrp="1"/>
-          </p:cNvSpPr>
-          <p:nvPr/>
-        </p:nvSpPr>
-        <p:spPr>
-          <a:xfrm xmlns:a="http://schemas.openxmlformats.org/drawingml/2006/main">
-            <a:off x="1353312" y="2587752"/>
-            <a:ext cx="4023360" cy="457200"/>
+      </p:sp>
+      <p:pic>
+        <p:nvPicPr>
+          <p:cNvPr id="12" name="evidence-image-2"/>
+          <p:cNvPicPr>
+            <a:picLocks xmlns:a="http://schemas.openxmlformats.org/drawingml/2006/main" noChangeAspect="1"/>
+          </p:cNvPicPr>
+          <p:nvPr/>
+        </p:nvPicPr>
+        <p:blipFill>
+          <a:blip xmlns:r="http://schemas.openxmlformats.org/officeDocument/2006/relationships" xmlns:a="http://schemas.openxmlformats.org/drawingml/2006/main" r:embed="R35abe571a06f4456"/>
+          <a:srcRect xmlns:a="http://schemas.openxmlformats.org/drawingml/2006/main" l="0" t="28005" r="0" b="28005"/>
+          <a:stretch xmlns:a="http://schemas.openxmlformats.org/drawingml/2006/main">
+            <a:fillRect l="0" t="0" r="0" b="0"/>
+          </a:stretch>
+        </p:blipFill>
+        <p:spPr>
+          <a:xfrm xmlns:a="http://schemas.openxmlformats.org/drawingml/2006/main">
+            <a:off x="781050" y="1733550"/>
+            <a:ext cx="10629900" cy="4419600"/>
+          </a:xfrm>
+          <a:prstGeom xmlns:a="http://schemas.openxmlformats.org/drawingml/2006/main" prst="roundRect">
+            <a:avLst>
+              <a:gd name="adj" fmla="val 2155"/>
+            </a:avLst>
+          </a:prstGeom>
+        </p:spPr>
+      </p:pic>
+    </p:spTree>
+    <p:extLst>
+      <p:ext uri="{BB962C8B-B14F-4D97-AF65-F5344CB8AC3E}">
+        <p14:creationId xmlns:p14="http://schemas.microsoft.com/office/powerpoint/2010/main" val="961537988"/>
+      </p:ext>
+    </p:extLst>
+  </p:cSld>
+</p:sld>
+</file>
+
+<file path=ppt/slides/slide6.xml><?xml version="1.0" encoding="utf-8"?>
+<p:sld xmlns:p="http://schemas.openxmlformats.org/presentationml/2006/main">
+  <p:cSld>
+    <p:spTree>
+      <p:nvGrpSpPr>
+        <p:cNvPr id="1" name=""/>
+        <p:cNvGrpSpPr/>
+        <p:nvPr/>
+      </p:nvGrpSpPr>
+      <p:grpSpPr>
+        <a:xfrm xmlns:a="http://schemas.openxmlformats.org/drawingml/2006/main"/>
+      </p:grpSpPr>
+      <p:sp>
+        <p:nvSpPr>
+          <p:cNvPr id="7" name="evidence-background-3">
+            <a:extLst xmlns:a="http://schemas.openxmlformats.org/drawingml/2006/main">
+              <a:ext uri="{FF2B5EF4-FFF2-40B4-BE49-F238E27FC236}">
+                <a16:creationId xmlns:a16="http://schemas.microsoft.com/office/drawing/2014/main" id="{391028B0-3F94-4F91-BAF4-52C73E1CA8B3}"/>
+              </a:ext>
+            </a:extLst>
+          </p:cNvPr>
+          <p:cNvSpPr>
+            <a:spLocks xmlns:a="http://schemas.openxmlformats.org/drawingml/2006/main" noGrp="1"/>
+          </p:cNvSpPr>
+          <p:nvPr/>
+        </p:nvSpPr>
+        <p:spPr>
+          <a:xfrm xmlns:a="http://schemas.openxmlformats.org/drawingml/2006/main">
+            <a:off x="0" y="0"/>
+            <a:ext cx="12192000" cy="6858000"/>
           </a:xfrm>
           <a:prstGeom xmlns:a="http://schemas.openxmlformats.org/drawingml/2006/main" prst="rect">
             <a:avLst/>
           </a:prstGeom>
-          <a:noFill xmlns:a="http://schemas.openxmlformats.org/drawingml/2006/main"/>
-        </p:spPr>
-        <p:txBody>
-          <a:bodyPr xmlns:a="http://schemas.openxmlformats.org/drawingml/2006/main" wrap="square" lIns="0" tIns="0" rIns="0" bIns="0" anchor="t">
-            <a:spAutoFit/>
-          </a:bodyPr>
-          <a:lstStyle xmlns:a="http://schemas.openxmlformats.org/drawingml/2006/main"/>
-          <a:p xmlns:a="http://schemas.openxmlformats.org/drawingml/2006/main">
-            <a:pPr algn="l">
-              <a:buNone/>
-            </a:pPr>
-            <a:r>
-              <a:rPr sz="1250" b="0" i="0">
-                <a:solidFill>
-                  <a:srgbClr val="E8EDF4"/>
+          <a:solidFill xmlns:a="http://schemas.openxmlformats.org/drawingml/2006/main">
+            <a:srgbClr val="0A0E14"/>
+          </a:solidFill>
+          <a:ln xmlns:a="http://schemas.openxmlformats.org/drawingml/2006/main" w="0">
+            <a:solidFill>
+              <a:srgbClr val="0A0E14"/>
+            </a:solidFill>
+            <a:prstDash val="solid"/>
+          </a:ln>
+        </p:spPr>
+      </p:sp>
+      <p:sp>
+        <p:nvSpPr>
+          <p:cNvPr id="2" name="evidence-accent-3">
+            <a:extLst xmlns:a="http://schemas.openxmlformats.org/drawingml/2006/main">
+              <a:ext uri="{FF2B5EF4-FFF2-40B4-BE49-F238E27FC236}">
+                <a16:creationId xmlns:a16="http://schemas.microsoft.com/office/drawing/2014/main" id="{F56EB157-1161-41EB-87E6-F1D7A3E30A0E}"/>
+              </a:ext>
+            </a:extLst>
+          </p:cNvPr>
+          <p:cNvSpPr>
+            <a:spLocks xmlns:a="http://schemas.openxmlformats.org/drawingml/2006/main" noGrp="1"/>
+          </p:cNvSpPr>
+          <p:nvPr/>
+        </p:nvSpPr>
+        <p:spPr>
+          <a:xfrm xmlns:a="http://schemas.openxmlformats.org/drawingml/2006/main">
+            <a:off x="685800" y="361950"/>
+            <a:ext cx="1181100" cy="257175"/>
+          </a:xfrm>
+          <a:prstGeom xmlns:a="http://schemas.openxmlformats.org/drawingml/2006/main" prst="roundRect">
+            <a:avLst>
+              <a:gd name="adj" fmla="val 29630"/>
+            </a:avLst>
+          </a:prstGeom>
+          <a:solidFill xmlns:a="http://schemas.openxmlformats.org/drawingml/2006/main">
+            <a:srgbClr val="D7FF43"/>
+          </a:solidFill>
+          <a:ln xmlns:a="http://schemas.openxmlformats.org/drawingml/2006/main" w="0">
+            <a:solidFill>
+              <a:srgbClr val="D7FF43"/>
+            </a:solidFill>
+            <a:prstDash val="solid"/>
+          </a:ln>
+        </p:spPr>
+        <p:txBody>
+          <a:bodyPr xmlns:a="http://schemas.openxmlformats.org/drawingml/2006/main" anchor="ctr"/>
+          <a:lstStyle xmlns:a="http://schemas.openxmlformats.org/drawingml/2006/main"/>
+          <a:p xmlns:a="http://schemas.openxmlformats.org/drawingml/2006/main">
+            <a:pPr algn="ctr">
+              <a:defRPr sz="900" b="1">
+                <a:solidFill>
+                  <a:srgbClr val="10150E"/>
+                </a:solidFill>
+                <a:latin typeface="Arial"/>
+                <a:ea typeface="Arial"/>
+                <a:cs typeface="Arial"/>
+              </a:defRPr>
+            </a:pPr>
+            <a:r>
+              <a:rPr sz="900" b="1">
+                <a:solidFill>
+                  <a:srgbClr val="10150E"/>
                 </a:solidFill>
                 <a:latin typeface="Arial"/>
                 <a:ea typeface="Arial"/>
                 <a:cs typeface="Arial"/>
               </a:rPr>
-              <a:t>Cumulative spending ceiling</a:t>
-            </a:r>
-          </a:p>
-        </p:txBody>
-      </p:sp>
-      <p:sp>
-        <p:nvSpPr>
-          <p:cNvPr id="9" name="Oval 8">
-            <a:extLst xmlns:a="http://schemas.openxmlformats.org/drawingml/2006/main">
-              <a:ext uri="{FF2B5EF4-FFF2-40B4-BE49-F238E27FC236}">
-                <a16:creationId xmlns:a16="http://schemas.microsoft.com/office/drawing/2014/main" id="{07E1319D-6ACF-4167-9E94-EC9BDE735535}"/>
-              </a:ext>
-            </a:extLst>
-          </p:cNvPr>
-          <p:cNvSpPr>
-            <a:spLocks xmlns:a="http://schemas.openxmlformats.org/drawingml/2006/main" noGrp="1"/>
-          </p:cNvSpPr>
-          <p:nvPr/>
-        </p:nvSpPr>
-        <p:spPr>
-          <a:xfrm xmlns:a="http://schemas.openxmlformats.org/drawingml/2006/main">
-            <a:off x="1097280" y="3063240"/>
-            <a:ext cx="100584" cy="100584"/>
-          </a:xfrm>
-          <a:prstGeom xmlns:a="http://schemas.openxmlformats.org/drawingml/2006/main" prst="ellipse">
-            <a:avLst/>
-          </a:prstGeom>
-          <a:solidFill xmlns:a="http://schemas.openxmlformats.org/drawingml/2006/main">
-            <a:srgbClr val="4ADE80"/>
-          </a:solidFill>
-          <a:ln xmlns:a="http://schemas.openxmlformats.org/drawingml/2006/main">
-            <a:noFill/>
-          </a:ln>
-        </p:spPr>
-        <p:style>
-          <a:lnRef xmlns:a="http://schemas.openxmlformats.org/drawingml/2006/main" idx="1">
-            <a:schemeClr val="accent1"/>
-          </a:lnRef>
-          <a:fillRef xmlns:a="http://schemas.openxmlformats.org/drawingml/2006/main" idx="3">
-            <a:schemeClr val="accent1"/>
-          </a:fillRef>
-          <a:effectRef xmlns:a="http://schemas.openxmlformats.org/drawingml/2006/main" idx="2">
-            <a:schemeClr val="accent1"/>
-          </a:effectRef>
-          <a:fontRef xmlns:a="http://schemas.openxmlformats.org/drawingml/2006/main" idx="minor">
-            <a:schemeClr val="lt1"/>
-          </a:fontRef>
-        </p:style>
-        <p:txBody>
-          <a:bodyPr xmlns:a="http://schemas.openxmlformats.org/drawingml/2006/main" anchor="ctr"/>
-          <a:lstStyle xmlns:a="http://schemas.openxmlformats.org/drawingml/2006/main"/>
-          <a:p xmlns:a="http://schemas.openxmlformats.org/drawingml/2006/main">
-            <a:pPr algn="ctr">
-              <a:buNone/>
-            </a:pPr>
-          </a:p>
-        </p:txBody>
-      </p:sp>
-      <p:sp>
-        <p:nvSpPr>
-          <p:cNvPr id="10" name="TextBox 9">
-            <a:extLst xmlns:a="http://schemas.openxmlformats.org/drawingml/2006/main">
-              <a:ext uri="{FF2B5EF4-FFF2-40B4-BE49-F238E27FC236}">
-                <a16:creationId xmlns:a16="http://schemas.microsoft.com/office/drawing/2014/main" id="{7310C5B9-CD56-4A9D-8AEF-04DBC14DFB10}"/>
-              </a:ext>
-            </a:extLst>
-          </p:cNvPr>
-          <p:cNvSpPr>
-            <a:spLocks xmlns:a="http://schemas.openxmlformats.org/drawingml/2006/main" noGrp="1"/>
-          </p:cNvSpPr>
-          <p:nvPr/>
-        </p:nvSpPr>
-        <p:spPr>
-          <a:xfrm xmlns:a="http://schemas.openxmlformats.org/drawingml/2006/main">
-            <a:off x="1353312" y="2990088"/>
-            <a:ext cx="4023360" cy="457200"/>
+              <a:t>MONAD · 01</a:t>
+            </a:r>
+          </a:p>
+        </p:txBody>
+      </p:sp>
+      <p:sp>
+        <p:nvSpPr>
+          <p:cNvPr id="3" name="evidence-title-3">
+            <a:extLst xmlns:a="http://schemas.openxmlformats.org/drawingml/2006/main">
+              <a:ext uri="{FF2B5EF4-FFF2-40B4-BE49-F238E27FC236}">
+                <a16:creationId xmlns:a16="http://schemas.microsoft.com/office/drawing/2014/main" id="{C382A94C-7070-4AA6-A604-D58F66E064EC}"/>
+              </a:ext>
+            </a:extLst>
+          </p:cNvPr>
+          <p:cNvSpPr>
+            <a:spLocks xmlns:a="http://schemas.openxmlformats.org/drawingml/2006/main" noGrp="1"/>
+          </p:cNvSpPr>
+          <p:nvPr/>
+        </p:nvSpPr>
+        <p:spPr>
+          <a:xfrm xmlns:a="http://schemas.openxmlformats.org/drawingml/2006/main">
+            <a:off x="685800" y="714375"/>
+            <a:ext cx="10820400" cy="485775"/>
           </a:xfrm>
           <a:prstGeom xmlns:a="http://schemas.openxmlformats.org/drawingml/2006/main" prst="rect">
             <a:avLst/>
           </a:prstGeom>
-          <a:noFill xmlns:a="http://schemas.openxmlformats.org/drawingml/2006/main"/>
-        </p:spPr>
-        <p:txBody>
-          <a:bodyPr xmlns:a="http://schemas.openxmlformats.org/drawingml/2006/main" wrap="square" lIns="0" tIns="0" rIns="0" bIns="0" anchor="t">
-            <a:spAutoFit/>
-          </a:bodyPr>
-          <a:lstStyle xmlns:a="http://schemas.openxmlformats.org/drawingml/2006/main"/>
-          <a:p xmlns:a="http://schemas.openxmlformats.org/drawingml/2006/main">
-            <a:pPr algn="l">
-              <a:buNone/>
-            </a:pPr>
-            <a:r>
-              <a:rPr sz="1250" b="0" i="0">
-                <a:solidFill>
-                  <a:srgbClr val="E8EDF4"/>
+          <a:solidFill xmlns:a="http://schemas.openxmlformats.org/drawingml/2006/main">
+            <a:srgbClr val="0A0E14"/>
+          </a:solidFill>
+          <a:ln xmlns:a="http://schemas.openxmlformats.org/drawingml/2006/main" w="0">
+            <a:solidFill>
+              <a:srgbClr val="0A0E14"/>
+            </a:solidFill>
+            <a:prstDash val="solid"/>
+          </a:ln>
+        </p:spPr>
+        <p:txBody>
+          <a:bodyPr xmlns:a="http://schemas.openxmlformats.org/drawingml/2006/main"/>
+          <a:lstStyle xmlns:a="http://schemas.openxmlformats.org/drawingml/2006/main"/>
+          <a:p xmlns:a="http://schemas.openxmlformats.org/drawingml/2006/main">
+            <a:pPr>
+              <a:defRPr sz="2850" b="1">
+                <a:solidFill>
+                  <a:srgbClr val="F2F5F8"/>
+                </a:solidFill>
+                <a:latin typeface="Arial"/>
+                <a:ea typeface="Arial"/>
+                <a:cs typeface="Arial"/>
+              </a:defRPr>
+            </a:pPr>
+            <a:r>
+              <a:rPr sz="2850" b="1">
+                <a:solidFill>
+                  <a:srgbClr val="F2F5F8"/>
                 </a:solidFill>
                 <a:latin typeface="Arial"/>
                 <a:ea typeface="Arial"/>
                 <a:cs typeface="Arial"/>
               </a:rPr>
-              <a:t>Approved-payee scope</a:t>
-            </a:r>
-          </a:p>
-        </p:txBody>
-      </p:sp>
-      <p:sp>
-        <p:nvSpPr>
-          <p:cNvPr id="11" name="Oval 10">
-            <a:extLst xmlns:a="http://schemas.openxmlformats.org/drawingml/2006/main">
-              <a:ext uri="{FF2B5EF4-FFF2-40B4-BE49-F238E27FC236}">
-                <a16:creationId xmlns:a16="http://schemas.microsoft.com/office/drawing/2014/main" id="{A4EC2AA3-DDE0-4F2B-A5DE-44FF6F219C6A}"/>
-              </a:ext>
-            </a:extLst>
-          </p:cNvPr>
-          <p:cNvSpPr>
-            <a:spLocks xmlns:a="http://schemas.openxmlformats.org/drawingml/2006/main" noGrp="1"/>
-          </p:cNvSpPr>
-          <p:nvPr/>
-        </p:nvSpPr>
-        <p:spPr>
-          <a:xfrm xmlns:a="http://schemas.openxmlformats.org/drawingml/2006/main">
-            <a:off x="1097280" y="3465576"/>
-            <a:ext cx="100584" cy="100584"/>
-          </a:xfrm>
-          <a:prstGeom xmlns:a="http://schemas.openxmlformats.org/drawingml/2006/main" prst="ellipse">
-            <a:avLst/>
-          </a:prstGeom>
-          <a:solidFill xmlns:a="http://schemas.openxmlformats.org/drawingml/2006/main">
-            <a:srgbClr val="4ADE80"/>
-          </a:solidFill>
-          <a:ln xmlns:a="http://schemas.openxmlformats.org/drawingml/2006/main">
-            <a:noFill/>
-          </a:ln>
-        </p:spPr>
-        <p:style>
-          <a:lnRef xmlns:a="http://schemas.openxmlformats.org/drawingml/2006/main" idx="1">
-            <a:schemeClr val="accent1"/>
-          </a:lnRef>
-          <a:fillRef xmlns:a="http://schemas.openxmlformats.org/drawingml/2006/main" idx="3">
-            <a:schemeClr val="accent1"/>
-          </a:fillRef>
-          <a:effectRef xmlns:a="http://schemas.openxmlformats.org/drawingml/2006/main" idx="2">
-            <a:schemeClr val="accent1"/>
-          </a:effectRef>
-          <a:fontRef xmlns:a="http://schemas.openxmlformats.org/drawingml/2006/main" idx="minor">
-            <a:schemeClr val="lt1"/>
-          </a:fontRef>
-        </p:style>
-        <p:txBody>
-          <a:bodyPr xmlns:a="http://schemas.openxmlformats.org/drawingml/2006/main" anchor="ctr"/>
-          <a:lstStyle xmlns:a="http://schemas.openxmlformats.org/drawingml/2006/main"/>
-          <a:p xmlns:a="http://schemas.openxmlformats.org/drawingml/2006/main">
-            <a:pPr algn="ctr">
-              <a:buNone/>
-            </a:pPr>
-          </a:p>
-        </p:txBody>
-      </p:sp>
-      <p:sp>
-        <p:nvSpPr>
-          <p:cNvPr id="12" name="TextBox 11">
-            <a:extLst xmlns:a="http://schemas.openxmlformats.org/drawingml/2006/main">
-              <a:ext uri="{FF2B5EF4-FFF2-40B4-BE49-F238E27FC236}">
-                <a16:creationId xmlns:a16="http://schemas.microsoft.com/office/drawing/2014/main" id="{A335B7DD-D329-4B7F-B52E-65DCFD4F852A}"/>
-              </a:ext>
-            </a:extLst>
-          </p:cNvPr>
-          <p:cNvSpPr>
-            <a:spLocks xmlns:a="http://schemas.openxmlformats.org/drawingml/2006/main" noGrp="1"/>
-          </p:cNvSpPr>
-          <p:nvPr/>
-        </p:nvSpPr>
-        <p:spPr>
-          <a:xfrm xmlns:a="http://schemas.openxmlformats.org/drawingml/2006/main">
-            <a:off x="1353312" y="3392424"/>
-            <a:ext cx="4023360" cy="457200"/>
+              <a:t>Public contract evidence</a:t>
+            </a:r>
+          </a:p>
+        </p:txBody>
+      </p:sp>
+      <p:sp>
+        <p:nvSpPr>
+          <p:cNvPr id="4" name="evidence-subtitle-3">
+            <a:extLst xmlns:a="http://schemas.openxmlformats.org/drawingml/2006/main">
+              <a:ext uri="{FF2B5EF4-FFF2-40B4-BE49-F238E27FC236}">
+                <a16:creationId xmlns:a16="http://schemas.microsoft.com/office/drawing/2014/main" id="{67CF98C1-7886-4176-9186-D7B7434BAEBD}"/>
+              </a:ext>
+            </a:extLst>
+          </p:cNvPr>
+          <p:cNvSpPr>
+            <a:spLocks xmlns:a="http://schemas.openxmlformats.org/drawingml/2006/main" noGrp="1"/>
+          </p:cNvSpPr>
+          <p:nvPr/>
+        </p:nvSpPr>
+        <p:spPr>
+          <a:xfrm xmlns:a="http://schemas.openxmlformats.org/drawingml/2006/main">
+            <a:off x="685800" y="1209675"/>
+            <a:ext cx="10820400" cy="295275"/>
           </a:xfrm>
           <a:prstGeom xmlns:a="http://schemas.openxmlformats.org/drawingml/2006/main" prst="rect">
             <a:avLst/>
           </a:prstGeom>
-          <a:noFill xmlns:a="http://schemas.openxmlformats.org/drawingml/2006/main"/>
-        </p:spPr>
-        <p:txBody>
-          <a:bodyPr xmlns:a="http://schemas.openxmlformats.org/drawingml/2006/main" wrap="square" lIns="0" tIns="0" rIns="0" bIns="0" anchor="t">
-            <a:spAutoFit/>
-          </a:bodyPr>
-          <a:lstStyle xmlns:a="http://schemas.openxmlformats.org/drawingml/2006/main"/>
-          <a:p xmlns:a="http://schemas.openxmlformats.org/drawingml/2006/main">
-            <a:pPr algn="l">
-              <a:buNone/>
-            </a:pPr>
-            <a:r>
-              <a:rPr sz="1250" b="0" i="0">
-                <a:solidFill>
-                  <a:srgbClr val="E8EDF4"/>
+          <a:solidFill xmlns:a="http://schemas.openxmlformats.org/drawingml/2006/main">
+            <a:srgbClr val="0A0E14"/>
+          </a:solidFill>
+          <a:ln xmlns:a="http://schemas.openxmlformats.org/drawingml/2006/main" w="0">
+            <a:solidFill>
+              <a:srgbClr val="0A0E14"/>
+            </a:solidFill>
+            <a:prstDash val="solid"/>
+          </a:ln>
+        </p:spPr>
+        <p:txBody>
+          <a:bodyPr xmlns:a="http://schemas.openxmlformats.org/drawingml/2006/main"/>
+          <a:lstStyle xmlns:a="http://schemas.openxmlformats.org/drawingml/2006/main"/>
+          <a:p xmlns:a="http://schemas.openxmlformats.org/drawingml/2006/main">
+            <a:pPr>
+              <a:defRPr sz="1275">
+                <a:solidFill>
+                  <a:srgbClr val="9BACBE"/>
+                </a:solidFill>
+                <a:latin typeface="Arial"/>
+                <a:ea typeface="Arial"/>
+                <a:cs typeface="Arial"/>
+              </a:defRPr>
+            </a:pPr>
+            <a:r>
+              <a:rPr sz="1275">
+                <a:solidFill>
+                  <a:srgbClr val="9BACBE"/>
                 </a:solidFill>
                 <a:latin typeface="Arial"/>
                 <a:ea typeface="Arial"/>
                 <a:cs typeface="Arial"/>
               </a:rPr>
-              <a:t>Validity window</a:t>
-            </a:r>
-          </a:p>
-        </p:txBody>
-      </p:sp>
-      <p:sp>
-        <p:nvSpPr>
-          <p:cNvPr id="13" name="Oval 12">
-            <a:extLst xmlns:a="http://schemas.openxmlformats.org/drawingml/2006/main">
-              <a:ext uri="{FF2B5EF4-FFF2-40B4-BE49-F238E27FC236}">
-                <a16:creationId xmlns:a16="http://schemas.microsoft.com/office/drawing/2014/main" id="{2E8E337C-04E1-4792-8A2B-2B1D6BC82370}"/>
-              </a:ext>
-            </a:extLst>
-          </p:cNvPr>
-          <p:cNvSpPr>
-            <a:spLocks xmlns:a="http://schemas.openxmlformats.org/drawingml/2006/main" noGrp="1"/>
-          </p:cNvSpPr>
-          <p:nvPr/>
-        </p:nvSpPr>
-        <p:spPr>
-          <a:xfrm xmlns:a="http://schemas.openxmlformats.org/drawingml/2006/main">
-            <a:off x="1097280" y="3867911"/>
-            <a:ext cx="100584" cy="100584"/>
-          </a:xfrm>
-          <a:prstGeom xmlns:a="http://schemas.openxmlformats.org/drawingml/2006/main" prst="ellipse">
-            <a:avLst/>
+              <a:t>One Monad testnet registry, with creation, spend-recording, and revocation visible together.</a:t>
+            </a:r>
+          </a:p>
+        </p:txBody>
+      </p:sp>
+      <p:sp>
+        <p:nvSpPr>
+          <p:cNvPr id="5" name="evidence-frame-3">
+            <a:extLst xmlns:a="http://schemas.openxmlformats.org/drawingml/2006/main">
+              <a:ext uri="{FF2B5EF4-FFF2-40B4-BE49-F238E27FC236}">
+                <a16:creationId xmlns:a16="http://schemas.microsoft.com/office/drawing/2014/main" id="{BEA38126-F55C-4217-9EB5-E3933357C7E9}"/>
+              </a:ext>
+            </a:extLst>
+          </p:cNvPr>
+          <p:cNvSpPr>
+            <a:spLocks xmlns:a="http://schemas.openxmlformats.org/drawingml/2006/main" noGrp="1"/>
+          </p:cNvSpPr>
+          <p:nvPr/>
+        </p:nvSpPr>
+        <p:spPr>
+          <a:xfrm xmlns:a="http://schemas.openxmlformats.org/drawingml/2006/main">
+            <a:off x="685800" y="1638300"/>
+            <a:ext cx="10820400" cy="4610100"/>
+          </a:xfrm>
+          <a:prstGeom xmlns:a="http://schemas.openxmlformats.org/drawingml/2006/main" prst="roundRect">
+            <a:avLst>
+              <a:gd name="adj" fmla="val 1653"/>
+            </a:avLst>
           </a:prstGeom>
           <a:solidFill xmlns:a="http://schemas.openxmlformats.org/drawingml/2006/main">
-            <a:srgbClr val="4ADE80"/>
+            <a:srgbClr val="111820"/>
           </a:solidFill>
-          <a:ln xmlns:a="http://schemas.openxmlformats.org/drawingml/2006/main">
-            <a:noFill/>
+          <a:ln xmlns:a="http://schemas.openxmlformats.org/drawingml/2006/main" w="14288">
+            <a:solidFill>
+              <a:srgbClr val="2B3746"/>
+            </a:solidFill>
+            <a:prstDash val="solid"/>
           </a:ln>
         </p:spPr>
-        <p:style>
-          <a:lnRef xmlns:a="http://schemas.openxmlformats.org/drawingml/2006/main" idx="1">
-            <a:schemeClr val="accent1"/>
-          </a:lnRef>
-          <a:fillRef xmlns:a="http://schemas.openxmlformats.org/drawingml/2006/main" idx="3">
-            <a:schemeClr val="accent1"/>
-          </a:fillRef>
-          <a:effectRef xmlns:a="http://schemas.openxmlformats.org/drawingml/2006/main" idx="2">
-            <a:schemeClr val="accent1"/>
-          </a:effectRef>
-          <a:fontRef xmlns:a="http://schemas.openxmlformats.org/drawingml/2006/main" idx="minor">
-            <a:schemeClr val="lt1"/>
-          </a:fontRef>
-        </p:style>
-        <p:txBody>
-          <a:bodyPr xmlns:a="http://schemas.openxmlformats.org/drawingml/2006/main" anchor="ctr"/>
-          <a:lstStyle xmlns:a="http://schemas.openxmlformats.org/drawingml/2006/main"/>
-          <a:p xmlns:a="http://schemas.openxmlformats.org/drawingml/2006/main">
-            <a:pPr algn="ctr">
-              <a:buNone/>
-            </a:pPr>
-          </a:p>
-        </p:txBody>
-      </p:sp>
-      <p:sp>
-        <p:nvSpPr>
-          <p:cNvPr id="14" name="TextBox 13">
-            <a:extLst xmlns:a="http://schemas.openxmlformats.org/drawingml/2006/main">
-              <a:ext uri="{FF2B5EF4-FFF2-40B4-BE49-F238E27FC236}">
-                <a16:creationId xmlns:a16="http://schemas.microsoft.com/office/drawing/2014/main" id="{B63E03B6-A86B-4144-B33E-C143B4BEAA2D}"/>
-              </a:ext>
-            </a:extLst>
-          </p:cNvPr>
-          <p:cNvSpPr>
-            <a:spLocks xmlns:a="http://schemas.openxmlformats.org/drawingml/2006/main" noGrp="1"/>
-          </p:cNvSpPr>
-          <p:nvPr/>
-        </p:nvSpPr>
-        <p:spPr>
-          <a:xfrm xmlns:a="http://schemas.openxmlformats.org/drawingml/2006/main">
-            <a:off x="1353312" y="3794760"/>
-            <a:ext cx="4023360" cy="457200"/>
+      </p:sp>
+      <p:pic>
+        <p:nvPicPr>
+          <p:cNvPr id="12" name="evidence-image-3"/>
+          <p:cNvPicPr>
+            <a:picLocks xmlns:a="http://schemas.openxmlformats.org/drawingml/2006/main" noChangeAspect="1"/>
+          </p:cNvPicPr>
+          <p:nvPr/>
+        </p:nvPicPr>
+        <p:blipFill>
+          <a:blip xmlns:r="http://schemas.openxmlformats.org/officeDocument/2006/relationships" xmlns:a="http://schemas.openxmlformats.org/drawingml/2006/main" r:embed="Ra976cc3bee18490e"/>
+          <a:stretch xmlns:a="http://schemas.openxmlformats.org/drawingml/2006/main"/>
+        </p:blipFill>
+        <p:spPr>
+          <a:xfrm xmlns:a="http://schemas.openxmlformats.org/drawingml/2006/main">
+            <a:off x="1728858" y="1733550"/>
+            <a:ext cx="8734284" cy="4419600"/>
+          </a:xfrm>
+          <a:prstGeom xmlns:a="http://schemas.openxmlformats.org/drawingml/2006/main" prst="roundRect">
+            <a:avLst>
+              <a:gd name="adj" fmla="val 2155"/>
+            </a:avLst>
+          </a:prstGeom>
+        </p:spPr>
+      </p:pic>
+    </p:spTree>
+    <p:extLst>
+      <p:ext uri="{BB962C8B-B14F-4D97-AF65-F5344CB8AC3E}">
+        <p14:creationId xmlns:p14="http://schemas.microsoft.com/office/powerpoint/2010/main" val="897514919"/>
+      </p:ext>
+    </p:extLst>
+  </p:cSld>
+</p:sld>
+</file>
+
+<file path=ppt/slides/slide7.xml><?xml version="1.0" encoding="utf-8"?>
+<p:sld xmlns:p="http://schemas.openxmlformats.org/presentationml/2006/main">
+  <p:cSld>
+    <p:spTree>
+      <p:nvGrpSpPr>
+        <p:cNvPr id="1" name=""/>
+        <p:cNvGrpSpPr/>
+        <p:nvPr/>
+      </p:nvGrpSpPr>
+      <p:grpSpPr>
+        <a:xfrm xmlns:a="http://schemas.openxmlformats.org/drawingml/2006/main"/>
+      </p:grpSpPr>
+      <p:sp>
+        <p:nvSpPr>
+          <p:cNvPr id="7" name="evidence-background-4">
+            <a:extLst xmlns:a="http://schemas.openxmlformats.org/drawingml/2006/main">
+              <a:ext uri="{FF2B5EF4-FFF2-40B4-BE49-F238E27FC236}">
+                <a16:creationId xmlns:a16="http://schemas.microsoft.com/office/drawing/2014/main" id="{11767F44-5D3C-4B04-B78C-823C88DDEEB2}"/>
+              </a:ext>
+            </a:extLst>
+          </p:cNvPr>
+          <p:cNvSpPr>
+            <a:spLocks xmlns:a="http://schemas.openxmlformats.org/drawingml/2006/main" noGrp="1"/>
+          </p:cNvSpPr>
+          <p:nvPr/>
+        </p:nvSpPr>
+        <p:spPr>
+          <a:xfrm xmlns:a="http://schemas.openxmlformats.org/drawingml/2006/main">
+            <a:off x="0" y="0"/>
+            <a:ext cx="12192000" cy="6858000"/>
           </a:xfrm>
           <a:prstGeom xmlns:a="http://schemas.openxmlformats.org/drawingml/2006/main" prst="rect">
             <a:avLst/>
           </a:prstGeom>
-          <a:noFill xmlns:a="http://schemas.openxmlformats.org/drawingml/2006/main"/>
-        </p:spPr>
-        <p:txBody>
-          <a:bodyPr xmlns:a="http://schemas.openxmlformats.org/drawingml/2006/main" wrap="square" lIns="0" tIns="0" rIns="0" bIns="0" anchor="t">
-            <a:spAutoFit/>
-          </a:bodyPr>
-          <a:lstStyle xmlns:a="http://schemas.openxmlformats.org/drawingml/2006/main"/>
-          <a:p xmlns:a="http://schemas.openxmlformats.org/drawingml/2006/main">
-            <a:pPr algn="l">
-              <a:buNone/>
-            </a:pPr>
-            <a:r>
-              <a:rPr sz="1250" b="0" i="0">
-                <a:solidFill>
-                  <a:srgbClr val="E8EDF4"/>
+          <a:solidFill xmlns:a="http://schemas.openxmlformats.org/drawingml/2006/main">
+            <a:srgbClr val="0A0E14"/>
+          </a:solidFill>
+          <a:ln xmlns:a="http://schemas.openxmlformats.org/drawingml/2006/main" w="0">
+            <a:solidFill>
+              <a:srgbClr val="0A0E14"/>
+            </a:solidFill>
+            <a:prstDash val="solid"/>
+          </a:ln>
+        </p:spPr>
+      </p:sp>
+      <p:sp>
+        <p:nvSpPr>
+          <p:cNvPr id="2" name="evidence-accent-4">
+            <a:extLst xmlns:a="http://schemas.openxmlformats.org/drawingml/2006/main">
+              <a:ext uri="{FF2B5EF4-FFF2-40B4-BE49-F238E27FC236}">
+                <a16:creationId xmlns:a16="http://schemas.microsoft.com/office/drawing/2014/main" id="{6E176257-D6D8-442C-8567-7D1A91BD90CD}"/>
+              </a:ext>
+            </a:extLst>
+          </p:cNvPr>
+          <p:cNvSpPr>
+            <a:spLocks xmlns:a="http://schemas.openxmlformats.org/drawingml/2006/main" noGrp="1"/>
+          </p:cNvSpPr>
+          <p:nvPr/>
+        </p:nvSpPr>
+        <p:spPr>
+          <a:xfrm xmlns:a="http://schemas.openxmlformats.org/drawingml/2006/main">
+            <a:off x="685800" y="361950"/>
+            <a:ext cx="1181100" cy="257175"/>
+          </a:xfrm>
+          <a:prstGeom xmlns:a="http://schemas.openxmlformats.org/drawingml/2006/main" prst="roundRect">
+            <a:avLst>
+              <a:gd name="adj" fmla="val 29630"/>
+            </a:avLst>
+          </a:prstGeom>
+          <a:solidFill xmlns:a="http://schemas.openxmlformats.org/drawingml/2006/main">
+            <a:srgbClr val="D7FF43"/>
+          </a:solidFill>
+          <a:ln xmlns:a="http://schemas.openxmlformats.org/drawingml/2006/main" w="0">
+            <a:solidFill>
+              <a:srgbClr val="D7FF43"/>
+            </a:solidFill>
+            <a:prstDash val="solid"/>
+          </a:ln>
+        </p:spPr>
+        <p:txBody>
+          <a:bodyPr xmlns:a="http://schemas.openxmlformats.org/drawingml/2006/main" anchor="ctr"/>
+          <a:lstStyle xmlns:a="http://schemas.openxmlformats.org/drawingml/2006/main"/>
+          <a:p xmlns:a="http://schemas.openxmlformats.org/drawingml/2006/main">
+            <a:pPr algn="ctr">
+              <a:defRPr sz="900" b="1">
+                <a:solidFill>
+                  <a:srgbClr val="10150E"/>
+                </a:solidFill>
+                <a:latin typeface="Arial"/>
+                <a:ea typeface="Arial"/>
+                <a:cs typeface="Arial"/>
+              </a:defRPr>
+            </a:pPr>
+            <a:r>
+              <a:rPr sz="900" b="1">
+                <a:solidFill>
+                  <a:srgbClr val="10150E"/>
                 </a:solidFill>
                 <a:latin typeface="Arial"/>
                 <a:ea typeface="Arial"/>
                 <a:cs typeface="Arial"/>
               </a:rPr>
-              <a:t>Revocation</a:t>
-            </a:r>
-          </a:p>
-        </p:txBody>
-      </p:sp>
-      <p:sp>
-        <p:nvSpPr>
-          <p:cNvPr id="15" name="Oval 14">
-            <a:extLst xmlns:a="http://schemas.openxmlformats.org/drawingml/2006/main">
-              <a:ext uri="{FF2B5EF4-FFF2-40B4-BE49-F238E27FC236}">
-                <a16:creationId xmlns:a16="http://schemas.microsoft.com/office/drawing/2014/main" id="{41DEC92B-1FB5-48D8-889B-035979728F12}"/>
-              </a:ext>
-            </a:extLst>
-          </p:cNvPr>
-          <p:cNvSpPr>
-            <a:spLocks xmlns:a="http://schemas.openxmlformats.org/drawingml/2006/main" noGrp="1"/>
-          </p:cNvSpPr>
-          <p:nvPr/>
-        </p:nvSpPr>
-        <p:spPr>
-          <a:xfrm xmlns:a="http://schemas.openxmlformats.org/drawingml/2006/main">
-            <a:off x="1097280" y="4270248"/>
-            <a:ext cx="100584" cy="100584"/>
-          </a:xfrm>
-          <a:prstGeom xmlns:a="http://schemas.openxmlformats.org/drawingml/2006/main" prst="ellipse">
-            <a:avLst/>
-          </a:prstGeom>
-          <a:solidFill xmlns:a="http://schemas.openxmlformats.org/drawingml/2006/main">
-            <a:srgbClr val="4ADE80"/>
-          </a:solidFill>
-          <a:ln xmlns:a="http://schemas.openxmlformats.org/drawingml/2006/main">
-            <a:noFill/>
-          </a:ln>
-        </p:spPr>
-        <p:style>
-          <a:lnRef xmlns:a="http://schemas.openxmlformats.org/drawingml/2006/main" idx="1">
-            <a:schemeClr val="accent1"/>
-          </a:lnRef>
-          <a:fillRef xmlns:a="http://schemas.openxmlformats.org/drawingml/2006/main" idx="3">
-            <a:schemeClr val="accent1"/>
-          </a:fillRef>
-          <a:effectRef xmlns:a="http://schemas.openxmlformats.org/drawingml/2006/main" idx="2">
-            <a:schemeClr val="accent1"/>
-          </a:effectRef>
-          <a:fontRef xmlns:a="http://schemas.openxmlformats.org/drawingml/2006/main" idx="minor">
-            <a:schemeClr val="lt1"/>
-          </a:fontRef>
-        </p:style>
-        <p:txBody>
-          <a:bodyPr xmlns:a="http://schemas.openxmlformats.org/drawingml/2006/main" anchor="ctr"/>
-          <a:lstStyle xmlns:a="http://schemas.openxmlformats.org/drawingml/2006/main"/>
-          <a:p xmlns:a="http://schemas.openxmlformats.org/drawingml/2006/main">
-            <a:pPr algn="ctr">
-              <a:buNone/>
-            </a:pPr>
-          </a:p>
-        </p:txBody>
-      </p:sp>
-      <p:sp>
-        <p:nvSpPr>
-          <p:cNvPr id="16" name="TextBox 15">
-            <a:extLst xmlns:a="http://schemas.openxmlformats.org/drawingml/2006/main">
-              <a:ext uri="{FF2B5EF4-FFF2-40B4-BE49-F238E27FC236}">
-                <a16:creationId xmlns:a16="http://schemas.microsoft.com/office/drawing/2014/main" id="{6A43DA89-A7D3-4F37-8B02-805F5AF07C5F}"/>
-              </a:ext>
-            </a:extLst>
-          </p:cNvPr>
-          <p:cNvSpPr>
-            <a:spLocks xmlns:a="http://schemas.openxmlformats.org/drawingml/2006/main" noGrp="1"/>
-          </p:cNvSpPr>
-          <p:nvPr/>
-        </p:nvSpPr>
-        <p:spPr>
-          <a:xfrm xmlns:a="http://schemas.openxmlformats.org/drawingml/2006/main">
-            <a:off x="1353312" y="4197096"/>
-            <a:ext cx="4023360" cy="457200"/>
+              <a:t>MONAD · 02</a:t>
+            </a:r>
+          </a:p>
+        </p:txBody>
+      </p:sp>
+      <p:sp>
+        <p:nvSpPr>
+          <p:cNvPr id="3" name="evidence-title-4">
+            <a:extLst xmlns:a="http://schemas.openxmlformats.org/drawingml/2006/main">
+              <a:ext uri="{FF2B5EF4-FFF2-40B4-BE49-F238E27FC236}">
+                <a16:creationId xmlns:a16="http://schemas.microsoft.com/office/drawing/2014/main" id="{01086DB1-4D6B-4A28-97A6-8C9B71D2D6EA}"/>
+              </a:ext>
+            </a:extLst>
+          </p:cNvPr>
+          <p:cNvSpPr>
+            <a:spLocks xmlns:a="http://schemas.openxmlformats.org/drawingml/2006/main" noGrp="1"/>
+          </p:cNvSpPr>
+          <p:nvPr/>
+        </p:nvSpPr>
+        <p:spPr>
+          <a:xfrm xmlns:a="http://schemas.openxmlformats.org/drawingml/2006/main">
+            <a:off x="685800" y="714375"/>
+            <a:ext cx="10820400" cy="485775"/>
           </a:xfrm>
           <a:prstGeom xmlns:a="http://schemas.openxmlformats.org/drawingml/2006/main" prst="rect">
             <a:avLst/>
           </a:prstGeom>
-          <a:noFill xmlns:a="http://schemas.openxmlformats.org/drawingml/2006/main"/>
-        </p:spPr>
-        <p:txBody>
-          <a:bodyPr xmlns:a="http://schemas.openxmlformats.org/drawingml/2006/main" wrap="square" lIns="0" tIns="0" rIns="0" bIns="0" anchor="t">
-            <a:spAutoFit/>
-          </a:bodyPr>
-          <a:lstStyle xmlns:a="http://schemas.openxmlformats.org/drawingml/2006/main"/>
-          <a:p xmlns:a="http://schemas.openxmlformats.org/drawingml/2006/main">
-            <a:pPr algn="l">
-              <a:buNone/>
-            </a:pPr>
-            <a:r>
-              <a:rPr sz="1250" b="0" i="0">
-                <a:solidFill>
-                  <a:srgbClr val="E8EDF4"/>
+          <a:solidFill xmlns:a="http://schemas.openxmlformats.org/drawingml/2006/main">
+            <a:srgbClr val="0A0E14"/>
+          </a:solidFill>
+          <a:ln xmlns:a="http://schemas.openxmlformats.org/drawingml/2006/main" w="0">
+            <a:solidFill>
+              <a:srgbClr val="0A0E14"/>
+            </a:solidFill>
+            <a:prstDash val="solid"/>
+          </a:ln>
+        </p:spPr>
+        <p:txBody>
+          <a:bodyPr xmlns:a="http://schemas.openxmlformats.org/drawingml/2006/main"/>
+          <a:lstStyle xmlns:a="http://schemas.openxmlformats.org/drawingml/2006/main"/>
+          <a:p xmlns:a="http://schemas.openxmlformats.org/drawingml/2006/main">
+            <a:pPr>
+              <a:defRPr sz="2850" b="1">
+                <a:solidFill>
+                  <a:srgbClr val="F2F5F8"/>
+                </a:solidFill>
+                <a:latin typeface="Arial"/>
+                <a:ea typeface="Arial"/>
+                <a:cs typeface="Arial"/>
+              </a:defRPr>
+            </a:pPr>
+            <a:r>
+              <a:rPr sz="2850" b="1">
+                <a:solidFill>
+                  <a:srgbClr val="F2F5F8"/>
                 </a:solidFill>
                 <a:latin typeface="Arial"/>
                 <a:ea typeface="Arial"/>
                 <a:cs typeface="Arial"/>
               </a:rPr>
-              <a:t>Deposit cap, via an approval
-signature verified on-chain</a:t>
-            </a:r>
-          </a:p>
-        </p:txBody>
-      </p:sp>
-      <p:sp>
-        <p:nvSpPr>
-          <p:cNvPr id="17" name="Rounded Rectangle 16">
-            <a:extLst xmlns:a="http://schemas.openxmlformats.org/drawingml/2006/main">
-              <a:ext uri="{FF2B5EF4-FFF2-40B4-BE49-F238E27FC236}">
-                <a16:creationId xmlns:a16="http://schemas.microsoft.com/office/drawing/2014/main" id="{F7C9F38F-C8F6-4C58-9769-C3CEC588E2C0}"/>
-              </a:ext>
-            </a:extLst>
-          </p:cNvPr>
-          <p:cNvSpPr>
-            <a:spLocks xmlns:a="http://schemas.openxmlformats.org/drawingml/2006/main" noGrp="1"/>
-          </p:cNvSpPr>
-          <p:nvPr/>
-        </p:nvSpPr>
-        <p:spPr>
-          <a:xfrm xmlns:a="http://schemas.openxmlformats.org/drawingml/2006/main">
-            <a:off x="5989320" y="1965960"/>
-            <a:ext cx="4892040" cy="2743200"/>
-          </a:xfrm>
-          <a:prstGeom xmlns:a="http://schemas.openxmlformats.org/drawingml/2006/main" prst="roundRect">
-            <a:avLst>
-              <a:gd name="adj" fmla="val 6000"/>
-            </a:avLst>
-          </a:prstGeom>
-          <a:solidFill xmlns:a="http://schemas.openxmlformats.org/drawingml/2006/main">
-            <a:srgbClr val="161E2A"/>
-          </a:solidFill>
-          <a:ln xmlns:a="http://schemas.openxmlformats.org/drawingml/2006/main" w="12700">
-            <a:solidFill>
-              <a:srgbClr val="2A3647"/>
-            </a:solidFill>
-          </a:ln>
-        </p:spPr>
-        <p:style>
-          <a:lnRef xmlns:a="http://schemas.openxmlformats.org/drawingml/2006/main" idx="1">
-            <a:schemeClr val="accent1"/>
-          </a:lnRef>
-          <a:fillRef xmlns:a="http://schemas.openxmlformats.org/drawingml/2006/main" idx="3">
-            <a:schemeClr val="accent1"/>
-          </a:fillRef>
-          <a:effectRef xmlns:a="http://schemas.openxmlformats.org/drawingml/2006/main" idx="2">
-            <a:schemeClr val="accent1"/>
-          </a:effectRef>
-          <a:fontRef xmlns:a="http://schemas.openxmlformats.org/drawingml/2006/main" idx="minor">
-            <a:schemeClr val="lt1"/>
-          </a:fontRef>
-        </p:style>
-        <p:txBody>
-          <a:bodyPr xmlns:a="http://schemas.openxmlformats.org/drawingml/2006/main" anchor="ctr"/>
-          <a:lstStyle xmlns:a="http://schemas.openxmlformats.org/drawingml/2006/main"/>
-          <a:p xmlns:a="http://schemas.openxmlformats.org/drawingml/2006/main">
-            <a:pPr algn="ctr">
-              <a:buNone/>
-            </a:pPr>
-          </a:p>
-        </p:txBody>
-      </p:sp>
-      <p:sp>
-        <p:nvSpPr>
-          <p:cNvPr id="18" name="TextBox 17">
-            <a:extLst xmlns:a="http://schemas.openxmlformats.org/drawingml/2006/main">
-              <a:ext uri="{FF2B5EF4-FFF2-40B4-BE49-F238E27FC236}">
-                <a16:creationId xmlns:a16="http://schemas.microsoft.com/office/drawing/2014/main" id="{F5F1A653-6EF5-4D25-AB6F-2B2CF22A6A5A}"/>
-              </a:ext>
-            </a:extLst>
-          </p:cNvPr>
-          <p:cNvSpPr>
-            <a:spLocks xmlns:a="http://schemas.openxmlformats.org/drawingml/2006/main" noGrp="1"/>
-          </p:cNvSpPr>
-          <p:nvPr/>
-        </p:nvSpPr>
-        <p:spPr>
-          <a:xfrm xmlns:a="http://schemas.openxmlformats.org/drawingml/2006/main">
-            <a:off x="6309360" y="2212848"/>
-            <a:ext cx="4114800" cy="274320"/>
+              <a:t>Spend recorded on-chain</a:t>
+            </a:r>
+          </a:p>
+        </p:txBody>
+      </p:sp>
+      <p:sp>
+        <p:nvSpPr>
+          <p:cNvPr id="4" name="evidence-subtitle-4">
+            <a:extLst xmlns:a="http://schemas.openxmlformats.org/drawingml/2006/main">
+              <a:ext uri="{FF2B5EF4-FFF2-40B4-BE49-F238E27FC236}">
+                <a16:creationId xmlns:a16="http://schemas.microsoft.com/office/drawing/2014/main" id="{0869FC4D-3F4A-4BBA-BD17-7188FE8ADE20}"/>
+              </a:ext>
+            </a:extLst>
+          </p:cNvPr>
+          <p:cNvSpPr>
+            <a:spLocks xmlns:a="http://schemas.openxmlformats.org/drawingml/2006/main" noGrp="1"/>
+          </p:cNvSpPr>
+          <p:nvPr/>
+        </p:nvSpPr>
+        <p:spPr>
+          <a:xfrm xmlns:a="http://schemas.openxmlformats.org/drawingml/2006/main">
+            <a:off x="685800" y="1209675"/>
+            <a:ext cx="10820400" cy="295275"/>
           </a:xfrm>
           <a:prstGeom xmlns:a="http://schemas.openxmlformats.org/drawingml/2006/main" prst="rect">
             <a:avLst/>
           </a:prstGeom>
-          <a:noFill xmlns:a="http://schemas.openxmlformats.org/drawingml/2006/main"/>
-        </p:spPr>
-        <p:txBody>
-          <a:bodyPr xmlns:a="http://schemas.openxmlformats.org/drawingml/2006/main" wrap="square" lIns="0" tIns="0" rIns="0" bIns="0" anchor="t">
-            <a:spAutoFit/>
-          </a:bodyPr>
-          <a:lstStyle xmlns:a="http://schemas.openxmlformats.org/drawingml/2006/main"/>
-          <a:p xmlns:a="http://schemas.openxmlformats.org/drawingml/2006/main">
-            <a:pPr algn="l">
-              <a:buNone/>
-            </a:pPr>
-            <a:r>
-              <a:rPr sz="1100" b="1" i="0">
-                <a:solidFill>
-                  <a:srgbClr val="FB7185"/>
+          <a:solidFill xmlns:a="http://schemas.openxmlformats.org/drawingml/2006/main">
+            <a:srgbClr val="0A0E14"/>
+          </a:solidFill>
+          <a:ln xmlns:a="http://schemas.openxmlformats.org/drawingml/2006/main" w="0">
+            <a:solidFill>
+              <a:srgbClr val="0A0E14"/>
+            </a:solidFill>
+            <a:prstDash val="solid"/>
+          </a:ln>
+        </p:spPr>
+        <p:txBody>
+          <a:bodyPr xmlns:a="http://schemas.openxmlformats.org/drawingml/2006/main"/>
+          <a:lstStyle xmlns:a="http://schemas.openxmlformats.org/drawingml/2006/main"/>
+          <a:p xmlns:a="http://schemas.openxmlformats.org/drawingml/2006/main">
+            <a:pPr>
+              <a:defRPr sz="1275">
+                <a:solidFill>
+                  <a:srgbClr val="9BACBE"/>
+                </a:solidFill>
+                <a:latin typeface="Arial"/>
+                <a:ea typeface="Arial"/>
+                <a:cs typeface="Arial"/>
+              </a:defRPr>
+            </a:pPr>
+            <a:r>
+              <a:rPr sz="1275">
+                <a:solidFill>
+                  <a:srgbClr val="9BACBE"/>
                 </a:solidFill>
                 <a:latin typeface="Arial"/>
                 <a:ea typeface="Arial"/>
                 <a:cs typeface="Arial"/>
               </a:rPr>
-              <a:t>NOT ENFORCED — AND WE SAY SO</a:t>
-            </a:r>
-          </a:p>
-        </p:txBody>
-      </p:sp>
-      <p:sp>
-        <p:nvSpPr>
-          <p:cNvPr id="19" name="Oval 18">
-            <a:extLst xmlns:a="http://schemas.openxmlformats.org/drawingml/2006/main">
-              <a:ext uri="{FF2B5EF4-FFF2-40B4-BE49-F238E27FC236}">
-                <a16:creationId xmlns:a16="http://schemas.microsoft.com/office/drawing/2014/main" id="{A41917CB-7E72-475E-84DB-16AA03FF8232}"/>
-              </a:ext>
-            </a:extLst>
-          </p:cNvPr>
-          <p:cNvSpPr>
-            <a:spLocks xmlns:a="http://schemas.openxmlformats.org/drawingml/2006/main" noGrp="1"/>
-          </p:cNvSpPr>
-          <p:nvPr/>
-        </p:nvSpPr>
-        <p:spPr>
-          <a:xfrm xmlns:a="http://schemas.openxmlformats.org/drawingml/2006/main">
-            <a:off x="6309360" y="2660904"/>
-            <a:ext cx="100584" cy="100584"/>
-          </a:xfrm>
-          <a:prstGeom xmlns:a="http://schemas.openxmlformats.org/drawingml/2006/main" prst="ellipse">
-            <a:avLst/>
+              <a:t>The successful transaction is immutable evidence that the mandate's remaining ceiling changed.</a:t>
+            </a:r>
+          </a:p>
+        </p:txBody>
+      </p:sp>
+      <p:sp>
+        <p:nvSpPr>
+          <p:cNvPr id="5" name="evidence-frame-4">
+            <a:extLst xmlns:a="http://schemas.openxmlformats.org/drawingml/2006/main">
+              <a:ext uri="{FF2B5EF4-FFF2-40B4-BE49-F238E27FC236}">
+                <a16:creationId xmlns:a16="http://schemas.microsoft.com/office/drawing/2014/main" id="{87E04674-2B8B-44B5-AE24-B5B102ACF242}"/>
+              </a:ext>
+            </a:extLst>
+          </p:cNvPr>
+          <p:cNvSpPr>
+            <a:spLocks xmlns:a="http://schemas.openxmlformats.org/drawingml/2006/main" noGrp="1"/>
+          </p:cNvSpPr>
+          <p:nvPr/>
+        </p:nvSpPr>
+        <p:spPr>
+          <a:xfrm xmlns:a="http://schemas.openxmlformats.org/drawingml/2006/main">
+            <a:off x="685800" y="1638300"/>
+            <a:ext cx="10820400" cy="4610100"/>
+          </a:xfrm>
+          <a:prstGeom xmlns:a="http://schemas.openxmlformats.org/drawingml/2006/main" prst="roundRect">
+            <a:avLst>
+              <a:gd name="adj" fmla="val 1653"/>
+            </a:avLst>
           </a:prstGeom>
           <a:solidFill xmlns:a="http://schemas.openxmlformats.org/drawingml/2006/main">
-            <a:srgbClr val="FB7185"/>
+            <a:srgbClr val="111820"/>
           </a:solidFill>
-          <a:ln xmlns:a="http://schemas.openxmlformats.org/drawingml/2006/main">
-            <a:noFill/>
+          <a:ln xmlns:a="http://schemas.openxmlformats.org/drawingml/2006/main" w="14288">
+            <a:solidFill>
+              <a:srgbClr val="2B3746"/>
+            </a:solidFill>
+            <a:prstDash val="solid"/>
           </a:ln>
         </p:spPr>
-        <p:style>
-          <a:lnRef xmlns:a="http://schemas.openxmlformats.org/drawingml/2006/main" idx="1">
-            <a:schemeClr val="accent1"/>
-          </a:lnRef>
-          <a:fillRef xmlns:a="http://schemas.openxmlformats.org/drawingml/2006/main" idx="3">
-            <a:schemeClr val="accent1"/>
-          </a:fillRef>
-          <a:effectRef xmlns:a="http://schemas.openxmlformats.org/drawingml/2006/main" idx="2">
-            <a:schemeClr val="accent1"/>
-          </a:effectRef>
-          <a:fontRef xmlns:a="http://schemas.openxmlformats.org/drawingml/2006/main" idx="minor">
-            <a:schemeClr val="lt1"/>
-          </a:fontRef>
-        </p:style>
-        <p:txBody>
-          <a:bodyPr xmlns:a="http://schemas.openxmlformats.org/drawingml/2006/main" anchor="ctr"/>
-          <a:lstStyle xmlns:a="http://schemas.openxmlformats.org/drawingml/2006/main"/>
-          <a:p xmlns:a="http://schemas.openxmlformats.org/drawingml/2006/main">
-            <a:pPr algn="ctr">
-              <a:buNone/>
-            </a:pPr>
-          </a:p>
-        </p:txBody>
-      </p:sp>
-      <p:sp>
-        <p:nvSpPr>
-          <p:cNvPr id="20" name="TextBox 19">
-            <a:extLst xmlns:a="http://schemas.openxmlformats.org/drawingml/2006/main">
-              <a:ext uri="{FF2B5EF4-FFF2-40B4-BE49-F238E27FC236}">
-                <a16:creationId xmlns:a16="http://schemas.microsoft.com/office/drawing/2014/main" id="{5224E462-2B2D-425F-BD2F-3116564C4BD7}"/>
-              </a:ext>
-            </a:extLst>
-          </p:cNvPr>
-          <p:cNvSpPr>
-            <a:spLocks xmlns:a="http://schemas.openxmlformats.org/drawingml/2006/main" noGrp="1"/>
-          </p:cNvSpPr>
-          <p:nvPr/>
-        </p:nvSpPr>
-        <p:spPr>
-          <a:xfrm xmlns:a="http://schemas.openxmlformats.org/drawingml/2006/main">
-            <a:off x="6565392" y="2587752"/>
-            <a:ext cx="4114800" cy="548640"/>
+      </p:sp>
+      <p:pic>
+        <p:nvPicPr>
+          <p:cNvPr id="12" name="evidence-image-4"/>
+          <p:cNvPicPr>
+            <a:picLocks xmlns:a="http://schemas.openxmlformats.org/drawingml/2006/main" noChangeAspect="1"/>
+          </p:cNvPicPr>
+          <p:nvPr/>
+        </p:nvPicPr>
+        <p:blipFill>
+          <a:blip xmlns:r="http://schemas.openxmlformats.org/officeDocument/2006/relationships" xmlns:a="http://schemas.openxmlformats.org/drawingml/2006/main" r:embed="R67b4c2c26f3d45d2"/>
+          <a:srcRect xmlns:a="http://schemas.openxmlformats.org/drawingml/2006/main" l="0" t="25712" r="0" b="25712"/>
+          <a:stretch xmlns:a="http://schemas.openxmlformats.org/drawingml/2006/main">
+            <a:fillRect l="0" t="0" r="0" b="0"/>
+          </a:stretch>
+        </p:blipFill>
+        <p:spPr>
+          <a:xfrm xmlns:a="http://schemas.openxmlformats.org/drawingml/2006/main">
+            <a:off x="781050" y="1733550"/>
+            <a:ext cx="10629900" cy="4419600"/>
+          </a:xfrm>
+          <a:prstGeom xmlns:a="http://schemas.openxmlformats.org/drawingml/2006/main" prst="roundRect">
+            <a:avLst>
+              <a:gd name="adj" fmla="val 2155"/>
+            </a:avLst>
+          </a:prstGeom>
+        </p:spPr>
+      </p:pic>
+    </p:spTree>
+    <p:extLst>
+      <p:ext uri="{BB962C8B-B14F-4D97-AF65-F5344CB8AC3E}">
+        <p14:creationId xmlns:p14="http://schemas.microsoft.com/office/powerpoint/2010/main" val="990843502"/>
+      </p:ext>
+    </p:extLst>
+  </p:cSld>
+</p:sld>
+</file>
+
+<file path=ppt/slides/slide8.xml><?xml version="1.0" encoding="utf-8"?>
+<p:sld xmlns:p="http://schemas.openxmlformats.org/presentationml/2006/main">
+  <p:cSld>
+    <p:spTree>
+      <p:nvGrpSpPr>
+        <p:cNvPr id="1" name=""/>
+        <p:cNvGrpSpPr/>
+        <p:nvPr/>
+      </p:nvGrpSpPr>
+      <p:grpSpPr>
+        <a:xfrm xmlns:a="http://schemas.openxmlformats.org/drawingml/2006/main"/>
+      </p:grpSpPr>
+      <p:sp>
+        <p:nvSpPr>
+          <p:cNvPr id="7" name="evidence-background-5">
+            <a:extLst xmlns:a="http://schemas.openxmlformats.org/drawingml/2006/main">
+              <a:ext uri="{FF2B5EF4-FFF2-40B4-BE49-F238E27FC236}">
+                <a16:creationId xmlns:a16="http://schemas.microsoft.com/office/drawing/2014/main" id="{2E3C06FE-37C7-47D0-98F9-7D994E58A696}"/>
+              </a:ext>
+            </a:extLst>
+          </p:cNvPr>
+          <p:cNvSpPr>
+            <a:spLocks xmlns:a="http://schemas.openxmlformats.org/drawingml/2006/main" noGrp="1"/>
+          </p:cNvSpPr>
+          <p:nvPr/>
+        </p:nvSpPr>
+        <p:spPr>
+          <a:xfrm xmlns:a="http://schemas.openxmlformats.org/drawingml/2006/main">
+            <a:off x="0" y="0"/>
+            <a:ext cx="12192000" cy="6858000"/>
           </a:xfrm>
           <a:prstGeom xmlns:a="http://schemas.openxmlformats.org/drawingml/2006/main" prst="rect">
             <a:avLst/>
           </a:prstGeom>
-          <a:noFill xmlns:a="http://schemas.openxmlformats.org/drawingml/2006/main"/>
-        </p:spPr>
-        <p:txBody>
-          <a:bodyPr xmlns:a="http://schemas.openxmlformats.org/drawingml/2006/main" wrap="square" lIns="0" tIns="0" rIns="0" bIns="0" anchor="t">
-            <a:spAutoFit/>
-          </a:bodyPr>
-          <a:lstStyle xmlns:a="http://schemas.openxmlformats.org/drawingml/2006/main"/>
-          <a:p xmlns:a="http://schemas.openxmlformats.org/drawingml/2006/main">
-            <a:pPr algn="l">
-              <a:buNone/>
-            </a:pPr>
-            <a:r>
-              <a:rPr sz="1250" b="0" i="0">
-                <a:solidFill>
-                  <a:srgbClr val="E8EDF4"/>
+          <a:solidFill xmlns:a="http://schemas.openxmlformats.org/drawingml/2006/main">
+            <a:srgbClr val="0A0E14"/>
+          </a:solidFill>
+          <a:ln xmlns:a="http://schemas.openxmlformats.org/drawingml/2006/main" w="0">
+            <a:solidFill>
+              <a:srgbClr val="0A0E14"/>
+            </a:solidFill>
+            <a:prstDash val="solid"/>
+          </a:ln>
+        </p:spPr>
+      </p:sp>
+      <p:sp>
+        <p:nvSpPr>
+          <p:cNvPr id="2" name="evidence-accent-5">
+            <a:extLst xmlns:a="http://schemas.openxmlformats.org/drawingml/2006/main">
+              <a:ext uri="{FF2B5EF4-FFF2-40B4-BE49-F238E27FC236}">
+                <a16:creationId xmlns:a16="http://schemas.microsoft.com/office/drawing/2014/main" id="{742A29AC-1834-4184-B0A1-4657463B2A62}"/>
+              </a:ext>
+            </a:extLst>
+          </p:cNvPr>
+          <p:cNvSpPr>
+            <a:spLocks xmlns:a="http://schemas.openxmlformats.org/drawingml/2006/main" noGrp="1"/>
+          </p:cNvSpPr>
+          <p:nvPr/>
+        </p:nvSpPr>
+        <p:spPr>
+          <a:xfrm xmlns:a="http://schemas.openxmlformats.org/drawingml/2006/main">
+            <a:off x="685800" y="361950"/>
+            <a:ext cx="1181100" cy="257175"/>
+          </a:xfrm>
+          <a:prstGeom xmlns:a="http://schemas.openxmlformats.org/drawingml/2006/main" prst="roundRect">
+            <a:avLst>
+              <a:gd name="adj" fmla="val 29630"/>
+            </a:avLst>
+          </a:prstGeom>
+          <a:solidFill xmlns:a="http://schemas.openxmlformats.org/drawingml/2006/main">
+            <a:srgbClr val="D7FF43"/>
+          </a:solidFill>
+          <a:ln xmlns:a="http://schemas.openxmlformats.org/drawingml/2006/main" w="0">
+            <a:solidFill>
+              <a:srgbClr val="D7FF43"/>
+            </a:solidFill>
+            <a:prstDash val="solid"/>
+          </a:ln>
+        </p:spPr>
+        <p:txBody>
+          <a:bodyPr xmlns:a="http://schemas.openxmlformats.org/drawingml/2006/main" anchor="ctr"/>
+          <a:lstStyle xmlns:a="http://schemas.openxmlformats.org/drawingml/2006/main"/>
+          <a:p xmlns:a="http://schemas.openxmlformats.org/drawingml/2006/main">
+            <a:pPr algn="ctr">
+              <a:defRPr sz="900" b="1">
+                <a:solidFill>
+                  <a:srgbClr val="10150E"/>
+                </a:solidFill>
+                <a:latin typeface="Arial"/>
+                <a:ea typeface="Arial"/>
+                <a:cs typeface="Arial"/>
+              </a:defRPr>
+            </a:pPr>
+            <a:r>
+              <a:rPr sz="900" b="1">
+                <a:solidFill>
+                  <a:srgbClr val="10150E"/>
                 </a:solidFill>
                 <a:latin typeface="Arial"/>
                 <a:ea typeface="Arial"/>
                 <a:cs typeface="Arial"/>
               </a:rPr>
-              <a:t>Whether the signed PO value matches
-the real invoice. No contract can.</a:t>
-            </a:r>
-          </a:p>
-        </p:txBody>
-      </p:sp>
-      <p:sp>
-        <p:nvSpPr>
-          <p:cNvPr id="21" name="Oval 20">
-            <a:extLst xmlns:a="http://schemas.openxmlformats.org/drawingml/2006/main">
-              <a:ext uri="{FF2B5EF4-FFF2-40B4-BE49-F238E27FC236}">
-                <a16:creationId xmlns:a16="http://schemas.microsoft.com/office/drawing/2014/main" id="{5891B326-7F0C-4D0B-A6CC-EECDCF683E79}"/>
-              </a:ext>
-            </a:extLst>
-          </p:cNvPr>
-          <p:cNvSpPr>
-            <a:spLocks xmlns:a="http://schemas.openxmlformats.org/drawingml/2006/main" noGrp="1"/>
-          </p:cNvSpPr>
-          <p:nvPr/>
-        </p:nvSpPr>
-        <p:spPr>
-          <a:xfrm xmlns:a="http://schemas.openxmlformats.org/drawingml/2006/main">
-            <a:off x="6309360" y="3227832"/>
-            <a:ext cx="100584" cy="100584"/>
-          </a:xfrm>
-          <a:prstGeom xmlns:a="http://schemas.openxmlformats.org/drawingml/2006/main" prst="ellipse">
-            <a:avLst/>
-          </a:prstGeom>
-          <a:solidFill xmlns:a="http://schemas.openxmlformats.org/drawingml/2006/main">
-            <a:srgbClr val="FB7185"/>
-          </a:solidFill>
-          <a:ln xmlns:a="http://schemas.openxmlformats.org/drawingml/2006/main">
-            <a:noFill/>
-          </a:ln>
-        </p:spPr>
-        <p:style>
-          <a:lnRef xmlns:a="http://schemas.openxmlformats.org/drawingml/2006/main" idx="1">
-            <a:schemeClr val="accent1"/>
-          </a:lnRef>
-          <a:fillRef xmlns:a="http://schemas.openxmlformats.org/drawingml/2006/main" idx="3">
-            <a:schemeClr val="accent1"/>
-          </a:fillRef>
-          <a:effectRef xmlns:a="http://schemas.openxmlformats.org/drawingml/2006/main" idx="2">
-            <a:schemeClr val="accent1"/>
-          </a:effectRef>
-          <a:fontRef xmlns:a="http://schemas.openxmlformats.org/drawingml/2006/main" idx="minor">
-            <a:schemeClr val="lt1"/>
-          </a:fontRef>
-        </p:style>
-        <p:txBody>
-          <a:bodyPr xmlns:a="http://schemas.openxmlformats.org/drawingml/2006/main" anchor="ctr"/>
-          <a:lstStyle xmlns:a="http://schemas.openxmlformats.org/drawingml/2006/main"/>
-          <a:p xmlns:a="http://schemas.openxmlformats.org/drawingml/2006/main">
-            <a:pPr algn="ctr">
-              <a:buNone/>
-            </a:pPr>
-          </a:p>
-        </p:txBody>
-      </p:sp>
-      <p:sp>
-        <p:nvSpPr>
-          <p:cNvPr id="22" name="TextBox 21">
-            <a:extLst xmlns:a="http://schemas.openxmlformats.org/drawingml/2006/main">
-              <a:ext uri="{FF2B5EF4-FFF2-40B4-BE49-F238E27FC236}">
-                <a16:creationId xmlns:a16="http://schemas.microsoft.com/office/drawing/2014/main" id="{6CB85F0C-E4FD-4471-8333-E39FAD9BBC00}"/>
-              </a:ext>
-            </a:extLst>
-          </p:cNvPr>
-          <p:cNvSpPr>
-            <a:spLocks xmlns:a="http://schemas.openxmlformats.org/drawingml/2006/main" noGrp="1"/>
-          </p:cNvSpPr>
-          <p:nvPr/>
-        </p:nvSpPr>
-        <p:spPr>
-          <a:xfrm xmlns:a="http://schemas.openxmlformats.org/drawingml/2006/main">
-            <a:off x="6565392" y="3154680"/>
-            <a:ext cx="4114800" cy="548640"/>
+              <a:t>MONAD · 03</a:t>
+            </a:r>
+          </a:p>
+        </p:txBody>
+      </p:sp>
+      <p:sp>
+        <p:nvSpPr>
+          <p:cNvPr id="3" name="evidence-title-5">
+            <a:extLst xmlns:a="http://schemas.openxmlformats.org/drawingml/2006/main">
+              <a:ext uri="{FF2B5EF4-FFF2-40B4-BE49-F238E27FC236}">
+                <a16:creationId xmlns:a16="http://schemas.microsoft.com/office/drawing/2014/main" id="{699DE518-A70F-4CF5-AEF8-868EE6A5F14D}"/>
+              </a:ext>
+            </a:extLst>
+          </p:cNvPr>
+          <p:cNvSpPr>
+            <a:spLocks xmlns:a="http://schemas.openxmlformats.org/drawingml/2006/main" noGrp="1"/>
+          </p:cNvSpPr>
+          <p:nvPr/>
+        </p:nvSpPr>
+        <p:spPr>
+          <a:xfrm xmlns:a="http://schemas.openxmlformats.org/drawingml/2006/main">
+            <a:off x="685800" y="714375"/>
+            <a:ext cx="10820400" cy="485775"/>
           </a:xfrm>
           <a:prstGeom xmlns:a="http://schemas.openxmlformats.org/drawingml/2006/main" prst="rect">
             <a:avLst/>
           </a:prstGeom>
-          <a:noFill xmlns:a="http://schemas.openxmlformats.org/drawingml/2006/main"/>
-        </p:spPr>
-        <p:txBody>
-          <a:bodyPr xmlns:a="http://schemas.openxmlformats.org/drawingml/2006/main" wrap="square" lIns="0" tIns="0" rIns="0" bIns="0" anchor="t">
-            <a:spAutoFit/>
-          </a:bodyPr>
-          <a:lstStyle xmlns:a="http://schemas.openxmlformats.org/drawingml/2006/main"/>
-          <a:p xmlns:a="http://schemas.openxmlformats.org/drawingml/2006/main">
-            <a:pPr algn="l">
-              <a:buNone/>
-            </a:pPr>
-            <a:r>
-              <a:rPr sz="1250" b="0" i="0">
-                <a:solidFill>
-                  <a:srgbClr val="E8EDF4"/>
+          <a:solidFill xmlns:a="http://schemas.openxmlformats.org/drawingml/2006/main">
+            <a:srgbClr val="0A0E14"/>
+          </a:solidFill>
+          <a:ln xmlns:a="http://schemas.openxmlformats.org/drawingml/2006/main" w="0">
+            <a:solidFill>
+              <a:srgbClr val="0A0E14"/>
+            </a:solidFill>
+            <a:prstDash val="solid"/>
+          </a:ln>
+        </p:spPr>
+        <p:txBody>
+          <a:bodyPr xmlns:a="http://schemas.openxmlformats.org/drawingml/2006/main"/>
+          <a:lstStyle xmlns:a="http://schemas.openxmlformats.org/drawingml/2006/main"/>
+          <a:p xmlns:a="http://schemas.openxmlformats.org/drawingml/2006/main">
+            <a:pPr>
+              <a:defRPr sz="2850" b="1">
+                <a:solidFill>
+                  <a:srgbClr val="F2F5F8"/>
+                </a:solidFill>
+                <a:latin typeface="Arial"/>
+                <a:ea typeface="Arial"/>
+                <a:cs typeface="Arial"/>
+              </a:defRPr>
+            </a:pPr>
+            <a:r>
+              <a:rPr sz="2850" b="1">
+                <a:solidFill>
+                  <a:srgbClr val="F2F5F8"/>
                 </a:solidFill>
                 <a:latin typeface="Arial"/>
                 <a:ea typeface="Arial"/>
                 <a:cs typeface="Arial"/>
               </a:rPr>
-              <a:t>Supplier verification. Out of scope,
-and we don’t claim it.</a:t>
-            </a:r>
-          </a:p>
-        </p:txBody>
-      </p:sp>
-      <p:sp>
-        <p:nvSpPr>
-          <p:cNvPr id="23" name="Oval 22">
-            <a:extLst xmlns:a="http://schemas.openxmlformats.org/drawingml/2006/main">
-              <a:ext uri="{FF2B5EF4-FFF2-40B4-BE49-F238E27FC236}">
-                <a16:creationId xmlns:a16="http://schemas.microsoft.com/office/drawing/2014/main" id="{49D58B91-9ACF-4F41-A2BC-12F4F9361CA1}"/>
-              </a:ext>
-            </a:extLst>
-          </p:cNvPr>
-          <p:cNvSpPr>
-            <a:spLocks xmlns:a="http://schemas.openxmlformats.org/drawingml/2006/main" noGrp="1"/>
-          </p:cNvSpPr>
-          <p:nvPr/>
-        </p:nvSpPr>
-        <p:spPr>
-          <a:xfrm xmlns:a="http://schemas.openxmlformats.org/drawingml/2006/main">
-            <a:off x="6309360" y="3794759"/>
-            <a:ext cx="100584" cy="100584"/>
-          </a:xfrm>
-          <a:prstGeom xmlns:a="http://schemas.openxmlformats.org/drawingml/2006/main" prst="ellipse">
-            <a:avLst/>
-          </a:prstGeom>
-          <a:solidFill xmlns:a="http://schemas.openxmlformats.org/drawingml/2006/main">
-            <a:srgbClr val="FB7185"/>
-          </a:solidFill>
-          <a:ln xmlns:a="http://schemas.openxmlformats.org/drawingml/2006/main">
-            <a:noFill/>
-          </a:ln>
-        </p:spPr>
-        <p:style>
-          <a:lnRef xmlns:a="http://schemas.openxmlformats.org/drawingml/2006/main" idx="1">
-            <a:schemeClr val="accent1"/>
-          </a:lnRef>
-          <a:fillRef xmlns:a="http://schemas.openxmlformats.org/drawingml/2006/main" idx="3">
-            <a:schemeClr val="accent1"/>
-          </a:fillRef>
-          <a:effectRef xmlns:a="http://schemas.openxmlformats.org/drawingml/2006/main" idx="2">
-            <a:schemeClr val="accent1"/>
-          </a:effectRef>
-          <a:fontRef xmlns:a="http://schemas.openxmlformats.org/drawingml/2006/main" idx="minor">
-            <a:schemeClr val="lt1"/>
-          </a:fontRef>
-        </p:style>
-        <p:txBody>
-          <a:bodyPr xmlns:a="http://schemas.openxmlformats.org/drawingml/2006/main" anchor="ctr"/>
-          <a:lstStyle xmlns:a="http://schemas.openxmlformats.org/drawingml/2006/main"/>
-          <a:p xmlns:a="http://schemas.openxmlformats.org/drawingml/2006/main">
-            <a:pPr algn="ctr">
-              <a:buNone/>
-            </a:pPr>
-          </a:p>
-        </p:txBody>
-      </p:sp>
-      <p:sp>
-        <p:nvSpPr>
-          <p:cNvPr id="24" name="TextBox 23">
-            <a:extLst xmlns:a="http://schemas.openxmlformats.org/drawingml/2006/main">
-              <a:ext uri="{FF2B5EF4-FFF2-40B4-BE49-F238E27FC236}">
-                <a16:creationId xmlns:a16="http://schemas.microsoft.com/office/drawing/2014/main" id="{F77D094F-94AA-4E44-A1E1-3292D5047144}"/>
-              </a:ext>
-            </a:extLst>
-          </p:cNvPr>
-          <p:cNvSpPr>
-            <a:spLocks xmlns:a="http://schemas.openxmlformats.org/drawingml/2006/main" noGrp="1"/>
-          </p:cNvSpPr>
-          <p:nvPr/>
-        </p:nvSpPr>
-        <p:spPr>
-          <a:xfrm xmlns:a="http://schemas.openxmlformats.org/drawingml/2006/main">
-            <a:off x="6565392" y="3721608"/>
-            <a:ext cx="4114800" cy="548640"/>
+              <a:t>Authority revoked on-chain</a:t>
+            </a:r>
+          </a:p>
+        </p:txBody>
+      </p:sp>
+      <p:sp>
+        <p:nvSpPr>
+          <p:cNvPr id="4" name="evidence-subtitle-5">
+            <a:extLst xmlns:a="http://schemas.openxmlformats.org/drawingml/2006/main">
+              <a:ext uri="{FF2B5EF4-FFF2-40B4-BE49-F238E27FC236}">
+                <a16:creationId xmlns:a16="http://schemas.microsoft.com/office/drawing/2014/main" id="{8CBD48EF-16F3-4A7D-8F4E-C73B74E29FE7}"/>
+              </a:ext>
+            </a:extLst>
+          </p:cNvPr>
+          <p:cNvSpPr>
+            <a:spLocks xmlns:a="http://schemas.openxmlformats.org/drawingml/2006/main" noGrp="1"/>
+          </p:cNvSpPr>
+          <p:nvPr/>
+        </p:nvSpPr>
+        <p:spPr>
+          <a:xfrm xmlns:a="http://schemas.openxmlformats.org/drawingml/2006/main">
+            <a:off x="685800" y="1209675"/>
+            <a:ext cx="10820400" cy="295275"/>
           </a:xfrm>
           <a:prstGeom xmlns:a="http://schemas.openxmlformats.org/drawingml/2006/main" prst="rect">
             <a:avLst/>
           </a:prstGeom>
-          <a:noFill xmlns:a="http://schemas.openxmlformats.org/drawingml/2006/main"/>
-        </p:spPr>
-        <p:txBody>
-          <a:bodyPr xmlns:a="http://schemas.openxmlformats.org/drawingml/2006/main" wrap="square" lIns="0" tIns="0" rIns="0" bIns="0" anchor="t">
-            <a:spAutoFit/>
-          </a:bodyPr>
-          <a:lstStyle xmlns:a="http://schemas.openxmlformats.org/drawingml/2006/main"/>
-          <a:p xmlns:a="http://schemas.openxmlformats.org/drawingml/2006/main">
-            <a:pPr algn="l">
-              <a:buNone/>
-            </a:pPr>
-            <a:r>
-              <a:rPr sz="1250" b="0" i="0">
-                <a:solidFill>
-                  <a:srgbClr val="E8EDF4"/>
+          <a:solidFill xmlns:a="http://schemas.openxmlformats.org/drawingml/2006/main">
+            <a:srgbClr val="0A0E14"/>
+          </a:solidFill>
+          <a:ln xmlns:a="http://schemas.openxmlformats.org/drawingml/2006/main" w="0">
+            <a:solidFill>
+              <a:srgbClr val="0A0E14"/>
+            </a:solidFill>
+            <a:prstDash val="solid"/>
+          </a:ln>
+        </p:spPr>
+        <p:txBody>
+          <a:bodyPr xmlns:a="http://schemas.openxmlformats.org/drawingml/2006/main"/>
+          <a:lstStyle xmlns:a="http://schemas.openxmlformats.org/drawingml/2006/main"/>
+          <a:p xmlns:a="http://schemas.openxmlformats.org/drawingml/2006/main">
+            <a:pPr>
+              <a:defRPr sz="1275">
+                <a:solidFill>
+                  <a:srgbClr val="9BACBE"/>
+                </a:solidFill>
+                <a:latin typeface="Arial"/>
+                <a:ea typeface="Arial"/>
+                <a:cs typeface="Arial"/>
+              </a:defRPr>
+            </a:pPr>
+            <a:r>
+              <a:rPr sz="1275">
+                <a:solidFill>
+                  <a:srgbClr val="9BACBE"/>
                 </a:solidFill>
                 <a:latin typeface="Arial"/>
                 <a:ea typeface="Arial"/>
                 <a:cs typeface="Arial"/>
               </a:rPr>
-              <a:t>Rain sandbox authentication is live.
-No live issuance or settlement.</a:t>
-            </a:r>
-          </a:p>
-        </p:txBody>
-      </p:sp>
-      <p:sp>
-        <p:nvSpPr>
-          <p:cNvPr id="25" name="Rounded Rectangle 24">
-            <a:extLst xmlns:a="http://schemas.openxmlformats.org/drawingml/2006/main">
-              <a:ext uri="{FF2B5EF4-FFF2-40B4-BE49-F238E27FC236}">
-                <a16:creationId xmlns:a16="http://schemas.microsoft.com/office/drawing/2014/main" id="{6A300827-5EDE-4115-9A58-0EE17627F972}"/>
-              </a:ext>
-            </a:extLst>
-          </p:cNvPr>
-          <p:cNvSpPr>
-            <a:spLocks xmlns:a="http://schemas.openxmlformats.org/drawingml/2006/main" noGrp="1"/>
-          </p:cNvSpPr>
-          <p:nvPr/>
-        </p:nvSpPr>
-        <p:spPr>
-          <a:xfrm xmlns:a="http://schemas.openxmlformats.org/drawingml/2006/main">
-            <a:off x="777240" y="5029200"/>
-            <a:ext cx="10104120" cy="1051560"/>
+              <a:t>Revocation is a state transition, not an application toggle — later authorization attempts fail.</a:t>
+            </a:r>
+          </a:p>
+        </p:txBody>
+      </p:sp>
+      <p:sp>
+        <p:nvSpPr>
+          <p:cNvPr id="5" name="evidence-frame-5">
+            <a:extLst xmlns:a="http://schemas.openxmlformats.org/drawingml/2006/main">
+              <a:ext uri="{FF2B5EF4-FFF2-40B4-BE49-F238E27FC236}">
+                <a16:creationId xmlns:a16="http://schemas.microsoft.com/office/drawing/2014/main" id="{3C82188C-46F6-4251-A670-C759B0DF102A}"/>
+              </a:ext>
+            </a:extLst>
+          </p:cNvPr>
+          <p:cNvSpPr>
+            <a:spLocks xmlns:a="http://schemas.openxmlformats.org/drawingml/2006/main" noGrp="1"/>
+          </p:cNvSpPr>
+          <p:nvPr/>
+        </p:nvSpPr>
+        <p:spPr>
+          <a:xfrm xmlns:a="http://schemas.openxmlformats.org/drawingml/2006/main">
+            <a:off x="685800" y="1638300"/>
+            <a:ext cx="10820400" cy="4610100"/>
           </a:xfrm>
           <a:prstGeom xmlns:a="http://schemas.openxmlformats.org/drawingml/2006/main" prst="roundRect">
             <a:avLst>
-              <a:gd name="adj" fmla="val 6000"/>
+              <a:gd name="adj" fmla="val 1653"/>
             </a:avLst>
           </a:prstGeom>
           <a:solidFill xmlns:a="http://schemas.openxmlformats.org/drawingml/2006/main">
-            <a:srgbClr val="182011"/>
+            <a:srgbClr val="111820"/>
           </a:solidFill>
-          <a:ln xmlns:a="http://schemas.openxmlformats.org/drawingml/2006/main" w="12700">
+          <a:ln xmlns:a="http://schemas.openxmlformats.org/drawingml/2006/main" w="14288">
             <a:solidFill>
-              <a:srgbClr val="3D4A1E"/>
+              <a:srgbClr val="2B3746"/>
             </a:solidFill>
+            <a:prstDash val="solid"/>
           </a:ln>
         </p:spPr>
-        <p:style>
-          <a:lnRef xmlns:a="http://schemas.openxmlformats.org/drawingml/2006/main" idx="1">
-            <a:schemeClr val="accent1"/>
-          </a:lnRef>
-          <a:fillRef xmlns:a="http://schemas.openxmlformats.org/drawingml/2006/main" idx="3">
-            <a:schemeClr val="accent1"/>
-          </a:fillRef>
-          <a:effectRef xmlns:a="http://schemas.openxmlformats.org/drawingml/2006/main" idx="2">
-            <a:schemeClr val="accent1"/>
-          </a:effectRef>
-          <a:fontRef xmlns:a="http://schemas.openxmlformats.org/drawingml/2006/main" idx="minor">
-            <a:schemeClr val="lt1"/>
-          </a:fontRef>
-        </p:style>
-        <p:txBody>
-          <a:bodyPr xmlns:a="http://schemas.openxmlformats.org/drawingml/2006/main" anchor="ctr"/>
-          <a:lstStyle xmlns:a="http://schemas.openxmlformats.org/drawingml/2006/main"/>
-          <a:p xmlns:a="http://schemas.openxmlformats.org/drawingml/2006/main">
-            <a:pPr algn="ctr">
-              <a:buNone/>
-            </a:pPr>
-          </a:p>
-        </p:txBody>
-      </p:sp>
-      <p:sp>
-        <p:nvSpPr>
-          <p:cNvPr id="26" name="TextBox 25">
-            <a:extLst xmlns:a="http://schemas.openxmlformats.org/drawingml/2006/main">
-              <a:ext uri="{FF2B5EF4-FFF2-40B4-BE49-F238E27FC236}">
-                <a16:creationId xmlns:a16="http://schemas.microsoft.com/office/drawing/2014/main" id="{75ECB08C-3861-4A67-A674-B0A15ED7722D}"/>
-              </a:ext>
-            </a:extLst>
-          </p:cNvPr>
-          <p:cNvSpPr>
-            <a:spLocks xmlns:a="http://schemas.openxmlformats.org/drawingml/2006/main" noGrp="1"/>
-          </p:cNvSpPr>
-          <p:nvPr/>
-        </p:nvSpPr>
-        <p:spPr>
-          <a:xfrm xmlns:a="http://schemas.openxmlformats.org/drawingml/2006/main">
-            <a:off x="1097280" y="5257800"/>
-            <a:ext cx="9509760" cy="685800"/>
+      </p:sp>
+      <p:pic>
+        <p:nvPicPr>
+          <p:cNvPr id="12" name="evidence-image-5"/>
+          <p:cNvPicPr>
+            <a:picLocks xmlns:a="http://schemas.openxmlformats.org/drawingml/2006/main" noChangeAspect="1"/>
+          </p:cNvPicPr>
+          <p:nvPr/>
+        </p:nvPicPr>
+        <p:blipFill>
+          <a:blip xmlns:r="http://schemas.openxmlformats.org/officeDocument/2006/relationships" xmlns:a="http://schemas.openxmlformats.org/drawingml/2006/main" r:embed="R4d4731e0bd4a4603"/>
+          <a:srcRect xmlns:a="http://schemas.openxmlformats.org/drawingml/2006/main" l="0" t="25665" r="0" b="25665"/>
+          <a:stretch xmlns:a="http://schemas.openxmlformats.org/drawingml/2006/main">
+            <a:fillRect l="0" t="0" r="0" b="0"/>
+          </a:stretch>
+        </p:blipFill>
+        <p:spPr>
+          <a:xfrm xmlns:a="http://schemas.openxmlformats.org/drawingml/2006/main">
+            <a:off x="781050" y="1733550"/>
+            <a:ext cx="10629900" cy="4419600"/>
+          </a:xfrm>
+          <a:prstGeom xmlns:a="http://schemas.openxmlformats.org/drawingml/2006/main" prst="roundRect">
+            <a:avLst>
+              <a:gd name="adj" fmla="val 2155"/>
+            </a:avLst>
+          </a:prstGeom>
+        </p:spPr>
+      </p:pic>
+    </p:spTree>
+    <p:extLst>
+      <p:ext uri="{BB962C8B-B14F-4D97-AF65-F5344CB8AC3E}">
+        <p14:creationId xmlns:p14="http://schemas.microsoft.com/office/powerpoint/2010/main" val="281872701"/>
+      </p:ext>
+    </p:extLst>
+  </p:cSld>
+</p:sld>
+</file>
+
+<file path=ppt/slides/slide9.xml><?xml version="1.0" encoding="utf-8"?>
+<p:sld xmlns:p="http://schemas.openxmlformats.org/presentationml/2006/main">
+  <p:cSld>
+    <p:spTree>
+      <p:nvGrpSpPr>
+        <p:cNvPr id="1" name=""/>
+        <p:cNvGrpSpPr/>
+        <p:nvPr/>
+      </p:nvGrpSpPr>
+      <p:grpSpPr>
+        <a:xfrm xmlns:a="http://schemas.openxmlformats.org/drawingml/2006/main"/>
+      </p:grpSpPr>
+      <p:sp>
+        <p:nvSpPr>
+          <p:cNvPr id="7" name="evidence-background-6">
+            <a:extLst xmlns:a="http://schemas.openxmlformats.org/drawingml/2006/main">
+              <a:ext uri="{FF2B5EF4-FFF2-40B4-BE49-F238E27FC236}">
+                <a16:creationId xmlns:a16="http://schemas.microsoft.com/office/drawing/2014/main" id="{ED42466D-E6E8-467B-BED2-C07FA16BA210}"/>
+              </a:ext>
+            </a:extLst>
+          </p:cNvPr>
+          <p:cNvSpPr>
+            <a:spLocks xmlns:a="http://schemas.openxmlformats.org/drawingml/2006/main" noGrp="1"/>
+          </p:cNvSpPr>
+          <p:nvPr/>
+        </p:nvSpPr>
+        <p:spPr>
+          <a:xfrm xmlns:a="http://schemas.openxmlformats.org/drawingml/2006/main">
+            <a:off x="0" y="0"/>
+            <a:ext cx="12192000" cy="6858000"/>
           </a:xfrm>
           <a:prstGeom xmlns:a="http://schemas.openxmlformats.org/drawingml/2006/main" prst="rect">
             <a:avLst/>
           </a:prstGeom>
-          <a:noFill xmlns:a="http://schemas.openxmlformats.org/drawingml/2006/main"/>
-        </p:spPr>
-        <p:txBody>
-          <a:bodyPr xmlns:a="http://schemas.openxmlformats.org/drawingml/2006/main" wrap="square" lIns="0" tIns="0" rIns="0" bIns="0">
-            <a:spAutoFit/>
-          </a:bodyPr>
-          <a:lstStyle xmlns:a="http://schemas.openxmlformats.org/drawingml/2006/main"/>
-          <a:p xmlns:a="http://schemas.openxmlformats.org/drawingml/2006/main">
-            <a:pPr algn="l">
-              <a:spcAft>
-                <a:spcPts val="0"/>
-              </a:spcAft>
-              <a:buNone/>
-            </a:pPr>
-            <a:r>
-              <a:rPr sz="1350" b="0">
-                <a:solidFill>
-                  <a:srgbClr val="9AA9BE"/>
+          <a:solidFill xmlns:a="http://schemas.openxmlformats.org/drawingml/2006/main">
+            <a:srgbClr val="0A0E14"/>
+          </a:solidFill>
+          <a:ln xmlns:a="http://schemas.openxmlformats.org/drawingml/2006/main" w="0">
+            <a:solidFill>
+              <a:srgbClr val="0A0E14"/>
+            </a:solidFill>
+            <a:prstDash val="solid"/>
+          </a:ln>
+        </p:spPr>
+      </p:sp>
+      <p:sp>
+        <p:nvSpPr>
+          <p:cNvPr id="2" name="evidence-accent-6">
+            <a:extLst xmlns:a="http://schemas.openxmlformats.org/drawingml/2006/main">
+              <a:ext uri="{FF2B5EF4-FFF2-40B4-BE49-F238E27FC236}">
+                <a16:creationId xmlns:a16="http://schemas.microsoft.com/office/drawing/2014/main" id="{283E9EBC-841F-4877-B163-CDE389BBECC4}"/>
+              </a:ext>
+            </a:extLst>
+          </p:cNvPr>
+          <p:cNvSpPr>
+            <a:spLocks xmlns:a="http://schemas.openxmlformats.org/drawingml/2006/main" noGrp="1"/>
+          </p:cNvSpPr>
+          <p:nvPr/>
+        </p:nvSpPr>
+        <p:spPr>
+          <a:xfrm xmlns:a="http://schemas.openxmlformats.org/drawingml/2006/main">
+            <a:off x="685800" y="361950"/>
+            <a:ext cx="1181100" cy="257175"/>
+          </a:xfrm>
+          <a:prstGeom xmlns:a="http://schemas.openxmlformats.org/drawingml/2006/main" prst="roundRect">
+            <a:avLst>
+              <a:gd name="adj" fmla="val 29630"/>
+            </a:avLst>
+          </a:prstGeom>
+          <a:solidFill xmlns:a="http://schemas.openxmlformats.org/drawingml/2006/main">
+            <a:srgbClr val="D7FF43"/>
+          </a:solidFill>
+          <a:ln xmlns:a="http://schemas.openxmlformats.org/drawingml/2006/main" w="0">
+            <a:solidFill>
+              <a:srgbClr val="D7FF43"/>
+            </a:solidFill>
+            <a:prstDash val="solid"/>
+          </a:ln>
+        </p:spPr>
+        <p:txBody>
+          <a:bodyPr xmlns:a="http://schemas.openxmlformats.org/drawingml/2006/main" anchor="ctr"/>
+          <a:lstStyle xmlns:a="http://schemas.openxmlformats.org/drawingml/2006/main"/>
+          <a:p xmlns:a="http://schemas.openxmlformats.org/drawingml/2006/main">
+            <a:pPr algn="ctr">
+              <a:defRPr sz="900" b="1">
+                <a:solidFill>
+                  <a:srgbClr val="10150E"/>
+                </a:solidFill>
+                <a:latin typeface="Arial"/>
+                <a:ea typeface="Arial"/>
+                <a:cs typeface="Arial"/>
+              </a:defRPr>
+            </a:pPr>
+            <a:r>
+              <a:rPr sz="900" b="1">
+                <a:solidFill>
+                  <a:srgbClr val="10150E"/>
                 </a:solidFill>
                 <a:latin typeface="Arial"/>
                 <a:ea typeface="Arial"/>
                 <a:cs typeface="Arial"/>
               </a:rPr>
-              <a:t>Live Rain GET: HTTP 200. For blocked payments, </a:t>
-            </a:r>
-            <a:r>
-              <a:rPr sz="1350" b="1">
-                <a:solidFill>
-                  <a:srgbClr val="D9FF55"/>
+              <a:t>RAIN · SANDBOX</a:t>
+            </a:r>
+          </a:p>
+        </p:txBody>
+      </p:sp>
+      <p:sp>
+        <p:nvSpPr>
+          <p:cNvPr id="3" name="evidence-title-6">
+            <a:extLst xmlns:a="http://schemas.openxmlformats.org/drawingml/2006/main">
+              <a:ext uri="{FF2B5EF4-FFF2-40B4-BE49-F238E27FC236}">
+                <a16:creationId xmlns:a16="http://schemas.microsoft.com/office/drawing/2014/main" id="{B39F3AE6-B5AC-4B27-B0FB-740397960681}"/>
+              </a:ext>
+            </a:extLst>
+          </p:cNvPr>
+          <p:cNvSpPr>
+            <a:spLocks xmlns:a="http://schemas.openxmlformats.org/drawingml/2006/main" noGrp="1"/>
+          </p:cNvSpPr>
+          <p:nvPr/>
+        </p:nvSpPr>
+        <p:spPr>
+          <a:xfrm xmlns:a="http://schemas.openxmlformats.org/drawingml/2006/main">
+            <a:off x="685800" y="714375"/>
+            <a:ext cx="10820400" cy="485775"/>
+          </a:xfrm>
+          <a:prstGeom xmlns:a="http://schemas.openxmlformats.org/drawingml/2006/main" prst="rect">
+            <a:avLst/>
+          </a:prstGeom>
+          <a:solidFill xmlns:a="http://schemas.openxmlformats.org/drawingml/2006/main">
+            <a:srgbClr val="0A0E14"/>
+          </a:solidFill>
+          <a:ln xmlns:a="http://schemas.openxmlformats.org/drawingml/2006/main" w="0">
+            <a:solidFill>
+              <a:srgbClr val="0A0E14"/>
+            </a:solidFill>
+            <a:prstDash val="solid"/>
+          </a:ln>
+        </p:spPr>
+        <p:txBody>
+          <a:bodyPr xmlns:a="http://schemas.openxmlformats.org/drawingml/2006/main"/>
+          <a:lstStyle xmlns:a="http://schemas.openxmlformats.org/drawingml/2006/main"/>
+          <a:p xmlns:a="http://schemas.openxmlformats.org/drawingml/2006/main">
+            <a:pPr>
+              <a:defRPr sz="2850" b="1">
+                <a:solidFill>
+                  <a:srgbClr val="F2F5F8"/>
+                </a:solidFill>
+                <a:latin typeface="Arial"/>
+                <a:ea typeface="Arial"/>
+                <a:cs typeface="Arial"/>
+              </a:defRPr>
+            </a:pPr>
+            <a:r>
+              <a:rPr sz="2850" b="1">
+                <a:solidFill>
+                  <a:srgbClr val="F2F5F8"/>
                 </a:solidFill>
                 <a:latin typeface="Arial"/>
                 <a:ea typeface="Arial"/>
                 <a:cs typeface="Arial"/>
               </a:rPr>
-              <a:t>MockRainAdapter.calls = 0</a:t>
-            </a:r>
-            <a:r>
-              <a:rPr sz="1350" b="0">
-                <a:solidFill>
-                  <a:srgbClr val="9AA9BE"/>
+              <a:t>Authenticated Rain connectivity</a:t>
+            </a:r>
+          </a:p>
+        </p:txBody>
+      </p:sp>
+      <p:sp>
+        <p:nvSpPr>
+          <p:cNvPr id="4" name="evidence-subtitle-6">
+            <a:extLst xmlns:a="http://schemas.openxmlformats.org/drawingml/2006/main">
+              <a:ext uri="{FF2B5EF4-FFF2-40B4-BE49-F238E27FC236}">
+                <a16:creationId xmlns:a16="http://schemas.microsoft.com/office/drawing/2014/main" id="{0ED0DBE7-E55B-460C-99FB-E1F6046F45AD}"/>
+              </a:ext>
+            </a:extLst>
+          </p:cNvPr>
+          <p:cNvSpPr>
+            <a:spLocks xmlns:a="http://schemas.openxmlformats.org/drawingml/2006/main" noGrp="1"/>
+          </p:cNvSpPr>
+          <p:nvPr/>
+        </p:nvSpPr>
+        <p:spPr>
+          <a:xfrm xmlns:a="http://schemas.openxmlformats.org/drawingml/2006/main">
+            <a:off x="685800" y="1209675"/>
+            <a:ext cx="10820400" cy="295275"/>
+          </a:xfrm>
+          <a:prstGeom xmlns:a="http://schemas.openxmlformats.org/drawingml/2006/main" prst="rect">
+            <a:avLst/>
+          </a:prstGeom>
+          <a:solidFill xmlns:a="http://schemas.openxmlformats.org/drawingml/2006/main">
+            <a:srgbClr val="0A0E14"/>
+          </a:solidFill>
+          <a:ln xmlns:a="http://schemas.openxmlformats.org/drawingml/2006/main" w="0">
+            <a:solidFill>
+              <a:srgbClr val="0A0E14"/>
+            </a:solidFill>
+            <a:prstDash val="solid"/>
+          </a:ln>
+        </p:spPr>
+        <p:txBody>
+          <a:bodyPr xmlns:a="http://schemas.openxmlformats.org/drawingml/2006/main"/>
+          <a:lstStyle xmlns:a="http://schemas.openxmlformats.org/drawingml/2006/main"/>
+          <a:p xmlns:a="http://schemas.openxmlformats.org/drawingml/2006/main">
+            <a:pPr>
+              <a:defRPr sz="1275">
+                <a:solidFill>
+                  <a:srgbClr val="9BACBE"/>
+                </a:solidFill>
+                <a:latin typeface="Arial"/>
+                <a:ea typeface="Arial"/>
+                <a:cs typeface="Arial"/>
+              </a:defRPr>
+            </a:pPr>
+            <a:r>
+              <a:rPr sz="1275">
+                <a:solidFill>
+                  <a:srgbClr val="9BACBE"/>
                 </a:solidFill>
                 <a:latin typeface="Arial"/>
                 <a:ea typeface="Arial"/>
                 <a:cs typeface="Arial"/>
               </a:rPr>
-              <a:t> — Monad remains the gate before mock execution.</a:t>
-            </a:r>
-          </a:p>
-        </p:txBody>
-      </p:sp>
+              <a:t>A live read-only sandbox call returns HTTP 200; issuance and settlement remain outside this build.</a:t>
+            </a:r>
+          </a:p>
+        </p:txBody>
+      </p:sp>
+      <p:sp>
+        <p:nvSpPr>
+          <p:cNvPr id="5" name="evidence-frame-6">
+            <a:extLst xmlns:a="http://schemas.openxmlformats.org/drawingml/2006/main">
+              <a:ext uri="{FF2B5EF4-FFF2-40B4-BE49-F238E27FC236}">
+                <a16:creationId xmlns:a16="http://schemas.microsoft.com/office/drawing/2014/main" id="{BE3B55C5-EEF4-41AE-B82A-DC0D74C55FFC}"/>
+              </a:ext>
+            </a:extLst>
+          </p:cNvPr>
+          <p:cNvSpPr>
+            <a:spLocks xmlns:a="http://schemas.openxmlformats.org/drawingml/2006/main" noGrp="1"/>
+          </p:cNvSpPr>
+          <p:nvPr/>
+        </p:nvSpPr>
+        <p:spPr>
+          <a:xfrm xmlns:a="http://schemas.openxmlformats.org/drawingml/2006/main">
+            <a:off x="685800" y="1638300"/>
+            <a:ext cx="10820400" cy="4610100"/>
+          </a:xfrm>
+          <a:prstGeom xmlns:a="http://schemas.openxmlformats.org/drawingml/2006/main" prst="roundRect">
+            <a:avLst>
+              <a:gd name="adj" fmla="val 1653"/>
+            </a:avLst>
+          </a:prstGeom>
+          <a:solidFill xmlns:a="http://schemas.openxmlformats.org/drawingml/2006/main">
+            <a:srgbClr val="111820"/>
+          </a:solidFill>
+          <a:ln xmlns:a="http://schemas.openxmlformats.org/drawingml/2006/main" w="14288">
+            <a:solidFill>
+              <a:srgbClr val="2B3746"/>
+            </a:solidFill>
+            <a:prstDash val="solid"/>
+          </a:ln>
+        </p:spPr>
+      </p:sp>
+      <p:pic>
+        <p:nvPicPr>
+          <p:cNvPr id="12" name="evidence-image-6"/>
+          <p:cNvPicPr>
+            <a:picLocks xmlns:a="http://schemas.openxmlformats.org/drawingml/2006/main" noChangeAspect="1"/>
+          </p:cNvPicPr>
+          <p:nvPr/>
+        </p:nvPicPr>
+        <p:blipFill>
+          <a:blip xmlns:r="http://schemas.openxmlformats.org/officeDocument/2006/relationships" xmlns:a="http://schemas.openxmlformats.org/drawingml/2006/main" r:embed="R27a3e1ab2b61402a"/>
+          <a:stretch xmlns:a="http://schemas.openxmlformats.org/drawingml/2006/main"/>
+        </p:blipFill>
+        <p:spPr>
+          <a:xfrm xmlns:a="http://schemas.openxmlformats.org/drawingml/2006/main">
+            <a:off x="781050" y="2478369"/>
+            <a:ext cx="10629900" cy="2929961"/>
+          </a:xfrm>
+          <a:prstGeom xmlns:a="http://schemas.openxmlformats.org/drawingml/2006/main" prst="roundRect">
+            <a:avLst>
+              <a:gd name="adj" fmla="val 2155"/>
+            </a:avLst>
+          </a:prstGeom>
+        </p:spPr>
+      </p:pic>
     </p:spTree>
     <p:extLst>
       <p:ext uri="{BB962C8B-B14F-4D97-AF65-F5344CB8AC3E}">
-        <p14:creationId xmlns:p14="http://schemas.microsoft.com/office/powerpoint/2010/main" val="541367755"/>
+        <p14:creationId xmlns:p14="http://schemas.microsoft.com/office/powerpoint/2010/main" val="1210166727"/>
       </p:ext>
     </p:extLst>
   </p:cSld>

--- a/demo/SourcePilot-deck.pptx
+++ b/demo/SourcePilot-deck.pptx
@@ -2,23 +2,23 @@
 <file path=ppt/presentation.xml><?xml version="1.0" encoding="utf-8"?>
 <p:presentation xmlns:p="http://schemas.openxmlformats.org/presentationml/2006/main">
   <p:sldMasterIdLst>
-    <p:sldMasterId xmlns:r="http://schemas.openxmlformats.org/officeDocument/2006/relationships" id="2147483648" r:id="R65fd60b8ae45496f"/>
+    <p:sldMasterId xmlns:r="http://schemas.openxmlformats.org/officeDocument/2006/relationships" id="2147483648" r:id="R88d7610acbf048ae"/>
   </p:sldMasterIdLst>
   <p:notesMasterIdLst>
-    <p:notesMasterId xmlns:r="http://schemas.openxmlformats.org/officeDocument/2006/relationships" r:id="R3525cc6d96084cb2"/>
+    <p:notesMasterId xmlns:r="http://schemas.openxmlformats.org/officeDocument/2006/relationships" r:id="R6ec91edb9ec6428b"/>
   </p:notesMasterIdLst>
   <p:sldIdLst>
-    <p:sldId xmlns:r="http://schemas.openxmlformats.org/officeDocument/2006/relationships" id="256" r:id="R498d22edaed741c7"/>
-    <p:sldId xmlns:r="http://schemas.openxmlformats.org/officeDocument/2006/relationships" id="257" r:id="Red41bf6db73d4b38"/>
-    <p:sldId xmlns:r="http://schemas.openxmlformats.org/officeDocument/2006/relationships" id="258" r:id="Rf2d49fff5f044e14"/>
-    <p:sldId xmlns:r="http://schemas.openxmlformats.org/officeDocument/2006/relationships" id="259" r:id="R1df9adc2fc934254"/>
-    <p:sldId xmlns:r="http://schemas.openxmlformats.org/officeDocument/2006/relationships" id="260" r:id="Rae91a4df9f0d4505"/>
-    <p:sldId xmlns:r="http://schemas.openxmlformats.org/officeDocument/2006/relationships" id="261" r:id="R4d713423cd1f47b3"/>
-    <p:sldId xmlns:r="http://schemas.openxmlformats.org/officeDocument/2006/relationships" id="262" r:id="R632eac0bf80d49ae"/>
-    <p:sldId xmlns:r="http://schemas.openxmlformats.org/officeDocument/2006/relationships" id="263" r:id="R1986808a5238442d"/>
-    <p:sldId xmlns:r="http://schemas.openxmlformats.org/officeDocument/2006/relationships" id="264" r:id="R9366d5e99cf24f20"/>
-    <p:sldId xmlns:r="http://schemas.openxmlformats.org/officeDocument/2006/relationships" id="265" r:id="R99253bdddf6a45ec"/>
-    <p:sldId xmlns:r="http://schemas.openxmlformats.org/officeDocument/2006/relationships" id="266" r:id="R6dba780e1abf47fd"/>
+    <p:sldId xmlns:r="http://schemas.openxmlformats.org/officeDocument/2006/relationships" id="256" r:id="Rb94c8daea53449c1"/>
+    <p:sldId xmlns:r="http://schemas.openxmlformats.org/officeDocument/2006/relationships" id="257" r:id="R6588cf0ff0f0434c"/>
+    <p:sldId xmlns:r="http://schemas.openxmlformats.org/officeDocument/2006/relationships" id="258" r:id="Rb71bd29561ad419c"/>
+    <p:sldId xmlns:r="http://schemas.openxmlformats.org/officeDocument/2006/relationships" id="259" r:id="R5ae669b2b8cb4b1d"/>
+    <p:sldId xmlns:r="http://schemas.openxmlformats.org/officeDocument/2006/relationships" id="260" r:id="R61e1a8d17d064316"/>
+    <p:sldId xmlns:r="http://schemas.openxmlformats.org/officeDocument/2006/relationships" id="261" r:id="R272f1065dd984794"/>
+    <p:sldId xmlns:r="http://schemas.openxmlformats.org/officeDocument/2006/relationships" id="262" r:id="R611dfb72fa264c98"/>
+    <p:sldId xmlns:r="http://schemas.openxmlformats.org/officeDocument/2006/relationships" id="263" r:id="R6855181609d14cb7"/>
+    <p:sldId xmlns:r="http://schemas.openxmlformats.org/officeDocument/2006/relationships" id="264" r:id="R994fa614c7c14208"/>
+    <p:sldId xmlns:r="http://schemas.openxmlformats.org/officeDocument/2006/relationships" id="265" r:id="R2c65244f595142c3"/>
+    <p:sldId xmlns:r="http://schemas.openxmlformats.org/officeDocument/2006/relationships" id="266" r:id="R54d7f3d1e4de4165"/>
   </p:sldIdLst>
   <p:sldSz cx="12191695" cy="6858000"/>
   <p:notesSz cx="6858000" cy="9144000"/>
@@ -825,7 +825,12 @@
           <a:lstStyle xmlns:a="http://schemas.openxmlformats.org/drawingml/2006/main"/>
           <a:p xmlns:a="http://schemas.openxmlformats.org/drawingml/2006/main">
             <a:r>
-              <a:t>Hanzhou is recommended because it clears the signed sourcing terms. The cheapest quote is rejected because shipping, delivery, specification, and deposit terms fail policy checks.</a:t>
+              <a:t>Click the slide title to open the live supplier comparison website. Live URL: https://rain-agentic-sourcepilot.vercel.app/compare</a:t>
+            </a:r>
+          </a:p>
+          <a:p xmlns:a="http://schemas.openxmlformats.org/drawingml/2006/main">
+            <a:r>
+              <a:t>Keep the original screenshot on screen as a stable fallback during the demo.</a:t>
             </a:r>
           </a:p>
           <a:p xmlns:a="http://schemas.openxmlformats.org/drawingml/2006/main">
@@ -840,7 +845,7 @@
           </a:p>
           <a:p xmlns:a="http://schemas.openxmlformats.org/drawingml/2006/main">
             <a:r>
-              <a:t>- /Users/yingzhou/Desktop/Screenshot 2026-08-09 at 12.43.49 AM.png (user-provided screenshot, captured 2026-08-09)</a:t>
+              <a:t>- https://rain-agentic-sourcepilot.vercel.app/compare (live deployed route, accessed 2026-08-09)</a:t>
             </a:r>
           </a:p>
           <a:p xmlns:a="http://schemas.openxmlformats.org/drawingml/2006/main">
@@ -915,7 +920,12 @@
           <a:lstStyle xmlns:a="http://schemas.openxmlformats.org/drawingml/2006/main"/>
           <a:p xmlns:a="http://schemas.openxmlformats.org/drawingml/2006/main">
             <a:r>
-              <a:t>Point to the $200 autonomous threshold and the pending founder approval. Do not submit the payment form during the recording.</a:t>
+              <a:t>Click the slide title to open the live owner-approval website. Live URL: https://rain-agentic-sourcepilot.vercel.app/approve</a:t>
+            </a:r>
+          </a:p>
+          <a:p xmlns:a="http://schemas.openxmlformats.org/drawingml/2006/main">
+            <a:r>
+              <a:t>Keep the original screenshot on screen as a stable fallback during the demo.</a:t>
             </a:r>
           </a:p>
           <a:p xmlns:a="http://schemas.openxmlformats.org/drawingml/2006/main">
@@ -930,7 +940,7 @@
           </a:p>
           <a:p xmlns:a="http://schemas.openxmlformats.org/drawingml/2006/main">
             <a:r>
-              <a:t>- /Users/yingzhou/Desktop/Screenshot 2026-08-09 at 12.44.08 AM.png (user-provided screenshot, captured 2026-08-09)</a:t>
+              <a:t>- https://rain-agentic-sourcepilot.vercel.app/approve (live deployed route, accessed 2026-08-09)</a:t>
             </a:r>
           </a:p>
           <a:p xmlns:a="http://schemas.openxmlformats.org/drawingml/2006/main">
@@ -1275,7 +1285,7 @@
           <a:lstStyle xmlns:a="http://schemas.openxmlformats.org/drawingml/2006/main"/>
           <a:p xmlns:a="http://schemas.openxmlformats.org/drawingml/2006/main">
             <a:r>
-              <a:t>Show only the successful result: authenticated true, GET /issuing/transactions, HTTP 200, and transaction count zero. Never display the API key or authentication header.</a:t>
+              <a:t>Show only the successful result: the active Rain sandbox card, last four digits, and expiry. Never display the API key, session secret, PAN, CVC, or authentication header.</a:t>
             </a:r>
           </a:p>
           <a:p xmlns:a="http://schemas.openxmlformats.org/drawingml/2006/main">
@@ -1290,7 +1300,7 @@
           </a:p>
           <a:p xmlns:a="http://schemas.openxmlformats.org/drawingml/2006/main">
             <a:r>
-              <a:t>- /Users/yingzhou/Desktop/Screenshot 2026-08-09 at 12.41.52 AM.png (user-provided screenshot, captured 2026-08-09)</a:t>
+              <a:t>- /Users/yingzhou/Desktop/Screenshot 2026-08-09 at 9.48.13 AM.png (user-provided screenshot, captured 2026-08-09)</a:t>
             </a:r>
           </a:p>
           <a:p xmlns:a="http://schemas.openxmlformats.org/drawingml/2006/main">
@@ -4322,17 +4332,17 @@
   </p:cSld>
   <p:clrMap bg1="lt1" tx1="dk1" bg2="lt2" tx2="dk2" accent1="accent1" accent2="accent2" accent3="accent3" accent4="accent4" accent5="accent5" accent6="accent6" hlink="hlink" folHlink="folHlink"/>
   <p:sldLayoutIdLst>
-    <p:sldLayoutId xmlns:r="http://schemas.openxmlformats.org/officeDocument/2006/relationships" id="2147483649" r:id="R523c7ad39ca54bfc"/>
-    <p:sldLayoutId xmlns:r="http://schemas.openxmlformats.org/officeDocument/2006/relationships" id="2147483650" r:id="Rdd25e791339044e4"/>
-    <p:sldLayoutId xmlns:r="http://schemas.openxmlformats.org/officeDocument/2006/relationships" id="2147483651" r:id="Rcf7370e419734aa1"/>
-    <p:sldLayoutId xmlns:r="http://schemas.openxmlformats.org/officeDocument/2006/relationships" id="2147483652" r:id="Rfbab329f27164dc3"/>
-    <p:sldLayoutId xmlns:r="http://schemas.openxmlformats.org/officeDocument/2006/relationships" id="2147483653" r:id="Rca86dd79ba8f416b"/>
-    <p:sldLayoutId xmlns:r="http://schemas.openxmlformats.org/officeDocument/2006/relationships" id="2147483654" r:id="Re99299f549f64fec"/>
-    <p:sldLayoutId xmlns:r="http://schemas.openxmlformats.org/officeDocument/2006/relationships" id="2147483655" r:id="R72d3c892e1cc4a83"/>
-    <p:sldLayoutId xmlns:r="http://schemas.openxmlformats.org/officeDocument/2006/relationships" id="2147483656" r:id="R56089b75f359498a"/>
-    <p:sldLayoutId xmlns:r="http://schemas.openxmlformats.org/officeDocument/2006/relationships" id="2147483657" r:id="Re93b53d467f54f6b"/>
-    <p:sldLayoutId xmlns:r="http://schemas.openxmlformats.org/officeDocument/2006/relationships" id="2147483658" r:id="R2eb914bfb1004b07"/>
-    <p:sldLayoutId xmlns:r="http://schemas.openxmlformats.org/officeDocument/2006/relationships" id="2147483659" r:id="R812637bf1ab44a01"/>
+    <p:sldLayoutId xmlns:r="http://schemas.openxmlformats.org/officeDocument/2006/relationships" id="2147483649" r:id="Rae9e010849e34524"/>
+    <p:sldLayoutId xmlns:r="http://schemas.openxmlformats.org/officeDocument/2006/relationships" id="2147483650" r:id="R0dad54761cc549b0"/>
+    <p:sldLayoutId xmlns:r="http://schemas.openxmlformats.org/officeDocument/2006/relationships" id="2147483651" r:id="R7b4be81054de479f"/>
+    <p:sldLayoutId xmlns:r="http://schemas.openxmlformats.org/officeDocument/2006/relationships" id="2147483652" r:id="Rc3e9dc211fe0409c"/>
+    <p:sldLayoutId xmlns:r="http://schemas.openxmlformats.org/officeDocument/2006/relationships" id="2147483653" r:id="R986dac4ae97747cc"/>
+    <p:sldLayoutId xmlns:r="http://schemas.openxmlformats.org/officeDocument/2006/relationships" id="2147483654" r:id="R826231ed94c84a41"/>
+    <p:sldLayoutId xmlns:r="http://schemas.openxmlformats.org/officeDocument/2006/relationships" id="2147483655" r:id="R610186be92d24bae"/>
+    <p:sldLayoutId xmlns:r="http://schemas.openxmlformats.org/officeDocument/2006/relationships" id="2147483656" r:id="R1b673f61b1a94c3f"/>
+    <p:sldLayoutId xmlns:r="http://schemas.openxmlformats.org/officeDocument/2006/relationships" id="2147483657" r:id="R23c7d4f7c94f4d4b"/>
+    <p:sldLayoutId xmlns:r="http://schemas.openxmlformats.org/officeDocument/2006/relationships" id="2147483658" r:id="R6813ba6b4c87418d"/>
+    <p:sldLayoutId xmlns:r="http://schemas.openxmlformats.org/officeDocument/2006/relationships" id="2147483659" r:id="R1d5796b4bb014aab"/>
   </p:sldLayoutIdLst>
   <p:txStyles>
     <p:titleStyle>
@@ -10974,6 +10984,7 @@
           <a:lstStyle xmlns:a="http://schemas.openxmlformats.org/drawingml/2006/main"/>
           <a:p xmlns:a="http://schemas.openxmlformats.org/drawingml/2006/main">
             <a:pPr algn="ctr">
+              <a:buNone/>
               <a:defRPr sz="900" b="1">
                 <a:solidFill>
                   <a:srgbClr val="10150E"/>
@@ -11034,6 +11045,7 @@
           <a:lstStyle xmlns:a="http://schemas.openxmlformats.org/drawingml/2006/main"/>
           <a:p xmlns:a="http://schemas.openxmlformats.org/drawingml/2006/main">
             <a:pPr>
+              <a:buNone/>
               <a:defRPr sz="2850" b="1">
                 <a:solidFill>
                   <a:srgbClr val="F2F5F8"/>
@@ -11094,6 +11106,7 @@
           <a:lstStyle xmlns:a="http://schemas.openxmlformats.org/drawingml/2006/main"/>
           <a:p xmlns:a="http://schemas.openxmlformats.org/drawingml/2006/main">
             <a:pPr>
+              <a:buNone/>
               <a:defRPr sz="1275">
                 <a:solidFill>
                   <a:srgbClr val="9BACBE"/>
@@ -11154,14 +11167,14 @@
       </p:sp>
       <p:pic>
         <p:nvPicPr>
-          <p:cNvPr id="12" name="evidence-image-1"/>
+          <p:cNvPr id="14" name="evidence-image-1"/>
           <p:cNvPicPr>
             <a:picLocks xmlns:a="http://schemas.openxmlformats.org/drawingml/2006/main" noChangeAspect="1"/>
           </p:cNvPicPr>
           <p:nvPr/>
         </p:nvPicPr>
         <p:blipFill>
-          <a:blip xmlns:r="http://schemas.openxmlformats.org/officeDocument/2006/relationships" xmlns:a="http://schemas.openxmlformats.org/drawingml/2006/main" r:embed="Rcb62da2299cb4402"/>
+          <a:blip xmlns:r="http://schemas.openxmlformats.org/officeDocument/2006/relationships" xmlns:a="http://schemas.openxmlformats.org/drawingml/2006/main" r:embed="R900a1e373b0e4dcb"/>
           <a:srcRect xmlns:a="http://schemas.openxmlformats.org/drawingml/2006/main" l="0" t="26919" r="0" b="26919"/>
           <a:stretch xmlns:a="http://schemas.openxmlformats.org/drawingml/2006/main">
             <a:fillRect l="0" t="0" r="0" b="0"/>
@@ -11273,6 +11286,7 @@
           <a:lstStyle xmlns:a="http://schemas.openxmlformats.org/drawingml/2006/main"/>
           <a:p xmlns:a="http://schemas.openxmlformats.org/drawingml/2006/main">
             <a:pPr algn="ctr">
+              <a:buNone/>
               <a:defRPr sz="900" b="1">
                 <a:solidFill>
                   <a:srgbClr val="10150E"/>
@@ -11333,6 +11347,7 @@
           <a:lstStyle xmlns:a="http://schemas.openxmlformats.org/drawingml/2006/main"/>
           <a:p xmlns:a="http://schemas.openxmlformats.org/drawingml/2006/main">
             <a:pPr>
+              <a:buNone/>
               <a:defRPr sz="2850" b="1">
                 <a:solidFill>
                   <a:srgbClr val="F2F5F8"/>
@@ -11393,6 +11408,7 @@
           <a:lstStyle xmlns:a="http://schemas.openxmlformats.org/drawingml/2006/main"/>
           <a:p xmlns:a="http://schemas.openxmlformats.org/drawingml/2006/main">
             <a:pPr>
+              <a:buNone/>
               <a:defRPr sz="1275">
                 <a:solidFill>
                   <a:srgbClr val="9BACBE"/>
@@ -11453,14 +11469,14 @@
       </p:sp>
       <p:pic>
         <p:nvPicPr>
-          <p:cNvPr id="12" name="evidence-image-2"/>
+          <p:cNvPr id="14" name="evidence-image-2"/>
           <p:cNvPicPr>
             <a:picLocks xmlns:a="http://schemas.openxmlformats.org/drawingml/2006/main" noChangeAspect="1"/>
           </p:cNvPicPr>
           <p:nvPr/>
         </p:nvPicPr>
         <p:blipFill>
-          <a:blip xmlns:r="http://schemas.openxmlformats.org/officeDocument/2006/relationships" xmlns:a="http://schemas.openxmlformats.org/drawingml/2006/main" r:embed="R35abe571a06f4456"/>
+          <a:blip xmlns:r="http://schemas.openxmlformats.org/officeDocument/2006/relationships" xmlns:a="http://schemas.openxmlformats.org/drawingml/2006/main" r:embed="R21b0a6c14efe4ae0"/>
           <a:srcRect xmlns:a="http://schemas.openxmlformats.org/drawingml/2006/main" l="0" t="28005" r="0" b="28005"/>
           <a:stretch xmlns:a="http://schemas.openxmlformats.org/drawingml/2006/main">
             <a:fillRect l="0" t="0" r="0" b="0"/>
@@ -11572,6 +11588,7 @@
           <a:lstStyle xmlns:a="http://schemas.openxmlformats.org/drawingml/2006/main"/>
           <a:p xmlns:a="http://schemas.openxmlformats.org/drawingml/2006/main">
             <a:pPr algn="ctr">
+              <a:buNone/>
               <a:defRPr sz="900" b="1">
                 <a:solidFill>
                   <a:srgbClr val="10150E"/>
@@ -11632,6 +11649,7 @@
           <a:lstStyle xmlns:a="http://schemas.openxmlformats.org/drawingml/2006/main"/>
           <a:p xmlns:a="http://schemas.openxmlformats.org/drawingml/2006/main">
             <a:pPr>
+              <a:buNone/>
               <a:defRPr sz="2850" b="1">
                 <a:solidFill>
                   <a:srgbClr val="F2F5F8"/>
@@ -11692,6 +11710,7 @@
           <a:lstStyle xmlns:a="http://schemas.openxmlformats.org/drawingml/2006/main"/>
           <a:p xmlns:a="http://schemas.openxmlformats.org/drawingml/2006/main">
             <a:pPr>
+              <a:buNone/>
               <a:defRPr sz="1275">
                 <a:solidFill>
                   <a:srgbClr val="9BACBE"/>
@@ -11752,14 +11771,14 @@
       </p:sp>
       <p:pic>
         <p:nvPicPr>
-          <p:cNvPr id="12" name="evidence-image-3"/>
+          <p:cNvPr id="14" name="evidence-image-3"/>
           <p:cNvPicPr>
             <a:picLocks xmlns:a="http://schemas.openxmlformats.org/drawingml/2006/main" noChangeAspect="1"/>
           </p:cNvPicPr>
           <p:nvPr/>
         </p:nvPicPr>
         <p:blipFill>
-          <a:blip xmlns:r="http://schemas.openxmlformats.org/officeDocument/2006/relationships" xmlns:a="http://schemas.openxmlformats.org/drawingml/2006/main" r:embed="Ra976cc3bee18490e"/>
+          <a:blip xmlns:r="http://schemas.openxmlformats.org/officeDocument/2006/relationships" xmlns:a="http://schemas.openxmlformats.org/drawingml/2006/main" r:embed="R229b62561a2a4da0"/>
           <a:stretch xmlns:a="http://schemas.openxmlformats.org/drawingml/2006/main"/>
         </p:blipFill>
         <p:spPr>
@@ -11868,6 +11887,7 @@
           <a:lstStyle xmlns:a="http://schemas.openxmlformats.org/drawingml/2006/main"/>
           <a:p xmlns:a="http://schemas.openxmlformats.org/drawingml/2006/main">
             <a:pPr algn="ctr">
+              <a:buNone/>
               <a:defRPr sz="900" b="1">
                 <a:solidFill>
                   <a:srgbClr val="10150E"/>
@@ -11928,6 +11948,7 @@
           <a:lstStyle xmlns:a="http://schemas.openxmlformats.org/drawingml/2006/main"/>
           <a:p xmlns:a="http://schemas.openxmlformats.org/drawingml/2006/main">
             <a:pPr>
+              <a:buNone/>
               <a:defRPr sz="2850" b="1">
                 <a:solidFill>
                   <a:srgbClr val="F2F5F8"/>
@@ -11988,6 +12009,7 @@
           <a:lstStyle xmlns:a="http://schemas.openxmlformats.org/drawingml/2006/main"/>
           <a:p xmlns:a="http://schemas.openxmlformats.org/drawingml/2006/main">
             <a:pPr>
+              <a:buNone/>
               <a:defRPr sz="1275">
                 <a:solidFill>
                   <a:srgbClr val="9BACBE"/>
@@ -12048,14 +12070,14 @@
       </p:sp>
       <p:pic>
         <p:nvPicPr>
-          <p:cNvPr id="12" name="evidence-image-4"/>
+          <p:cNvPr id="14" name="evidence-image-4"/>
           <p:cNvPicPr>
             <a:picLocks xmlns:a="http://schemas.openxmlformats.org/drawingml/2006/main" noChangeAspect="1"/>
           </p:cNvPicPr>
           <p:nvPr/>
         </p:nvPicPr>
         <p:blipFill>
-          <a:blip xmlns:r="http://schemas.openxmlformats.org/officeDocument/2006/relationships" xmlns:a="http://schemas.openxmlformats.org/drawingml/2006/main" r:embed="R67b4c2c26f3d45d2"/>
+          <a:blip xmlns:r="http://schemas.openxmlformats.org/officeDocument/2006/relationships" xmlns:a="http://schemas.openxmlformats.org/drawingml/2006/main" r:embed="Rf2fe90eb5edf4733"/>
           <a:srcRect xmlns:a="http://schemas.openxmlformats.org/drawingml/2006/main" l="0" t="25712" r="0" b="25712"/>
           <a:stretch xmlns:a="http://schemas.openxmlformats.org/drawingml/2006/main">
             <a:fillRect l="0" t="0" r="0" b="0"/>
@@ -12167,6 +12189,7 @@
           <a:lstStyle xmlns:a="http://schemas.openxmlformats.org/drawingml/2006/main"/>
           <a:p xmlns:a="http://schemas.openxmlformats.org/drawingml/2006/main">
             <a:pPr algn="ctr">
+              <a:buNone/>
               <a:defRPr sz="900" b="1">
                 <a:solidFill>
                   <a:srgbClr val="10150E"/>
@@ -12227,6 +12250,7 @@
           <a:lstStyle xmlns:a="http://schemas.openxmlformats.org/drawingml/2006/main"/>
           <a:p xmlns:a="http://schemas.openxmlformats.org/drawingml/2006/main">
             <a:pPr>
+              <a:buNone/>
               <a:defRPr sz="2850" b="1">
                 <a:solidFill>
                   <a:srgbClr val="F2F5F8"/>
@@ -12287,6 +12311,7 @@
           <a:lstStyle xmlns:a="http://schemas.openxmlformats.org/drawingml/2006/main"/>
           <a:p xmlns:a="http://schemas.openxmlformats.org/drawingml/2006/main">
             <a:pPr>
+              <a:buNone/>
               <a:defRPr sz="1275">
                 <a:solidFill>
                   <a:srgbClr val="9BACBE"/>
@@ -12347,14 +12372,14 @@
       </p:sp>
       <p:pic>
         <p:nvPicPr>
-          <p:cNvPr id="12" name="evidence-image-5"/>
+          <p:cNvPr id="14" name="evidence-image-5"/>
           <p:cNvPicPr>
             <a:picLocks xmlns:a="http://schemas.openxmlformats.org/drawingml/2006/main" noChangeAspect="1"/>
           </p:cNvPicPr>
           <p:nvPr/>
         </p:nvPicPr>
         <p:blipFill>
-          <a:blip xmlns:r="http://schemas.openxmlformats.org/officeDocument/2006/relationships" xmlns:a="http://schemas.openxmlformats.org/drawingml/2006/main" r:embed="R4d4731e0bd4a4603"/>
+          <a:blip xmlns:r="http://schemas.openxmlformats.org/officeDocument/2006/relationships" xmlns:a="http://schemas.openxmlformats.org/drawingml/2006/main" r:embed="R55ff0457af044331"/>
           <a:srcRect xmlns:a="http://schemas.openxmlformats.org/drawingml/2006/main" l="0" t="25665" r="0" b="25665"/>
           <a:stretch xmlns:a="http://schemas.openxmlformats.org/drawingml/2006/main">
             <a:fillRect l="0" t="0" r="0" b="0"/>
@@ -12466,6 +12491,7 @@
           <a:lstStyle xmlns:a="http://schemas.openxmlformats.org/drawingml/2006/main"/>
           <a:p xmlns:a="http://schemas.openxmlformats.org/drawingml/2006/main">
             <a:pPr algn="ctr">
+              <a:buNone/>
               <a:defRPr sz="900" b="1">
                 <a:solidFill>
                   <a:srgbClr val="10150E"/>
@@ -12526,6 +12552,7 @@
           <a:lstStyle xmlns:a="http://schemas.openxmlformats.org/drawingml/2006/main"/>
           <a:p xmlns:a="http://schemas.openxmlformats.org/drawingml/2006/main">
             <a:pPr>
+              <a:buNone/>
               <a:defRPr sz="2850" b="1">
                 <a:solidFill>
                   <a:srgbClr val="F2F5F8"/>
@@ -12544,7 +12571,7 @@
                 <a:ea typeface="Arial"/>
                 <a:cs typeface="Arial"/>
               </a:rPr>
-              <a:t>Authenticated Rain connectivity</a:t>
+              <a:t>Live Rain scoped card</a:t>
             </a:r>
           </a:p>
         </p:txBody>
@@ -12586,6 +12613,7 @@
           <a:lstStyle xmlns:a="http://schemas.openxmlformats.org/drawingml/2006/main"/>
           <a:p xmlns:a="http://schemas.openxmlformats.org/drawingml/2006/main">
             <a:pPr>
+              <a:buNone/>
               <a:defRPr sz="1275">
                 <a:solidFill>
                   <a:srgbClr val="9BACBE"/>
@@ -12604,7 +12632,7 @@
                 <a:ea typeface="Arial"/>
                 <a:cs typeface="Arial"/>
               </a:rPr>
-              <a:t>A live read-only sandbox call returns HTTP 200; issuance and settlement remain outside this build.</a:t>
+              <a:t>A live authenticated API read returns an active sandbox card; payment execution remains mocked.</a:t>
             </a:r>
           </a:p>
         </p:txBody>
@@ -12646,25 +12674,24 @@
       </p:sp>
       <p:pic>
         <p:nvPicPr>
-          <p:cNvPr id="12" name="evidence-image-6"/>
+          <p:cNvPr id="14" name="evidence-image-6"/>
           <p:cNvPicPr>
             <a:picLocks xmlns:a="http://schemas.openxmlformats.org/drawingml/2006/main" noChangeAspect="1"/>
           </p:cNvPicPr>
           <p:nvPr/>
         </p:nvPicPr>
         <p:blipFill>
-          <a:blip xmlns:r="http://schemas.openxmlformats.org/officeDocument/2006/relationships" xmlns:a="http://schemas.openxmlformats.org/drawingml/2006/main" r:embed="R27a3e1ab2b61402a"/>
+          <a:blip xmlns:r="http://schemas.openxmlformats.org/officeDocument/2006/relationships" xmlns:a="http://schemas.openxmlformats.org/drawingml/2006/main" r:embed="R2651fabe378a41d7"/>
+          <a:srcRect xmlns:a="http://schemas.openxmlformats.org/drawingml/2006/main" l="3000" t="50000" r="3000" b="0"/>
           <a:stretch xmlns:a="http://schemas.openxmlformats.org/drawingml/2006/main"/>
         </p:blipFill>
         <p:spPr>
-          <a:xfrm xmlns:a="http://schemas.openxmlformats.org/drawingml/2006/main">
+          <a:xfrm xmlns:a="http://schemas.openxmlformats.org/drawingml/2006/main" flipH="0" flipV="0">
             <a:off x="781050" y="2478369"/>
             <a:ext cx="10629900" cy="2929961"/>
           </a:xfrm>
           <a:prstGeom xmlns:a="http://schemas.openxmlformats.org/drawingml/2006/main" prst="roundRect">
-            <a:avLst>
-              <a:gd name="adj" fmla="val 2155"/>
-            </a:avLst>
+            <a:avLst/>
           </a:prstGeom>
         </p:spPr>
       </p:pic>
